--- a/slides/attention_workshop.pptx
+++ b/slides/attention_workshop.pptx
@@ -2252,7 +2252,7 @@
               <a:rPr lang="en-US" dirty="0"/>
               <a:t>Tempo: 20 minutos (01:30 a 01:50). O treino da seção 3.2 já deve ter terminado durante o intervalo.
 Roteiro sugerido: gerar três partidas e observar em que lance cada uma se torna ilegal (3.3); variar a temperatura; medir a taxa de legalidade do próprio modelo e comparar com a do modelo de referência (3.4); jogar contra o modelo (3.5).
-Para jogar, a turma digita lances em notação algébrica. Quem não conhece a notação pode usar a tabela do slide anterior ou jogar aberturas conhecidas (1.e4, 2.Nf3, 3.Bc4). A seção 3.6 é um complemento para quem terminar antes.
+O tabuleiro da seção 3.5 é interativo: basta arrastar as peças (ou clicar na peça e depois na casa), e os lances legais ficam marcados. Quem preferir pode digitar em notação algébrica. Os lances do modelo aparecem em vermelho no histórico, e o painel mostra quantos deles foram legais na primeira tentativa. Vale sugerir que a turma jogue também contra o próprio modelo (trocando ref por modelo na célula) para comparar. A seção 3.6 é um complemento para quem terminar antes.
 Se o modelo de referência não estiver disponível, a seção 3.4 usa automaticamente o modelo treinado pela turma.</a:t>
             </a:r>
             <a:endParaRPr lang="en-US" dirty="0"/>
@@ -30470,7 +30470,7 @@
                 <a:ea typeface="Calibri" pitchFamily="34" charset="-122"/>
                 <a:cs typeface="Calibri" pitchFamily="34" charset="-120"/>
               </a:rPr>
-              <a:t>Lances em notação algébrica: e4, Nf3, exd5, O-O, Qxf7#. Digite “sair” para encerrar.</a:t>
+              <a:t>Arraste as peças ou clique na peça e depois na casa. Também é possível digitar o lance (e4, Nf3, O-O).</a:t>
             </a:r>
             <a:endParaRPr lang="en-US" sz="1600" dirty="0"/>
           </a:p>

--- a/slides/attention_workshop.pptx
+++ b/slides/attention_workshop.pptx
@@ -3749,7 +3749,7 @@
                 <a:ea typeface="Calibri" pitchFamily="34" charset="-122"/>
                 <a:cs typeface="Calibri" pitchFamily="34" charset="-120"/>
               </a:rPr>
-              <a:t>Outubro de 2026</a:t>
+              <a:t>14 de outubro de 2026</a:t>
             </a:r>
             <a:endParaRPr lang="en-US" sz="1500" dirty="0"/>
           </a:p>

--- a/slides/attention_workshop.pptx
+++ b/slides/attention_workshop.pptx
@@ -2071,7 +2071,7 @@
             <a:r>
               <a:rPr lang="en-US" dirty="0"/>
               <a:t>Esta é a pergunta científica interessante do exercício. O modelo só vê texto. Para prever um lance legal de forma consistente, ele precisa, de algum modo, acompanhar a posição das peças.
-A métrica usada no notebook é a taxa de legalidade: o modelo joga de brancas contra um adversário que sorteia lances, e medimos a fração de lances do modelo que são legais na primeira tentativa. Modelos pequenos treinados por minutos acertam bem a abertura e se perdem no meio-jogo. O modelo de referência deve ir melhor; comparem os números na seção 3.4.
+A métrica usada no notebook é a taxa de legalidade: o modelo joga de brancas contra um adversário que sorteia lances, e medimos a fração de lances do modelo que são legais na primeira tentativa. Modelos pequenos treinados por minutos acertam bem a abertura e se perdem no meio-jogo. O modelo de referência (4,85M de parâmetros, 1 hora de treino em uma T4) chegou a cerca de 85% de lances legais nessa métrica, com perda de validação de 0,48; um modelo pequeno treinado por 3 minutos ficou em torno de 30%. Os números da turma aparecem na seção 3.4. Vale lembrar que a métrica cobre só os primeiros 20 lances do modelo, a parte mais fácil da partida.
 Karvonen (2024) treinou modelos maiores com o mesmo formato de dados e mostrou, com sondas lineares, que é possível ler o estado do tabuleiro a partir das ativações internas. Ou seja, uma representação do tabuleiro emerge do objetivo de prever o próximo caractere. Esse resultado conversa com o trabalho de Li et al. (2023) sobre Othello.</a:t>
             </a:r>
             <a:endParaRPr lang="en-US" dirty="0"/>

--- a/slides/attention_workshop.pptx
+++ b/slides/attention_workshop.pptx
@@ -531,8 +531,7 @@
           <a:p>
             <a:r>
               <a:rPr lang="en-US" dirty="0"/>
-              <a:t>Abertura (00:00). Apresente-se em uma frase e diga o combinado: o workshop é prático, cerca de metade do tempo é no notebook, e ninguém precisa ter visto Transformers antes. Quem estiver nos primeiros semestres vai acompanhar a intuição e usar as células de recuperação sem constrangimento; quem já conhece redes neurais vai escrever as partes centrais.
-Mensagem central do dia: a mesma equação de uma linha que aparece no artigo de 2017 é o núcleo do GPT, do Claude e do Gemini. Ao final, a turma terá escrito essa equação e treinado um modelo que joga xadrez.</a:t>
+              <a:t/>
             </a:r>
             <a:endParaRPr lang="en-US" dirty="0"/>
           </a:p>
@@ -620,11 +619,7 @@
           <a:p>
             <a:r>
               <a:rPr lang="en-US" dirty="0"/>
-              <a:t>A equação central do artigo. Leia da direita para a esquerda, em três etapas, que são exatamente os passos do Exercício 2.
-1. QKᵀ produz uma matriz T × T. A entrada (i, j) é o produto escalar entre a query da posição i e a key da posição j, isto é, a compatibilidade entre elas.
-2. Divide-se por √d_k (próximo slide) e aplica-se a softmax em cada linha. Cada linha passa a ser uma distribuição de probabilidade sobre as posições.
-3. Multiplica-se por V. A saída da posição i é a média dos values ponderada pela linha i.
-Custo: a matriz T × T é a origem do custo quadrático mencionado na tabela anterior.</a:t>
+              <a:t/>
             </a:r>
             <a:endParaRPr lang="en-US" dirty="0"/>
           </a:p>
@@ -712,9 +707,7 @@
           <a:p>
             <a:r>
               <a:rPr lang="en-US" dirty="0"/>
-              <a:t>Argumento do artigo (nota de rodapé 4): se as componentes de q e k são independentes, com média 0 e variância 1, o produto escalar tem variância d_k. Com d_k grande, os scores ficam grandes em módulo, a softmax satura e seus gradientes ficam muito pequenos.
-O gráfico reproduz o experimento da seção 1.3 do notebook: 10 keys aleatórias; a barra mede o maior peso médio da softmax. Sem escala, com d_k = 512, o maior peso já é 0.95, ou seja, quase one-hot. Com a escala, fica em torno de 0.3 para qualquer d_k.
-Pergunta para a turma: o que aconteceria se dividíssemos por d_k em vez de √d_k? (A variância ficaria 1/d_k e a softmax tenderia à distribuição uniforme.)</a:t>
+              <a:t/>
             </a:r>
             <a:endParaRPr lang="en-US" dirty="0"/>
           </a:p>
@@ -802,10 +795,7 @@
           <a:p>
             <a:r>
               <a:rPr lang="en-US" dirty="0"/>
-              <a:t>Para gerar texto, a previsão na posição t só pode depender das posições 1 a t. Caso contrário, durante o treino o modelo "colaria" olhando o próximo token.
-A implementação é simples: antes da softmax, os scores acima da diagonal recebem menos infinito. Como e^(-∞) = 0, esses pesos saem exatamente zero, e cada linha continua somando 1 sobre as posições permitidas.
-Consequência prática importante: com a máscara, uma única passada pela sequência treina T previsões ao mesmo tempo, uma por posição. É isso que torna o treino de Transformers tão eficiente em comparação com RNNs.
-Este é o Exercício 3 do notebook.</a:t>
+              <a:t/>
             </a:r>
             <a:endParaRPr lang="en-US" dirty="0"/>
           </a:p>
@@ -893,13 +883,7 @@
           <a:p>
             <a:r>
               <a:rPr lang="en-US" dirty="0"/>
-              <a:t>Tempo: 20 minutos (00:25 a 00:45).
-Instruções para a turma: cada exercício termina com uma célula de verificação que imprime "Correto" ou uma dica do erro. Quem travar por mais de 3 minutos em um exercício deve usar a célula de recuperação logo abaixo e seguir em frente.
-Pontos para circular pela sala:
-- Exercício 1: o erro mais comum é esquecer keepdims=True, o que quebra o broadcasting.
-- Exercício 2: esquecer de transpor K (o erro de shape denuncia) ou esquecer a divisão por √d_k (a verificação detecta e avisa).
-- Exercício 3: np.tril(np.ones((T, T))) resolve em uma linha.
-Aos 40 minutos, avise que faltam 5 minutos e peça que todos rodem as células 1.3 e 1.4 para ver os mapas de atenção. Feche comentando que os padrões ainda são aleatórios, pois as matrizes W não foram treinadas.</a:t>
+              <a:t/>
             </a:r>
             <a:endParaRPr lang="en-US" dirty="0"/>
           </a:p>
@@ -987,9 +971,7 @@
           <a:p>
             <a:r>
               <a:rPr lang="en-US" dirty="0"/>
-              <a:t>Em vez de uma atenção com dimensão d_model, o artigo usa h cabeças menores, cada uma com dimensão d_model / h, em paralelo. No modelo base do artigo, h = 8 e d_k = 64.
-Motivação: uma única softmax produz uma única média ponderada por posição. Várias cabeças permitem que a mesma posição combine informação de lugares diferentes por critérios diferentes (por exemplo, uma cabeça pode seguir a sintaxe, outra a correferência). O custo total é similar ao de uma cabeça de dimensão completa.
-No notebook (Exercício 5), a implementação é uma linha: concatenar as saídas das cabeças no último eixo e aplicar a projeção W_O.</a:t>
+              <a:t/>
             </a:r>
             <a:endParaRPr lang="en-US" dirty="0"/>
           </a:p>
@@ -1077,9 +1059,7 @@
           <a:p>
             <a:r>
               <a:rPr lang="en-US" dirty="0"/>
-              <a:t>A atenção, como definida, é invariante a permutações: embaralhar os tokens da entrada apenas embaralha as linhas da saída. Portanto, a ordem precisa ser informada explicitamente.
-O artigo soma a cada embedding um vetor de senos e cossenos com frequências em progressão geométrica. Cada dimensão oscila com um período diferente, e posições relativas correspondem a transformações lineares desses vetores.
-O artigo relata que embeddings de posição aprendidos dão resultados praticamente idênticos (Tabela 3, linha E). No notebook usamos a versão aprendida, como no GPT, e deixamos a senoidal como exercício para casa. Modelos atuais costumam usar RoPE, que aplica rotações às queries e keys.</a:t>
+              <a:t/>
             </a:r>
             <a:endParaRPr lang="en-US" dirty="0"/>
           </a:p>
@@ -1167,10 +1147,7 @@
           <a:p>
             <a:r>
               <a:rPr lang="en-US" dirty="0"/>
-              <a:t>O bloco alterna comunicação (atenção, que mistura informação entre posições) e computação (FFN, uma MLP aplicada a cada posição de forma independente, com camada oculta 4 vezes maior).
-As conexões residuais fazem com que cada subcamada aprenda apenas uma correção sobre x, e criam um caminho direto para o gradiente, o que permite empilhar muitos blocos. A LayerNorm mantém a escala das ativações.
-Diferença em relação ao artigo: o original aplica a normalização depois da soma (post-LN). GPT-2 e praticamente todos os modelos atuais usam pre-LN, como no diagrama, porque treina de forma mais estável sem warm-up cuidadoso. Vale mencionar para quem for ler o artigo e estranhar.
-Exercício 6: exatamente as duas linhas da equação.</a:t>
+              <a:t/>
             </a:r>
             <a:endParaRPr lang="en-US" dirty="0"/>
           </a:p>
@@ -1258,9 +1235,7 @@
           <a:p>
             <a:r>
               <a:rPr lang="en-US" dirty="0"/>
-              <a:t>O artigo resolve tradução, então usa duas pilhas. O encoder lê a frase de origem inteira com self-attention sem máscara (cada palavra vê todas). O decoder gera a tradução token a token com self-attention causal e, em cada bloco, uma camada de cross-attention em que as queries vêm do decoder e as keys e values vêm da saída do encoder. É por ela que a tradução "consulta" a frase original.
-Números do modelo base: N = 6 blocos em cada pilha, d_model = 512, h = 8 cabeças, d_ff = 2048, cerca de 65 milhões de parâmetros, treinado por 12 horas em 8 GPUs P100 (o modelo grande levou 3,5 dias).
-Transição: no workshop vamos construir apenas a pilha da direita, sem a cross-attention. É isso que o GPT faz.</a:t>
+              <a:t/>
             </a:r>
             <a:endParaRPr lang="en-US" dirty="0"/>
           </a:p>
@@ -1348,11 +1323,7 @@
           <a:p>
             <a:r>
               <a:rPr lang="en-US" dirty="0"/>
-              <a:t>A partir de 2018 a arquitetura se dividiu em três famílias, conforme a parte do Transformer original que se mantém.
-Encoder-only (BERT): atenção bidirecional, treinado para preencher lacunas. Bom para classificação e para gerar embeddings de busca.
-Decoder-only (GPT, Llama, Claude): atenção causal, treinado para prever o próximo token. Tornou-se dominante porque o mesmo objetivo simples escala para praticamente qualquer tarefa formulada como texto.
-Encoder-decoder (o original, T5, Whisper): natural quando entrada e saída são sequências distintas, como tradução e transcrição.
-O workshop fica na linha do meio.</a:t>
+              <a:t/>
             </a:r>
             <a:endParaRPr lang="en-US" dirty="0"/>
           </a:p>
@@ -1440,10 +1411,7 @@
           <a:p>
             <a:r>
               <a:rPr lang="en-US" dirty="0"/>
-              <a:t>Percorra o fluxo da esquerda para a direita, sempre falando dos shapes, que é onde a turma mais se perde.
-A entrada são índices inteiros com shape (B, T). O embedding de token e o de posição produzem (B, T, C), com C = n_embd. Os N blocos preservam esse shape. A LayerNorm final e a camada linear levam a (B, T, V), um logit por item do vocabulário em cada posição.
-A perda é a entropia cruzada entre os logits da posição t e o token da posição t+1. Graças à máscara causal, uma passada gera T exemplos de treino.
-No notebook, a classe GPT é fornecida pronta: ela apenas junta as peças escritas nos exercícios 4 a 6.</a:t>
+              <a:t/>
             </a:r>
             <a:endParaRPr lang="en-US" dirty="0"/>
           </a:p>
@@ -1531,8 +1499,7 @@
           <a:p>
             <a:r>
               <a:rPr lang="en-US" dirty="0"/>
-              <a:t>Mostre o roteiro rapidamente (1 minuto). Destaque que as faixas escuras são tempo de notebook e que a parte teórica vem sempre imediatamente antes da prática correspondente.
-Combine o sinal para pedir ajuda (por exemplo, mão levantada ou um post-it no monitor) e apresente os monitores, que vão circular pela sala durante os exercícios.</a:t>
+              <a:t/>
             </a:r>
             <a:endParaRPr lang="en-US" dirty="0"/>
           </a:p>
@@ -1620,10 +1587,7 @@
           <a:p>
             <a:r>
               <a:rPr lang="en-US" dirty="0"/>
-              <a:t>Tempo: 20 minutos (00:55 a 01:15).
-O Exercício 4 é o mais importante do dia: é a mesma função do Exercício 2, agora com a dimensão de lote. Os erros esperados são usar k.T (que em tensores 3D inverte todas as dimensões, não só as duas últimas) e esquecer de recortar a máscara com [:T, :T]. A verificação compara o resultado com a versão em NumPy, o que costuma ser um bom momento de "fechamento" para a turma.
-Os Exercícios 5 e 6 são curtos. Depois deles, a turma executa a seção 2.6: o modelo de ordenação treina em cerca de 30 segundos e deve chegar perto de 100% de acerto.
-Aos 01:12, peça que todos executem as células 3.1 e 3.2 antes do intervalo.</a:t>
+              <a:t/>
             </a:r>
             <a:endParaRPr lang="en-US" dirty="0"/>
           </a:p>
@@ -1711,9 +1675,7 @@
           <a:p>
             <a:r>
               <a:rPr lang="en-US" dirty="0"/>
-              <a:t>Resultado real do modelo da seção 2.6 (2 camadas, 2 cabeças, cerca de 100 mil parâmetros, 2000 passos), para a entrada 3 1 4 1 5 9 2 6.
-Cada linha é um passo da geração da parte ordenada; cada coluna é uma posição observada. A cabeça mostrada (camada 2, cabeça 0) concentra o peso, em cada passo, na posição da entrada que contém o dígito a ser escrito em seguida. Para escrever o 9, por exemplo, ela olha para o 9 da entrada.
-Ninguém programou essa regra. O modelo recebeu apenas pares entrada/saída e a atenção emergiu como mecanismo de busca. Na turma, os padrões podem variar de cabeça para cabeça e de execução para execução; em geral, pelo menos uma das cabeças apresenta esse comportamento.</a:t>
+              <a:t/>
             </a:r>
             <a:endParaRPr lang="en-US" dirty="0"/>
           </a:p>
@@ -1801,8 +1763,7 @@
           <a:p>
             <a:r>
               <a:rPr lang="en-US" dirty="0"/>
-              <a:t>Intervalo de 5 minutos (01:15 a 01:20). Antes de liberar a turma, confirme que a maioria executou as células 3.1 e 3.2: a de treino deve estar imprimindo linhas "passo ... | perda ...". O treino dura 6 minutos e termina durante a pausa.
-Se alguém estiver sem GPU, o treino em CPU será lento demais. Oriente essa pessoa a interromper a célula e usar o modelo de referência na seção 3.4.</a:t>
+              <a:t/>
             </a:r>
             <a:endParaRPr lang="en-US" dirty="0"/>
           </a:p>
@@ -1890,9 +1851,7 @@
           <a:p>
             <a:r>
               <a:rPr lang="en-US" dirty="0"/>
-              <a:t>O conjunto de dados tem cerca de 60 mil partidas do banco público do Lichess (janeiro a março de 2013), filtradas por término normal e rating médio a partir de 1500, e revalidadas com python-chess. Cada partida é uma linha começando com ponto e vírgula, no formato usado por Adam Karvonen.
-Tokenização: cada caractere é um token. O vocabulário inteiro tem 33 símbolos, mostrados embaixo. Isso simplifica muito o workshop, com o custo de sequências mais longas. LLMs de verdade usam BPE, com vocabulários de dezenas a centenas de milhares de subpalavras.
-Um lance como "Nxe5" são quatro tokens. O modelo precisa aprender a soletrar lances, as regras de movimento e o estado do tabuleiro, tudo a partir do texto.</a:t>
+              <a:t/>
             </a:r>
             <a:endParaRPr lang="en-US" dirty="0"/>
           </a:p>
@@ -1980,9 +1939,7 @@
           <a:p>
             <a:r>
               <a:rPr lang="en-US" dirty="0"/>
-              <a:t>O treino é idêntico ao da ordenação e ao de qualquer LLM: o alvo é a própria entrada deslocada em uma posição. Não há rótulos manuais.
-Mostre o alinhamento: em cada coluna, o modelo vê tudo o que está em x até aquela coluna e precisa prever o caractere de y na mesma coluna.
-Números do modelo da turma: 4 blocos, 4 cabeças, n_embd = 128, contexto de 256 caracteres, cerca de 0,8 milhão de parâmetros. A perda inicial fica perto de ln(33) ≈ 3,5, que corresponde a chutar uniformemente entre 33 caracteres, e cai para algo em torno de 1,0 em poucos minutos.</a:t>
+              <a:t/>
             </a:r>
             <a:endParaRPr lang="en-US" dirty="0"/>
           </a:p>
@@ -2070,9 +2027,7 @@
           <a:p>
             <a:r>
               <a:rPr lang="en-US" dirty="0"/>
-              <a:t>Esta é a pergunta científica interessante do exercício. O modelo só vê texto. Para prever um lance legal de forma consistente, ele precisa, de algum modo, acompanhar a posição das peças.
-A métrica usada no notebook é a taxa de legalidade: o modelo joga de brancas contra um adversário que sorteia lances, e medimos a fração de lances do modelo que são legais na primeira tentativa. Modelos pequenos treinados por minutos acertam bem a abertura e se perdem no meio-jogo. O modelo de referência (4,85M de parâmetros, 1 hora de treino em uma T4) chegou a cerca de 85% de lances legais nessa métrica, com perda de validação de 0,48; um modelo pequeno treinado por 3 minutos ficou em torno de 30%. Os números da turma aparecem na seção 3.4. Vale lembrar que a métrica cobre só os primeiros 20 lances do modelo, a parte mais fácil da partida.
-Karvonen (2024) treinou modelos maiores com o mesmo formato de dados e mostrou, com sondas lineares, que é possível ler o estado do tabuleiro a partir das ativações internas. Ou seja, uma representação do tabuleiro emerge do objetivo de prever o próximo caractere. Esse resultado conversa com o trabalho de Li et al. (2023) sobre Othello.</a:t>
+              <a:t/>
             </a:r>
             <a:endParaRPr lang="en-US" dirty="0"/>
           </a:p>
@@ -2160,9 +2115,7 @@
           <a:p>
             <a:r>
               <a:rPr lang="en-US" dirty="0"/>
-              <a:t>Na geração, os logits são divididos por uma temperatura τ antes da softmax. τ menor que 1 acentua as diferenças e aproxima a escolha gulosa; τ maior que 1 achata a distribuição.
-O gráfico usa logits ilustrativos para o lance das pretas depois de 1.e4. Com τ = 0,3, quase toda a massa vai para e5; com τ = 1,5, lances menos prováveis ganham espaço.
-No xadrez isso tem um efeito visível: temperatura alta gera partidas mais variadas e mais lances ilegais. É o mesmo parâmetro "temperature" das APIs de LLMs. Na seção 3.3 a turma varia o valor e observa o efeito.</a:t>
+              <a:t/>
             </a:r>
             <a:endParaRPr lang="en-US" dirty="0"/>
           </a:p>
@@ -2250,10 +2203,7 @@
           <a:p>
             <a:r>
               <a:rPr lang="en-US" dirty="0"/>
-              <a:t>Tempo: 20 minutos (01:30 a 01:50). O treino da seção 3.2 já deve ter terminado durante o intervalo.
-Roteiro sugerido: gerar três partidas e observar em que lance cada uma se torna ilegal (3.3); variar a temperatura; medir a taxa de legalidade do próprio modelo e comparar com a do modelo de referência (3.4); jogar contra o modelo (3.5).
-O tabuleiro da seção 3.5 é interativo: basta arrastar as peças (ou clicar na peça e depois na casa), e os lances legais ficam marcados. Quem preferir pode digitar em notação algébrica. Os lances do modelo aparecem em vermelho no histórico, e o painel mostra quantos deles foram legais na primeira tentativa. Vale sugerir que a turma jogue também contra o próprio modelo (trocando ref por modelo na célula) para comparar. A seção 3.6 é um complemento para quem terminar antes.
-Se o modelo de referência não estiver disponível, a seção 3.4 usa automaticamente o modelo treinado pela turma.</a:t>
+              <a:t/>
             </a:r>
             <a:endParaRPr lang="en-US" dirty="0"/>
           </a:p>
@@ -2341,8 +2291,7 @@
           <a:p>
             <a:r>
               <a:rPr lang="en-US" dirty="0"/>
-              <a:t>Feche o conteúdo técnico mostrando que a distância entre o notebook e um LLM é, em grande parte, de escala e de pós-treino. A arquitetura é reconhecível: embeddings, blocos com atenção e FFN, residuais, LayerNorm, cabeça linear.
-Diferenças que valem citar, se houver tempo: tokenização por BPE; posição via RoPE; atenção com KV cache na inferência e variantes como grouped-query attention; normalização RMSNorm; ativação SwiGLU. Depois do pré-treino vêm o ajuste por instruções e o aprendizado por reforço com feedback humano ou com recompensas verificáveis, que transformam um completador de texto em um assistente.</a:t>
+              <a:t/>
             </a:r>
             <a:endParaRPr lang="en-US" dirty="0"/>
           </a:p>
@@ -2430,8 +2379,7 @@
           <a:p>
             <a:r>
               <a:rPr lang="en-US" dirty="0"/>
-              <a:t>Indique a ordem de leitura sugerida: começar pelo vídeo do Karpathy (reforça tudo o que foi feito hoje, com o mesmo estilo de código), depois o texto ilustrado do Alammar, e então o artigo original, que fica muito mais legível depois do workshop. Karvonen e Li et al. são para quem se interessou pela pergunta dos modelos de mundo.
-O repositório do workshop fica público; os notebooks, o gabarito e o script de pré-treino continuam disponíveis.</a:t>
+              <a:t/>
             </a:r>
             <a:endParaRPr lang="en-US" dirty="0"/>
           </a:p>
@@ -2519,8 +2467,7 @@
           <a:p>
             <a:r>
               <a:rPr lang="en-US" dirty="0"/>
-              <a:t>Este é o gancho. Se o modelo de referência já estiver treinado, faça uma demonstração ao vivo de 1 a 2 minutos: abra o notebook de gabarito, rode a seção 3.5 e jogue três ou quatro lances contra o modelo.
-Ponto a enfatizar: o modelo nunca recebe o tabuleiro. Ele vê somente a sequência de caracteres à esquerda e aprende a prever o caractere seguinte. Qualquer noção de "onde estão as peças" precisa emergir dentro da rede. Essa observação volta no slide sobre modelos de mundo.</a:t>
+              <a:t/>
             </a:r>
             <a:endParaRPr lang="en-US" dirty="0"/>
           </a:p>
@@ -2608,8 +2555,7 @@
           <a:p>
             <a:r>
               <a:rPr lang="en-US" dirty="0"/>
-              <a:t>Agradeça, abra para perguntas (cerca de 5 minutos) e lembre que o link do notebook continua válido depois do evento.
-Perguntas frequentes para as quais vale ter resposta pronta (ver o guia de estudos, seção de perguntas difíceis): por que o custo é quadrático; o que é KV cache; como o GPT passou de prever texto a seguir instruções; se o modelo de xadrez "entende" xadrez; qual a diferença entre este modelo e o AlphaZero.</a:t>
+              <a:t/>
             </a:r>
             <a:endParaRPr lang="en-US" dirty="0"/>
           </a:p>
@@ -2697,9 +2643,7 @@
           <a:p>
             <a:r>
               <a:rPr lang="en-US" dirty="0"/>
-              <a:t>Reserve até 10 minutos. Este é o ponto em que a turma mais trava, então espere todos concluírem antes de seguir. Os monitores devem circular pela sala.
-Passo 2 é essencial: sem "Salvar uma cópia no Drive", as alterações se perdem ao fechar a aba. Passo 3: sem GPU, a Parte 3 fica inviável. Se o Colab recusar GPU por cota, a pessoa pode seguir em CPU até a Parte 2 e fazer a Parte 3 em dupla com um colega.
-Peça que executem as duas primeiras células agora. A primeira baixa o repositório e o conjunto de dados (cerca de 10 MB); a segunda deve imprimir "Dispositivo: cuda".</a:t>
+              <a:t/>
             </a:r>
             <a:endParaRPr lang="en-US" dirty="0"/>
           </a:p>
@@ -2787,8 +2731,7 @@
           <a:p>
             <a:r>
               <a:rPr lang="en-US" dirty="0"/>
-              <a:t>Defina o objeto de estudo antes da arquitetura. Um modelo de linguagem atribui uma distribuição de probabilidade ao próximo token, dado o contexto. Gerar texto é repetir essa previsão: sorteia-se um token, ele é anexado ao contexto, e o processo recomeça.
-Os valores do gráfico são ilustrativos. A pergunta de fundo para o resto do workshop é como a previsão em uma posição consegue usar a informação espalhada pelas posições anteriores. A resposta do artigo é a atenção.</a:t>
+              <a:t/>
             </a:r>
             <a:endParaRPr lang="en-US" dirty="0"/>
           </a:p>
@@ -2876,9 +2819,7 @@
           <a:p>
             <a:r>
               <a:rPr lang="en-US" dirty="0"/>
-              <a:t>Contexto histórico. Em 2017, o estado da arte em tradução eram RNNs (LSTM, GRU) em arquiteturas encoder-decoder, frequentemente já com um mecanismo de atenção (Bahdanau et al., 2015) acoplado.
-Dois problemas motivam o artigo. Primeiro, o cálculo é sequencial: h_t depende de h_{t-1}, então não é possível paralelizar ao longo da sequência durante o treino, o que desperdiça GPUs. Segundo, a informação do primeiro token precisa atravessar n passos para chegar ao último, e o sinal (e o gradiente) se degrada no caminho.
-A proposta do artigo, já no título, é abandonar a recorrência e usar apenas atenção.</a:t>
+              <a:t/>
             </a:r>
             <a:endParaRPr lang="en-US" dirty="0"/>
           </a:p>
@@ -2966,9 +2907,7 @@
           <a:p>
             <a:r>
               <a:rPr lang="en-US" dirty="0"/>
-              <a:t>Esta é a Tabela 1 do artigo, que resume o argumento. n é o comprimento da sequência, d a dimensão da representação e k o tamanho do kernel da convolução.
-Leitura: a self-attention conecta quaisquer duas posições em um número constante de operações sequenciais, e o caminho máximo entre elas tem comprimento 1. O custo é quadrático em n por camada, o que é aceitável quando n é menor que d, como era o caso em tradução de frases.
-Vale antecipar que esse custo O(n²) é exatamente o que limita o tamanho do contexto dos LLMs atuais e motiva variantes como FlashAttention e atenção esparsa.</a:t>
+              <a:t/>
             </a:r>
             <a:endParaRPr lang="en-US" dirty="0"/>
           </a:p>
@@ -3056,9 +2995,7 @@
           <a:p>
             <a:r>
               <a:rPr lang="en-US" dirty="0"/>
-              <a:t>A analogia que sustenta o resto do workshop. Em um dicionário convencional, a consulta precisa coincidir exatamente com uma chave. Na atenção, a consulta é comparada com todas as chaves, cada comparação vira um peso, e o resultado é a média dos valores ponderada por esses pesos.
-No exemplo (o mesmo do notebook), a consulta mistura "cavalo" e "bispo". Os pesos se dividem entre essas duas chaves e o resultado é aproximadamente 3, o valor material de ambas. Pergunte à turma o que aconteceria com a consulta "peão + dama" (resposta: cerca de 5, a média de 1 e 9).
-Vocabulário para fixar: query é o que se procura, key é o que cada item anuncia, value é o conteúdo que cada item entrega.</a:t>
+              <a:t/>
             </a:r>
             <a:endParaRPr lang="en-US" dirty="0"/>
           </a:p>
@@ -3146,9 +3083,7 @@
           <a:p>
             <a:r>
               <a:rPr lang="en-US" dirty="0"/>
-              <a:t>Em self-attention, as três matrizes são projeções lineares da mesma entrada X, que tem uma linha por token. W_Q, W_K e W_V são os parâmetros aprendidos da camada; o resto é álgebra sem parâmetros.
-Ênfase nos shapes: X é T × d_model, as projeções levam para T × d_k. No notebook, d_model = 16 e d_k = 8 no exemplo em NumPy.
-Observação útil para a turma mais avançada: as mesmas posições desempenham os três papéis. Cada token pergunta (query), é consultado (key) e entrega conteúdo (value).</a:t>
+              <a:t/>
             </a:r>
             <a:endParaRPr lang="en-US" dirty="0"/>
           </a:p>
@@ -3562,7 +3497,7 @@
       </p:sp>
       <p:sp>
         <p:nvSpPr>
-          <p:cNvPr id="4" name="Text 1"/>
+          <p:cNvPr id="3" name="Text 1"/>
           <p:cNvSpPr txBox="1"/>
           <p:nvPr/>
         </p:nvSpPr>
@@ -3601,7 +3536,7 @@
       </p:sp>
       <p:sp>
         <p:nvSpPr>
-          <p:cNvPr id="5" name="Text 2"/>
+          <p:cNvPr id="4" name="Text 2"/>
           <p:cNvSpPr txBox="1"/>
           <p:nvPr/>
         </p:nvSpPr>
@@ -3640,7 +3575,7 @@
       </p:sp>
       <p:sp>
         <p:nvSpPr>
-          <p:cNvPr id="6" name="Text 3"/>
+          <p:cNvPr id="5" name="Text 3"/>
           <p:cNvSpPr txBox="1"/>
           <p:nvPr/>
         </p:nvSpPr>
@@ -3679,7 +3614,7 @@
       </p:sp>
       <p:sp>
         <p:nvSpPr>
-          <p:cNvPr id="7" name="Text 4"/>
+          <p:cNvPr id="6" name="Text 4"/>
           <p:cNvSpPr txBox="1"/>
           <p:nvPr/>
         </p:nvSpPr>
@@ -3718,7 +3653,7 @@
       </p:sp>
       <p:sp>
         <p:nvSpPr>
-          <p:cNvPr id="8" name="Text 5"/>
+          <p:cNvPr id="7" name="Text 5"/>
           <p:cNvSpPr txBox="1"/>
           <p:nvPr/>
         </p:nvSpPr>
@@ -3757,7 +3692,7 @@
       </p:sp>
       <p:sp>
         <p:nvSpPr>
-          <p:cNvPr id="9" name="Shape 6"/>
+          <p:cNvPr id="8" name="Shape 6"/>
           <p:cNvSpPr/>
           <p:nvPr/>
         </p:nvSpPr>
@@ -3782,7 +3717,7 @@
       </p:sp>
       <p:sp>
         <p:nvSpPr>
-          <p:cNvPr id="10" name="Shape 7"/>
+          <p:cNvPr id="9" name="Shape 7"/>
           <p:cNvSpPr/>
           <p:nvPr/>
         </p:nvSpPr>
@@ -3807,7 +3742,7 @@
       </p:sp>
       <p:sp>
         <p:nvSpPr>
-          <p:cNvPr id="11" name="Shape 8"/>
+          <p:cNvPr id="10" name="Shape 8"/>
           <p:cNvSpPr/>
           <p:nvPr/>
         </p:nvSpPr>
@@ -3832,7 +3767,7 @@
       </p:sp>
       <p:sp>
         <p:nvSpPr>
-          <p:cNvPr id="12" name="Shape 9"/>
+          <p:cNvPr id="11" name="Shape 9"/>
           <p:cNvSpPr/>
           <p:nvPr/>
         </p:nvSpPr>
@@ -3857,7 +3792,7 @@
       </p:sp>
       <p:sp>
         <p:nvSpPr>
-          <p:cNvPr id="13" name="Shape 10"/>
+          <p:cNvPr id="12" name="Shape 10"/>
           <p:cNvSpPr/>
           <p:nvPr/>
         </p:nvSpPr>
@@ -3882,7 +3817,7 @@
       </p:sp>
       <p:sp>
         <p:nvSpPr>
-          <p:cNvPr id="14" name="Shape 11"/>
+          <p:cNvPr id="13" name="Shape 11"/>
           <p:cNvSpPr/>
           <p:nvPr/>
         </p:nvSpPr>
@@ -3907,7 +3842,7 @@
       </p:sp>
       <p:sp>
         <p:nvSpPr>
-          <p:cNvPr id="15" name="Shape 12"/>
+          <p:cNvPr id="14" name="Shape 12"/>
           <p:cNvSpPr/>
           <p:nvPr/>
         </p:nvSpPr>
@@ -3932,7 +3867,7 @@
       </p:sp>
       <p:sp>
         <p:nvSpPr>
-          <p:cNvPr id="16" name="Shape 13"/>
+          <p:cNvPr id="15" name="Shape 13"/>
           <p:cNvSpPr/>
           <p:nvPr/>
         </p:nvSpPr>
@@ -3957,7 +3892,7 @@
       </p:sp>
       <p:sp>
         <p:nvSpPr>
-          <p:cNvPr id="17" name="Shape 14"/>
+          <p:cNvPr id="16" name="Shape 14"/>
           <p:cNvSpPr/>
           <p:nvPr/>
         </p:nvSpPr>
@@ -3982,7 +3917,7 @@
       </p:sp>
       <p:sp>
         <p:nvSpPr>
-          <p:cNvPr id="18" name="Shape 15"/>
+          <p:cNvPr id="17" name="Shape 15"/>
           <p:cNvSpPr/>
           <p:nvPr/>
         </p:nvSpPr>
@@ -4007,7 +3942,7 @@
       </p:sp>
       <p:sp>
         <p:nvSpPr>
-          <p:cNvPr id="19" name="Shape 16"/>
+          <p:cNvPr id="18" name="Shape 16"/>
           <p:cNvSpPr/>
           <p:nvPr/>
         </p:nvSpPr>
@@ -4032,7 +3967,7 @@
       </p:sp>
       <p:sp>
         <p:nvSpPr>
-          <p:cNvPr id="20" name="Shape 17"/>
+          <p:cNvPr id="19" name="Shape 17"/>
           <p:cNvSpPr/>
           <p:nvPr/>
         </p:nvSpPr>
@@ -4057,7 +3992,7 @@
       </p:sp>
       <p:sp>
         <p:nvSpPr>
-          <p:cNvPr id="21" name="Shape 18"/>
+          <p:cNvPr id="20" name="Shape 18"/>
           <p:cNvSpPr/>
           <p:nvPr/>
         </p:nvSpPr>
@@ -4082,7 +4017,7 @@
       </p:sp>
       <p:sp>
         <p:nvSpPr>
-          <p:cNvPr id="22" name="Shape 19"/>
+          <p:cNvPr id="21" name="Shape 19"/>
           <p:cNvSpPr/>
           <p:nvPr/>
         </p:nvSpPr>
@@ -4107,7 +4042,7 @@
       </p:sp>
       <p:sp>
         <p:nvSpPr>
-          <p:cNvPr id="23" name="Shape 20"/>
+          <p:cNvPr id="22" name="Shape 20"/>
           <p:cNvSpPr/>
           <p:nvPr/>
         </p:nvSpPr>
@@ -4132,7 +4067,7 @@
       </p:sp>
       <p:sp>
         <p:nvSpPr>
-          <p:cNvPr id="24" name="Shape 21"/>
+          <p:cNvPr id="23" name="Shape 21"/>
           <p:cNvSpPr/>
           <p:nvPr/>
         </p:nvSpPr>
@@ -4157,7 +4092,7 @@
       </p:sp>
       <p:sp>
         <p:nvSpPr>
-          <p:cNvPr id="25" name="Shape 22"/>
+          <p:cNvPr id="24" name="Shape 22"/>
           <p:cNvSpPr/>
           <p:nvPr/>
         </p:nvSpPr>
@@ -4182,7 +4117,7 @@
       </p:sp>
       <p:sp>
         <p:nvSpPr>
-          <p:cNvPr id="26" name="Shape 23"/>
+          <p:cNvPr id="25" name="Shape 23"/>
           <p:cNvSpPr/>
           <p:nvPr/>
         </p:nvSpPr>
@@ -4207,7 +4142,7 @@
       </p:sp>
       <p:sp>
         <p:nvSpPr>
-          <p:cNvPr id="27" name="Shape 24"/>
+          <p:cNvPr id="26" name="Shape 24"/>
           <p:cNvSpPr/>
           <p:nvPr/>
         </p:nvSpPr>
@@ -4232,7 +4167,7 @@
       </p:sp>
       <p:sp>
         <p:nvSpPr>
-          <p:cNvPr id="28" name="Shape 25"/>
+          <p:cNvPr id="27" name="Shape 25"/>
           <p:cNvSpPr/>
           <p:nvPr/>
         </p:nvSpPr>
@@ -4257,7 +4192,7 @@
       </p:sp>
       <p:sp>
         <p:nvSpPr>
-          <p:cNvPr id="29" name="Shape 26"/>
+          <p:cNvPr id="28" name="Shape 26"/>
           <p:cNvSpPr/>
           <p:nvPr/>
         </p:nvSpPr>
@@ -4282,7 +4217,7 @@
       </p:sp>
       <p:sp>
         <p:nvSpPr>
-          <p:cNvPr id="30" name="Shape 27"/>
+          <p:cNvPr id="29" name="Shape 27"/>
           <p:cNvSpPr/>
           <p:nvPr/>
         </p:nvSpPr>
@@ -4307,7 +4242,7 @@
       </p:sp>
       <p:sp>
         <p:nvSpPr>
-          <p:cNvPr id="31" name="Shape 28"/>
+          <p:cNvPr id="30" name="Shape 28"/>
           <p:cNvSpPr/>
           <p:nvPr/>
         </p:nvSpPr>
@@ -4332,7 +4267,7 @@
       </p:sp>
       <p:sp>
         <p:nvSpPr>
-          <p:cNvPr id="32" name="Shape 29"/>
+          <p:cNvPr id="31" name="Shape 29"/>
           <p:cNvSpPr/>
           <p:nvPr/>
         </p:nvSpPr>
@@ -4357,7 +4292,7 @@
       </p:sp>
       <p:sp>
         <p:nvSpPr>
-          <p:cNvPr id="33" name="Shape 30"/>
+          <p:cNvPr id="32" name="Shape 30"/>
           <p:cNvSpPr/>
           <p:nvPr/>
         </p:nvSpPr>
@@ -4382,7 +4317,7 @@
       </p:sp>
       <p:sp>
         <p:nvSpPr>
-          <p:cNvPr id="34" name="Shape 31"/>
+          <p:cNvPr id="33" name="Shape 31"/>
           <p:cNvSpPr/>
           <p:nvPr/>
         </p:nvSpPr>
@@ -4407,7 +4342,7 @@
       </p:sp>
       <p:sp>
         <p:nvSpPr>
-          <p:cNvPr id="35" name="Shape 32"/>
+          <p:cNvPr id="34" name="Shape 32"/>
           <p:cNvSpPr/>
           <p:nvPr/>
         </p:nvSpPr>
@@ -4432,7 +4367,7 @@
       </p:sp>
       <p:sp>
         <p:nvSpPr>
-          <p:cNvPr id="36" name="Shape 33"/>
+          <p:cNvPr id="35" name="Shape 33"/>
           <p:cNvSpPr/>
           <p:nvPr/>
         </p:nvSpPr>
@@ -4457,7 +4392,7 @@
       </p:sp>
       <p:sp>
         <p:nvSpPr>
-          <p:cNvPr id="37" name="Shape 34"/>
+          <p:cNvPr id="36" name="Shape 34"/>
           <p:cNvSpPr/>
           <p:nvPr/>
         </p:nvSpPr>
@@ -4482,7 +4417,7 @@
       </p:sp>
       <p:sp>
         <p:nvSpPr>
-          <p:cNvPr id="38" name="Shape 35"/>
+          <p:cNvPr id="37" name="Shape 35"/>
           <p:cNvSpPr/>
           <p:nvPr/>
         </p:nvSpPr>
@@ -4507,7 +4442,7 @@
       </p:sp>
       <p:sp>
         <p:nvSpPr>
-          <p:cNvPr id="39" name="Shape 36"/>
+          <p:cNvPr id="38" name="Shape 36"/>
           <p:cNvSpPr/>
           <p:nvPr/>
         </p:nvSpPr>
@@ -4532,7 +4467,7 @@
       </p:sp>
       <p:sp>
         <p:nvSpPr>
-          <p:cNvPr id="40" name="Shape 37"/>
+          <p:cNvPr id="39" name="Shape 37"/>
           <p:cNvSpPr/>
           <p:nvPr/>
         </p:nvSpPr>
@@ -4557,7 +4492,7 @@
       </p:sp>
       <p:sp>
         <p:nvSpPr>
-          <p:cNvPr id="41" name="Shape 38"/>
+          <p:cNvPr id="40" name="Shape 38"/>
           <p:cNvSpPr/>
           <p:nvPr/>
         </p:nvSpPr>
@@ -4582,7 +4517,7 @@
       </p:sp>
       <p:sp>
         <p:nvSpPr>
-          <p:cNvPr id="42" name="Shape 39"/>
+          <p:cNvPr id="41" name="Shape 39"/>
           <p:cNvSpPr/>
           <p:nvPr/>
         </p:nvSpPr>
@@ -4607,7 +4542,7 @@
       </p:sp>
       <p:sp>
         <p:nvSpPr>
-          <p:cNvPr id="43" name="Shape 40"/>
+          <p:cNvPr id="42" name="Shape 40"/>
           <p:cNvSpPr/>
           <p:nvPr/>
         </p:nvSpPr>
@@ -4632,7 +4567,7 @@
       </p:sp>
       <p:sp>
         <p:nvSpPr>
-          <p:cNvPr id="44" name="Shape 41"/>
+          <p:cNvPr id="43" name="Shape 41"/>
           <p:cNvSpPr/>
           <p:nvPr/>
         </p:nvSpPr>
@@ -4657,7 +4592,7 @@
       </p:sp>
       <p:sp>
         <p:nvSpPr>
-          <p:cNvPr id="45" name="Shape 42"/>
+          <p:cNvPr id="44" name="Shape 42"/>
           <p:cNvSpPr/>
           <p:nvPr/>
         </p:nvSpPr>
@@ -4682,7 +4617,7 @@
       </p:sp>
       <p:sp>
         <p:nvSpPr>
-          <p:cNvPr id="46" name="Shape 43"/>
+          <p:cNvPr id="45" name="Shape 43"/>
           <p:cNvSpPr/>
           <p:nvPr/>
         </p:nvSpPr>
@@ -4707,7 +4642,7 @@
       </p:sp>
       <p:sp>
         <p:nvSpPr>
-          <p:cNvPr id="47" name="Shape 44"/>
+          <p:cNvPr id="46" name="Shape 44"/>
           <p:cNvSpPr/>
           <p:nvPr/>
         </p:nvSpPr>
@@ -4732,7 +4667,7 @@
       </p:sp>
       <p:sp>
         <p:nvSpPr>
-          <p:cNvPr id="48" name="Shape 45"/>
+          <p:cNvPr id="47" name="Shape 45"/>
           <p:cNvSpPr/>
           <p:nvPr/>
         </p:nvSpPr>
@@ -4757,7 +4692,7 @@
       </p:sp>
       <p:sp>
         <p:nvSpPr>
-          <p:cNvPr id="49" name="Shape 46"/>
+          <p:cNvPr id="48" name="Shape 46"/>
           <p:cNvSpPr/>
           <p:nvPr/>
         </p:nvSpPr>
@@ -4782,7 +4717,7 @@
       </p:sp>
       <p:sp>
         <p:nvSpPr>
-          <p:cNvPr id="50" name="Shape 47"/>
+          <p:cNvPr id="49" name="Shape 47"/>
           <p:cNvSpPr/>
           <p:nvPr/>
         </p:nvSpPr>
@@ -4807,7 +4742,7 @@
       </p:sp>
       <p:sp>
         <p:nvSpPr>
-          <p:cNvPr id="51" name="Shape 48"/>
+          <p:cNvPr id="50" name="Shape 48"/>
           <p:cNvSpPr/>
           <p:nvPr/>
         </p:nvSpPr>
@@ -4832,7 +4767,7 @@
       </p:sp>
       <p:sp>
         <p:nvSpPr>
-          <p:cNvPr id="52" name="Shape 49"/>
+          <p:cNvPr id="51" name="Shape 49"/>
           <p:cNvSpPr/>
           <p:nvPr/>
         </p:nvSpPr>
@@ -4857,7 +4792,7 @@
       </p:sp>
       <p:sp>
         <p:nvSpPr>
-          <p:cNvPr id="53" name="Shape 50"/>
+          <p:cNvPr id="52" name="Shape 50"/>
           <p:cNvSpPr/>
           <p:nvPr/>
         </p:nvSpPr>
@@ -4882,7 +4817,7 @@
       </p:sp>
       <p:sp>
         <p:nvSpPr>
-          <p:cNvPr id="54" name="Shape 51"/>
+          <p:cNvPr id="53" name="Shape 51"/>
           <p:cNvSpPr/>
           <p:nvPr/>
         </p:nvSpPr>
@@ -4907,7 +4842,7 @@
       </p:sp>
       <p:sp>
         <p:nvSpPr>
-          <p:cNvPr id="55" name="Shape 52"/>
+          <p:cNvPr id="54" name="Shape 52"/>
           <p:cNvSpPr/>
           <p:nvPr/>
         </p:nvSpPr>
@@ -4932,7 +4867,7 @@
       </p:sp>
       <p:sp>
         <p:nvSpPr>
-          <p:cNvPr id="56" name="Shape 53"/>
+          <p:cNvPr id="55" name="Shape 53"/>
           <p:cNvSpPr/>
           <p:nvPr/>
         </p:nvSpPr>
@@ -4957,7 +4892,7 @@
       </p:sp>
       <p:sp>
         <p:nvSpPr>
-          <p:cNvPr id="57" name="Shape 54"/>
+          <p:cNvPr id="56" name="Shape 54"/>
           <p:cNvSpPr/>
           <p:nvPr/>
         </p:nvSpPr>
@@ -4982,7 +4917,7 @@
       </p:sp>
       <p:sp>
         <p:nvSpPr>
-          <p:cNvPr id="58" name="Shape 55"/>
+          <p:cNvPr id="57" name="Shape 55"/>
           <p:cNvSpPr/>
           <p:nvPr/>
         </p:nvSpPr>
@@ -5007,7 +4942,7 @@
       </p:sp>
       <p:sp>
         <p:nvSpPr>
-          <p:cNvPr id="59" name="Shape 56"/>
+          <p:cNvPr id="58" name="Shape 56"/>
           <p:cNvSpPr/>
           <p:nvPr/>
         </p:nvSpPr>
@@ -5032,7 +4967,7 @@
       </p:sp>
       <p:sp>
         <p:nvSpPr>
-          <p:cNvPr id="60" name="Shape 57"/>
+          <p:cNvPr id="59" name="Shape 57"/>
           <p:cNvSpPr/>
           <p:nvPr/>
         </p:nvSpPr>
@@ -5057,7 +4992,7 @@
       </p:sp>
       <p:sp>
         <p:nvSpPr>
-          <p:cNvPr id="61" name="Shape 58"/>
+          <p:cNvPr id="60" name="Shape 58"/>
           <p:cNvSpPr/>
           <p:nvPr/>
         </p:nvSpPr>
@@ -5082,7 +5017,7 @@
       </p:sp>
       <p:sp>
         <p:nvSpPr>
-          <p:cNvPr id="62" name="Shape 59"/>
+          <p:cNvPr id="61" name="Shape 59"/>
           <p:cNvSpPr/>
           <p:nvPr/>
         </p:nvSpPr>
@@ -5107,7 +5042,7 @@
       </p:sp>
       <p:sp>
         <p:nvSpPr>
-          <p:cNvPr id="63" name="Shape 60"/>
+          <p:cNvPr id="62" name="Shape 60"/>
           <p:cNvSpPr/>
           <p:nvPr/>
         </p:nvSpPr>
@@ -5132,7 +5067,7 @@
       </p:sp>
       <p:sp>
         <p:nvSpPr>
-          <p:cNvPr id="64" name="Shape 61"/>
+          <p:cNvPr id="63" name="Shape 61"/>
           <p:cNvSpPr/>
           <p:nvPr/>
         </p:nvSpPr>
@@ -5157,7 +5092,7 @@
       </p:sp>
       <p:sp>
         <p:nvSpPr>
-          <p:cNvPr id="65" name="Shape 62"/>
+          <p:cNvPr id="64" name="Shape 62"/>
           <p:cNvSpPr/>
           <p:nvPr/>
         </p:nvSpPr>
@@ -5182,7 +5117,7 @@
       </p:sp>
       <p:sp>
         <p:nvSpPr>
-          <p:cNvPr id="66" name="Shape 63"/>
+          <p:cNvPr id="65" name="Shape 63"/>
           <p:cNvSpPr/>
           <p:nvPr/>
         </p:nvSpPr>
@@ -5207,7 +5142,7 @@
       </p:sp>
       <p:sp>
         <p:nvSpPr>
-          <p:cNvPr id="67" name="Shape 64"/>
+          <p:cNvPr id="66" name="Shape 64"/>
           <p:cNvSpPr/>
           <p:nvPr/>
         </p:nvSpPr>
@@ -5232,7 +5167,7 @@
       </p:sp>
       <p:sp>
         <p:nvSpPr>
-          <p:cNvPr id="68" name="Shape 65"/>
+          <p:cNvPr id="67" name="Shape 65"/>
           <p:cNvSpPr/>
           <p:nvPr/>
         </p:nvSpPr>
@@ -5257,7 +5192,7 @@
       </p:sp>
       <p:sp>
         <p:nvSpPr>
-          <p:cNvPr id="69" name="Shape 66"/>
+          <p:cNvPr id="68" name="Shape 66"/>
           <p:cNvSpPr/>
           <p:nvPr/>
         </p:nvSpPr>
@@ -5282,7 +5217,7 @@
       </p:sp>
       <p:sp>
         <p:nvSpPr>
-          <p:cNvPr id="70" name="Shape 67"/>
+          <p:cNvPr id="69" name="Shape 67"/>
           <p:cNvSpPr/>
           <p:nvPr/>
         </p:nvSpPr>
@@ -5307,7 +5242,7 @@
       </p:sp>
       <p:sp>
         <p:nvSpPr>
-          <p:cNvPr id="71" name="Shape 68"/>
+          <p:cNvPr id="70" name="Shape 68"/>
           <p:cNvSpPr/>
           <p:nvPr/>
         </p:nvSpPr>
@@ -5332,7 +5267,7 @@
       </p:sp>
       <p:sp>
         <p:nvSpPr>
-          <p:cNvPr id="72" name="Shape 69"/>
+          <p:cNvPr id="71" name="Shape 69"/>
           <p:cNvSpPr/>
           <p:nvPr/>
         </p:nvSpPr>
@@ -5357,7 +5292,7 @@
       </p:sp>
       <p:sp>
         <p:nvSpPr>
-          <p:cNvPr id="73" name="Text 70"/>
+          <p:cNvPr id="72" name="Text 70"/>
           <p:cNvSpPr txBox="1"/>
           <p:nvPr/>
         </p:nvSpPr>
@@ -5545,7 +5480,7 @@
       </p:sp>
       <p:pic>
         <p:nvPicPr>
-          <p:cNvPr id="6" name="Image 0" descr="/Users/giovannivasconcelos/Documents/University/tech_summit/attention/slides/assets/eq_attention.png">    </p:cNvPr>
+          <p:cNvPr id="5" name="Image 0" descr="/Users/giovannivasconcelos/Documents/University/tech_summit/attention/slides/assets/eq_attention.png">    </p:cNvPr>
           <p:cNvPicPr>
             <a:picLocks noChangeAspect="1"/>
           </p:cNvPicPr>
@@ -5569,7 +5504,7 @@
       </p:pic>
       <p:sp>
         <p:nvSpPr>
-          <p:cNvPr id="7" name="Text 3"/>
+          <p:cNvPr id="6" name="Text 3"/>
           <p:cNvSpPr txBox="1"/>
           <p:nvPr/>
         </p:nvSpPr>
@@ -5608,7 +5543,7 @@
       </p:sp>
       <p:sp>
         <p:nvSpPr>
-          <p:cNvPr id="8" name="Text 4"/>
+          <p:cNvPr id="7" name="Text 4"/>
           <p:cNvSpPr txBox="1"/>
           <p:nvPr/>
         </p:nvSpPr>
@@ -5647,7 +5582,7 @@
       </p:sp>
       <p:sp>
         <p:nvSpPr>
-          <p:cNvPr id="9" name="Text 5"/>
+          <p:cNvPr id="8" name="Text 5"/>
           <p:cNvSpPr txBox="1"/>
           <p:nvPr/>
         </p:nvSpPr>
@@ -5686,7 +5621,7 @@
       </p:sp>
       <p:sp>
         <p:nvSpPr>
-          <p:cNvPr id="10" name="Text 6"/>
+          <p:cNvPr id="9" name="Text 6"/>
           <p:cNvSpPr txBox="1"/>
           <p:nvPr/>
         </p:nvSpPr>
@@ -5725,7 +5660,7 @@
       </p:sp>
       <p:sp>
         <p:nvSpPr>
-          <p:cNvPr id="11" name="Text 7"/>
+          <p:cNvPr id="10" name="Text 7"/>
           <p:cNvSpPr txBox="1"/>
           <p:nvPr/>
         </p:nvSpPr>
@@ -5764,7 +5699,7 @@
       </p:sp>
       <p:sp>
         <p:nvSpPr>
-          <p:cNvPr id="12" name="Text 8"/>
+          <p:cNvPr id="11" name="Text 8"/>
           <p:cNvSpPr txBox="1"/>
           <p:nvPr/>
         </p:nvSpPr>
@@ -5803,7 +5738,7 @@
       </p:sp>
       <p:sp>
         <p:nvSpPr>
-          <p:cNvPr id="13" name="Text 9"/>
+          <p:cNvPr id="12" name="Text 9"/>
           <p:cNvSpPr txBox="1"/>
           <p:nvPr/>
         </p:nvSpPr>
@@ -5842,7 +5777,7 @@
       </p:sp>
       <p:sp>
         <p:nvSpPr>
-          <p:cNvPr id="14" name="Text 10"/>
+          <p:cNvPr id="13" name="Text 10"/>
           <p:cNvSpPr txBox="1"/>
           <p:nvPr/>
         </p:nvSpPr>
@@ -5881,7 +5816,7 @@
       </p:sp>
       <p:sp>
         <p:nvSpPr>
-          <p:cNvPr id="15" name="Text 11"/>
+          <p:cNvPr id="14" name="Text 11"/>
           <p:cNvSpPr txBox="1"/>
           <p:nvPr/>
         </p:nvSpPr>
@@ -6069,7 +6004,7 @@
       </p:sp>
       <p:pic>
         <p:nvPicPr>
-          <p:cNvPr id="6" name="Image 0" descr="/Users/giovannivasconcelos/Documents/University/tech_summit/attention/slides/assets/eq_var.png">    </p:cNvPr>
+          <p:cNvPr id="5" name="Image 0" descr="/Users/giovannivasconcelos/Documents/University/tech_summit/attention/slides/assets/eq_var.png">    </p:cNvPr>
           <p:cNvPicPr>
             <a:picLocks noChangeAspect="1"/>
           </p:cNvPicPr>
@@ -6093,7 +6028,7 @@
       </p:pic>
       <p:sp>
         <p:nvSpPr>
-          <p:cNvPr id="7" name="Text 3"/>
+          <p:cNvPr id="6" name="Text 3"/>
           <p:cNvSpPr txBox="1"/>
           <p:nvPr/>
         </p:nvSpPr>
@@ -6132,7 +6067,7 @@
       </p:sp>
       <p:sp>
         <p:nvSpPr>
-          <p:cNvPr id="8" name="Text 4"/>
+          <p:cNvPr id="7" name="Text 4"/>
           <p:cNvSpPr txBox="1"/>
           <p:nvPr/>
         </p:nvSpPr>
@@ -6171,7 +6106,7 @@
       </p:sp>
       <p:pic>
         <p:nvPicPr>
-          <p:cNvPr id="9" name="Image 1" descr="/Users/giovannivasconcelos/Documents/University/tech_summit/attention/slides/assets/ch_sqrtdk.png">    </p:cNvPr>
+          <p:cNvPr id="8" name="Image 1" descr="/Users/giovannivasconcelos/Documents/University/tech_summit/attention/slides/assets/ch_sqrtdk.png">    </p:cNvPr>
           <p:cNvPicPr>
             <a:picLocks noChangeAspect="1"/>
           </p:cNvPicPr>
@@ -6344,7 +6279,7 @@
       </p:sp>
       <p:sp>
         <p:nvSpPr>
-          <p:cNvPr id="6" name="Shape 3"/>
+          <p:cNvPr id="5" name="Shape 3"/>
           <p:cNvSpPr/>
           <p:nvPr/>
         </p:nvSpPr>
@@ -6369,7 +6304,7 @@
       </p:sp>
       <p:sp>
         <p:nvSpPr>
-          <p:cNvPr id="7" name="Text 4"/>
+          <p:cNvPr id="6" name="Text 4"/>
           <p:cNvSpPr txBox="1"/>
           <p:nvPr/>
         </p:nvSpPr>
@@ -6408,7 +6343,7 @@
       </p:sp>
       <p:sp>
         <p:nvSpPr>
-          <p:cNvPr id="8" name="Shape 5"/>
+          <p:cNvPr id="7" name="Shape 5"/>
           <p:cNvSpPr/>
           <p:nvPr/>
         </p:nvSpPr>
@@ -6433,7 +6368,7 @@
       </p:sp>
       <p:sp>
         <p:nvSpPr>
-          <p:cNvPr id="9" name="Text 6"/>
+          <p:cNvPr id="8" name="Text 6"/>
           <p:cNvSpPr txBox="1"/>
           <p:nvPr/>
         </p:nvSpPr>
@@ -6472,7 +6407,7 @@
       </p:sp>
       <p:sp>
         <p:nvSpPr>
-          <p:cNvPr id="10" name="Shape 7"/>
+          <p:cNvPr id="9" name="Shape 7"/>
           <p:cNvSpPr/>
           <p:nvPr/>
         </p:nvSpPr>
@@ -6497,7 +6432,7 @@
       </p:sp>
       <p:sp>
         <p:nvSpPr>
-          <p:cNvPr id="11" name="Text 8"/>
+          <p:cNvPr id="10" name="Text 8"/>
           <p:cNvSpPr txBox="1"/>
           <p:nvPr/>
         </p:nvSpPr>
@@ -6536,7 +6471,7 @@
       </p:sp>
       <p:sp>
         <p:nvSpPr>
-          <p:cNvPr id="12" name="Shape 9"/>
+          <p:cNvPr id="11" name="Shape 9"/>
           <p:cNvSpPr/>
           <p:nvPr/>
         </p:nvSpPr>
@@ -6561,7 +6496,7 @@
       </p:sp>
       <p:sp>
         <p:nvSpPr>
-          <p:cNvPr id="13" name="Text 10"/>
+          <p:cNvPr id="12" name="Text 10"/>
           <p:cNvSpPr txBox="1"/>
           <p:nvPr/>
         </p:nvSpPr>
@@ -6600,7 +6535,7 @@
       </p:sp>
       <p:sp>
         <p:nvSpPr>
-          <p:cNvPr id="14" name="Shape 11"/>
+          <p:cNvPr id="13" name="Shape 11"/>
           <p:cNvSpPr/>
           <p:nvPr/>
         </p:nvSpPr>
@@ -6625,7 +6560,7 @@
       </p:sp>
       <p:sp>
         <p:nvSpPr>
-          <p:cNvPr id="15" name="Text 12"/>
+          <p:cNvPr id="14" name="Text 12"/>
           <p:cNvSpPr txBox="1"/>
           <p:nvPr/>
         </p:nvSpPr>
@@ -6664,7 +6599,7 @@
       </p:sp>
       <p:sp>
         <p:nvSpPr>
-          <p:cNvPr id="16" name="Shape 13"/>
+          <p:cNvPr id="15" name="Shape 13"/>
           <p:cNvSpPr/>
           <p:nvPr/>
         </p:nvSpPr>
@@ -6689,7 +6624,7 @@
       </p:sp>
       <p:sp>
         <p:nvSpPr>
-          <p:cNvPr id="17" name="Text 14"/>
+          <p:cNvPr id="16" name="Text 14"/>
           <p:cNvSpPr txBox="1"/>
           <p:nvPr/>
         </p:nvSpPr>
@@ -6728,7 +6663,7 @@
       </p:sp>
       <p:sp>
         <p:nvSpPr>
-          <p:cNvPr id="18" name="Shape 15"/>
+          <p:cNvPr id="17" name="Shape 15"/>
           <p:cNvSpPr/>
           <p:nvPr/>
         </p:nvSpPr>
@@ -6753,7 +6688,7 @@
       </p:sp>
       <p:sp>
         <p:nvSpPr>
-          <p:cNvPr id="19" name="Text 16"/>
+          <p:cNvPr id="18" name="Text 16"/>
           <p:cNvSpPr txBox="1"/>
           <p:nvPr/>
         </p:nvSpPr>
@@ -6792,7 +6727,7 @@
       </p:sp>
       <p:sp>
         <p:nvSpPr>
-          <p:cNvPr id="20" name="Shape 17"/>
+          <p:cNvPr id="19" name="Shape 17"/>
           <p:cNvSpPr/>
           <p:nvPr/>
         </p:nvSpPr>
@@ -6817,7 +6752,7 @@
       </p:sp>
       <p:sp>
         <p:nvSpPr>
-          <p:cNvPr id="21" name="Text 18"/>
+          <p:cNvPr id="20" name="Text 18"/>
           <p:cNvSpPr txBox="1"/>
           <p:nvPr/>
         </p:nvSpPr>
@@ -6856,7 +6791,7 @@
       </p:sp>
       <p:sp>
         <p:nvSpPr>
-          <p:cNvPr id="22" name="Shape 19"/>
+          <p:cNvPr id="21" name="Shape 19"/>
           <p:cNvSpPr/>
           <p:nvPr/>
         </p:nvSpPr>
@@ -6881,7 +6816,7 @@
       </p:sp>
       <p:sp>
         <p:nvSpPr>
-          <p:cNvPr id="23" name="Text 20"/>
+          <p:cNvPr id="22" name="Text 20"/>
           <p:cNvSpPr txBox="1"/>
           <p:nvPr/>
         </p:nvSpPr>
@@ -6920,7 +6855,7 @@
       </p:sp>
       <p:sp>
         <p:nvSpPr>
-          <p:cNvPr id="24" name="Shape 21"/>
+          <p:cNvPr id="23" name="Shape 21"/>
           <p:cNvSpPr/>
           <p:nvPr/>
         </p:nvSpPr>
@@ -6945,7 +6880,7 @@
       </p:sp>
       <p:sp>
         <p:nvSpPr>
-          <p:cNvPr id="25" name="Text 22"/>
+          <p:cNvPr id="24" name="Text 22"/>
           <p:cNvSpPr txBox="1"/>
           <p:nvPr/>
         </p:nvSpPr>
@@ -6984,7 +6919,7 @@
       </p:sp>
       <p:sp>
         <p:nvSpPr>
-          <p:cNvPr id="26" name="Shape 23"/>
+          <p:cNvPr id="25" name="Shape 23"/>
           <p:cNvSpPr/>
           <p:nvPr/>
         </p:nvSpPr>
@@ -7009,7 +6944,7 @@
       </p:sp>
       <p:sp>
         <p:nvSpPr>
-          <p:cNvPr id="27" name="Text 24"/>
+          <p:cNvPr id="26" name="Text 24"/>
           <p:cNvSpPr txBox="1"/>
           <p:nvPr/>
         </p:nvSpPr>
@@ -7048,7 +6983,7 @@
       </p:sp>
       <p:sp>
         <p:nvSpPr>
-          <p:cNvPr id="28" name="Shape 25"/>
+          <p:cNvPr id="27" name="Shape 25"/>
           <p:cNvSpPr/>
           <p:nvPr/>
         </p:nvSpPr>
@@ -7073,7 +7008,7 @@
       </p:sp>
       <p:sp>
         <p:nvSpPr>
-          <p:cNvPr id="29" name="Text 26"/>
+          <p:cNvPr id="28" name="Text 26"/>
           <p:cNvSpPr txBox="1"/>
           <p:nvPr/>
         </p:nvSpPr>
@@ -7112,7 +7047,7 @@
       </p:sp>
       <p:sp>
         <p:nvSpPr>
-          <p:cNvPr id="30" name="Shape 27"/>
+          <p:cNvPr id="29" name="Shape 27"/>
           <p:cNvSpPr/>
           <p:nvPr/>
         </p:nvSpPr>
@@ -7137,7 +7072,7 @@
       </p:sp>
       <p:sp>
         <p:nvSpPr>
-          <p:cNvPr id="31" name="Text 28"/>
+          <p:cNvPr id="30" name="Text 28"/>
           <p:cNvSpPr txBox="1"/>
           <p:nvPr/>
         </p:nvSpPr>
@@ -7176,7 +7111,7 @@
       </p:sp>
       <p:sp>
         <p:nvSpPr>
-          <p:cNvPr id="32" name="Shape 29"/>
+          <p:cNvPr id="31" name="Shape 29"/>
           <p:cNvSpPr/>
           <p:nvPr/>
         </p:nvSpPr>
@@ -7201,7 +7136,7 @@
       </p:sp>
       <p:sp>
         <p:nvSpPr>
-          <p:cNvPr id="33" name="Text 30"/>
+          <p:cNvPr id="32" name="Text 30"/>
           <p:cNvSpPr txBox="1"/>
           <p:nvPr/>
         </p:nvSpPr>
@@ -7240,7 +7175,7 @@
       </p:sp>
       <p:sp>
         <p:nvSpPr>
-          <p:cNvPr id="34" name="Shape 31"/>
+          <p:cNvPr id="33" name="Shape 31"/>
           <p:cNvSpPr/>
           <p:nvPr/>
         </p:nvSpPr>
@@ -7265,7 +7200,7 @@
       </p:sp>
       <p:sp>
         <p:nvSpPr>
-          <p:cNvPr id="35" name="Text 32"/>
+          <p:cNvPr id="34" name="Text 32"/>
           <p:cNvSpPr txBox="1"/>
           <p:nvPr/>
         </p:nvSpPr>
@@ -7304,7 +7239,7 @@
       </p:sp>
       <p:sp>
         <p:nvSpPr>
-          <p:cNvPr id="36" name="Shape 33"/>
+          <p:cNvPr id="35" name="Shape 33"/>
           <p:cNvSpPr/>
           <p:nvPr/>
         </p:nvSpPr>
@@ -7329,7 +7264,7 @@
       </p:sp>
       <p:sp>
         <p:nvSpPr>
-          <p:cNvPr id="37" name="Text 34"/>
+          <p:cNvPr id="36" name="Text 34"/>
           <p:cNvSpPr txBox="1"/>
           <p:nvPr/>
         </p:nvSpPr>
@@ -7368,7 +7303,7 @@
       </p:sp>
       <p:sp>
         <p:nvSpPr>
-          <p:cNvPr id="38" name="Shape 35"/>
+          <p:cNvPr id="37" name="Shape 35"/>
           <p:cNvSpPr/>
           <p:nvPr/>
         </p:nvSpPr>
@@ -7393,7 +7328,7 @@
       </p:sp>
       <p:sp>
         <p:nvSpPr>
-          <p:cNvPr id="39" name="Text 36"/>
+          <p:cNvPr id="38" name="Text 36"/>
           <p:cNvSpPr txBox="1"/>
           <p:nvPr/>
         </p:nvSpPr>
@@ -7432,7 +7367,7 @@
       </p:sp>
       <p:sp>
         <p:nvSpPr>
-          <p:cNvPr id="40" name="Shape 37"/>
+          <p:cNvPr id="39" name="Shape 37"/>
           <p:cNvSpPr/>
           <p:nvPr/>
         </p:nvSpPr>
@@ -7457,7 +7392,7 @@
       </p:sp>
       <p:sp>
         <p:nvSpPr>
-          <p:cNvPr id="41" name="Text 38"/>
+          <p:cNvPr id="40" name="Text 38"/>
           <p:cNvSpPr txBox="1"/>
           <p:nvPr/>
         </p:nvSpPr>
@@ -7496,7 +7431,7 @@
       </p:sp>
       <p:sp>
         <p:nvSpPr>
-          <p:cNvPr id="42" name="Shape 39"/>
+          <p:cNvPr id="41" name="Shape 39"/>
           <p:cNvSpPr/>
           <p:nvPr/>
         </p:nvSpPr>
@@ -7521,7 +7456,7 @@
       </p:sp>
       <p:sp>
         <p:nvSpPr>
-          <p:cNvPr id="43" name="Text 40"/>
+          <p:cNvPr id="42" name="Text 40"/>
           <p:cNvSpPr txBox="1"/>
           <p:nvPr/>
         </p:nvSpPr>
@@ -7560,7 +7495,7 @@
       </p:sp>
       <p:sp>
         <p:nvSpPr>
-          <p:cNvPr id="44" name="Shape 41"/>
+          <p:cNvPr id="43" name="Shape 41"/>
           <p:cNvSpPr/>
           <p:nvPr/>
         </p:nvSpPr>
@@ -7585,7 +7520,7 @@
       </p:sp>
       <p:sp>
         <p:nvSpPr>
-          <p:cNvPr id="45" name="Text 42"/>
+          <p:cNvPr id="44" name="Text 42"/>
           <p:cNvSpPr txBox="1"/>
           <p:nvPr/>
         </p:nvSpPr>
@@ -7624,7 +7559,7 @@
       </p:sp>
       <p:sp>
         <p:nvSpPr>
-          <p:cNvPr id="46" name="Shape 43"/>
+          <p:cNvPr id="45" name="Shape 43"/>
           <p:cNvSpPr/>
           <p:nvPr/>
         </p:nvSpPr>
@@ -7649,7 +7584,7 @@
       </p:sp>
       <p:sp>
         <p:nvSpPr>
-          <p:cNvPr id="47" name="Text 44"/>
+          <p:cNvPr id="46" name="Text 44"/>
           <p:cNvSpPr txBox="1"/>
           <p:nvPr/>
         </p:nvSpPr>
@@ -7688,7 +7623,7 @@
       </p:sp>
       <p:sp>
         <p:nvSpPr>
-          <p:cNvPr id="48" name="Shape 45"/>
+          <p:cNvPr id="47" name="Shape 45"/>
           <p:cNvSpPr/>
           <p:nvPr/>
         </p:nvSpPr>
@@ -7713,7 +7648,7 @@
       </p:sp>
       <p:sp>
         <p:nvSpPr>
-          <p:cNvPr id="49" name="Text 46"/>
+          <p:cNvPr id="48" name="Text 46"/>
           <p:cNvSpPr txBox="1"/>
           <p:nvPr/>
         </p:nvSpPr>
@@ -7752,7 +7687,7 @@
       </p:sp>
       <p:sp>
         <p:nvSpPr>
-          <p:cNvPr id="50" name="Shape 47"/>
+          <p:cNvPr id="49" name="Shape 47"/>
           <p:cNvSpPr/>
           <p:nvPr/>
         </p:nvSpPr>
@@ -7777,7 +7712,7 @@
       </p:sp>
       <p:sp>
         <p:nvSpPr>
-          <p:cNvPr id="51" name="Text 48"/>
+          <p:cNvPr id="50" name="Text 48"/>
           <p:cNvSpPr txBox="1"/>
           <p:nvPr/>
         </p:nvSpPr>
@@ -7816,7 +7751,7 @@
       </p:sp>
       <p:sp>
         <p:nvSpPr>
-          <p:cNvPr id="52" name="Shape 49"/>
+          <p:cNvPr id="51" name="Shape 49"/>
           <p:cNvSpPr/>
           <p:nvPr/>
         </p:nvSpPr>
@@ -7841,7 +7776,7 @@
       </p:sp>
       <p:sp>
         <p:nvSpPr>
-          <p:cNvPr id="53" name="Text 50"/>
+          <p:cNvPr id="52" name="Text 50"/>
           <p:cNvSpPr txBox="1"/>
           <p:nvPr/>
         </p:nvSpPr>
@@ -7880,7 +7815,7 @@
       </p:sp>
       <p:sp>
         <p:nvSpPr>
-          <p:cNvPr id="54" name="Shape 51"/>
+          <p:cNvPr id="53" name="Shape 51"/>
           <p:cNvSpPr/>
           <p:nvPr/>
         </p:nvSpPr>
@@ -7905,7 +7840,7 @@
       </p:sp>
       <p:sp>
         <p:nvSpPr>
-          <p:cNvPr id="55" name="Text 52"/>
+          <p:cNvPr id="54" name="Text 52"/>
           <p:cNvSpPr txBox="1"/>
           <p:nvPr/>
         </p:nvSpPr>
@@ -7944,7 +7879,7 @@
       </p:sp>
       <p:sp>
         <p:nvSpPr>
-          <p:cNvPr id="56" name="Text 53"/>
+          <p:cNvPr id="55" name="Text 53"/>
           <p:cNvSpPr txBox="1"/>
           <p:nvPr/>
         </p:nvSpPr>
@@ -7983,7 +7918,7 @@
       </p:sp>
       <p:sp>
         <p:nvSpPr>
-          <p:cNvPr id="57" name="Text 54"/>
+          <p:cNvPr id="56" name="Text 54"/>
           <p:cNvSpPr txBox="1"/>
           <p:nvPr/>
         </p:nvSpPr>
@@ -8022,7 +7957,7 @@
       </p:sp>
       <p:sp>
         <p:nvSpPr>
-          <p:cNvPr id="58" name="Text 55"/>
+          <p:cNvPr id="57" name="Text 55"/>
           <p:cNvSpPr txBox="1"/>
           <p:nvPr/>
         </p:nvSpPr>
@@ -8061,7 +7996,7 @@
       </p:sp>
       <p:sp>
         <p:nvSpPr>
-          <p:cNvPr id="59" name="Text 56"/>
+          <p:cNvPr id="58" name="Text 56"/>
           <p:cNvSpPr txBox="1"/>
           <p:nvPr/>
         </p:nvSpPr>
@@ -8100,7 +8035,7 @@
       </p:sp>
       <p:sp>
         <p:nvSpPr>
-          <p:cNvPr id="60" name="Text 57"/>
+          <p:cNvPr id="59" name="Text 57"/>
           <p:cNvSpPr txBox="1"/>
           <p:nvPr/>
         </p:nvSpPr>
@@ -8139,7 +8074,7 @@
       </p:sp>
       <p:sp>
         <p:nvSpPr>
-          <p:cNvPr id="61" name="Text 58"/>
+          <p:cNvPr id="60" name="Text 58"/>
           <p:cNvSpPr txBox="1"/>
           <p:nvPr/>
         </p:nvSpPr>
@@ -8178,7 +8113,7 @@
       </p:sp>
       <p:sp>
         <p:nvSpPr>
-          <p:cNvPr id="62" name="Text 59"/>
+          <p:cNvPr id="61" name="Text 59"/>
           <p:cNvSpPr txBox="1"/>
           <p:nvPr/>
         </p:nvSpPr>
@@ -8217,7 +8152,7 @@
       </p:sp>
       <p:sp>
         <p:nvSpPr>
-          <p:cNvPr id="63" name="Text 60"/>
+          <p:cNvPr id="62" name="Text 60"/>
           <p:cNvSpPr txBox="1"/>
           <p:nvPr/>
         </p:nvSpPr>
@@ -8256,7 +8191,7 @@
       </p:sp>
       <p:sp>
         <p:nvSpPr>
-          <p:cNvPr id="64" name="Text 61"/>
+          <p:cNvPr id="63" name="Text 61"/>
           <p:cNvSpPr txBox="1"/>
           <p:nvPr/>
         </p:nvSpPr>
@@ -8295,7 +8230,7 @@
       </p:sp>
       <p:sp>
         <p:nvSpPr>
-          <p:cNvPr id="65" name="Text 62"/>
+          <p:cNvPr id="64" name="Text 62"/>
           <p:cNvSpPr txBox="1"/>
           <p:nvPr/>
         </p:nvSpPr>
@@ -8334,7 +8269,7 @@
       </p:sp>
       <p:sp>
         <p:nvSpPr>
-          <p:cNvPr id="66" name="Text 63"/>
+          <p:cNvPr id="65" name="Text 63"/>
           <p:cNvSpPr txBox="1"/>
           <p:nvPr/>
         </p:nvSpPr>
@@ -8373,7 +8308,7 @@
       </p:sp>
       <p:sp>
         <p:nvSpPr>
-          <p:cNvPr id="67" name="Shape 64"/>
+          <p:cNvPr id="66" name="Shape 64"/>
           <p:cNvSpPr/>
           <p:nvPr/>
         </p:nvSpPr>
@@ -8397,7 +8332,7 @@
       </p:sp>
       <p:sp>
         <p:nvSpPr>
-          <p:cNvPr id="68" name="Text 65"/>
+          <p:cNvPr id="67" name="Text 65"/>
           <p:cNvSpPr txBox="1"/>
           <p:nvPr/>
         </p:nvSpPr>
@@ -8436,7 +8371,7 @@
       </p:sp>
       <p:sp>
         <p:nvSpPr>
-          <p:cNvPr id="69" name="Shape 66"/>
+          <p:cNvPr id="68" name="Shape 66"/>
           <p:cNvSpPr/>
           <p:nvPr/>
         </p:nvSpPr>
@@ -8461,7 +8396,7 @@
       </p:sp>
       <p:sp>
         <p:nvSpPr>
-          <p:cNvPr id="70" name="Text 67"/>
+          <p:cNvPr id="69" name="Text 67"/>
           <p:cNvSpPr txBox="1"/>
           <p:nvPr/>
         </p:nvSpPr>
@@ -8500,7 +8435,7 @@
       </p:sp>
       <p:sp>
         <p:nvSpPr>
-          <p:cNvPr id="71" name="Shape 68"/>
+          <p:cNvPr id="70" name="Shape 68"/>
           <p:cNvSpPr/>
           <p:nvPr/>
         </p:nvSpPr>
@@ -8525,7 +8460,7 @@
       </p:sp>
       <p:sp>
         <p:nvSpPr>
-          <p:cNvPr id="72" name="Text 69"/>
+          <p:cNvPr id="71" name="Text 69"/>
           <p:cNvSpPr txBox="1"/>
           <p:nvPr/>
         </p:nvSpPr>
@@ -8564,7 +8499,7 @@
       </p:sp>
       <p:sp>
         <p:nvSpPr>
-          <p:cNvPr id="73" name="Shape 70"/>
+          <p:cNvPr id="72" name="Shape 70"/>
           <p:cNvSpPr/>
           <p:nvPr/>
         </p:nvSpPr>
@@ -8589,7 +8524,7 @@
       </p:sp>
       <p:sp>
         <p:nvSpPr>
-          <p:cNvPr id="74" name="Text 71"/>
+          <p:cNvPr id="73" name="Text 71"/>
           <p:cNvSpPr txBox="1"/>
           <p:nvPr/>
         </p:nvSpPr>
@@ -8628,7 +8563,7 @@
       </p:sp>
       <p:sp>
         <p:nvSpPr>
-          <p:cNvPr id="75" name="Shape 72"/>
+          <p:cNvPr id="74" name="Shape 72"/>
           <p:cNvSpPr/>
           <p:nvPr/>
         </p:nvSpPr>
@@ -8653,7 +8588,7 @@
       </p:sp>
       <p:sp>
         <p:nvSpPr>
-          <p:cNvPr id="76" name="Text 73"/>
+          <p:cNvPr id="75" name="Text 73"/>
           <p:cNvSpPr txBox="1"/>
           <p:nvPr/>
         </p:nvSpPr>
@@ -8692,7 +8627,7 @@
       </p:sp>
       <p:sp>
         <p:nvSpPr>
-          <p:cNvPr id="77" name="Shape 74"/>
+          <p:cNvPr id="76" name="Shape 74"/>
           <p:cNvSpPr/>
           <p:nvPr/>
         </p:nvSpPr>
@@ -8717,7 +8652,7 @@
       </p:sp>
       <p:sp>
         <p:nvSpPr>
-          <p:cNvPr id="78" name="Text 75"/>
+          <p:cNvPr id="77" name="Text 75"/>
           <p:cNvSpPr txBox="1"/>
           <p:nvPr/>
         </p:nvSpPr>
@@ -8756,7 +8691,7 @@
       </p:sp>
       <p:sp>
         <p:nvSpPr>
-          <p:cNvPr id="79" name="Shape 76"/>
+          <p:cNvPr id="78" name="Shape 76"/>
           <p:cNvSpPr/>
           <p:nvPr/>
         </p:nvSpPr>
@@ -8781,7 +8716,7 @@
       </p:sp>
       <p:sp>
         <p:nvSpPr>
-          <p:cNvPr id="80" name="Text 77"/>
+          <p:cNvPr id="79" name="Text 77"/>
           <p:cNvSpPr txBox="1"/>
           <p:nvPr/>
         </p:nvSpPr>
@@ -8820,7 +8755,7 @@
       </p:sp>
       <p:sp>
         <p:nvSpPr>
-          <p:cNvPr id="81" name="Shape 78"/>
+          <p:cNvPr id="80" name="Shape 78"/>
           <p:cNvSpPr/>
           <p:nvPr/>
         </p:nvSpPr>
@@ -8845,7 +8780,7 @@
       </p:sp>
       <p:sp>
         <p:nvSpPr>
-          <p:cNvPr id="82" name="Text 79"/>
+          <p:cNvPr id="81" name="Text 79"/>
           <p:cNvSpPr txBox="1"/>
           <p:nvPr/>
         </p:nvSpPr>
@@ -8884,7 +8819,7 @@
       </p:sp>
       <p:sp>
         <p:nvSpPr>
-          <p:cNvPr id="83" name="Shape 80"/>
+          <p:cNvPr id="82" name="Shape 80"/>
           <p:cNvSpPr/>
           <p:nvPr/>
         </p:nvSpPr>
@@ -8909,7 +8844,7 @@
       </p:sp>
       <p:sp>
         <p:nvSpPr>
-          <p:cNvPr id="84" name="Text 81"/>
+          <p:cNvPr id="83" name="Text 81"/>
           <p:cNvSpPr txBox="1"/>
           <p:nvPr/>
         </p:nvSpPr>
@@ -8948,7 +8883,7 @@
       </p:sp>
       <p:sp>
         <p:nvSpPr>
-          <p:cNvPr id="85" name="Shape 82"/>
+          <p:cNvPr id="84" name="Shape 82"/>
           <p:cNvSpPr/>
           <p:nvPr/>
         </p:nvSpPr>
@@ -8973,7 +8908,7 @@
       </p:sp>
       <p:sp>
         <p:nvSpPr>
-          <p:cNvPr id="86" name="Text 83"/>
+          <p:cNvPr id="85" name="Text 83"/>
           <p:cNvSpPr txBox="1"/>
           <p:nvPr/>
         </p:nvSpPr>
@@ -9012,7 +8947,7 @@
       </p:sp>
       <p:sp>
         <p:nvSpPr>
-          <p:cNvPr id="87" name="Shape 84"/>
+          <p:cNvPr id="86" name="Shape 84"/>
           <p:cNvSpPr/>
           <p:nvPr/>
         </p:nvSpPr>
@@ -9037,7 +8972,7 @@
       </p:sp>
       <p:sp>
         <p:nvSpPr>
-          <p:cNvPr id="88" name="Text 85"/>
+          <p:cNvPr id="87" name="Text 85"/>
           <p:cNvSpPr txBox="1"/>
           <p:nvPr/>
         </p:nvSpPr>
@@ -9076,7 +9011,7 @@
       </p:sp>
       <p:sp>
         <p:nvSpPr>
-          <p:cNvPr id="89" name="Shape 86"/>
+          <p:cNvPr id="88" name="Shape 86"/>
           <p:cNvSpPr/>
           <p:nvPr/>
         </p:nvSpPr>
@@ -9101,7 +9036,7 @@
       </p:sp>
       <p:sp>
         <p:nvSpPr>
-          <p:cNvPr id="90" name="Text 87"/>
+          <p:cNvPr id="89" name="Text 87"/>
           <p:cNvSpPr txBox="1"/>
           <p:nvPr/>
         </p:nvSpPr>
@@ -9140,7 +9075,7 @@
       </p:sp>
       <p:sp>
         <p:nvSpPr>
-          <p:cNvPr id="91" name="Shape 88"/>
+          <p:cNvPr id="90" name="Shape 88"/>
           <p:cNvSpPr/>
           <p:nvPr/>
         </p:nvSpPr>
@@ -9165,7 +9100,7 @@
       </p:sp>
       <p:sp>
         <p:nvSpPr>
-          <p:cNvPr id="92" name="Text 89"/>
+          <p:cNvPr id="91" name="Text 89"/>
           <p:cNvSpPr txBox="1"/>
           <p:nvPr/>
         </p:nvSpPr>
@@ -9204,7 +9139,7 @@
       </p:sp>
       <p:sp>
         <p:nvSpPr>
-          <p:cNvPr id="93" name="Shape 90"/>
+          <p:cNvPr id="92" name="Shape 90"/>
           <p:cNvSpPr/>
           <p:nvPr/>
         </p:nvSpPr>
@@ -9229,7 +9164,7 @@
       </p:sp>
       <p:sp>
         <p:nvSpPr>
-          <p:cNvPr id="94" name="Text 91"/>
+          <p:cNvPr id="93" name="Text 91"/>
           <p:cNvSpPr txBox="1"/>
           <p:nvPr/>
         </p:nvSpPr>
@@ -9268,7 +9203,7 @@
       </p:sp>
       <p:sp>
         <p:nvSpPr>
-          <p:cNvPr id="95" name="Shape 92"/>
+          <p:cNvPr id="94" name="Shape 92"/>
           <p:cNvSpPr/>
           <p:nvPr/>
         </p:nvSpPr>
@@ -9293,7 +9228,7 @@
       </p:sp>
       <p:sp>
         <p:nvSpPr>
-          <p:cNvPr id="96" name="Text 93"/>
+          <p:cNvPr id="95" name="Text 93"/>
           <p:cNvSpPr txBox="1"/>
           <p:nvPr/>
         </p:nvSpPr>
@@ -9332,7 +9267,7 @@
       </p:sp>
       <p:sp>
         <p:nvSpPr>
-          <p:cNvPr id="97" name="Shape 94"/>
+          <p:cNvPr id="96" name="Shape 94"/>
           <p:cNvSpPr/>
           <p:nvPr/>
         </p:nvSpPr>
@@ -9357,7 +9292,7 @@
       </p:sp>
       <p:sp>
         <p:nvSpPr>
-          <p:cNvPr id="98" name="Text 95"/>
+          <p:cNvPr id="97" name="Text 95"/>
           <p:cNvSpPr txBox="1"/>
           <p:nvPr/>
         </p:nvSpPr>
@@ -9396,7 +9331,7 @@
       </p:sp>
       <p:sp>
         <p:nvSpPr>
-          <p:cNvPr id="99" name="Shape 96"/>
+          <p:cNvPr id="98" name="Shape 96"/>
           <p:cNvSpPr/>
           <p:nvPr/>
         </p:nvSpPr>
@@ -9421,7 +9356,7 @@
       </p:sp>
       <p:sp>
         <p:nvSpPr>
-          <p:cNvPr id="100" name="Text 97"/>
+          <p:cNvPr id="99" name="Text 97"/>
           <p:cNvSpPr txBox="1"/>
           <p:nvPr/>
         </p:nvSpPr>
@@ -9460,7 +9395,7 @@
       </p:sp>
       <p:sp>
         <p:nvSpPr>
-          <p:cNvPr id="101" name="Shape 98"/>
+          <p:cNvPr id="100" name="Shape 98"/>
           <p:cNvSpPr/>
           <p:nvPr/>
         </p:nvSpPr>
@@ -9485,7 +9420,7 @@
       </p:sp>
       <p:sp>
         <p:nvSpPr>
-          <p:cNvPr id="102" name="Text 99"/>
+          <p:cNvPr id="101" name="Text 99"/>
           <p:cNvSpPr txBox="1"/>
           <p:nvPr/>
         </p:nvSpPr>
@@ -9524,7 +9459,7 @@
       </p:sp>
       <p:sp>
         <p:nvSpPr>
-          <p:cNvPr id="103" name="Shape 100"/>
+          <p:cNvPr id="102" name="Shape 100"/>
           <p:cNvSpPr/>
           <p:nvPr/>
         </p:nvSpPr>
@@ -9549,7 +9484,7 @@
       </p:sp>
       <p:sp>
         <p:nvSpPr>
-          <p:cNvPr id="104" name="Text 101"/>
+          <p:cNvPr id="103" name="Text 101"/>
           <p:cNvSpPr txBox="1"/>
           <p:nvPr/>
         </p:nvSpPr>
@@ -9588,7 +9523,7 @@
       </p:sp>
       <p:sp>
         <p:nvSpPr>
-          <p:cNvPr id="105" name="Shape 102"/>
+          <p:cNvPr id="104" name="Shape 102"/>
           <p:cNvSpPr/>
           <p:nvPr/>
         </p:nvSpPr>
@@ -9613,7 +9548,7 @@
       </p:sp>
       <p:sp>
         <p:nvSpPr>
-          <p:cNvPr id="106" name="Text 103"/>
+          <p:cNvPr id="105" name="Text 103"/>
           <p:cNvSpPr txBox="1"/>
           <p:nvPr/>
         </p:nvSpPr>
@@ -9652,7 +9587,7 @@
       </p:sp>
       <p:sp>
         <p:nvSpPr>
-          <p:cNvPr id="107" name="Shape 104"/>
+          <p:cNvPr id="106" name="Shape 104"/>
           <p:cNvSpPr/>
           <p:nvPr/>
         </p:nvSpPr>
@@ -9677,7 +9612,7 @@
       </p:sp>
       <p:sp>
         <p:nvSpPr>
-          <p:cNvPr id="108" name="Text 105"/>
+          <p:cNvPr id="107" name="Text 105"/>
           <p:cNvSpPr txBox="1"/>
           <p:nvPr/>
         </p:nvSpPr>
@@ -9716,7 +9651,7 @@
       </p:sp>
       <p:sp>
         <p:nvSpPr>
-          <p:cNvPr id="109" name="Shape 106"/>
+          <p:cNvPr id="108" name="Shape 106"/>
           <p:cNvSpPr/>
           <p:nvPr/>
         </p:nvSpPr>
@@ -9741,7 +9676,7 @@
       </p:sp>
       <p:sp>
         <p:nvSpPr>
-          <p:cNvPr id="110" name="Text 107"/>
+          <p:cNvPr id="109" name="Text 107"/>
           <p:cNvSpPr txBox="1"/>
           <p:nvPr/>
         </p:nvSpPr>
@@ -9780,7 +9715,7 @@
       </p:sp>
       <p:sp>
         <p:nvSpPr>
-          <p:cNvPr id="111" name="Shape 108"/>
+          <p:cNvPr id="110" name="Shape 108"/>
           <p:cNvSpPr/>
           <p:nvPr/>
         </p:nvSpPr>
@@ -9805,7 +9740,7 @@
       </p:sp>
       <p:sp>
         <p:nvSpPr>
-          <p:cNvPr id="112" name="Text 109"/>
+          <p:cNvPr id="111" name="Text 109"/>
           <p:cNvSpPr txBox="1"/>
           <p:nvPr/>
         </p:nvSpPr>
@@ -9844,7 +9779,7 @@
       </p:sp>
       <p:sp>
         <p:nvSpPr>
-          <p:cNvPr id="113" name="Shape 110"/>
+          <p:cNvPr id="112" name="Shape 110"/>
           <p:cNvSpPr/>
           <p:nvPr/>
         </p:nvSpPr>
@@ -9869,7 +9804,7 @@
       </p:sp>
       <p:sp>
         <p:nvSpPr>
-          <p:cNvPr id="114" name="Text 111"/>
+          <p:cNvPr id="113" name="Text 111"/>
           <p:cNvSpPr txBox="1"/>
           <p:nvPr/>
         </p:nvSpPr>
@@ -9908,7 +9843,7 @@
       </p:sp>
       <p:sp>
         <p:nvSpPr>
-          <p:cNvPr id="115" name="Shape 112"/>
+          <p:cNvPr id="114" name="Shape 112"/>
           <p:cNvSpPr/>
           <p:nvPr/>
         </p:nvSpPr>
@@ -9933,7 +9868,7 @@
       </p:sp>
       <p:sp>
         <p:nvSpPr>
-          <p:cNvPr id="116" name="Text 113"/>
+          <p:cNvPr id="115" name="Text 113"/>
           <p:cNvSpPr txBox="1"/>
           <p:nvPr/>
         </p:nvSpPr>
@@ -9972,7 +9907,7 @@
       </p:sp>
       <p:sp>
         <p:nvSpPr>
-          <p:cNvPr id="117" name="Shape 114"/>
+          <p:cNvPr id="116" name="Shape 114"/>
           <p:cNvSpPr/>
           <p:nvPr/>
         </p:nvSpPr>
@@ -9997,7 +9932,7 @@
       </p:sp>
       <p:sp>
         <p:nvSpPr>
-          <p:cNvPr id="118" name="Text 115"/>
+          <p:cNvPr id="117" name="Text 115"/>
           <p:cNvSpPr txBox="1"/>
           <p:nvPr/>
         </p:nvSpPr>
@@ -10036,7 +9971,7 @@
       </p:sp>
       <p:sp>
         <p:nvSpPr>
-          <p:cNvPr id="119" name="Text 116"/>
+          <p:cNvPr id="118" name="Text 116"/>
           <p:cNvSpPr txBox="1"/>
           <p:nvPr/>
         </p:nvSpPr>
@@ -10075,7 +10010,7 @@
       </p:sp>
       <p:sp>
         <p:nvSpPr>
-          <p:cNvPr id="120" name="Text 117"/>
+          <p:cNvPr id="119" name="Text 117"/>
           <p:cNvSpPr txBox="1"/>
           <p:nvPr/>
         </p:nvSpPr>
@@ -10114,7 +10049,7 @@
       </p:sp>
       <p:sp>
         <p:nvSpPr>
-          <p:cNvPr id="121" name="Text 118"/>
+          <p:cNvPr id="120" name="Text 118"/>
           <p:cNvSpPr txBox="1"/>
           <p:nvPr/>
         </p:nvSpPr>
@@ -10153,7 +10088,7 @@
       </p:sp>
       <p:sp>
         <p:nvSpPr>
-          <p:cNvPr id="122" name="Text 119"/>
+          <p:cNvPr id="121" name="Text 119"/>
           <p:cNvSpPr txBox="1"/>
           <p:nvPr/>
         </p:nvSpPr>
@@ -10192,7 +10127,7 @@
       </p:sp>
       <p:sp>
         <p:nvSpPr>
-          <p:cNvPr id="123" name="Text 120"/>
+          <p:cNvPr id="122" name="Text 120"/>
           <p:cNvSpPr txBox="1"/>
           <p:nvPr/>
         </p:nvSpPr>
@@ -10231,7 +10166,7 @@
       </p:sp>
       <p:sp>
         <p:nvSpPr>
-          <p:cNvPr id="124" name="Text 121"/>
+          <p:cNvPr id="123" name="Text 121"/>
           <p:cNvSpPr txBox="1"/>
           <p:nvPr/>
         </p:nvSpPr>
@@ -10270,7 +10205,7 @@
       </p:sp>
       <p:sp>
         <p:nvSpPr>
-          <p:cNvPr id="125" name="Text 122"/>
+          <p:cNvPr id="124" name="Text 122"/>
           <p:cNvSpPr txBox="1"/>
           <p:nvPr/>
         </p:nvSpPr>
@@ -10309,7 +10244,7 @@
       </p:sp>
       <p:sp>
         <p:nvSpPr>
-          <p:cNvPr id="126" name="Text 123"/>
+          <p:cNvPr id="125" name="Text 123"/>
           <p:cNvSpPr txBox="1"/>
           <p:nvPr/>
         </p:nvSpPr>
@@ -10348,7 +10283,7 @@
       </p:sp>
       <p:sp>
         <p:nvSpPr>
-          <p:cNvPr id="127" name="Text 124"/>
+          <p:cNvPr id="126" name="Text 124"/>
           <p:cNvSpPr txBox="1"/>
           <p:nvPr/>
         </p:nvSpPr>
@@ -10387,7 +10322,7 @@
       </p:sp>
       <p:sp>
         <p:nvSpPr>
-          <p:cNvPr id="128" name="Text 125"/>
+          <p:cNvPr id="127" name="Text 125"/>
           <p:cNvSpPr txBox="1"/>
           <p:nvPr/>
         </p:nvSpPr>
@@ -10426,7 +10361,7 @@
       </p:sp>
       <p:sp>
         <p:nvSpPr>
-          <p:cNvPr id="129" name="Text 126"/>
+          <p:cNvPr id="128" name="Text 126"/>
           <p:cNvSpPr txBox="1"/>
           <p:nvPr/>
         </p:nvSpPr>
@@ -10465,7 +10400,7 @@
       </p:sp>
       <p:sp>
         <p:nvSpPr>
-          <p:cNvPr id="130" name="Text 127"/>
+          <p:cNvPr id="129" name="Text 127"/>
           <p:cNvSpPr txBox="1"/>
           <p:nvPr/>
         </p:nvSpPr>
@@ -10653,7 +10588,7 @@
       </p:sp>
       <p:sp>
         <p:nvSpPr>
-          <p:cNvPr id="6" name="Text 3"/>
+          <p:cNvPr id="5" name="Text 3"/>
           <p:cNvSpPr txBox="1"/>
           <p:nvPr/>
         </p:nvSpPr>
@@ -10692,7 +10627,7 @@
       </p:sp>
       <p:sp>
         <p:nvSpPr>
-          <p:cNvPr id="7" name="Text 4"/>
+          <p:cNvPr id="6" name="Text 4"/>
           <p:cNvSpPr txBox="1"/>
           <p:nvPr/>
         </p:nvSpPr>
@@ -10731,7 +10666,7 @@
       </p:sp>
       <p:sp>
         <p:nvSpPr>
-          <p:cNvPr id="8" name="Text 5"/>
+          <p:cNvPr id="7" name="Text 5"/>
           <p:cNvSpPr txBox="1"/>
           <p:nvPr/>
         </p:nvSpPr>
@@ -10770,7 +10705,7 @@
       </p:sp>
       <p:sp>
         <p:nvSpPr>
-          <p:cNvPr id="9" name="Text 6"/>
+          <p:cNvPr id="8" name="Text 6"/>
           <p:cNvSpPr txBox="1"/>
           <p:nvPr/>
         </p:nvSpPr>
@@ -10809,7 +10744,7 @@
       </p:sp>
       <p:sp>
         <p:nvSpPr>
-          <p:cNvPr id="10" name="Text 7"/>
+          <p:cNvPr id="9" name="Text 7"/>
           <p:cNvSpPr txBox="1"/>
           <p:nvPr/>
         </p:nvSpPr>
@@ -10848,7 +10783,7 @@
       </p:sp>
       <p:sp>
         <p:nvSpPr>
-          <p:cNvPr id="11" name="Text 8"/>
+          <p:cNvPr id="10" name="Text 8"/>
           <p:cNvSpPr txBox="1"/>
           <p:nvPr/>
         </p:nvSpPr>
@@ -10887,7 +10822,7 @@
       </p:sp>
       <p:sp>
         <p:nvSpPr>
-          <p:cNvPr id="12" name="Text 9"/>
+          <p:cNvPr id="11" name="Text 9"/>
           <p:cNvSpPr txBox="1"/>
           <p:nvPr/>
         </p:nvSpPr>
@@ -10926,7 +10861,7 @@
       </p:sp>
       <p:sp>
         <p:nvSpPr>
-          <p:cNvPr id="13" name="Text 10"/>
+          <p:cNvPr id="12" name="Text 10"/>
           <p:cNvSpPr txBox="1"/>
           <p:nvPr/>
         </p:nvSpPr>
@@ -10965,7 +10900,7 @@
       </p:sp>
       <p:sp>
         <p:nvSpPr>
-          <p:cNvPr id="14" name="Text 11"/>
+          <p:cNvPr id="13" name="Text 11"/>
           <p:cNvSpPr txBox="1"/>
           <p:nvPr/>
         </p:nvSpPr>
@@ -11004,7 +10939,7 @@
       </p:sp>
       <p:sp>
         <p:nvSpPr>
-          <p:cNvPr id="15" name="Text 12"/>
+          <p:cNvPr id="14" name="Text 12"/>
           <p:cNvSpPr txBox="1"/>
           <p:nvPr/>
         </p:nvSpPr>
@@ -11043,7 +10978,7 @@
       </p:sp>
       <p:sp>
         <p:nvSpPr>
-          <p:cNvPr id="16" name="Text 13"/>
+          <p:cNvPr id="15" name="Text 13"/>
           <p:cNvSpPr txBox="1"/>
           <p:nvPr/>
         </p:nvSpPr>
@@ -11082,7 +11017,7 @@
       </p:sp>
       <p:sp>
         <p:nvSpPr>
-          <p:cNvPr id="17" name="Text 14"/>
+          <p:cNvPr id="16" name="Text 14"/>
           <p:cNvSpPr txBox="1"/>
           <p:nvPr/>
         </p:nvSpPr>
@@ -11121,7 +11056,7 @@
       </p:sp>
       <p:sp>
         <p:nvSpPr>
-          <p:cNvPr id="18" name="Text 15"/>
+          <p:cNvPr id="17" name="Text 15"/>
           <p:cNvSpPr txBox="1"/>
           <p:nvPr/>
         </p:nvSpPr>
@@ -11160,7 +11095,7 @@
       </p:sp>
       <p:sp>
         <p:nvSpPr>
-          <p:cNvPr id="19" name="Text 16"/>
+          <p:cNvPr id="18" name="Text 16"/>
           <p:cNvSpPr txBox="1"/>
           <p:nvPr/>
         </p:nvSpPr>
@@ -11199,7 +11134,7 @@
       </p:sp>
       <p:sp>
         <p:nvSpPr>
-          <p:cNvPr id="20" name="Shape 17"/>
+          <p:cNvPr id="19" name="Shape 17"/>
           <p:cNvSpPr/>
           <p:nvPr/>
         </p:nvSpPr>
@@ -11224,7 +11159,7 @@
       </p:sp>
       <p:sp>
         <p:nvSpPr>
-          <p:cNvPr id="21" name="Text 18"/>
+          <p:cNvPr id="20" name="Text 18"/>
           <p:cNvSpPr txBox="1"/>
           <p:nvPr/>
         </p:nvSpPr>
@@ -11412,7 +11347,7 @@
       </p:sp>
       <p:pic>
         <p:nvPicPr>
-          <p:cNvPr id="6" name="Image 0" descr="/Users/giovannivasconcelos/Documents/University/tech_summit/attention/slides/assets/eq_mha.png">    </p:cNvPr>
+          <p:cNvPr id="5" name="Image 0" descr="/Users/giovannivasconcelos/Documents/University/tech_summit/attention/slides/assets/eq_mha.png">    </p:cNvPr>
           <p:cNvPicPr>
             <a:picLocks noChangeAspect="1"/>
           </p:cNvPicPr>
@@ -11436,7 +11371,7 @@
       </p:pic>
       <p:sp>
         <p:nvSpPr>
-          <p:cNvPr id="7" name="Shape 3"/>
+          <p:cNvPr id="6" name="Shape 3"/>
           <p:cNvSpPr/>
           <p:nvPr/>
         </p:nvSpPr>
@@ -11461,7 +11396,7 @@
       </p:sp>
       <p:sp>
         <p:nvSpPr>
-          <p:cNvPr id="8" name="Text 4"/>
+          <p:cNvPr id="7" name="Text 4"/>
           <p:cNvSpPr txBox="1"/>
           <p:nvPr/>
         </p:nvSpPr>
@@ -11500,7 +11435,7 @@
       </p:sp>
       <p:sp>
         <p:nvSpPr>
-          <p:cNvPr id="9" name="Shape 5"/>
+          <p:cNvPr id="8" name="Shape 5"/>
           <p:cNvSpPr/>
           <p:nvPr/>
         </p:nvSpPr>
@@ -11524,7 +11459,7 @@
       </p:sp>
       <p:sp>
         <p:nvSpPr>
-          <p:cNvPr id="10" name="Shape 6"/>
+          <p:cNvPr id="9" name="Shape 6"/>
           <p:cNvSpPr/>
           <p:nvPr/>
         </p:nvSpPr>
@@ -11549,7 +11484,7 @@
       </p:sp>
       <p:sp>
         <p:nvSpPr>
-          <p:cNvPr id="11" name="Text 7"/>
+          <p:cNvPr id="10" name="Text 7"/>
           <p:cNvSpPr txBox="1"/>
           <p:nvPr/>
         </p:nvSpPr>
@@ -11588,7 +11523,7 @@
       </p:sp>
       <p:sp>
         <p:nvSpPr>
-          <p:cNvPr id="12" name="Shape 8"/>
+          <p:cNvPr id="11" name="Shape 8"/>
           <p:cNvSpPr/>
           <p:nvPr/>
         </p:nvSpPr>
@@ -11612,7 +11547,7 @@
       </p:sp>
       <p:sp>
         <p:nvSpPr>
-          <p:cNvPr id="13" name="Shape 9"/>
+          <p:cNvPr id="12" name="Shape 9"/>
           <p:cNvSpPr/>
           <p:nvPr/>
         </p:nvSpPr>
@@ -11636,7 +11571,7 @@
       </p:sp>
       <p:sp>
         <p:nvSpPr>
-          <p:cNvPr id="14" name="Shape 10"/>
+          <p:cNvPr id="13" name="Shape 10"/>
           <p:cNvSpPr/>
           <p:nvPr/>
         </p:nvSpPr>
@@ -11661,7 +11596,7 @@
       </p:sp>
       <p:sp>
         <p:nvSpPr>
-          <p:cNvPr id="15" name="Text 11"/>
+          <p:cNvPr id="14" name="Text 11"/>
           <p:cNvSpPr txBox="1"/>
           <p:nvPr/>
         </p:nvSpPr>
@@ -11700,7 +11635,7 @@
       </p:sp>
       <p:sp>
         <p:nvSpPr>
-          <p:cNvPr id="16" name="Shape 12"/>
+          <p:cNvPr id="15" name="Shape 12"/>
           <p:cNvSpPr/>
           <p:nvPr/>
         </p:nvSpPr>
@@ -11724,7 +11659,7 @@
       </p:sp>
       <p:sp>
         <p:nvSpPr>
-          <p:cNvPr id="17" name="Shape 13"/>
+          <p:cNvPr id="16" name="Shape 13"/>
           <p:cNvSpPr/>
           <p:nvPr/>
         </p:nvSpPr>
@@ -11748,7 +11683,7 @@
       </p:sp>
       <p:sp>
         <p:nvSpPr>
-          <p:cNvPr id="18" name="Shape 14"/>
+          <p:cNvPr id="17" name="Shape 14"/>
           <p:cNvSpPr/>
           <p:nvPr/>
         </p:nvSpPr>
@@ -11773,7 +11708,7 @@
       </p:sp>
       <p:sp>
         <p:nvSpPr>
-          <p:cNvPr id="19" name="Text 15"/>
+          <p:cNvPr id="18" name="Text 15"/>
           <p:cNvSpPr txBox="1"/>
           <p:nvPr/>
         </p:nvSpPr>
@@ -11812,7 +11747,7 @@
       </p:sp>
       <p:sp>
         <p:nvSpPr>
-          <p:cNvPr id="20" name="Shape 16"/>
+          <p:cNvPr id="19" name="Shape 16"/>
           <p:cNvSpPr/>
           <p:nvPr/>
         </p:nvSpPr>
@@ -11836,7 +11771,7 @@
       </p:sp>
       <p:sp>
         <p:nvSpPr>
-          <p:cNvPr id="21" name="Shape 17"/>
+          <p:cNvPr id="20" name="Shape 17"/>
           <p:cNvSpPr/>
           <p:nvPr/>
         </p:nvSpPr>
@@ -11860,7 +11795,7 @@
       </p:sp>
       <p:sp>
         <p:nvSpPr>
-          <p:cNvPr id="22" name="Shape 18"/>
+          <p:cNvPr id="21" name="Shape 18"/>
           <p:cNvSpPr/>
           <p:nvPr/>
         </p:nvSpPr>
@@ -11885,7 +11820,7 @@
       </p:sp>
       <p:sp>
         <p:nvSpPr>
-          <p:cNvPr id="23" name="Text 19"/>
+          <p:cNvPr id="22" name="Text 19"/>
           <p:cNvSpPr txBox="1"/>
           <p:nvPr/>
         </p:nvSpPr>
@@ -11924,7 +11859,7 @@
       </p:sp>
       <p:sp>
         <p:nvSpPr>
-          <p:cNvPr id="24" name="Shape 20"/>
+          <p:cNvPr id="23" name="Shape 20"/>
           <p:cNvSpPr/>
           <p:nvPr/>
         </p:nvSpPr>
@@ -11948,7 +11883,7 @@
       </p:sp>
       <p:sp>
         <p:nvSpPr>
-          <p:cNvPr id="25" name="Text 21"/>
+          <p:cNvPr id="24" name="Text 21"/>
           <p:cNvSpPr txBox="1"/>
           <p:nvPr/>
         </p:nvSpPr>
@@ -11987,7 +11922,7 @@
       </p:sp>
       <p:sp>
         <p:nvSpPr>
-          <p:cNvPr id="26" name="Shape 22"/>
+          <p:cNvPr id="25" name="Shape 22"/>
           <p:cNvSpPr/>
           <p:nvPr/>
         </p:nvSpPr>
@@ -12012,7 +11947,7 @@
       </p:sp>
       <p:sp>
         <p:nvSpPr>
-          <p:cNvPr id="27" name="Text 23"/>
+          <p:cNvPr id="26" name="Text 23"/>
           <p:cNvSpPr txBox="1"/>
           <p:nvPr/>
         </p:nvSpPr>
@@ -12051,7 +11986,7 @@
       </p:sp>
       <p:sp>
         <p:nvSpPr>
-          <p:cNvPr id="28" name="Shape 24"/>
+          <p:cNvPr id="27" name="Shape 24"/>
           <p:cNvSpPr/>
           <p:nvPr/>
         </p:nvSpPr>
@@ -12075,7 +12010,7 @@
       </p:sp>
       <p:sp>
         <p:nvSpPr>
-          <p:cNvPr id="29" name="Shape 25"/>
+          <p:cNvPr id="28" name="Shape 25"/>
           <p:cNvSpPr/>
           <p:nvPr/>
         </p:nvSpPr>
@@ -12100,7 +12035,7 @@
       </p:sp>
       <p:sp>
         <p:nvSpPr>
-          <p:cNvPr id="30" name="Text 26"/>
+          <p:cNvPr id="29" name="Text 26"/>
           <p:cNvSpPr txBox="1"/>
           <p:nvPr/>
         </p:nvSpPr>
@@ -12139,7 +12074,7 @@
       </p:sp>
       <p:sp>
         <p:nvSpPr>
-          <p:cNvPr id="31" name="Shape 27"/>
+          <p:cNvPr id="30" name="Shape 27"/>
           <p:cNvSpPr/>
           <p:nvPr/>
         </p:nvSpPr>
@@ -12163,7 +12098,7 @@
       </p:sp>
       <p:sp>
         <p:nvSpPr>
-          <p:cNvPr id="32" name="Shape 28"/>
+          <p:cNvPr id="31" name="Shape 28"/>
           <p:cNvSpPr/>
           <p:nvPr/>
         </p:nvSpPr>
@@ -12188,7 +12123,7 @@
       </p:sp>
       <p:sp>
         <p:nvSpPr>
-          <p:cNvPr id="33" name="Text 29"/>
+          <p:cNvPr id="32" name="Text 29"/>
           <p:cNvSpPr txBox="1"/>
           <p:nvPr/>
         </p:nvSpPr>
@@ -12227,7 +12162,7 @@
       </p:sp>
       <p:sp>
         <p:nvSpPr>
-          <p:cNvPr id="34" name="Text 30"/>
+          <p:cNvPr id="33" name="Text 30"/>
           <p:cNvSpPr txBox="1"/>
           <p:nvPr/>
         </p:nvSpPr>
@@ -12415,7 +12350,7 @@
       </p:sp>
       <p:pic>
         <p:nvPicPr>
-          <p:cNvPr id="6" name="Image 0" descr="/Users/giovannivasconcelos/Documents/University/tech_summit/attention/slides/assets/eq_pe.png">    </p:cNvPr>
+          <p:cNvPr id="5" name="Image 0" descr="/Users/giovannivasconcelos/Documents/University/tech_summit/attention/slides/assets/eq_pe.png">    </p:cNvPr>
           <p:cNvPicPr>
             <a:picLocks noChangeAspect="1"/>
           </p:cNvPicPr>
@@ -12439,7 +12374,7 @@
       </p:pic>
       <p:sp>
         <p:nvSpPr>
-          <p:cNvPr id="7" name="Text 3"/>
+          <p:cNvPr id="6" name="Text 3"/>
           <p:cNvSpPr txBox="1"/>
           <p:nvPr/>
         </p:nvSpPr>
@@ -12478,7 +12413,7 @@
       </p:sp>
       <p:sp>
         <p:nvSpPr>
-          <p:cNvPr id="8" name="Text 4"/>
+          <p:cNvPr id="7" name="Text 4"/>
           <p:cNvSpPr txBox="1"/>
           <p:nvPr/>
         </p:nvSpPr>
@@ -12517,7 +12452,7 @@
       </p:sp>
       <p:pic>
         <p:nvPicPr>
-          <p:cNvPr id="9" name="Image 1" descr="/Users/giovannivasconcelos/Documents/University/tech_summit/attention/slides/assets/ch_pe.png">    </p:cNvPr>
+          <p:cNvPr id="8" name="Image 1" descr="/Users/giovannivasconcelos/Documents/University/tech_summit/attention/slides/assets/ch_pe.png">    </p:cNvPr>
           <p:cNvPicPr>
             <a:picLocks noChangeAspect="1"/>
           </p:cNvPicPr>
@@ -12690,7 +12625,7 @@
       </p:sp>
       <p:pic>
         <p:nvPicPr>
-          <p:cNvPr id="6" name="Image 0" descr="/Users/giovannivasconcelos/Documents/University/tech_summit/attention/slides/assets/eq_block.png">    </p:cNvPr>
+          <p:cNvPr id="5" name="Image 0" descr="/Users/giovannivasconcelos/Documents/University/tech_summit/attention/slides/assets/eq_block.png">    </p:cNvPr>
           <p:cNvPicPr>
             <a:picLocks noChangeAspect="1"/>
           </p:cNvPicPr>
@@ -12714,7 +12649,7 @@
       </p:pic>
       <p:sp>
         <p:nvSpPr>
-          <p:cNvPr id="7" name="Text 3"/>
+          <p:cNvPr id="6" name="Text 3"/>
           <p:cNvSpPr txBox="1"/>
           <p:nvPr/>
         </p:nvSpPr>
@@ -12753,7 +12688,7 @@
       </p:sp>
       <p:sp>
         <p:nvSpPr>
-          <p:cNvPr id="8" name="Shape 4"/>
+          <p:cNvPr id="7" name="Shape 4"/>
           <p:cNvSpPr/>
           <p:nvPr/>
         </p:nvSpPr>
@@ -12777,7 +12712,7 @@
       </p:sp>
       <p:sp>
         <p:nvSpPr>
-          <p:cNvPr id="9" name="Shape 5"/>
+          <p:cNvPr id="8" name="Shape 5"/>
           <p:cNvSpPr/>
           <p:nvPr/>
         </p:nvSpPr>
@@ -12802,7 +12737,7 @@
       </p:sp>
       <p:sp>
         <p:nvSpPr>
-          <p:cNvPr id="10" name="Text 6"/>
+          <p:cNvPr id="9" name="Text 6"/>
           <p:cNvSpPr txBox="1"/>
           <p:nvPr/>
         </p:nvSpPr>
@@ -12841,7 +12776,7 @@
       </p:sp>
       <p:sp>
         <p:nvSpPr>
-          <p:cNvPr id="11" name="Shape 7"/>
+          <p:cNvPr id="10" name="Shape 7"/>
           <p:cNvSpPr/>
           <p:nvPr/>
         </p:nvSpPr>
@@ -12865,7 +12800,7 @@
       </p:sp>
       <p:sp>
         <p:nvSpPr>
-          <p:cNvPr id="12" name="Shape 8"/>
+          <p:cNvPr id="11" name="Shape 8"/>
           <p:cNvSpPr/>
           <p:nvPr/>
         </p:nvSpPr>
@@ -12890,7 +12825,7 @@
       </p:sp>
       <p:sp>
         <p:nvSpPr>
-          <p:cNvPr id="13" name="Text 9"/>
+          <p:cNvPr id="12" name="Text 9"/>
           <p:cNvSpPr txBox="1"/>
           <p:nvPr/>
         </p:nvSpPr>
@@ -12946,7 +12881,7 @@
       </p:sp>
       <p:sp>
         <p:nvSpPr>
-          <p:cNvPr id="14" name="Shape 10"/>
+          <p:cNvPr id="13" name="Shape 10"/>
           <p:cNvSpPr/>
           <p:nvPr/>
         </p:nvSpPr>
@@ -12970,7 +12905,7 @@
       </p:sp>
       <p:sp>
         <p:nvSpPr>
-          <p:cNvPr id="15" name="Shape 11"/>
+          <p:cNvPr id="14" name="Shape 11"/>
           <p:cNvSpPr/>
           <p:nvPr/>
         </p:nvSpPr>
@@ -12995,7 +12930,7 @@
       </p:sp>
       <p:sp>
         <p:nvSpPr>
-          <p:cNvPr id="16" name="Text 12"/>
+          <p:cNvPr id="15" name="Text 12"/>
           <p:cNvSpPr txBox="1"/>
           <p:nvPr/>
         </p:nvSpPr>
@@ -13034,7 +12969,7 @@
       </p:sp>
       <p:sp>
         <p:nvSpPr>
-          <p:cNvPr id="17" name="Shape 13"/>
+          <p:cNvPr id="16" name="Shape 13"/>
           <p:cNvSpPr/>
           <p:nvPr/>
         </p:nvSpPr>
@@ -13058,7 +12993,7 @@
       </p:sp>
       <p:sp>
         <p:nvSpPr>
-          <p:cNvPr id="18" name="Shape 14"/>
+          <p:cNvPr id="17" name="Shape 14"/>
           <p:cNvSpPr/>
           <p:nvPr/>
         </p:nvSpPr>
@@ -13083,7 +13018,7 @@
       </p:sp>
       <p:sp>
         <p:nvSpPr>
-          <p:cNvPr id="19" name="Text 15"/>
+          <p:cNvPr id="18" name="Text 15"/>
           <p:cNvSpPr txBox="1"/>
           <p:nvPr/>
         </p:nvSpPr>
@@ -13122,7 +13057,7 @@
       </p:sp>
       <p:sp>
         <p:nvSpPr>
-          <p:cNvPr id="20" name="Shape 16"/>
+          <p:cNvPr id="19" name="Shape 16"/>
           <p:cNvSpPr/>
           <p:nvPr/>
         </p:nvSpPr>
@@ -13146,7 +13081,7 @@
       </p:sp>
       <p:sp>
         <p:nvSpPr>
-          <p:cNvPr id="21" name="Shape 17"/>
+          <p:cNvPr id="20" name="Shape 17"/>
           <p:cNvSpPr/>
           <p:nvPr/>
         </p:nvSpPr>
@@ -13171,7 +13106,7 @@
       </p:sp>
       <p:sp>
         <p:nvSpPr>
-          <p:cNvPr id="22" name="Text 18"/>
+          <p:cNvPr id="21" name="Text 18"/>
           <p:cNvSpPr txBox="1"/>
           <p:nvPr/>
         </p:nvSpPr>
@@ -13210,7 +13145,7 @@
       </p:sp>
       <p:sp>
         <p:nvSpPr>
-          <p:cNvPr id="23" name="Shape 19"/>
+          <p:cNvPr id="22" name="Shape 19"/>
           <p:cNvSpPr/>
           <p:nvPr/>
         </p:nvSpPr>
@@ -13234,7 +13169,7 @@
       </p:sp>
       <p:sp>
         <p:nvSpPr>
-          <p:cNvPr id="24" name="Shape 20"/>
+          <p:cNvPr id="23" name="Shape 20"/>
           <p:cNvSpPr/>
           <p:nvPr/>
         </p:nvSpPr>
@@ -13259,7 +13194,7 @@
       </p:sp>
       <p:sp>
         <p:nvSpPr>
-          <p:cNvPr id="25" name="Text 21"/>
+          <p:cNvPr id="24" name="Text 21"/>
           <p:cNvSpPr txBox="1"/>
           <p:nvPr/>
         </p:nvSpPr>
@@ -13298,7 +13233,7 @@
       </p:sp>
       <p:sp>
         <p:nvSpPr>
-          <p:cNvPr id="26" name="Shape 22"/>
+          <p:cNvPr id="25" name="Shape 22"/>
           <p:cNvSpPr/>
           <p:nvPr/>
         </p:nvSpPr>
@@ -13322,7 +13257,7 @@
       </p:sp>
       <p:sp>
         <p:nvSpPr>
-          <p:cNvPr id="27" name="Text 23"/>
+          <p:cNvPr id="26" name="Text 23"/>
           <p:cNvSpPr txBox="1"/>
           <p:nvPr/>
         </p:nvSpPr>
@@ -13361,7 +13296,7 @@
       </p:sp>
       <p:sp>
         <p:nvSpPr>
-          <p:cNvPr id="28" name="Shape 24"/>
+          <p:cNvPr id="27" name="Shape 24"/>
           <p:cNvSpPr/>
           <p:nvPr/>
         </p:nvSpPr>
@@ -13384,7 +13319,7 @@
       </p:sp>
       <p:sp>
         <p:nvSpPr>
-          <p:cNvPr id="29" name="Shape 25"/>
+          <p:cNvPr id="28" name="Shape 25"/>
           <p:cNvSpPr/>
           <p:nvPr/>
         </p:nvSpPr>
@@ -13407,7 +13342,7 @@
       </p:sp>
       <p:sp>
         <p:nvSpPr>
-          <p:cNvPr id="30" name="Shape 26"/>
+          <p:cNvPr id="29" name="Shape 26"/>
           <p:cNvSpPr/>
           <p:nvPr/>
         </p:nvSpPr>
@@ -13431,7 +13366,7 @@
       </p:sp>
       <p:sp>
         <p:nvSpPr>
-          <p:cNvPr id="31" name="Shape 27"/>
+          <p:cNvPr id="30" name="Shape 27"/>
           <p:cNvSpPr/>
           <p:nvPr/>
         </p:nvSpPr>
@@ -13454,7 +13389,7 @@
       </p:sp>
       <p:sp>
         <p:nvSpPr>
-          <p:cNvPr id="32" name="Shape 28"/>
+          <p:cNvPr id="31" name="Shape 28"/>
           <p:cNvSpPr/>
           <p:nvPr/>
         </p:nvSpPr>
@@ -13477,7 +13412,7 @@
       </p:sp>
       <p:sp>
         <p:nvSpPr>
-          <p:cNvPr id="33" name="Shape 29"/>
+          <p:cNvPr id="32" name="Shape 29"/>
           <p:cNvSpPr/>
           <p:nvPr/>
         </p:nvSpPr>
@@ -13501,7 +13436,7 @@
       </p:sp>
       <p:sp>
         <p:nvSpPr>
-          <p:cNvPr id="34" name="Text 30"/>
+          <p:cNvPr id="33" name="Text 30"/>
           <p:cNvSpPr txBox="1"/>
           <p:nvPr/>
         </p:nvSpPr>
@@ -13540,7 +13475,7 @@
       </p:sp>
       <p:sp>
         <p:nvSpPr>
-          <p:cNvPr id="35" name="Text 31"/>
+          <p:cNvPr id="34" name="Text 31"/>
           <p:cNvSpPr txBox="1"/>
           <p:nvPr/>
         </p:nvSpPr>
@@ -13579,7 +13514,7 @@
       </p:sp>
       <p:sp>
         <p:nvSpPr>
-          <p:cNvPr id="36" name="Text 32"/>
+          <p:cNvPr id="35" name="Text 32"/>
           <p:cNvSpPr txBox="1"/>
           <p:nvPr/>
         </p:nvSpPr>
@@ -13618,7 +13553,7 @@
       </p:sp>
       <p:sp>
         <p:nvSpPr>
-          <p:cNvPr id="37" name="Text 33"/>
+          <p:cNvPr id="36" name="Text 33"/>
           <p:cNvSpPr txBox="1"/>
           <p:nvPr/>
         </p:nvSpPr>
@@ -13657,7 +13592,7 @@
       </p:sp>
       <p:sp>
         <p:nvSpPr>
-          <p:cNvPr id="38" name="Text 34"/>
+          <p:cNvPr id="37" name="Text 34"/>
           <p:cNvSpPr txBox="1"/>
           <p:nvPr/>
         </p:nvSpPr>
@@ -13696,7 +13631,7 @@
       </p:sp>
       <p:sp>
         <p:nvSpPr>
-          <p:cNvPr id="39" name="Text 35"/>
+          <p:cNvPr id="38" name="Text 35"/>
           <p:cNvSpPr txBox="1"/>
           <p:nvPr/>
         </p:nvSpPr>
@@ -13735,7 +13670,7 @@
       </p:sp>
       <p:sp>
         <p:nvSpPr>
-          <p:cNvPr id="40" name="Text 36"/>
+          <p:cNvPr id="39" name="Text 36"/>
           <p:cNvSpPr txBox="1"/>
           <p:nvPr/>
         </p:nvSpPr>
@@ -13923,7 +13858,7 @@
       </p:sp>
       <p:sp>
         <p:nvSpPr>
-          <p:cNvPr id="6" name="Text 3"/>
+          <p:cNvPr id="5" name="Text 3"/>
           <p:cNvSpPr txBox="1"/>
           <p:nvPr/>
         </p:nvSpPr>
@@ -13962,7 +13897,7 @@
       </p:sp>
       <p:sp>
         <p:nvSpPr>
-          <p:cNvPr id="7" name="Shape 4"/>
+          <p:cNvPr id="6" name="Shape 4"/>
           <p:cNvSpPr/>
           <p:nvPr/>
         </p:nvSpPr>
@@ -13987,7 +13922,7 @@
       </p:sp>
       <p:sp>
         <p:nvSpPr>
-          <p:cNvPr id="8" name="Shape 5"/>
+          <p:cNvPr id="7" name="Shape 5"/>
           <p:cNvSpPr/>
           <p:nvPr/>
         </p:nvSpPr>
@@ -14012,7 +13947,7 @@
       </p:sp>
       <p:sp>
         <p:nvSpPr>
-          <p:cNvPr id="9" name="Text 6"/>
+          <p:cNvPr id="8" name="Text 6"/>
           <p:cNvSpPr txBox="1"/>
           <p:nvPr/>
         </p:nvSpPr>
@@ -14051,7 +13986,7 @@
       </p:sp>
       <p:sp>
         <p:nvSpPr>
-          <p:cNvPr id="10" name="Shape 7"/>
+          <p:cNvPr id="9" name="Shape 7"/>
           <p:cNvSpPr/>
           <p:nvPr/>
         </p:nvSpPr>
@@ -14076,7 +14011,7 @@
       </p:sp>
       <p:sp>
         <p:nvSpPr>
-          <p:cNvPr id="11" name="Text 8"/>
+          <p:cNvPr id="10" name="Text 8"/>
           <p:cNvSpPr txBox="1"/>
           <p:nvPr/>
         </p:nvSpPr>
@@ -14115,7 +14050,7 @@
       </p:sp>
       <p:sp>
         <p:nvSpPr>
-          <p:cNvPr id="12" name="Text 9"/>
+          <p:cNvPr id="11" name="Text 9"/>
           <p:cNvSpPr txBox="1"/>
           <p:nvPr/>
         </p:nvSpPr>
@@ -14154,7 +14089,7 @@
       </p:sp>
       <p:sp>
         <p:nvSpPr>
-          <p:cNvPr id="13" name="Text 10"/>
+          <p:cNvPr id="12" name="Text 10"/>
           <p:cNvSpPr txBox="1"/>
           <p:nvPr/>
         </p:nvSpPr>
@@ -14193,7 +14128,7 @@
       </p:sp>
       <p:sp>
         <p:nvSpPr>
-          <p:cNvPr id="14" name="Shape 11"/>
+          <p:cNvPr id="13" name="Shape 11"/>
           <p:cNvSpPr/>
           <p:nvPr/>
         </p:nvSpPr>
@@ -14218,7 +14153,7 @@
       </p:sp>
       <p:sp>
         <p:nvSpPr>
-          <p:cNvPr id="15" name="Shape 12"/>
+          <p:cNvPr id="14" name="Shape 12"/>
           <p:cNvSpPr/>
           <p:nvPr/>
         </p:nvSpPr>
@@ -14243,7 +14178,7 @@
       </p:sp>
       <p:sp>
         <p:nvSpPr>
-          <p:cNvPr id="16" name="Text 13"/>
+          <p:cNvPr id="15" name="Text 13"/>
           <p:cNvSpPr txBox="1"/>
           <p:nvPr/>
         </p:nvSpPr>
@@ -14282,7 +14217,7 @@
       </p:sp>
       <p:sp>
         <p:nvSpPr>
-          <p:cNvPr id="17" name="Shape 14"/>
+          <p:cNvPr id="16" name="Shape 14"/>
           <p:cNvSpPr/>
           <p:nvPr/>
         </p:nvSpPr>
@@ -14307,7 +14242,7 @@
       </p:sp>
       <p:sp>
         <p:nvSpPr>
-          <p:cNvPr id="18" name="Text 15"/>
+          <p:cNvPr id="17" name="Text 15"/>
           <p:cNvSpPr txBox="1"/>
           <p:nvPr/>
         </p:nvSpPr>
@@ -14346,7 +14281,7 @@
       </p:sp>
       <p:sp>
         <p:nvSpPr>
-          <p:cNvPr id="19" name="Shape 16"/>
+          <p:cNvPr id="18" name="Shape 16"/>
           <p:cNvSpPr/>
           <p:nvPr/>
         </p:nvSpPr>
@@ -14371,7 +14306,7 @@
       </p:sp>
       <p:sp>
         <p:nvSpPr>
-          <p:cNvPr id="20" name="Text 17"/>
+          <p:cNvPr id="19" name="Text 17"/>
           <p:cNvSpPr txBox="1"/>
           <p:nvPr/>
         </p:nvSpPr>
@@ -14410,7 +14345,7 @@
       </p:sp>
       <p:sp>
         <p:nvSpPr>
-          <p:cNvPr id="21" name="Text 18"/>
+          <p:cNvPr id="20" name="Text 18"/>
           <p:cNvSpPr txBox="1"/>
           <p:nvPr/>
         </p:nvSpPr>
@@ -14449,7 +14384,7 @@
       </p:sp>
       <p:sp>
         <p:nvSpPr>
-          <p:cNvPr id="22" name="Shape 19"/>
+          <p:cNvPr id="21" name="Shape 19"/>
           <p:cNvSpPr/>
           <p:nvPr/>
         </p:nvSpPr>
@@ -14473,7 +14408,7 @@
       </p:sp>
       <p:sp>
         <p:nvSpPr>
-          <p:cNvPr id="23" name="Text 20"/>
+          <p:cNvPr id="22" name="Text 20"/>
           <p:cNvSpPr txBox="1"/>
           <p:nvPr/>
         </p:nvSpPr>
@@ -14512,7 +14447,7 @@
       </p:sp>
       <p:sp>
         <p:nvSpPr>
-          <p:cNvPr id="24" name="Text 21"/>
+          <p:cNvPr id="23" name="Text 21"/>
           <p:cNvSpPr txBox="1"/>
           <p:nvPr/>
         </p:nvSpPr>
@@ -14551,7 +14486,7 @@
       </p:sp>
       <p:sp>
         <p:nvSpPr>
-          <p:cNvPr id="25" name="Text 22"/>
+          <p:cNvPr id="24" name="Text 22"/>
           <p:cNvSpPr txBox="1"/>
           <p:nvPr/>
         </p:nvSpPr>
@@ -14590,7 +14525,7 @@
       </p:sp>
       <p:sp>
         <p:nvSpPr>
-          <p:cNvPr id="26" name="Text 23"/>
+          <p:cNvPr id="25" name="Text 23"/>
           <p:cNvSpPr txBox="1"/>
           <p:nvPr/>
         </p:nvSpPr>
@@ -14629,7 +14564,7 @@
       </p:sp>
       <p:sp>
         <p:nvSpPr>
-          <p:cNvPr id="27" name="Text 24"/>
+          <p:cNvPr id="26" name="Text 24"/>
           <p:cNvSpPr txBox="1"/>
           <p:nvPr/>
         </p:nvSpPr>
@@ -14668,7 +14603,7 @@
       </p:sp>
       <p:sp>
         <p:nvSpPr>
-          <p:cNvPr id="28" name="Shape 25"/>
+          <p:cNvPr id="27" name="Shape 25"/>
           <p:cNvSpPr/>
           <p:nvPr/>
         </p:nvSpPr>
@@ -14693,7 +14628,7 @@
       </p:sp>
       <p:sp>
         <p:nvSpPr>
-          <p:cNvPr id="29" name="Text 26"/>
+          <p:cNvPr id="28" name="Text 26"/>
           <p:cNvSpPr txBox="1"/>
           <p:nvPr/>
         </p:nvSpPr>
@@ -14835,7 +14770,7 @@
       </p:sp>
       <p:sp>
         <p:nvSpPr>
-          <p:cNvPr id="30" name="Text 27"/>
+          <p:cNvPr id="29" name="Text 27"/>
           <p:cNvSpPr txBox="1"/>
           <p:nvPr/>
         </p:nvSpPr>
@@ -16115,7 +16050,7 @@
       </p:graphicFrame>
       <p:sp>
         <p:nvSpPr>
-          <p:cNvPr id="7" name="Text 3"/>
+          <p:cNvPr id="6" name="Text 3"/>
           <p:cNvSpPr txBox="1"/>
           <p:nvPr/>
         </p:nvSpPr>
@@ -16303,7 +16238,7 @@
       </p:sp>
       <p:sp>
         <p:nvSpPr>
-          <p:cNvPr id="6" name="Shape 3"/>
+          <p:cNvPr id="5" name="Shape 3"/>
           <p:cNvSpPr/>
           <p:nvPr/>
         </p:nvSpPr>
@@ -16328,7 +16263,7 @@
       </p:sp>
       <p:sp>
         <p:nvSpPr>
-          <p:cNvPr id="7" name="Text 4"/>
+          <p:cNvPr id="6" name="Text 4"/>
           <p:cNvSpPr txBox="1"/>
           <p:nvPr/>
         </p:nvSpPr>
@@ -16367,7 +16302,7 @@
       </p:sp>
       <p:sp>
         <p:nvSpPr>
-          <p:cNvPr id="8" name="Text 5"/>
+          <p:cNvPr id="7" name="Text 5"/>
           <p:cNvSpPr txBox="1"/>
           <p:nvPr/>
         </p:nvSpPr>
@@ -16406,7 +16341,7 @@
       </p:sp>
       <p:sp>
         <p:nvSpPr>
-          <p:cNvPr id="9" name="Shape 6"/>
+          <p:cNvPr id="8" name="Shape 6"/>
           <p:cNvSpPr/>
           <p:nvPr/>
         </p:nvSpPr>
@@ -16430,7 +16365,7 @@
       </p:sp>
       <p:sp>
         <p:nvSpPr>
-          <p:cNvPr id="10" name="Shape 7"/>
+          <p:cNvPr id="9" name="Shape 7"/>
           <p:cNvSpPr/>
           <p:nvPr/>
         </p:nvSpPr>
@@ -16455,7 +16390,7 @@
       </p:sp>
       <p:sp>
         <p:nvSpPr>
-          <p:cNvPr id="11" name="Text 8"/>
+          <p:cNvPr id="10" name="Text 8"/>
           <p:cNvSpPr txBox="1"/>
           <p:nvPr/>
         </p:nvSpPr>
@@ -16511,7 +16446,7 @@
       </p:sp>
       <p:sp>
         <p:nvSpPr>
-          <p:cNvPr id="12" name="Text 9"/>
+          <p:cNvPr id="11" name="Text 9"/>
           <p:cNvSpPr txBox="1"/>
           <p:nvPr/>
         </p:nvSpPr>
@@ -16550,7 +16485,7 @@
       </p:sp>
       <p:sp>
         <p:nvSpPr>
-          <p:cNvPr id="13" name="Shape 10"/>
+          <p:cNvPr id="12" name="Shape 10"/>
           <p:cNvSpPr/>
           <p:nvPr/>
         </p:nvSpPr>
@@ -16574,7 +16509,7 @@
       </p:sp>
       <p:sp>
         <p:nvSpPr>
-          <p:cNvPr id="14" name="Shape 11"/>
+          <p:cNvPr id="13" name="Shape 11"/>
           <p:cNvSpPr/>
           <p:nvPr/>
         </p:nvSpPr>
@@ -16599,7 +16534,7 @@
       </p:sp>
       <p:sp>
         <p:nvSpPr>
-          <p:cNvPr id="15" name="Text 12"/>
+          <p:cNvPr id="14" name="Text 12"/>
           <p:cNvSpPr txBox="1"/>
           <p:nvPr/>
         </p:nvSpPr>
@@ -16638,7 +16573,7 @@
       </p:sp>
       <p:sp>
         <p:nvSpPr>
-          <p:cNvPr id="16" name="Text 13"/>
+          <p:cNvPr id="15" name="Text 13"/>
           <p:cNvSpPr txBox="1"/>
           <p:nvPr/>
         </p:nvSpPr>
@@ -16677,7 +16612,7 @@
       </p:sp>
       <p:sp>
         <p:nvSpPr>
-          <p:cNvPr id="17" name="Shape 14"/>
+          <p:cNvPr id="16" name="Shape 14"/>
           <p:cNvSpPr/>
           <p:nvPr/>
         </p:nvSpPr>
@@ -16701,7 +16636,7 @@
       </p:sp>
       <p:sp>
         <p:nvSpPr>
-          <p:cNvPr id="18" name="Shape 15"/>
+          <p:cNvPr id="17" name="Shape 15"/>
           <p:cNvSpPr/>
           <p:nvPr/>
         </p:nvSpPr>
@@ -16726,7 +16661,7 @@
       </p:sp>
       <p:sp>
         <p:nvSpPr>
-          <p:cNvPr id="19" name="Text 16"/>
+          <p:cNvPr id="18" name="Text 16"/>
           <p:cNvSpPr txBox="1"/>
           <p:nvPr/>
         </p:nvSpPr>
@@ -16765,7 +16700,7 @@
       </p:sp>
       <p:sp>
         <p:nvSpPr>
-          <p:cNvPr id="20" name="Text 17"/>
+          <p:cNvPr id="19" name="Text 17"/>
           <p:cNvSpPr txBox="1"/>
           <p:nvPr/>
         </p:nvSpPr>
@@ -16804,7 +16739,7 @@
       </p:sp>
       <p:sp>
         <p:nvSpPr>
-          <p:cNvPr id="21" name="Shape 18"/>
+          <p:cNvPr id="20" name="Shape 18"/>
           <p:cNvSpPr/>
           <p:nvPr/>
         </p:nvSpPr>
@@ -16828,7 +16763,7 @@
       </p:sp>
       <p:sp>
         <p:nvSpPr>
-          <p:cNvPr id="22" name="Shape 19"/>
+          <p:cNvPr id="21" name="Shape 19"/>
           <p:cNvSpPr/>
           <p:nvPr/>
         </p:nvSpPr>
@@ -16853,7 +16788,7 @@
       </p:sp>
       <p:sp>
         <p:nvSpPr>
-          <p:cNvPr id="23" name="Text 20"/>
+          <p:cNvPr id="22" name="Text 20"/>
           <p:cNvSpPr txBox="1"/>
           <p:nvPr/>
         </p:nvSpPr>
@@ -16892,7 +16827,7 @@
       </p:sp>
       <p:sp>
         <p:nvSpPr>
-          <p:cNvPr id="24" name="Text 21"/>
+          <p:cNvPr id="23" name="Text 21"/>
           <p:cNvSpPr txBox="1"/>
           <p:nvPr/>
         </p:nvSpPr>
@@ -16931,7 +16866,7 @@
       </p:sp>
       <p:sp>
         <p:nvSpPr>
-          <p:cNvPr id="25" name="Shape 22"/>
+          <p:cNvPr id="24" name="Shape 22"/>
           <p:cNvSpPr/>
           <p:nvPr/>
         </p:nvSpPr>
@@ -16955,7 +16890,7 @@
       </p:sp>
       <p:sp>
         <p:nvSpPr>
-          <p:cNvPr id="26" name="Shape 23"/>
+          <p:cNvPr id="25" name="Shape 23"/>
           <p:cNvSpPr/>
           <p:nvPr/>
         </p:nvSpPr>
@@ -16980,7 +16915,7 @@
       </p:sp>
       <p:sp>
         <p:nvSpPr>
-          <p:cNvPr id="27" name="Text 24"/>
+          <p:cNvPr id="26" name="Text 24"/>
           <p:cNvSpPr txBox="1"/>
           <p:nvPr/>
         </p:nvSpPr>
@@ -17019,7 +16954,7 @@
       </p:sp>
       <p:sp>
         <p:nvSpPr>
-          <p:cNvPr id="28" name="Text 25"/>
+          <p:cNvPr id="27" name="Text 25"/>
           <p:cNvSpPr txBox="1"/>
           <p:nvPr/>
         </p:nvSpPr>
@@ -17058,7 +16993,7 @@
       </p:sp>
       <p:sp>
         <p:nvSpPr>
-          <p:cNvPr id="29" name="Text 26"/>
+          <p:cNvPr id="28" name="Text 26"/>
           <p:cNvSpPr txBox="1"/>
           <p:nvPr/>
         </p:nvSpPr>
@@ -17097,7 +17032,7 @@
       </p:sp>
       <p:pic>
         <p:nvPicPr>
-          <p:cNvPr id="30" name="Image 0" descr="/Users/giovannivasconcelos/Documents/University/tech_summit/attention/slides/assets/eq_loss.png">    </p:cNvPr>
+          <p:cNvPr id="29" name="Image 0" descr="/Users/giovannivasconcelos/Documents/University/tech_summit/attention/slides/assets/eq_loss.png">    </p:cNvPr>
           <p:cNvPicPr>
             <a:picLocks noChangeAspect="1"/>
           </p:cNvPicPr>
@@ -17121,7 +17056,7 @@
       </p:pic>
       <p:sp>
         <p:nvSpPr>
-          <p:cNvPr id="31" name="Text 27"/>
+          <p:cNvPr id="30" name="Text 27"/>
           <p:cNvSpPr txBox="1"/>
           <p:nvPr/>
         </p:nvSpPr>
@@ -17309,7 +17244,7 @@
       </p:sp>
       <p:sp>
         <p:nvSpPr>
-          <p:cNvPr id="6" name="Text 3"/>
+          <p:cNvPr id="5" name="Text 3"/>
           <p:cNvSpPr txBox="1"/>
           <p:nvPr/>
         </p:nvSpPr>
@@ -17348,7 +17283,7 @@
       </p:sp>
       <p:sp>
         <p:nvSpPr>
-          <p:cNvPr id="7" name="Shape 4"/>
+          <p:cNvPr id="6" name="Shape 4"/>
           <p:cNvSpPr/>
           <p:nvPr/>
         </p:nvSpPr>
@@ -17373,7 +17308,7 @@
       </p:sp>
       <p:sp>
         <p:nvSpPr>
-          <p:cNvPr id="8" name="Text 5"/>
+          <p:cNvPr id="7" name="Text 5"/>
           <p:cNvSpPr txBox="1"/>
           <p:nvPr/>
         </p:nvSpPr>
@@ -17412,7 +17347,7 @@
       </p:sp>
       <p:sp>
         <p:nvSpPr>
-          <p:cNvPr id="9" name="Text 6"/>
+          <p:cNvPr id="8" name="Text 6"/>
           <p:cNvSpPr txBox="1"/>
           <p:nvPr/>
         </p:nvSpPr>
@@ -17451,7 +17386,7 @@
       </p:sp>
       <p:sp>
         <p:nvSpPr>
-          <p:cNvPr id="10" name="Shape 7"/>
+          <p:cNvPr id="9" name="Shape 7"/>
           <p:cNvSpPr/>
           <p:nvPr/>
         </p:nvSpPr>
@@ -17476,7 +17411,7 @@
       </p:sp>
       <p:sp>
         <p:nvSpPr>
-          <p:cNvPr id="11" name="Text 8"/>
+          <p:cNvPr id="10" name="Text 8"/>
           <p:cNvSpPr txBox="1"/>
           <p:nvPr/>
         </p:nvSpPr>
@@ -17515,7 +17450,7 @@
       </p:sp>
       <p:sp>
         <p:nvSpPr>
-          <p:cNvPr id="12" name="Text 9"/>
+          <p:cNvPr id="11" name="Text 9"/>
           <p:cNvSpPr txBox="1"/>
           <p:nvPr/>
         </p:nvSpPr>
@@ -17554,7 +17489,7 @@
       </p:sp>
       <p:sp>
         <p:nvSpPr>
-          <p:cNvPr id="13" name="Shape 10"/>
+          <p:cNvPr id="12" name="Shape 10"/>
           <p:cNvSpPr/>
           <p:nvPr/>
         </p:nvSpPr>
@@ -17579,7 +17514,7 @@
       </p:sp>
       <p:sp>
         <p:nvSpPr>
-          <p:cNvPr id="14" name="Text 11"/>
+          <p:cNvPr id="13" name="Text 11"/>
           <p:cNvSpPr txBox="1"/>
           <p:nvPr/>
         </p:nvSpPr>
@@ -17618,7 +17553,7 @@
       </p:sp>
       <p:sp>
         <p:nvSpPr>
-          <p:cNvPr id="15" name="Text 12"/>
+          <p:cNvPr id="14" name="Text 12"/>
           <p:cNvSpPr txBox="1"/>
           <p:nvPr/>
         </p:nvSpPr>
@@ -17657,7 +17592,7 @@
       </p:sp>
       <p:sp>
         <p:nvSpPr>
-          <p:cNvPr id="16" name="Shape 13"/>
+          <p:cNvPr id="15" name="Shape 13"/>
           <p:cNvSpPr/>
           <p:nvPr/>
         </p:nvSpPr>
@@ -17682,7 +17617,7 @@
       </p:sp>
       <p:sp>
         <p:nvSpPr>
-          <p:cNvPr id="17" name="Text 14"/>
+          <p:cNvPr id="16" name="Text 14"/>
           <p:cNvSpPr txBox="1"/>
           <p:nvPr/>
         </p:nvSpPr>
@@ -17721,7 +17656,7 @@
       </p:sp>
       <p:sp>
         <p:nvSpPr>
-          <p:cNvPr id="18" name="Text 15"/>
+          <p:cNvPr id="17" name="Text 15"/>
           <p:cNvSpPr txBox="1"/>
           <p:nvPr/>
         </p:nvSpPr>
@@ -17760,7 +17695,7 @@
       </p:sp>
       <p:sp>
         <p:nvSpPr>
-          <p:cNvPr id="19" name="Shape 16"/>
+          <p:cNvPr id="18" name="Shape 16"/>
           <p:cNvSpPr/>
           <p:nvPr/>
         </p:nvSpPr>
@@ -17785,7 +17720,7 @@
       </p:sp>
       <p:sp>
         <p:nvSpPr>
-          <p:cNvPr id="20" name="Text 17"/>
+          <p:cNvPr id="19" name="Text 17"/>
           <p:cNvSpPr txBox="1"/>
           <p:nvPr/>
         </p:nvSpPr>
@@ -17824,7 +17759,7 @@
       </p:sp>
       <p:sp>
         <p:nvSpPr>
-          <p:cNvPr id="21" name="Text 18"/>
+          <p:cNvPr id="20" name="Text 18"/>
           <p:cNvSpPr txBox="1"/>
           <p:nvPr/>
         </p:nvSpPr>
@@ -17863,7 +17798,7 @@
       </p:sp>
       <p:sp>
         <p:nvSpPr>
-          <p:cNvPr id="22" name="Shape 19"/>
+          <p:cNvPr id="21" name="Shape 19"/>
           <p:cNvSpPr/>
           <p:nvPr/>
         </p:nvSpPr>
@@ -17888,7 +17823,7 @@
       </p:sp>
       <p:sp>
         <p:nvSpPr>
-          <p:cNvPr id="23" name="Text 20"/>
+          <p:cNvPr id="22" name="Text 20"/>
           <p:cNvSpPr txBox="1"/>
           <p:nvPr/>
         </p:nvSpPr>
@@ -17927,7 +17862,7 @@
       </p:sp>
       <p:sp>
         <p:nvSpPr>
-          <p:cNvPr id="24" name="Text 21"/>
+          <p:cNvPr id="23" name="Text 21"/>
           <p:cNvSpPr txBox="1"/>
           <p:nvPr/>
         </p:nvSpPr>
@@ -17966,7 +17901,7 @@
       </p:sp>
       <p:sp>
         <p:nvSpPr>
-          <p:cNvPr id="25" name="Shape 22"/>
+          <p:cNvPr id="24" name="Shape 22"/>
           <p:cNvSpPr/>
           <p:nvPr/>
         </p:nvSpPr>
@@ -17991,7 +17926,7 @@
       </p:sp>
       <p:sp>
         <p:nvSpPr>
-          <p:cNvPr id="26" name="Text 23"/>
+          <p:cNvPr id="25" name="Text 23"/>
           <p:cNvSpPr txBox="1"/>
           <p:nvPr/>
         </p:nvSpPr>
@@ -18030,7 +17965,7 @@
       </p:sp>
       <p:sp>
         <p:nvSpPr>
-          <p:cNvPr id="27" name="Text 24"/>
+          <p:cNvPr id="26" name="Text 24"/>
           <p:cNvSpPr txBox="1"/>
           <p:nvPr/>
         </p:nvSpPr>
@@ -18069,7 +18004,7 @@
       </p:sp>
       <p:sp>
         <p:nvSpPr>
-          <p:cNvPr id="28" name="Shape 25"/>
+          <p:cNvPr id="27" name="Shape 25"/>
           <p:cNvSpPr/>
           <p:nvPr/>
         </p:nvSpPr>
@@ -18094,7 +18029,7 @@
       </p:sp>
       <p:sp>
         <p:nvSpPr>
-          <p:cNvPr id="29" name="Text 26"/>
+          <p:cNvPr id="28" name="Text 26"/>
           <p:cNvSpPr txBox="1"/>
           <p:nvPr/>
         </p:nvSpPr>
@@ -18133,7 +18068,7 @@
       </p:sp>
       <p:sp>
         <p:nvSpPr>
-          <p:cNvPr id="30" name="Text 27"/>
+          <p:cNvPr id="29" name="Text 27"/>
           <p:cNvSpPr txBox="1"/>
           <p:nvPr/>
         </p:nvSpPr>
@@ -18172,7 +18107,7 @@
       </p:sp>
       <p:sp>
         <p:nvSpPr>
-          <p:cNvPr id="31" name="Shape 28"/>
+          <p:cNvPr id="30" name="Shape 28"/>
           <p:cNvSpPr/>
           <p:nvPr/>
         </p:nvSpPr>
@@ -18197,7 +18132,7 @@
       </p:sp>
       <p:sp>
         <p:nvSpPr>
-          <p:cNvPr id="32" name="Text 29"/>
+          <p:cNvPr id="31" name="Text 29"/>
           <p:cNvSpPr txBox="1"/>
           <p:nvPr/>
         </p:nvSpPr>
@@ -18236,7 +18171,7 @@
       </p:sp>
       <p:sp>
         <p:nvSpPr>
-          <p:cNvPr id="33" name="Shape 30"/>
+          <p:cNvPr id="32" name="Shape 30"/>
           <p:cNvSpPr/>
           <p:nvPr/>
         </p:nvSpPr>
@@ -18261,7 +18196,7 @@
       </p:sp>
       <p:sp>
         <p:nvSpPr>
-          <p:cNvPr id="34" name="Text 31"/>
+          <p:cNvPr id="33" name="Text 31"/>
           <p:cNvSpPr txBox="1"/>
           <p:nvPr/>
         </p:nvSpPr>
@@ -18492,7 +18427,7 @@
       </p:sp>
       <p:sp>
         <p:nvSpPr>
-          <p:cNvPr id="6" name="Text 3"/>
+          <p:cNvPr id="5" name="Text 3"/>
           <p:cNvSpPr txBox="1"/>
           <p:nvPr/>
         </p:nvSpPr>
@@ -18531,7 +18466,7 @@
       </p:sp>
       <p:sp>
         <p:nvSpPr>
-          <p:cNvPr id="7" name="Text 4"/>
+          <p:cNvPr id="6" name="Text 4"/>
           <p:cNvSpPr txBox="1"/>
           <p:nvPr/>
         </p:nvSpPr>
@@ -18570,7 +18505,7 @@
       </p:sp>
       <p:sp>
         <p:nvSpPr>
-          <p:cNvPr id="8" name="Text 5"/>
+          <p:cNvPr id="7" name="Text 5"/>
           <p:cNvSpPr txBox="1"/>
           <p:nvPr/>
         </p:nvSpPr>
@@ -18609,7 +18544,7 @@
       </p:sp>
       <p:sp>
         <p:nvSpPr>
-          <p:cNvPr id="9" name="Text 6"/>
+          <p:cNvPr id="8" name="Text 6"/>
           <p:cNvSpPr txBox="1"/>
           <p:nvPr/>
         </p:nvSpPr>
@@ -18648,7 +18583,7 @@
       </p:sp>
       <p:sp>
         <p:nvSpPr>
-          <p:cNvPr id="10" name="Text 7"/>
+          <p:cNvPr id="9" name="Text 7"/>
           <p:cNvSpPr txBox="1"/>
           <p:nvPr/>
         </p:nvSpPr>
@@ -18687,7 +18622,7 @@
       </p:sp>
       <p:sp>
         <p:nvSpPr>
-          <p:cNvPr id="11" name="Text 8"/>
+          <p:cNvPr id="10" name="Text 8"/>
           <p:cNvSpPr txBox="1"/>
           <p:nvPr/>
         </p:nvSpPr>
@@ -18726,7 +18661,7 @@
       </p:sp>
       <p:sp>
         <p:nvSpPr>
-          <p:cNvPr id="12" name="Text 9"/>
+          <p:cNvPr id="11" name="Text 9"/>
           <p:cNvSpPr txBox="1"/>
           <p:nvPr/>
         </p:nvSpPr>
@@ -18765,7 +18700,7 @@
       </p:sp>
       <p:sp>
         <p:nvSpPr>
-          <p:cNvPr id="13" name="Text 10"/>
+          <p:cNvPr id="12" name="Text 10"/>
           <p:cNvSpPr txBox="1"/>
           <p:nvPr/>
         </p:nvSpPr>
@@ -18804,7 +18739,7 @@
       </p:sp>
       <p:sp>
         <p:nvSpPr>
-          <p:cNvPr id="14" name="Text 11"/>
+          <p:cNvPr id="13" name="Text 11"/>
           <p:cNvSpPr txBox="1"/>
           <p:nvPr/>
         </p:nvSpPr>
@@ -18843,7 +18778,7 @@
       </p:sp>
       <p:sp>
         <p:nvSpPr>
-          <p:cNvPr id="15" name="Text 12"/>
+          <p:cNvPr id="14" name="Text 12"/>
           <p:cNvSpPr txBox="1"/>
           <p:nvPr/>
         </p:nvSpPr>
@@ -18882,7 +18817,7 @@
       </p:sp>
       <p:sp>
         <p:nvSpPr>
-          <p:cNvPr id="16" name="Text 13"/>
+          <p:cNvPr id="15" name="Text 13"/>
           <p:cNvSpPr txBox="1"/>
           <p:nvPr/>
         </p:nvSpPr>
@@ -18921,7 +18856,7 @@
       </p:sp>
       <p:sp>
         <p:nvSpPr>
-          <p:cNvPr id="17" name="Text 14"/>
+          <p:cNvPr id="16" name="Text 14"/>
           <p:cNvSpPr txBox="1"/>
           <p:nvPr/>
         </p:nvSpPr>
@@ -18960,7 +18895,7 @@
       </p:sp>
       <p:sp>
         <p:nvSpPr>
-          <p:cNvPr id="18" name="Text 15"/>
+          <p:cNvPr id="17" name="Text 15"/>
           <p:cNvSpPr txBox="1"/>
           <p:nvPr/>
         </p:nvSpPr>
@@ -18999,7 +18934,7 @@
       </p:sp>
       <p:sp>
         <p:nvSpPr>
-          <p:cNvPr id="19" name="Text 16"/>
+          <p:cNvPr id="18" name="Text 16"/>
           <p:cNvSpPr txBox="1"/>
           <p:nvPr/>
         </p:nvSpPr>
@@ -19038,7 +18973,7 @@
       </p:sp>
       <p:sp>
         <p:nvSpPr>
-          <p:cNvPr id="20" name="Shape 17"/>
+          <p:cNvPr id="19" name="Shape 17"/>
           <p:cNvSpPr/>
           <p:nvPr/>
         </p:nvSpPr>
@@ -19063,7 +18998,7 @@
       </p:sp>
       <p:sp>
         <p:nvSpPr>
-          <p:cNvPr id="21" name="Text 18"/>
+          <p:cNvPr id="20" name="Text 18"/>
           <p:cNvSpPr txBox="1"/>
           <p:nvPr/>
         </p:nvSpPr>
@@ -19265,7 +19200,7 @@
       </p:sp>
       <p:pic>
         <p:nvPicPr>
-          <p:cNvPr id="6" name="Image 0" descr="/Users/giovannivasconcelos/Documents/University/tech_summit/attention/slides/assets/sort_heatmap.png">    </p:cNvPr>
+          <p:cNvPr id="5" name="Image 0" descr="/Users/giovannivasconcelos/Documents/University/tech_summit/attention/slides/assets/sort_heatmap.png">    </p:cNvPr>
           <p:cNvPicPr>
             <a:picLocks noChangeAspect="1"/>
           </p:cNvPicPr>
@@ -19289,7 +19224,7 @@
       </p:pic>
       <p:sp>
         <p:nvSpPr>
-          <p:cNvPr id="7" name="Text 3"/>
+          <p:cNvPr id="6" name="Text 3"/>
           <p:cNvSpPr txBox="1"/>
           <p:nvPr/>
         </p:nvSpPr>
@@ -19328,7 +19263,7 @@
       </p:sp>
       <p:sp>
         <p:nvSpPr>
-          <p:cNvPr id="8" name="Text 4"/>
+          <p:cNvPr id="7" name="Text 4"/>
           <p:cNvSpPr txBox="1"/>
           <p:nvPr/>
         </p:nvSpPr>
@@ -19367,7 +19302,7 @@
       </p:sp>
       <p:sp>
         <p:nvSpPr>
-          <p:cNvPr id="9" name="Text 5"/>
+          <p:cNvPr id="8" name="Text 5"/>
           <p:cNvSpPr txBox="1"/>
           <p:nvPr/>
         </p:nvSpPr>
@@ -19406,7 +19341,7 @@
       </p:sp>
       <p:sp>
         <p:nvSpPr>
-          <p:cNvPr id="10" name="Text 6"/>
+          <p:cNvPr id="9" name="Text 6"/>
           <p:cNvSpPr txBox="1"/>
           <p:nvPr/>
         </p:nvSpPr>
@@ -19445,7 +19380,7 @@
       </p:sp>
       <p:sp>
         <p:nvSpPr>
-          <p:cNvPr id="11" name="Text 7"/>
+          <p:cNvPr id="10" name="Text 7"/>
           <p:cNvSpPr txBox="1"/>
           <p:nvPr/>
         </p:nvSpPr>
@@ -19594,7 +19529,7 @@
       </p:sp>
       <p:sp>
         <p:nvSpPr>
-          <p:cNvPr id="5" name="Text 2"/>
+          <p:cNvPr id="4" name="Text 2"/>
           <p:cNvSpPr txBox="1"/>
           <p:nvPr/>
         </p:nvSpPr>
@@ -19633,7 +19568,7 @@
       </p:sp>
       <p:sp>
         <p:nvSpPr>
-          <p:cNvPr id="6" name="Text 3"/>
+          <p:cNvPr id="5" name="Text 3"/>
           <p:cNvSpPr txBox="1"/>
           <p:nvPr/>
         </p:nvSpPr>
@@ -19672,7 +19607,7 @@
       </p:sp>
       <p:sp>
         <p:nvSpPr>
-          <p:cNvPr id="7" name="Shape 4"/>
+          <p:cNvPr id="6" name="Shape 4"/>
           <p:cNvSpPr/>
           <p:nvPr/>
         </p:nvSpPr>
@@ -19697,7 +19632,7 @@
       </p:sp>
       <p:sp>
         <p:nvSpPr>
-          <p:cNvPr id="8" name="Text 5"/>
+          <p:cNvPr id="7" name="Text 5"/>
           <p:cNvSpPr txBox="1"/>
           <p:nvPr/>
         </p:nvSpPr>
@@ -19759,7 +19694,7 @@
       </p:sp>
       <p:sp>
         <p:nvSpPr>
-          <p:cNvPr id="9" name="Shape 6"/>
+          <p:cNvPr id="8" name="Shape 6"/>
           <p:cNvSpPr/>
           <p:nvPr/>
         </p:nvSpPr>
@@ -19784,7 +19719,7 @@
       </p:sp>
       <p:sp>
         <p:nvSpPr>
-          <p:cNvPr id="10" name="Shape 7"/>
+          <p:cNvPr id="9" name="Shape 7"/>
           <p:cNvSpPr/>
           <p:nvPr/>
         </p:nvSpPr>
@@ -19809,7 +19744,7 @@
       </p:sp>
       <p:sp>
         <p:nvSpPr>
-          <p:cNvPr id="11" name="Shape 8"/>
+          <p:cNvPr id="10" name="Shape 8"/>
           <p:cNvSpPr/>
           <p:nvPr/>
         </p:nvSpPr>
@@ -19834,7 +19769,7 @@
       </p:sp>
       <p:sp>
         <p:nvSpPr>
-          <p:cNvPr id="12" name="Shape 9"/>
+          <p:cNvPr id="11" name="Shape 9"/>
           <p:cNvSpPr/>
           <p:nvPr/>
         </p:nvSpPr>
@@ -19859,7 +19794,7 @@
       </p:sp>
       <p:sp>
         <p:nvSpPr>
-          <p:cNvPr id="13" name="Shape 10"/>
+          <p:cNvPr id="12" name="Shape 10"/>
           <p:cNvSpPr/>
           <p:nvPr/>
         </p:nvSpPr>
@@ -19884,7 +19819,7 @@
       </p:sp>
       <p:sp>
         <p:nvSpPr>
-          <p:cNvPr id="14" name="Shape 11"/>
+          <p:cNvPr id="13" name="Shape 11"/>
           <p:cNvSpPr/>
           <p:nvPr/>
         </p:nvSpPr>
@@ -19909,7 +19844,7 @@
       </p:sp>
       <p:sp>
         <p:nvSpPr>
-          <p:cNvPr id="15" name="Shape 12"/>
+          <p:cNvPr id="14" name="Shape 12"/>
           <p:cNvSpPr/>
           <p:nvPr/>
         </p:nvSpPr>
@@ -19934,7 +19869,7 @@
       </p:sp>
       <p:sp>
         <p:nvSpPr>
-          <p:cNvPr id="16" name="Shape 13"/>
+          <p:cNvPr id="15" name="Shape 13"/>
           <p:cNvSpPr/>
           <p:nvPr/>
         </p:nvSpPr>
@@ -19959,7 +19894,7 @@
       </p:sp>
       <p:sp>
         <p:nvSpPr>
-          <p:cNvPr id="17" name="Shape 14"/>
+          <p:cNvPr id="16" name="Shape 14"/>
           <p:cNvSpPr/>
           <p:nvPr/>
         </p:nvSpPr>
@@ -19984,7 +19919,7 @@
       </p:sp>
       <p:sp>
         <p:nvSpPr>
-          <p:cNvPr id="18" name="Shape 15"/>
+          <p:cNvPr id="17" name="Shape 15"/>
           <p:cNvSpPr/>
           <p:nvPr/>
         </p:nvSpPr>
@@ -20009,7 +19944,7 @@
       </p:sp>
       <p:sp>
         <p:nvSpPr>
-          <p:cNvPr id="19" name="Shape 16"/>
+          <p:cNvPr id="18" name="Shape 16"/>
           <p:cNvSpPr/>
           <p:nvPr/>
         </p:nvSpPr>
@@ -20034,7 +19969,7 @@
       </p:sp>
       <p:sp>
         <p:nvSpPr>
-          <p:cNvPr id="20" name="Shape 17"/>
+          <p:cNvPr id="19" name="Shape 17"/>
           <p:cNvSpPr/>
           <p:nvPr/>
         </p:nvSpPr>
@@ -20059,7 +19994,7 @@
       </p:sp>
       <p:sp>
         <p:nvSpPr>
-          <p:cNvPr id="21" name="Shape 18"/>
+          <p:cNvPr id="20" name="Shape 18"/>
           <p:cNvSpPr/>
           <p:nvPr/>
         </p:nvSpPr>
@@ -20084,7 +20019,7 @@
       </p:sp>
       <p:sp>
         <p:nvSpPr>
-          <p:cNvPr id="22" name="Shape 19"/>
+          <p:cNvPr id="21" name="Shape 19"/>
           <p:cNvSpPr/>
           <p:nvPr/>
         </p:nvSpPr>
@@ -20109,7 +20044,7 @@
       </p:sp>
       <p:sp>
         <p:nvSpPr>
-          <p:cNvPr id="23" name="Shape 20"/>
+          <p:cNvPr id="22" name="Shape 20"/>
           <p:cNvSpPr/>
           <p:nvPr/>
         </p:nvSpPr>
@@ -20134,7 +20069,7 @@
       </p:sp>
       <p:sp>
         <p:nvSpPr>
-          <p:cNvPr id="24" name="Shape 21"/>
+          <p:cNvPr id="23" name="Shape 21"/>
           <p:cNvSpPr/>
           <p:nvPr/>
         </p:nvSpPr>
@@ -20159,7 +20094,7 @@
       </p:sp>
       <p:sp>
         <p:nvSpPr>
-          <p:cNvPr id="25" name="Shape 22"/>
+          <p:cNvPr id="24" name="Shape 22"/>
           <p:cNvSpPr/>
           <p:nvPr/>
         </p:nvSpPr>
@@ -20184,7 +20119,7 @@
       </p:sp>
       <p:sp>
         <p:nvSpPr>
-          <p:cNvPr id="26" name="Shape 23"/>
+          <p:cNvPr id="25" name="Shape 23"/>
           <p:cNvSpPr/>
           <p:nvPr/>
         </p:nvSpPr>
@@ -20209,7 +20144,7 @@
       </p:sp>
       <p:sp>
         <p:nvSpPr>
-          <p:cNvPr id="27" name="Shape 24"/>
+          <p:cNvPr id="26" name="Shape 24"/>
           <p:cNvSpPr/>
           <p:nvPr/>
         </p:nvSpPr>
@@ -20234,7 +20169,7 @@
       </p:sp>
       <p:sp>
         <p:nvSpPr>
-          <p:cNvPr id="28" name="Shape 25"/>
+          <p:cNvPr id="27" name="Shape 25"/>
           <p:cNvSpPr/>
           <p:nvPr/>
         </p:nvSpPr>
@@ -20259,7 +20194,7 @@
       </p:sp>
       <p:sp>
         <p:nvSpPr>
-          <p:cNvPr id="29" name="Shape 26"/>
+          <p:cNvPr id="28" name="Shape 26"/>
           <p:cNvSpPr/>
           <p:nvPr/>
         </p:nvSpPr>
@@ -20284,7 +20219,7 @@
       </p:sp>
       <p:sp>
         <p:nvSpPr>
-          <p:cNvPr id="30" name="Shape 27"/>
+          <p:cNvPr id="29" name="Shape 27"/>
           <p:cNvSpPr/>
           <p:nvPr/>
         </p:nvSpPr>
@@ -20309,7 +20244,7 @@
       </p:sp>
       <p:sp>
         <p:nvSpPr>
-          <p:cNvPr id="31" name="Shape 28"/>
+          <p:cNvPr id="30" name="Shape 28"/>
           <p:cNvSpPr/>
           <p:nvPr/>
         </p:nvSpPr>
@@ -20334,7 +20269,7 @@
       </p:sp>
       <p:sp>
         <p:nvSpPr>
-          <p:cNvPr id="32" name="Shape 29"/>
+          <p:cNvPr id="31" name="Shape 29"/>
           <p:cNvSpPr/>
           <p:nvPr/>
         </p:nvSpPr>
@@ -20359,7 +20294,7 @@
       </p:sp>
       <p:sp>
         <p:nvSpPr>
-          <p:cNvPr id="33" name="Shape 30"/>
+          <p:cNvPr id="32" name="Shape 30"/>
           <p:cNvSpPr/>
           <p:nvPr/>
         </p:nvSpPr>
@@ -20384,7 +20319,7 @@
       </p:sp>
       <p:sp>
         <p:nvSpPr>
-          <p:cNvPr id="34" name="Shape 31"/>
+          <p:cNvPr id="33" name="Shape 31"/>
           <p:cNvSpPr/>
           <p:nvPr/>
         </p:nvSpPr>
@@ -20409,7 +20344,7 @@
       </p:sp>
       <p:sp>
         <p:nvSpPr>
-          <p:cNvPr id="35" name="Shape 32"/>
+          <p:cNvPr id="34" name="Shape 32"/>
           <p:cNvSpPr/>
           <p:nvPr/>
         </p:nvSpPr>
@@ -20434,7 +20369,7 @@
       </p:sp>
       <p:sp>
         <p:nvSpPr>
-          <p:cNvPr id="36" name="Shape 33"/>
+          <p:cNvPr id="35" name="Shape 33"/>
           <p:cNvSpPr/>
           <p:nvPr/>
         </p:nvSpPr>
@@ -20459,7 +20394,7 @@
       </p:sp>
       <p:sp>
         <p:nvSpPr>
-          <p:cNvPr id="37" name="Shape 34"/>
+          <p:cNvPr id="36" name="Shape 34"/>
           <p:cNvSpPr/>
           <p:nvPr/>
         </p:nvSpPr>
@@ -20484,7 +20419,7 @@
       </p:sp>
       <p:sp>
         <p:nvSpPr>
-          <p:cNvPr id="38" name="Shape 35"/>
+          <p:cNvPr id="37" name="Shape 35"/>
           <p:cNvSpPr/>
           <p:nvPr/>
         </p:nvSpPr>
@@ -20509,7 +20444,7 @@
       </p:sp>
       <p:sp>
         <p:nvSpPr>
-          <p:cNvPr id="39" name="Shape 36"/>
+          <p:cNvPr id="38" name="Shape 36"/>
           <p:cNvSpPr/>
           <p:nvPr/>
         </p:nvSpPr>
@@ -20534,7 +20469,7 @@
       </p:sp>
       <p:sp>
         <p:nvSpPr>
-          <p:cNvPr id="40" name="Shape 37"/>
+          <p:cNvPr id="39" name="Shape 37"/>
           <p:cNvSpPr/>
           <p:nvPr/>
         </p:nvSpPr>
@@ -20559,7 +20494,7 @@
       </p:sp>
       <p:sp>
         <p:nvSpPr>
-          <p:cNvPr id="41" name="Shape 38"/>
+          <p:cNvPr id="40" name="Shape 38"/>
           <p:cNvSpPr/>
           <p:nvPr/>
         </p:nvSpPr>
@@ -20584,7 +20519,7 @@
       </p:sp>
       <p:sp>
         <p:nvSpPr>
-          <p:cNvPr id="42" name="Shape 39"/>
+          <p:cNvPr id="41" name="Shape 39"/>
           <p:cNvSpPr/>
           <p:nvPr/>
         </p:nvSpPr>
@@ -20609,7 +20544,7 @@
       </p:sp>
       <p:sp>
         <p:nvSpPr>
-          <p:cNvPr id="43" name="Shape 40"/>
+          <p:cNvPr id="42" name="Shape 40"/>
           <p:cNvSpPr/>
           <p:nvPr/>
         </p:nvSpPr>
@@ -20634,7 +20569,7 @@
       </p:sp>
       <p:sp>
         <p:nvSpPr>
-          <p:cNvPr id="44" name="Shape 41"/>
+          <p:cNvPr id="43" name="Shape 41"/>
           <p:cNvSpPr/>
           <p:nvPr/>
         </p:nvSpPr>
@@ -20659,7 +20594,7 @@
       </p:sp>
       <p:sp>
         <p:nvSpPr>
-          <p:cNvPr id="45" name="Shape 42"/>
+          <p:cNvPr id="44" name="Shape 42"/>
           <p:cNvSpPr/>
           <p:nvPr/>
         </p:nvSpPr>
@@ -20684,7 +20619,7 @@
       </p:sp>
       <p:sp>
         <p:nvSpPr>
-          <p:cNvPr id="46" name="Shape 43"/>
+          <p:cNvPr id="45" name="Shape 43"/>
           <p:cNvSpPr/>
           <p:nvPr/>
         </p:nvSpPr>
@@ -20709,7 +20644,7 @@
       </p:sp>
       <p:sp>
         <p:nvSpPr>
-          <p:cNvPr id="47" name="Shape 44"/>
+          <p:cNvPr id="46" name="Shape 44"/>
           <p:cNvSpPr/>
           <p:nvPr/>
         </p:nvSpPr>
@@ -20734,7 +20669,7 @@
       </p:sp>
       <p:sp>
         <p:nvSpPr>
-          <p:cNvPr id="48" name="Shape 45"/>
+          <p:cNvPr id="47" name="Shape 45"/>
           <p:cNvSpPr/>
           <p:nvPr/>
         </p:nvSpPr>
@@ -20759,7 +20694,7 @@
       </p:sp>
       <p:sp>
         <p:nvSpPr>
-          <p:cNvPr id="49" name="Shape 46"/>
+          <p:cNvPr id="48" name="Shape 46"/>
           <p:cNvSpPr/>
           <p:nvPr/>
         </p:nvSpPr>
@@ -20784,7 +20719,7 @@
       </p:sp>
       <p:sp>
         <p:nvSpPr>
-          <p:cNvPr id="50" name="Shape 47"/>
+          <p:cNvPr id="49" name="Shape 47"/>
           <p:cNvSpPr/>
           <p:nvPr/>
         </p:nvSpPr>
@@ -20809,7 +20744,7 @@
       </p:sp>
       <p:sp>
         <p:nvSpPr>
-          <p:cNvPr id="51" name="Shape 48"/>
+          <p:cNvPr id="50" name="Shape 48"/>
           <p:cNvSpPr/>
           <p:nvPr/>
         </p:nvSpPr>
@@ -20834,7 +20769,7 @@
       </p:sp>
       <p:sp>
         <p:nvSpPr>
-          <p:cNvPr id="52" name="Shape 49"/>
+          <p:cNvPr id="51" name="Shape 49"/>
           <p:cNvSpPr/>
           <p:nvPr/>
         </p:nvSpPr>
@@ -20859,7 +20794,7 @@
       </p:sp>
       <p:sp>
         <p:nvSpPr>
-          <p:cNvPr id="53" name="Shape 50"/>
+          <p:cNvPr id="52" name="Shape 50"/>
           <p:cNvSpPr/>
           <p:nvPr/>
         </p:nvSpPr>
@@ -20884,7 +20819,7 @@
       </p:sp>
       <p:sp>
         <p:nvSpPr>
-          <p:cNvPr id="54" name="Shape 51"/>
+          <p:cNvPr id="53" name="Shape 51"/>
           <p:cNvSpPr/>
           <p:nvPr/>
         </p:nvSpPr>
@@ -20909,7 +20844,7 @@
       </p:sp>
       <p:sp>
         <p:nvSpPr>
-          <p:cNvPr id="55" name="Shape 52"/>
+          <p:cNvPr id="54" name="Shape 52"/>
           <p:cNvSpPr/>
           <p:nvPr/>
         </p:nvSpPr>
@@ -20934,7 +20869,7 @@
       </p:sp>
       <p:sp>
         <p:nvSpPr>
-          <p:cNvPr id="56" name="Shape 53"/>
+          <p:cNvPr id="55" name="Shape 53"/>
           <p:cNvSpPr/>
           <p:nvPr/>
         </p:nvSpPr>
@@ -20959,7 +20894,7 @@
       </p:sp>
       <p:sp>
         <p:nvSpPr>
-          <p:cNvPr id="57" name="Shape 54"/>
+          <p:cNvPr id="56" name="Shape 54"/>
           <p:cNvSpPr/>
           <p:nvPr/>
         </p:nvSpPr>
@@ -20984,7 +20919,7 @@
       </p:sp>
       <p:sp>
         <p:nvSpPr>
-          <p:cNvPr id="58" name="Shape 55"/>
+          <p:cNvPr id="57" name="Shape 55"/>
           <p:cNvSpPr/>
           <p:nvPr/>
         </p:nvSpPr>
@@ -21009,7 +20944,7 @@
       </p:sp>
       <p:sp>
         <p:nvSpPr>
-          <p:cNvPr id="59" name="Shape 56"/>
+          <p:cNvPr id="58" name="Shape 56"/>
           <p:cNvSpPr/>
           <p:nvPr/>
         </p:nvSpPr>
@@ -21034,7 +20969,7 @@
       </p:sp>
       <p:sp>
         <p:nvSpPr>
-          <p:cNvPr id="60" name="Shape 57"/>
+          <p:cNvPr id="59" name="Shape 57"/>
           <p:cNvSpPr/>
           <p:nvPr/>
         </p:nvSpPr>
@@ -21059,7 +20994,7 @@
       </p:sp>
       <p:sp>
         <p:nvSpPr>
-          <p:cNvPr id="61" name="Shape 58"/>
+          <p:cNvPr id="60" name="Shape 58"/>
           <p:cNvSpPr/>
           <p:nvPr/>
         </p:nvSpPr>
@@ -21084,7 +21019,7 @@
       </p:sp>
       <p:sp>
         <p:nvSpPr>
-          <p:cNvPr id="62" name="Shape 59"/>
+          <p:cNvPr id="61" name="Shape 59"/>
           <p:cNvSpPr/>
           <p:nvPr/>
         </p:nvSpPr>
@@ -21109,7 +21044,7 @@
       </p:sp>
       <p:sp>
         <p:nvSpPr>
-          <p:cNvPr id="63" name="Shape 60"/>
+          <p:cNvPr id="62" name="Shape 60"/>
           <p:cNvSpPr/>
           <p:nvPr/>
         </p:nvSpPr>
@@ -21134,7 +21069,7 @@
       </p:sp>
       <p:sp>
         <p:nvSpPr>
-          <p:cNvPr id="64" name="Shape 61"/>
+          <p:cNvPr id="63" name="Shape 61"/>
           <p:cNvSpPr/>
           <p:nvPr/>
         </p:nvSpPr>
@@ -21159,7 +21094,7 @@
       </p:sp>
       <p:sp>
         <p:nvSpPr>
-          <p:cNvPr id="65" name="Shape 62"/>
+          <p:cNvPr id="64" name="Shape 62"/>
           <p:cNvSpPr/>
           <p:nvPr/>
         </p:nvSpPr>
@@ -21184,7 +21119,7 @@
       </p:sp>
       <p:sp>
         <p:nvSpPr>
-          <p:cNvPr id="66" name="Shape 63"/>
+          <p:cNvPr id="65" name="Shape 63"/>
           <p:cNvSpPr/>
           <p:nvPr/>
         </p:nvSpPr>
@@ -21209,7 +21144,7 @@
       </p:sp>
       <p:sp>
         <p:nvSpPr>
-          <p:cNvPr id="67" name="Shape 64"/>
+          <p:cNvPr id="66" name="Shape 64"/>
           <p:cNvSpPr/>
           <p:nvPr/>
         </p:nvSpPr>
@@ -21234,7 +21169,7 @@
       </p:sp>
       <p:sp>
         <p:nvSpPr>
-          <p:cNvPr id="68" name="Shape 65"/>
+          <p:cNvPr id="67" name="Shape 65"/>
           <p:cNvSpPr/>
           <p:nvPr/>
         </p:nvSpPr>
@@ -21259,7 +21194,7 @@
       </p:sp>
       <p:sp>
         <p:nvSpPr>
-          <p:cNvPr id="69" name="Shape 66"/>
+          <p:cNvPr id="68" name="Shape 66"/>
           <p:cNvSpPr/>
           <p:nvPr/>
         </p:nvSpPr>
@@ -21284,7 +21219,7 @@
       </p:sp>
       <p:sp>
         <p:nvSpPr>
-          <p:cNvPr id="70" name="Shape 67"/>
+          <p:cNvPr id="69" name="Shape 67"/>
           <p:cNvSpPr/>
           <p:nvPr/>
         </p:nvSpPr>
@@ -21309,7 +21244,7 @@
       </p:sp>
       <p:sp>
         <p:nvSpPr>
-          <p:cNvPr id="71" name="Shape 68"/>
+          <p:cNvPr id="70" name="Shape 68"/>
           <p:cNvSpPr/>
           <p:nvPr/>
         </p:nvSpPr>
@@ -21334,7 +21269,7 @@
       </p:sp>
       <p:sp>
         <p:nvSpPr>
-          <p:cNvPr id="72" name="Shape 69"/>
+          <p:cNvPr id="71" name="Shape 69"/>
           <p:cNvSpPr/>
           <p:nvPr/>
         </p:nvSpPr>
@@ -21359,7 +21294,7 @@
       </p:sp>
       <p:sp>
         <p:nvSpPr>
-          <p:cNvPr id="73" name="Shape 70"/>
+          <p:cNvPr id="72" name="Shape 70"/>
           <p:cNvSpPr/>
           <p:nvPr/>
         </p:nvSpPr>
@@ -21530,7 +21465,7 @@
       </p:sp>
       <p:sp>
         <p:nvSpPr>
-          <p:cNvPr id="6" name="Shape 3"/>
+          <p:cNvPr id="5" name="Shape 3"/>
           <p:cNvSpPr/>
           <p:nvPr/>
         </p:nvSpPr>
@@ -21555,7 +21490,7 @@
       </p:sp>
       <p:sp>
         <p:nvSpPr>
-          <p:cNvPr id="7" name="Text 4"/>
+          <p:cNvPr id="6" name="Text 4"/>
           <p:cNvSpPr txBox="1"/>
           <p:nvPr/>
         </p:nvSpPr>
@@ -22445,7 +22380,7 @@
       </p:graphicFrame>
       <p:sp>
         <p:nvSpPr>
-          <p:cNvPr id="9" name="Text 5"/>
+          <p:cNvPr id="8" name="Text 5"/>
           <p:cNvSpPr txBox="1"/>
           <p:nvPr/>
         </p:nvSpPr>
@@ -22484,7 +22419,7 @@
       </p:sp>
       <p:sp>
         <p:nvSpPr>
-          <p:cNvPr id="10" name="Shape 6"/>
+          <p:cNvPr id="9" name="Shape 6"/>
           <p:cNvSpPr/>
           <p:nvPr/>
         </p:nvSpPr>
@@ -22509,7 +22444,7 @@
       </p:sp>
       <p:sp>
         <p:nvSpPr>
-          <p:cNvPr id="11" name="Text 7"/>
+          <p:cNvPr id="10" name="Text 7"/>
           <p:cNvSpPr txBox="1"/>
           <p:nvPr/>
         </p:nvSpPr>
@@ -22548,7 +22483,7 @@
       </p:sp>
       <p:sp>
         <p:nvSpPr>
-          <p:cNvPr id="12" name="Shape 8"/>
+          <p:cNvPr id="11" name="Shape 8"/>
           <p:cNvSpPr/>
           <p:nvPr/>
         </p:nvSpPr>
@@ -22573,7 +22508,7 @@
       </p:sp>
       <p:sp>
         <p:nvSpPr>
-          <p:cNvPr id="13" name="Text 9"/>
+          <p:cNvPr id="12" name="Text 9"/>
           <p:cNvSpPr txBox="1"/>
           <p:nvPr/>
         </p:nvSpPr>
@@ -22612,7 +22547,7 @@
       </p:sp>
       <p:sp>
         <p:nvSpPr>
-          <p:cNvPr id="14" name="Shape 10"/>
+          <p:cNvPr id="13" name="Shape 10"/>
           <p:cNvSpPr/>
           <p:nvPr/>
         </p:nvSpPr>
@@ -22637,7 +22572,7 @@
       </p:sp>
       <p:sp>
         <p:nvSpPr>
-          <p:cNvPr id="15" name="Text 11"/>
+          <p:cNvPr id="14" name="Text 11"/>
           <p:cNvSpPr txBox="1"/>
           <p:nvPr/>
         </p:nvSpPr>
@@ -22676,7 +22611,7 @@
       </p:sp>
       <p:sp>
         <p:nvSpPr>
-          <p:cNvPr id="16" name="Shape 12"/>
+          <p:cNvPr id="15" name="Shape 12"/>
           <p:cNvSpPr/>
           <p:nvPr/>
         </p:nvSpPr>
@@ -22701,7 +22636,7 @@
       </p:sp>
       <p:sp>
         <p:nvSpPr>
-          <p:cNvPr id="17" name="Text 13"/>
+          <p:cNvPr id="16" name="Text 13"/>
           <p:cNvSpPr txBox="1"/>
           <p:nvPr/>
         </p:nvSpPr>
@@ -22740,7 +22675,7 @@
       </p:sp>
       <p:sp>
         <p:nvSpPr>
-          <p:cNvPr id="18" name="Shape 14"/>
+          <p:cNvPr id="17" name="Shape 14"/>
           <p:cNvSpPr/>
           <p:nvPr/>
         </p:nvSpPr>
@@ -22765,7 +22700,7 @@
       </p:sp>
       <p:sp>
         <p:nvSpPr>
-          <p:cNvPr id="19" name="Text 15"/>
+          <p:cNvPr id="18" name="Text 15"/>
           <p:cNvSpPr txBox="1"/>
           <p:nvPr/>
         </p:nvSpPr>
@@ -22804,7 +22739,7 @@
       </p:sp>
       <p:sp>
         <p:nvSpPr>
-          <p:cNvPr id="20" name="Shape 16"/>
+          <p:cNvPr id="19" name="Shape 16"/>
           <p:cNvSpPr/>
           <p:nvPr/>
         </p:nvSpPr>
@@ -22829,7 +22764,7 @@
       </p:sp>
       <p:sp>
         <p:nvSpPr>
-          <p:cNvPr id="21" name="Text 17"/>
+          <p:cNvPr id="20" name="Text 17"/>
           <p:cNvSpPr txBox="1"/>
           <p:nvPr/>
         </p:nvSpPr>
@@ -22868,7 +22803,7 @@
       </p:sp>
       <p:sp>
         <p:nvSpPr>
-          <p:cNvPr id="22" name="Shape 18"/>
+          <p:cNvPr id="21" name="Shape 18"/>
           <p:cNvSpPr/>
           <p:nvPr/>
         </p:nvSpPr>
@@ -22893,7 +22828,7 @@
       </p:sp>
       <p:sp>
         <p:nvSpPr>
-          <p:cNvPr id="23" name="Text 19"/>
+          <p:cNvPr id="22" name="Text 19"/>
           <p:cNvSpPr txBox="1"/>
           <p:nvPr/>
         </p:nvSpPr>
@@ -22932,7 +22867,7 @@
       </p:sp>
       <p:sp>
         <p:nvSpPr>
-          <p:cNvPr id="24" name="Shape 20"/>
+          <p:cNvPr id="23" name="Shape 20"/>
           <p:cNvSpPr/>
           <p:nvPr/>
         </p:nvSpPr>
@@ -22957,7 +22892,7 @@
       </p:sp>
       <p:sp>
         <p:nvSpPr>
-          <p:cNvPr id="25" name="Text 21"/>
+          <p:cNvPr id="24" name="Text 21"/>
           <p:cNvSpPr txBox="1"/>
           <p:nvPr/>
         </p:nvSpPr>
@@ -22996,7 +22931,7 @@
       </p:sp>
       <p:sp>
         <p:nvSpPr>
-          <p:cNvPr id="26" name="Shape 22"/>
+          <p:cNvPr id="25" name="Shape 22"/>
           <p:cNvSpPr/>
           <p:nvPr/>
         </p:nvSpPr>
@@ -23021,7 +22956,7 @@
       </p:sp>
       <p:sp>
         <p:nvSpPr>
-          <p:cNvPr id="27" name="Text 23"/>
+          <p:cNvPr id="26" name="Text 23"/>
           <p:cNvSpPr txBox="1"/>
           <p:nvPr/>
         </p:nvSpPr>
@@ -23060,7 +22995,7 @@
       </p:sp>
       <p:sp>
         <p:nvSpPr>
-          <p:cNvPr id="28" name="Shape 24"/>
+          <p:cNvPr id="27" name="Shape 24"/>
           <p:cNvSpPr/>
           <p:nvPr/>
         </p:nvSpPr>
@@ -23085,7 +23020,7 @@
       </p:sp>
       <p:sp>
         <p:nvSpPr>
-          <p:cNvPr id="29" name="Text 25"/>
+          <p:cNvPr id="28" name="Text 25"/>
           <p:cNvSpPr txBox="1"/>
           <p:nvPr/>
         </p:nvSpPr>
@@ -23124,7 +23059,7 @@
       </p:sp>
       <p:sp>
         <p:nvSpPr>
-          <p:cNvPr id="30" name="Shape 26"/>
+          <p:cNvPr id="29" name="Shape 26"/>
           <p:cNvSpPr/>
           <p:nvPr/>
         </p:nvSpPr>
@@ -23149,7 +23084,7 @@
       </p:sp>
       <p:sp>
         <p:nvSpPr>
-          <p:cNvPr id="31" name="Text 27"/>
+          <p:cNvPr id="30" name="Text 27"/>
           <p:cNvSpPr txBox="1"/>
           <p:nvPr/>
         </p:nvSpPr>
@@ -23188,7 +23123,7 @@
       </p:sp>
       <p:sp>
         <p:nvSpPr>
-          <p:cNvPr id="32" name="Shape 28"/>
+          <p:cNvPr id="31" name="Shape 28"/>
           <p:cNvSpPr/>
           <p:nvPr/>
         </p:nvSpPr>
@@ -23213,7 +23148,7 @@
       </p:sp>
       <p:sp>
         <p:nvSpPr>
-          <p:cNvPr id="33" name="Text 29"/>
+          <p:cNvPr id="32" name="Text 29"/>
           <p:cNvSpPr txBox="1"/>
           <p:nvPr/>
         </p:nvSpPr>
@@ -23252,7 +23187,7 @@
       </p:sp>
       <p:sp>
         <p:nvSpPr>
-          <p:cNvPr id="34" name="Shape 30"/>
+          <p:cNvPr id="33" name="Shape 30"/>
           <p:cNvSpPr/>
           <p:nvPr/>
         </p:nvSpPr>
@@ -23277,7 +23212,7 @@
       </p:sp>
       <p:sp>
         <p:nvSpPr>
-          <p:cNvPr id="35" name="Text 31"/>
+          <p:cNvPr id="34" name="Text 31"/>
           <p:cNvSpPr txBox="1"/>
           <p:nvPr/>
         </p:nvSpPr>
@@ -23316,7 +23251,7 @@
       </p:sp>
       <p:sp>
         <p:nvSpPr>
-          <p:cNvPr id="36" name="Shape 32"/>
+          <p:cNvPr id="35" name="Shape 32"/>
           <p:cNvSpPr/>
           <p:nvPr/>
         </p:nvSpPr>
@@ -23341,7 +23276,7 @@
       </p:sp>
       <p:sp>
         <p:nvSpPr>
-          <p:cNvPr id="37" name="Text 33"/>
+          <p:cNvPr id="36" name="Text 33"/>
           <p:cNvSpPr txBox="1"/>
           <p:nvPr/>
         </p:nvSpPr>
@@ -23380,7 +23315,7 @@
       </p:sp>
       <p:sp>
         <p:nvSpPr>
-          <p:cNvPr id="38" name="Shape 34"/>
+          <p:cNvPr id="37" name="Shape 34"/>
           <p:cNvSpPr/>
           <p:nvPr/>
         </p:nvSpPr>
@@ -23405,7 +23340,7 @@
       </p:sp>
       <p:sp>
         <p:nvSpPr>
-          <p:cNvPr id="39" name="Text 35"/>
+          <p:cNvPr id="38" name="Text 35"/>
           <p:cNvSpPr txBox="1"/>
           <p:nvPr/>
         </p:nvSpPr>
@@ -23444,7 +23379,7 @@
       </p:sp>
       <p:sp>
         <p:nvSpPr>
-          <p:cNvPr id="40" name="Shape 36"/>
+          <p:cNvPr id="39" name="Shape 36"/>
           <p:cNvSpPr/>
           <p:nvPr/>
         </p:nvSpPr>
@@ -23469,7 +23404,7 @@
       </p:sp>
       <p:sp>
         <p:nvSpPr>
-          <p:cNvPr id="41" name="Text 37"/>
+          <p:cNvPr id="40" name="Text 37"/>
           <p:cNvSpPr txBox="1"/>
           <p:nvPr/>
         </p:nvSpPr>
@@ -23508,7 +23443,7 @@
       </p:sp>
       <p:sp>
         <p:nvSpPr>
-          <p:cNvPr id="42" name="Shape 38"/>
+          <p:cNvPr id="41" name="Shape 38"/>
           <p:cNvSpPr/>
           <p:nvPr/>
         </p:nvSpPr>
@@ -23533,7 +23468,7 @@
       </p:sp>
       <p:sp>
         <p:nvSpPr>
-          <p:cNvPr id="43" name="Text 39"/>
+          <p:cNvPr id="42" name="Text 39"/>
           <p:cNvSpPr txBox="1"/>
           <p:nvPr/>
         </p:nvSpPr>
@@ -23572,7 +23507,7 @@
       </p:sp>
       <p:sp>
         <p:nvSpPr>
-          <p:cNvPr id="44" name="Shape 40"/>
+          <p:cNvPr id="43" name="Shape 40"/>
           <p:cNvSpPr/>
           <p:nvPr/>
         </p:nvSpPr>
@@ -23597,7 +23532,7 @@
       </p:sp>
       <p:sp>
         <p:nvSpPr>
-          <p:cNvPr id="45" name="Text 41"/>
+          <p:cNvPr id="44" name="Text 41"/>
           <p:cNvSpPr txBox="1"/>
           <p:nvPr/>
         </p:nvSpPr>
@@ -23636,7 +23571,7 @@
       </p:sp>
       <p:sp>
         <p:nvSpPr>
-          <p:cNvPr id="46" name="Shape 42"/>
+          <p:cNvPr id="45" name="Shape 42"/>
           <p:cNvSpPr/>
           <p:nvPr/>
         </p:nvSpPr>
@@ -23661,7 +23596,7 @@
       </p:sp>
       <p:sp>
         <p:nvSpPr>
-          <p:cNvPr id="47" name="Text 43"/>
+          <p:cNvPr id="46" name="Text 43"/>
           <p:cNvSpPr txBox="1"/>
           <p:nvPr/>
         </p:nvSpPr>
@@ -23700,7 +23635,7 @@
       </p:sp>
       <p:sp>
         <p:nvSpPr>
-          <p:cNvPr id="48" name="Shape 44"/>
+          <p:cNvPr id="47" name="Shape 44"/>
           <p:cNvSpPr/>
           <p:nvPr/>
         </p:nvSpPr>
@@ -23725,7 +23660,7 @@
       </p:sp>
       <p:sp>
         <p:nvSpPr>
-          <p:cNvPr id="49" name="Text 45"/>
+          <p:cNvPr id="48" name="Text 45"/>
           <p:cNvSpPr txBox="1"/>
           <p:nvPr/>
         </p:nvSpPr>
@@ -23764,7 +23699,7 @@
       </p:sp>
       <p:sp>
         <p:nvSpPr>
-          <p:cNvPr id="50" name="Shape 46"/>
+          <p:cNvPr id="49" name="Shape 46"/>
           <p:cNvSpPr/>
           <p:nvPr/>
         </p:nvSpPr>
@@ -23789,7 +23724,7 @@
       </p:sp>
       <p:sp>
         <p:nvSpPr>
-          <p:cNvPr id="51" name="Text 47"/>
+          <p:cNvPr id="50" name="Text 47"/>
           <p:cNvSpPr txBox="1"/>
           <p:nvPr/>
         </p:nvSpPr>
@@ -23828,7 +23763,7 @@
       </p:sp>
       <p:sp>
         <p:nvSpPr>
-          <p:cNvPr id="52" name="Shape 48"/>
+          <p:cNvPr id="51" name="Shape 48"/>
           <p:cNvSpPr/>
           <p:nvPr/>
         </p:nvSpPr>
@@ -23853,7 +23788,7 @@
       </p:sp>
       <p:sp>
         <p:nvSpPr>
-          <p:cNvPr id="53" name="Text 49"/>
+          <p:cNvPr id="52" name="Text 49"/>
           <p:cNvSpPr txBox="1"/>
           <p:nvPr/>
         </p:nvSpPr>
@@ -23892,7 +23827,7 @@
       </p:sp>
       <p:sp>
         <p:nvSpPr>
-          <p:cNvPr id="54" name="Shape 50"/>
+          <p:cNvPr id="53" name="Shape 50"/>
           <p:cNvSpPr/>
           <p:nvPr/>
         </p:nvSpPr>
@@ -23917,7 +23852,7 @@
       </p:sp>
       <p:sp>
         <p:nvSpPr>
-          <p:cNvPr id="55" name="Text 51"/>
+          <p:cNvPr id="54" name="Text 51"/>
           <p:cNvSpPr txBox="1"/>
           <p:nvPr/>
         </p:nvSpPr>
@@ -23956,7 +23891,7 @@
       </p:sp>
       <p:sp>
         <p:nvSpPr>
-          <p:cNvPr id="56" name="Shape 52"/>
+          <p:cNvPr id="55" name="Shape 52"/>
           <p:cNvSpPr/>
           <p:nvPr/>
         </p:nvSpPr>
@@ -23981,7 +23916,7 @@
       </p:sp>
       <p:sp>
         <p:nvSpPr>
-          <p:cNvPr id="57" name="Text 53"/>
+          <p:cNvPr id="56" name="Text 53"/>
           <p:cNvSpPr txBox="1"/>
           <p:nvPr/>
         </p:nvSpPr>
@@ -24020,7 +23955,7 @@
       </p:sp>
       <p:sp>
         <p:nvSpPr>
-          <p:cNvPr id="58" name="Shape 54"/>
+          <p:cNvPr id="57" name="Shape 54"/>
           <p:cNvSpPr/>
           <p:nvPr/>
         </p:nvSpPr>
@@ -24045,7 +23980,7 @@
       </p:sp>
       <p:sp>
         <p:nvSpPr>
-          <p:cNvPr id="59" name="Text 55"/>
+          <p:cNvPr id="58" name="Text 55"/>
           <p:cNvSpPr txBox="1"/>
           <p:nvPr/>
         </p:nvSpPr>
@@ -24084,7 +24019,7 @@
       </p:sp>
       <p:sp>
         <p:nvSpPr>
-          <p:cNvPr id="60" name="Shape 56"/>
+          <p:cNvPr id="59" name="Shape 56"/>
           <p:cNvSpPr/>
           <p:nvPr/>
         </p:nvSpPr>
@@ -24109,7 +24044,7 @@
       </p:sp>
       <p:sp>
         <p:nvSpPr>
-          <p:cNvPr id="61" name="Text 57"/>
+          <p:cNvPr id="60" name="Text 57"/>
           <p:cNvSpPr txBox="1"/>
           <p:nvPr/>
         </p:nvSpPr>
@@ -24148,7 +24083,7 @@
       </p:sp>
       <p:sp>
         <p:nvSpPr>
-          <p:cNvPr id="62" name="Shape 58"/>
+          <p:cNvPr id="61" name="Shape 58"/>
           <p:cNvSpPr/>
           <p:nvPr/>
         </p:nvSpPr>
@@ -24173,7 +24108,7 @@
       </p:sp>
       <p:sp>
         <p:nvSpPr>
-          <p:cNvPr id="63" name="Text 59"/>
+          <p:cNvPr id="62" name="Text 59"/>
           <p:cNvSpPr txBox="1"/>
           <p:nvPr/>
         </p:nvSpPr>
@@ -24212,7 +24147,7 @@
       </p:sp>
       <p:sp>
         <p:nvSpPr>
-          <p:cNvPr id="64" name="Shape 60"/>
+          <p:cNvPr id="63" name="Shape 60"/>
           <p:cNvSpPr/>
           <p:nvPr/>
         </p:nvSpPr>
@@ -24237,7 +24172,7 @@
       </p:sp>
       <p:sp>
         <p:nvSpPr>
-          <p:cNvPr id="65" name="Text 61"/>
+          <p:cNvPr id="64" name="Text 61"/>
           <p:cNvSpPr txBox="1"/>
           <p:nvPr/>
         </p:nvSpPr>
@@ -24276,7 +24211,7 @@
       </p:sp>
       <p:sp>
         <p:nvSpPr>
-          <p:cNvPr id="66" name="Shape 62"/>
+          <p:cNvPr id="65" name="Shape 62"/>
           <p:cNvSpPr/>
           <p:nvPr/>
         </p:nvSpPr>
@@ -24301,7 +24236,7 @@
       </p:sp>
       <p:sp>
         <p:nvSpPr>
-          <p:cNvPr id="67" name="Text 63"/>
+          <p:cNvPr id="66" name="Text 63"/>
           <p:cNvSpPr txBox="1"/>
           <p:nvPr/>
         </p:nvSpPr>
@@ -24340,7 +24275,7 @@
       </p:sp>
       <p:sp>
         <p:nvSpPr>
-          <p:cNvPr id="68" name="Shape 64"/>
+          <p:cNvPr id="67" name="Shape 64"/>
           <p:cNvSpPr/>
           <p:nvPr/>
         </p:nvSpPr>
@@ -24365,7 +24300,7 @@
       </p:sp>
       <p:sp>
         <p:nvSpPr>
-          <p:cNvPr id="69" name="Text 65"/>
+          <p:cNvPr id="68" name="Text 65"/>
           <p:cNvSpPr txBox="1"/>
           <p:nvPr/>
         </p:nvSpPr>
@@ -24404,7 +24339,7 @@
       </p:sp>
       <p:sp>
         <p:nvSpPr>
-          <p:cNvPr id="70" name="Shape 66"/>
+          <p:cNvPr id="69" name="Shape 66"/>
           <p:cNvSpPr/>
           <p:nvPr/>
         </p:nvSpPr>
@@ -24429,7 +24364,7 @@
       </p:sp>
       <p:sp>
         <p:nvSpPr>
-          <p:cNvPr id="71" name="Text 67"/>
+          <p:cNvPr id="70" name="Text 67"/>
           <p:cNvSpPr txBox="1"/>
           <p:nvPr/>
         </p:nvSpPr>
@@ -24468,7 +24403,7 @@
       </p:sp>
       <p:sp>
         <p:nvSpPr>
-          <p:cNvPr id="72" name="Shape 68"/>
+          <p:cNvPr id="71" name="Shape 68"/>
           <p:cNvSpPr/>
           <p:nvPr/>
         </p:nvSpPr>
@@ -24493,7 +24428,7 @@
       </p:sp>
       <p:sp>
         <p:nvSpPr>
-          <p:cNvPr id="73" name="Text 69"/>
+          <p:cNvPr id="72" name="Text 69"/>
           <p:cNvSpPr txBox="1"/>
           <p:nvPr/>
         </p:nvSpPr>
@@ -24532,7 +24467,7 @@
       </p:sp>
       <p:sp>
         <p:nvSpPr>
-          <p:cNvPr id="74" name="Shape 70"/>
+          <p:cNvPr id="73" name="Shape 70"/>
           <p:cNvSpPr/>
           <p:nvPr/>
         </p:nvSpPr>
@@ -24557,7 +24492,7 @@
       </p:sp>
       <p:sp>
         <p:nvSpPr>
-          <p:cNvPr id="75" name="Text 71"/>
+          <p:cNvPr id="74" name="Text 71"/>
           <p:cNvSpPr txBox="1"/>
           <p:nvPr/>
         </p:nvSpPr>
@@ -24596,7 +24531,7 @@
       </p:sp>
       <p:sp>
         <p:nvSpPr>
-          <p:cNvPr id="76" name="Text 72"/>
+          <p:cNvPr id="75" name="Text 72"/>
           <p:cNvSpPr txBox="1"/>
           <p:nvPr/>
         </p:nvSpPr>
@@ -24784,7 +24719,7 @@
       </p:sp>
       <p:sp>
         <p:nvSpPr>
-          <p:cNvPr id="6" name="Text 3"/>
+          <p:cNvPr id="5" name="Text 3"/>
           <p:cNvSpPr txBox="1"/>
           <p:nvPr/>
         </p:nvSpPr>
@@ -24823,7 +24758,7 @@
       </p:sp>
       <p:sp>
         <p:nvSpPr>
-          <p:cNvPr id="7" name="Text 4"/>
+          <p:cNvPr id="6" name="Text 4"/>
           <p:cNvSpPr txBox="1"/>
           <p:nvPr/>
         </p:nvSpPr>
@@ -24862,7 +24797,7 @@
       </p:sp>
       <p:sp>
         <p:nvSpPr>
-          <p:cNvPr id="8" name="Shape 5"/>
+          <p:cNvPr id="7" name="Shape 5"/>
           <p:cNvSpPr/>
           <p:nvPr/>
         </p:nvSpPr>
@@ -24887,7 +24822,7 @@
       </p:sp>
       <p:sp>
         <p:nvSpPr>
-          <p:cNvPr id="9" name="Text 6"/>
+          <p:cNvPr id="8" name="Text 6"/>
           <p:cNvSpPr txBox="1"/>
           <p:nvPr/>
         </p:nvSpPr>
@@ -24926,7 +24861,7 @@
       </p:sp>
       <p:sp>
         <p:nvSpPr>
-          <p:cNvPr id="10" name="Shape 7"/>
+          <p:cNvPr id="9" name="Shape 7"/>
           <p:cNvSpPr/>
           <p:nvPr/>
         </p:nvSpPr>
@@ -24951,7 +24886,7 @@
       </p:sp>
       <p:sp>
         <p:nvSpPr>
-          <p:cNvPr id="11" name="Text 8"/>
+          <p:cNvPr id="10" name="Text 8"/>
           <p:cNvSpPr txBox="1"/>
           <p:nvPr/>
         </p:nvSpPr>
@@ -24990,7 +24925,7 @@
       </p:sp>
       <p:sp>
         <p:nvSpPr>
-          <p:cNvPr id="12" name="Shape 9"/>
+          <p:cNvPr id="11" name="Shape 9"/>
           <p:cNvSpPr/>
           <p:nvPr/>
         </p:nvSpPr>
@@ -25015,7 +24950,7 @@
       </p:sp>
       <p:sp>
         <p:nvSpPr>
-          <p:cNvPr id="13" name="Text 10"/>
+          <p:cNvPr id="12" name="Text 10"/>
           <p:cNvSpPr txBox="1"/>
           <p:nvPr/>
         </p:nvSpPr>
@@ -25054,7 +24989,7 @@
       </p:sp>
       <p:sp>
         <p:nvSpPr>
-          <p:cNvPr id="14" name="Shape 11"/>
+          <p:cNvPr id="13" name="Shape 11"/>
           <p:cNvSpPr/>
           <p:nvPr/>
         </p:nvSpPr>
@@ -25079,7 +25014,7 @@
       </p:sp>
       <p:sp>
         <p:nvSpPr>
-          <p:cNvPr id="15" name="Text 12"/>
+          <p:cNvPr id="14" name="Text 12"/>
           <p:cNvSpPr txBox="1"/>
           <p:nvPr/>
         </p:nvSpPr>
@@ -25118,7 +25053,7 @@
       </p:sp>
       <p:sp>
         <p:nvSpPr>
-          <p:cNvPr id="16" name="Shape 13"/>
+          <p:cNvPr id="15" name="Shape 13"/>
           <p:cNvSpPr/>
           <p:nvPr/>
         </p:nvSpPr>
@@ -25143,7 +25078,7 @@
       </p:sp>
       <p:sp>
         <p:nvSpPr>
-          <p:cNvPr id="17" name="Text 14"/>
+          <p:cNvPr id="16" name="Text 14"/>
           <p:cNvSpPr txBox="1"/>
           <p:nvPr/>
         </p:nvSpPr>
@@ -25182,7 +25117,7 @@
       </p:sp>
       <p:sp>
         <p:nvSpPr>
-          <p:cNvPr id="18" name="Shape 15"/>
+          <p:cNvPr id="17" name="Shape 15"/>
           <p:cNvSpPr/>
           <p:nvPr/>
         </p:nvSpPr>
@@ -25207,7 +25142,7 @@
       </p:sp>
       <p:sp>
         <p:nvSpPr>
-          <p:cNvPr id="19" name="Text 16"/>
+          <p:cNvPr id="18" name="Text 16"/>
           <p:cNvSpPr txBox="1"/>
           <p:nvPr/>
         </p:nvSpPr>
@@ -25246,7 +25181,7 @@
       </p:sp>
       <p:sp>
         <p:nvSpPr>
-          <p:cNvPr id="20" name="Shape 17"/>
+          <p:cNvPr id="19" name="Shape 17"/>
           <p:cNvSpPr/>
           <p:nvPr/>
         </p:nvSpPr>
@@ -25271,7 +25206,7 @@
       </p:sp>
       <p:sp>
         <p:nvSpPr>
-          <p:cNvPr id="21" name="Text 18"/>
+          <p:cNvPr id="20" name="Text 18"/>
           <p:cNvSpPr txBox="1"/>
           <p:nvPr/>
         </p:nvSpPr>
@@ -25310,7 +25245,7 @@
       </p:sp>
       <p:sp>
         <p:nvSpPr>
-          <p:cNvPr id="22" name="Shape 19"/>
+          <p:cNvPr id="21" name="Shape 19"/>
           <p:cNvSpPr/>
           <p:nvPr/>
         </p:nvSpPr>
@@ -25335,7 +25270,7 @@
       </p:sp>
       <p:sp>
         <p:nvSpPr>
-          <p:cNvPr id="23" name="Text 20"/>
+          <p:cNvPr id="22" name="Text 20"/>
           <p:cNvSpPr txBox="1"/>
           <p:nvPr/>
         </p:nvSpPr>
@@ -25374,7 +25309,7 @@
       </p:sp>
       <p:sp>
         <p:nvSpPr>
-          <p:cNvPr id="24" name="Shape 21"/>
+          <p:cNvPr id="23" name="Shape 21"/>
           <p:cNvSpPr/>
           <p:nvPr/>
         </p:nvSpPr>
@@ -25399,7 +25334,7 @@
       </p:sp>
       <p:sp>
         <p:nvSpPr>
-          <p:cNvPr id="25" name="Text 22"/>
+          <p:cNvPr id="24" name="Text 22"/>
           <p:cNvSpPr txBox="1"/>
           <p:nvPr/>
         </p:nvSpPr>
@@ -25438,7 +25373,7 @@
       </p:sp>
       <p:sp>
         <p:nvSpPr>
-          <p:cNvPr id="26" name="Shape 23"/>
+          <p:cNvPr id="25" name="Shape 23"/>
           <p:cNvSpPr/>
           <p:nvPr/>
         </p:nvSpPr>
@@ -25463,7 +25398,7 @@
       </p:sp>
       <p:sp>
         <p:nvSpPr>
-          <p:cNvPr id="27" name="Text 24"/>
+          <p:cNvPr id="26" name="Text 24"/>
           <p:cNvSpPr txBox="1"/>
           <p:nvPr/>
         </p:nvSpPr>
@@ -25502,7 +25437,7 @@
       </p:sp>
       <p:sp>
         <p:nvSpPr>
-          <p:cNvPr id="28" name="Shape 25"/>
+          <p:cNvPr id="27" name="Shape 25"/>
           <p:cNvSpPr/>
           <p:nvPr/>
         </p:nvSpPr>
@@ -25527,7 +25462,7 @@
       </p:sp>
       <p:sp>
         <p:nvSpPr>
-          <p:cNvPr id="29" name="Text 26"/>
+          <p:cNvPr id="28" name="Text 26"/>
           <p:cNvSpPr txBox="1"/>
           <p:nvPr/>
         </p:nvSpPr>
@@ -25566,7 +25501,7 @@
       </p:sp>
       <p:sp>
         <p:nvSpPr>
-          <p:cNvPr id="30" name="Shape 27"/>
+          <p:cNvPr id="29" name="Shape 27"/>
           <p:cNvSpPr/>
           <p:nvPr/>
         </p:nvSpPr>
@@ -25591,7 +25526,7 @@
       </p:sp>
       <p:sp>
         <p:nvSpPr>
-          <p:cNvPr id="31" name="Text 28"/>
+          <p:cNvPr id="30" name="Text 28"/>
           <p:cNvSpPr txBox="1"/>
           <p:nvPr/>
         </p:nvSpPr>
@@ -25630,7 +25565,7 @@
       </p:sp>
       <p:sp>
         <p:nvSpPr>
-          <p:cNvPr id="32" name="Shape 29"/>
+          <p:cNvPr id="31" name="Shape 29"/>
           <p:cNvSpPr/>
           <p:nvPr/>
         </p:nvSpPr>
@@ -25655,7 +25590,7 @@
       </p:sp>
       <p:sp>
         <p:nvSpPr>
-          <p:cNvPr id="33" name="Text 30"/>
+          <p:cNvPr id="32" name="Text 30"/>
           <p:cNvSpPr txBox="1"/>
           <p:nvPr/>
         </p:nvSpPr>
@@ -25694,7 +25629,7 @@
       </p:sp>
       <p:sp>
         <p:nvSpPr>
-          <p:cNvPr id="34" name="Shape 31"/>
+          <p:cNvPr id="33" name="Shape 31"/>
           <p:cNvSpPr/>
           <p:nvPr/>
         </p:nvSpPr>
@@ -25719,7 +25654,7 @@
       </p:sp>
       <p:sp>
         <p:nvSpPr>
-          <p:cNvPr id="35" name="Text 32"/>
+          <p:cNvPr id="34" name="Text 32"/>
           <p:cNvSpPr txBox="1"/>
           <p:nvPr/>
         </p:nvSpPr>
@@ -25758,7 +25693,7 @@
       </p:sp>
       <p:sp>
         <p:nvSpPr>
-          <p:cNvPr id="36" name="Shape 33"/>
+          <p:cNvPr id="35" name="Shape 33"/>
           <p:cNvSpPr/>
           <p:nvPr/>
         </p:nvSpPr>
@@ -25783,7 +25718,7 @@
       </p:sp>
       <p:sp>
         <p:nvSpPr>
-          <p:cNvPr id="37" name="Text 34"/>
+          <p:cNvPr id="36" name="Text 34"/>
           <p:cNvSpPr txBox="1"/>
           <p:nvPr/>
         </p:nvSpPr>
@@ -25822,7 +25757,7 @@
       </p:sp>
       <p:sp>
         <p:nvSpPr>
-          <p:cNvPr id="38" name="Shape 35"/>
+          <p:cNvPr id="37" name="Shape 35"/>
           <p:cNvSpPr/>
           <p:nvPr/>
         </p:nvSpPr>
@@ -25847,7 +25782,7 @@
       </p:sp>
       <p:sp>
         <p:nvSpPr>
-          <p:cNvPr id="39" name="Text 36"/>
+          <p:cNvPr id="38" name="Text 36"/>
           <p:cNvSpPr txBox="1"/>
           <p:nvPr/>
         </p:nvSpPr>
@@ -25886,7 +25821,7 @@
       </p:sp>
       <p:sp>
         <p:nvSpPr>
-          <p:cNvPr id="40" name="Shape 37"/>
+          <p:cNvPr id="39" name="Shape 37"/>
           <p:cNvSpPr/>
           <p:nvPr/>
         </p:nvSpPr>
@@ -25911,7 +25846,7 @@
       </p:sp>
       <p:sp>
         <p:nvSpPr>
-          <p:cNvPr id="41" name="Text 38"/>
+          <p:cNvPr id="40" name="Text 38"/>
           <p:cNvSpPr txBox="1"/>
           <p:nvPr/>
         </p:nvSpPr>
@@ -25950,7 +25885,7 @@
       </p:sp>
       <p:sp>
         <p:nvSpPr>
-          <p:cNvPr id="42" name="Shape 39"/>
+          <p:cNvPr id="41" name="Shape 39"/>
           <p:cNvSpPr/>
           <p:nvPr/>
         </p:nvSpPr>
@@ -25975,7 +25910,7 @@
       </p:sp>
       <p:sp>
         <p:nvSpPr>
-          <p:cNvPr id="43" name="Text 40"/>
+          <p:cNvPr id="42" name="Text 40"/>
           <p:cNvSpPr txBox="1"/>
           <p:nvPr/>
         </p:nvSpPr>
@@ -26014,7 +25949,7 @@
       </p:sp>
       <p:sp>
         <p:nvSpPr>
-          <p:cNvPr id="44" name="Shape 41"/>
+          <p:cNvPr id="43" name="Shape 41"/>
           <p:cNvSpPr/>
           <p:nvPr/>
         </p:nvSpPr>
@@ -26039,7 +25974,7 @@
       </p:sp>
       <p:sp>
         <p:nvSpPr>
-          <p:cNvPr id="45" name="Text 42"/>
+          <p:cNvPr id="44" name="Text 42"/>
           <p:cNvSpPr txBox="1"/>
           <p:nvPr/>
         </p:nvSpPr>
@@ -26078,7 +26013,7 @@
       </p:sp>
       <p:sp>
         <p:nvSpPr>
-          <p:cNvPr id="46" name="Shape 43"/>
+          <p:cNvPr id="45" name="Shape 43"/>
           <p:cNvSpPr/>
           <p:nvPr/>
         </p:nvSpPr>
@@ -26103,7 +26038,7 @@
       </p:sp>
       <p:sp>
         <p:nvSpPr>
-          <p:cNvPr id="47" name="Text 44"/>
+          <p:cNvPr id="46" name="Text 44"/>
           <p:cNvSpPr txBox="1"/>
           <p:nvPr/>
         </p:nvSpPr>
@@ -26142,7 +26077,7 @@
       </p:sp>
       <p:sp>
         <p:nvSpPr>
-          <p:cNvPr id="48" name="Shape 45"/>
+          <p:cNvPr id="47" name="Shape 45"/>
           <p:cNvSpPr/>
           <p:nvPr/>
         </p:nvSpPr>
@@ -26167,7 +26102,7 @@
       </p:sp>
       <p:sp>
         <p:nvSpPr>
-          <p:cNvPr id="49" name="Text 46"/>
+          <p:cNvPr id="48" name="Text 46"/>
           <p:cNvSpPr txBox="1"/>
           <p:nvPr/>
         </p:nvSpPr>
@@ -26206,7 +26141,7 @@
       </p:sp>
       <p:sp>
         <p:nvSpPr>
-          <p:cNvPr id="50" name="Shape 47"/>
+          <p:cNvPr id="49" name="Shape 47"/>
           <p:cNvSpPr/>
           <p:nvPr/>
         </p:nvSpPr>
@@ -26231,7 +26166,7 @@
       </p:sp>
       <p:sp>
         <p:nvSpPr>
-          <p:cNvPr id="51" name="Text 48"/>
+          <p:cNvPr id="50" name="Text 48"/>
           <p:cNvSpPr txBox="1"/>
           <p:nvPr/>
         </p:nvSpPr>
@@ -26270,7 +26205,7 @@
       </p:sp>
       <p:sp>
         <p:nvSpPr>
-          <p:cNvPr id="52" name="Shape 49"/>
+          <p:cNvPr id="51" name="Shape 49"/>
           <p:cNvSpPr/>
           <p:nvPr/>
         </p:nvSpPr>
@@ -26295,7 +26230,7 @@
       </p:sp>
       <p:sp>
         <p:nvSpPr>
-          <p:cNvPr id="53" name="Text 50"/>
+          <p:cNvPr id="52" name="Text 50"/>
           <p:cNvSpPr txBox="1"/>
           <p:nvPr/>
         </p:nvSpPr>
@@ -26334,7 +26269,7 @@
       </p:sp>
       <p:sp>
         <p:nvSpPr>
-          <p:cNvPr id="54" name="Shape 51"/>
+          <p:cNvPr id="53" name="Shape 51"/>
           <p:cNvSpPr/>
           <p:nvPr/>
         </p:nvSpPr>
@@ -26359,7 +26294,7 @@
       </p:sp>
       <p:sp>
         <p:nvSpPr>
-          <p:cNvPr id="55" name="Text 52"/>
+          <p:cNvPr id="54" name="Text 52"/>
           <p:cNvSpPr txBox="1"/>
           <p:nvPr/>
         </p:nvSpPr>
@@ -26398,7 +26333,7 @@
       </p:sp>
       <p:sp>
         <p:nvSpPr>
-          <p:cNvPr id="56" name="Shape 53"/>
+          <p:cNvPr id="55" name="Shape 53"/>
           <p:cNvSpPr/>
           <p:nvPr/>
         </p:nvSpPr>
@@ -26423,7 +26358,7 @@
       </p:sp>
       <p:sp>
         <p:nvSpPr>
-          <p:cNvPr id="57" name="Text 54"/>
+          <p:cNvPr id="56" name="Text 54"/>
           <p:cNvSpPr txBox="1"/>
           <p:nvPr/>
         </p:nvSpPr>
@@ -26462,7 +26397,7 @@
       </p:sp>
       <p:sp>
         <p:nvSpPr>
-          <p:cNvPr id="58" name="Shape 55"/>
+          <p:cNvPr id="57" name="Shape 55"/>
           <p:cNvSpPr/>
           <p:nvPr/>
         </p:nvSpPr>
@@ -26487,7 +26422,7 @@
       </p:sp>
       <p:sp>
         <p:nvSpPr>
-          <p:cNvPr id="59" name="Text 56"/>
+          <p:cNvPr id="58" name="Text 56"/>
           <p:cNvSpPr txBox="1"/>
           <p:nvPr/>
         </p:nvSpPr>
@@ -26526,7 +26461,7 @@
       </p:sp>
       <p:sp>
         <p:nvSpPr>
-          <p:cNvPr id="60" name="Shape 57"/>
+          <p:cNvPr id="59" name="Shape 57"/>
           <p:cNvSpPr/>
           <p:nvPr/>
         </p:nvSpPr>
@@ -26551,7 +26486,7 @@
       </p:sp>
       <p:sp>
         <p:nvSpPr>
-          <p:cNvPr id="61" name="Text 58"/>
+          <p:cNvPr id="60" name="Text 58"/>
           <p:cNvSpPr txBox="1"/>
           <p:nvPr/>
         </p:nvSpPr>
@@ -26590,7 +26525,7 @@
       </p:sp>
       <p:sp>
         <p:nvSpPr>
-          <p:cNvPr id="62" name="Shape 59"/>
+          <p:cNvPr id="61" name="Shape 59"/>
           <p:cNvSpPr/>
           <p:nvPr/>
         </p:nvSpPr>
@@ -26615,7 +26550,7 @@
       </p:sp>
       <p:sp>
         <p:nvSpPr>
-          <p:cNvPr id="63" name="Text 60"/>
+          <p:cNvPr id="62" name="Text 60"/>
           <p:cNvSpPr txBox="1"/>
           <p:nvPr/>
         </p:nvSpPr>
@@ -26654,7 +26589,7 @@
       </p:sp>
       <p:sp>
         <p:nvSpPr>
-          <p:cNvPr id="64" name="Shape 61"/>
+          <p:cNvPr id="63" name="Shape 61"/>
           <p:cNvSpPr/>
           <p:nvPr/>
         </p:nvSpPr>
@@ -26679,7 +26614,7 @@
       </p:sp>
       <p:sp>
         <p:nvSpPr>
-          <p:cNvPr id="65" name="Text 62"/>
+          <p:cNvPr id="64" name="Text 62"/>
           <p:cNvSpPr txBox="1"/>
           <p:nvPr/>
         </p:nvSpPr>
@@ -26718,7 +26653,7 @@
       </p:sp>
       <p:sp>
         <p:nvSpPr>
-          <p:cNvPr id="66" name="Shape 63"/>
+          <p:cNvPr id="65" name="Shape 63"/>
           <p:cNvSpPr/>
           <p:nvPr/>
         </p:nvSpPr>
@@ -26743,7 +26678,7 @@
       </p:sp>
       <p:sp>
         <p:nvSpPr>
-          <p:cNvPr id="67" name="Text 64"/>
+          <p:cNvPr id="66" name="Text 64"/>
           <p:cNvSpPr txBox="1"/>
           <p:nvPr/>
         </p:nvSpPr>
@@ -26782,7 +26717,7 @@
       </p:sp>
       <p:sp>
         <p:nvSpPr>
-          <p:cNvPr id="68" name="Shape 65"/>
+          <p:cNvPr id="67" name="Shape 65"/>
           <p:cNvSpPr/>
           <p:nvPr/>
         </p:nvSpPr>
@@ -26807,7 +26742,7 @@
       </p:sp>
       <p:sp>
         <p:nvSpPr>
-          <p:cNvPr id="69" name="Text 66"/>
+          <p:cNvPr id="68" name="Text 66"/>
           <p:cNvSpPr txBox="1"/>
           <p:nvPr/>
         </p:nvSpPr>
@@ -26846,7 +26781,7 @@
       </p:sp>
       <p:sp>
         <p:nvSpPr>
-          <p:cNvPr id="70" name="Shape 67"/>
+          <p:cNvPr id="69" name="Shape 67"/>
           <p:cNvSpPr/>
           <p:nvPr/>
         </p:nvSpPr>
@@ -26871,7 +26806,7 @@
       </p:sp>
       <p:sp>
         <p:nvSpPr>
-          <p:cNvPr id="71" name="Text 68"/>
+          <p:cNvPr id="70" name="Text 68"/>
           <p:cNvSpPr txBox="1"/>
           <p:nvPr/>
         </p:nvSpPr>
@@ -26910,7 +26845,7 @@
       </p:sp>
       <p:sp>
         <p:nvSpPr>
-          <p:cNvPr id="72" name="Shape 69"/>
+          <p:cNvPr id="71" name="Shape 69"/>
           <p:cNvSpPr/>
           <p:nvPr/>
         </p:nvSpPr>
@@ -26935,7 +26870,7 @@
       </p:sp>
       <p:sp>
         <p:nvSpPr>
-          <p:cNvPr id="73" name="Text 70"/>
+          <p:cNvPr id="72" name="Text 70"/>
           <p:cNvSpPr txBox="1"/>
           <p:nvPr/>
         </p:nvSpPr>
@@ -26974,7 +26909,7 @@
       </p:sp>
       <p:sp>
         <p:nvSpPr>
-          <p:cNvPr id="74" name="Shape 71"/>
+          <p:cNvPr id="73" name="Shape 71"/>
           <p:cNvSpPr/>
           <p:nvPr/>
         </p:nvSpPr>
@@ -26999,7 +26934,7 @@
       </p:sp>
       <p:sp>
         <p:nvSpPr>
-          <p:cNvPr id="75" name="Text 72"/>
+          <p:cNvPr id="74" name="Text 72"/>
           <p:cNvSpPr txBox="1"/>
           <p:nvPr/>
         </p:nvSpPr>
@@ -27038,7 +26973,7 @@
       </p:sp>
       <p:sp>
         <p:nvSpPr>
-          <p:cNvPr id="76" name="Shape 73"/>
+          <p:cNvPr id="75" name="Shape 73"/>
           <p:cNvSpPr/>
           <p:nvPr/>
         </p:nvSpPr>
@@ -27063,7 +26998,7 @@
       </p:sp>
       <p:sp>
         <p:nvSpPr>
-          <p:cNvPr id="77" name="Text 74"/>
+          <p:cNvPr id="76" name="Text 74"/>
           <p:cNvSpPr txBox="1"/>
           <p:nvPr/>
         </p:nvSpPr>
@@ -27102,7 +27037,7 @@
       </p:sp>
       <p:sp>
         <p:nvSpPr>
-          <p:cNvPr id="78" name="Shape 75"/>
+          <p:cNvPr id="77" name="Shape 75"/>
           <p:cNvSpPr/>
           <p:nvPr/>
         </p:nvSpPr>
@@ -27127,7 +27062,7 @@
       </p:sp>
       <p:sp>
         <p:nvSpPr>
-          <p:cNvPr id="79" name="Text 76"/>
+          <p:cNvPr id="78" name="Text 76"/>
           <p:cNvSpPr txBox="1"/>
           <p:nvPr/>
         </p:nvSpPr>
@@ -27166,7 +27101,7 @@
       </p:sp>
       <p:sp>
         <p:nvSpPr>
-          <p:cNvPr id="80" name="Text 77"/>
+          <p:cNvPr id="79" name="Text 77"/>
           <p:cNvSpPr txBox="1"/>
           <p:nvPr/>
         </p:nvSpPr>
@@ -27205,7 +27140,7 @@
       </p:sp>
       <p:sp>
         <p:nvSpPr>
-          <p:cNvPr id="81" name="Text 78"/>
+          <p:cNvPr id="80" name="Text 78"/>
           <p:cNvSpPr txBox="1"/>
           <p:nvPr/>
         </p:nvSpPr>
@@ -27244,7 +27179,7 @@
       </p:sp>
       <p:sp>
         <p:nvSpPr>
-          <p:cNvPr id="82" name="Text 79"/>
+          <p:cNvPr id="81" name="Text 79"/>
           <p:cNvSpPr txBox="1"/>
           <p:nvPr/>
         </p:nvSpPr>
@@ -27283,7 +27218,7 @@
       </p:sp>
       <p:sp>
         <p:nvSpPr>
-          <p:cNvPr id="83" name="Text 80"/>
+          <p:cNvPr id="82" name="Text 80"/>
           <p:cNvSpPr txBox="1"/>
           <p:nvPr/>
         </p:nvSpPr>
@@ -27322,7 +27257,7 @@
       </p:sp>
       <p:sp>
         <p:nvSpPr>
-          <p:cNvPr id="84" name="Text 81"/>
+          <p:cNvPr id="83" name="Text 81"/>
           <p:cNvSpPr txBox="1"/>
           <p:nvPr/>
         </p:nvSpPr>
@@ -27361,7 +27296,7 @@
       </p:sp>
       <p:sp>
         <p:nvSpPr>
-          <p:cNvPr id="85" name="Text 82"/>
+          <p:cNvPr id="84" name="Text 82"/>
           <p:cNvSpPr txBox="1"/>
           <p:nvPr/>
         </p:nvSpPr>
@@ -27400,7 +27335,7 @@
       </p:sp>
       <p:sp>
         <p:nvSpPr>
-          <p:cNvPr id="86" name="Text 83"/>
+          <p:cNvPr id="85" name="Text 83"/>
           <p:cNvSpPr txBox="1"/>
           <p:nvPr/>
         </p:nvSpPr>
@@ -27439,7 +27374,7 @@
       </p:sp>
       <p:sp>
         <p:nvSpPr>
-          <p:cNvPr id="87" name="Text 84"/>
+          <p:cNvPr id="86" name="Text 84"/>
           <p:cNvSpPr txBox="1"/>
           <p:nvPr/>
         </p:nvSpPr>
@@ -27478,7 +27413,7 @@
       </p:sp>
       <p:sp>
         <p:nvSpPr>
-          <p:cNvPr id="88" name="Text 85"/>
+          <p:cNvPr id="87" name="Text 85"/>
           <p:cNvSpPr txBox="1"/>
           <p:nvPr/>
         </p:nvSpPr>
@@ -27666,7 +27601,7 @@
       </p:sp>
       <p:sp>
         <p:nvSpPr>
-          <p:cNvPr id="6" name="Shape 3"/>
+          <p:cNvPr id="5" name="Shape 3"/>
           <p:cNvSpPr/>
           <p:nvPr/>
         </p:nvSpPr>
@@ -27691,7 +27626,7 @@
       </p:sp>
       <p:sp>
         <p:nvSpPr>
-          <p:cNvPr id="7" name="Shape 4"/>
+          <p:cNvPr id="6" name="Shape 4"/>
           <p:cNvSpPr/>
           <p:nvPr/>
         </p:nvSpPr>
@@ -27716,7 +27651,7 @@
       </p:sp>
       <p:sp>
         <p:nvSpPr>
-          <p:cNvPr id="8" name="Shape 5"/>
+          <p:cNvPr id="7" name="Shape 5"/>
           <p:cNvSpPr/>
           <p:nvPr/>
         </p:nvSpPr>
@@ -27741,7 +27676,7 @@
       </p:sp>
       <p:sp>
         <p:nvSpPr>
-          <p:cNvPr id="9" name="Shape 6"/>
+          <p:cNvPr id="8" name="Shape 6"/>
           <p:cNvSpPr/>
           <p:nvPr/>
         </p:nvSpPr>
@@ -27766,7 +27701,7 @@
       </p:sp>
       <p:sp>
         <p:nvSpPr>
-          <p:cNvPr id="10" name="Shape 7"/>
+          <p:cNvPr id="9" name="Shape 7"/>
           <p:cNvSpPr/>
           <p:nvPr/>
         </p:nvSpPr>
@@ -27791,7 +27726,7 @@
       </p:sp>
       <p:sp>
         <p:nvSpPr>
-          <p:cNvPr id="11" name="Shape 8"/>
+          <p:cNvPr id="10" name="Shape 8"/>
           <p:cNvSpPr/>
           <p:nvPr/>
         </p:nvSpPr>
@@ -27816,7 +27751,7 @@
       </p:sp>
       <p:sp>
         <p:nvSpPr>
-          <p:cNvPr id="12" name="Shape 9"/>
+          <p:cNvPr id="11" name="Shape 9"/>
           <p:cNvSpPr/>
           <p:nvPr/>
         </p:nvSpPr>
@@ -27841,7 +27776,7 @@
       </p:sp>
       <p:sp>
         <p:nvSpPr>
-          <p:cNvPr id="13" name="Shape 10"/>
+          <p:cNvPr id="12" name="Shape 10"/>
           <p:cNvSpPr/>
           <p:nvPr/>
         </p:nvSpPr>
@@ -27866,7 +27801,7 @@
       </p:sp>
       <p:sp>
         <p:nvSpPr>
-          <p:cNvPr id="14" name="Shape 11"/>
+          <p:cNvPr id="13" name="Shape 11"/>
           <p:cNvSpPr/>
           <p:nvPr/>
         </p:nvSpPr>
@@ -27891,7 +27826,7 @@
       </p:sp>
       <p:sp>
         <p:nvSpPr>
-          <p:cNvPr id="15" name="Shape 12"/>
+          <p:cNvPr id="14" name="Shape 12"/>
           <p:cNvSpPr/>
           <p:nvPr/>
         </p:nvSpPr>
@@ -27916,7 +27851,7 @@
       </p:sp>
       <p:sp>
         <p:nvSpPr>
-          <p:cNvPr id="16" name="Shape 13"/>
+          <p:cNvPr id="15" name="Shape 13"/>
           <p:cNvSpPr/>
           <p:nvPr/>
         </p:nvSpPr>
@@ -27941,7 +27876,7 @@
       </p:sp>
       <p:sp>
         <p:nvSpPr>
-          <p:cNvPr id="17" name="Shape 14"/>
+          <p:cNvPr id="16" name="Shape 14"/>
           <p:cNvSpPr/>
           <p:nvPr/>
         </p:nvSpPr>
@@ -27966,7 +27901,7 @@
       </p:sp>
       <p:sp>
         <p:nvSpPr>
-          <p:cNvPr id="18" name="Shape 15"/>
+          <p:cNvPr id="17" name="Shape 15"/>
           <p:cNvSpPr/>
           <p:nvPr/>
         </p:nvSpPr>
@@ -27991,7 +27926,7 @@
       </p:sp>
       <p:sp>
         <p:nvSpPr>
-          <p:cNvPr id="19" name="Shape 16"/>
+          <p:cNvPr id="18" name="Shape 16"/>
           <p:cNvSpPr/>
           <p:nvPr/>
         </p:nvSpPr>
@@ -28016,7 +27951,7 @@
       </p:sp>
       <p:sp>
         <p:nvSpPr>
-          <p:cNvPr id="20" name="Shape 17"/>
+          <p:cNvPr id="19" name="Shape 17"/>
           <p:cNvSpPr/>
           <p:nvPr/>
         </p:nvSpPr>
@@ -28041,7 +27976,7 @@
       </p:sp>
       <p:sp>
         <p:nvSpPr>
-          <p:cNvPr id="21" name="Shape 18"/>
+          <p:cNvPr id="20" name="Shape 18"/>
           <p:cNvSpPr/>
           <p:nvPr/>
         </p:nvSpPr>
@@ -28066,7 +28001,7 @@
       </p:sp>
       <p:sp>
         <p:nvSpPr>
-          <p:cNvPr id="22" name="Shape 19"/>
+          <p:cNvPr id="21" name="Shape 19"/>
           <p:cNvSpPr/>
           <p:nvPr/>
         </p:nvSpPr>
@@ -28091,7 +28026,7 @@
       </p:sp>
       <p:sp>
         <p:nvSpPr>
-          <p:cNvPr id="23" name="Shape 20"/>
+          <p:cNvPr id="22" name="Shape 20"/>
           <p:cNvSpPr/>
           <p:nvPr/>
         </p:nvSpPr>
@@ -28116,7 +28051,7 @@
       </p:sp>
       <p:sp>
         <p:nvSpPr>
-          <p:cNvPr id="24" name="Shape 21"/>
+          <p:cNvPr id="23" name="Shape 21"/>
           <p:cNvSpPr/>
           <p:nvPr/>
         </p:nvSpPr>
@@ -28141,7 +28076,7 @@
       </p:sp>
       <p:sp>
         <p:nvSpPr>
-          <p:cNvPr id="25" name="Shape 22"/>
+          <p:cNvPr id="24" name="Shape 22"/>
           <p:cNvSpPr/>
           <p:nvPr/>
         </p:nvSpPr>
@@ -28166,7 +28101,7 @@
       </p:sp>
       <p:sp>
         <p:nvSpPr>
-          <p:cNvPr id="26" name="Shape 23"/>
+          <p:cNvPr id="25" name="Shape 23"/>
           <p:cNvSpPr/>
           <p:nvPr/>
         </p:nvSpPr>
@@ -28191,7 +28126,7 @@
       </p:sp>
       <p:sp>
         <p:nvSpPr>
-          <p:cNvPr id="27" name="Shape 24"/>
+          <p:cNvPr id="26" name="Shape 24"/>
           <p:cNvSpPr/>
           <p:nvPr/>
         </p:nvSpPr>
@@ -28216,7 +28151,7 @@
       </p:sp>
       <p:sp>
         <p:nvSpPr>
-          <p:cNvPr id="28" name="Shape 25"/>
+          <p:cNvPr id="27" name="Shape 25"/>
           <p:cNvSpPr/>
           <p:nvPr/>
         </p:nvSpPr>
@@ -28241,7 +28176,7 @@
       </p:sp>
       <p:sp>
         <p:nvSpPr>
-          <p:cNvPr id="29" name="Shape 26"/>
+          <p:cNvPr id="28" name="Shape 26"/>
           <p:cNvSpPr/>
           <p:nvPr/>
         </p:nvSpPr>
@@ -28266,7 +28201,7 @@
       </p:sp>
       <p:sp>
         <p:nvSpPr>
-          <p:cNvPr id="30" name="Shape 27"/>
+          <p:cNvPr id="29" name="Shape 27"/>
           <p:cNvSpPr/>
           <p:nvPr/>
         </p:nvSpPr>
@@ -28291,7 +28226,7 @@
       </p:sp>
       <p:sp>
         <p:nvSpPr>
-          <p:cNvPr id="31" name="Shape 28"/>
+          <p:cNvPr id="30" name="Shape 28"/>
           <p:cNvSpPr/>
           <p:nvPr/>
         </p:nvSpPr>
@@ -28316,7 +28251,7 @@
       </p:sp>
       <p:sp>
         <p:nvSpPr>
-          <p:cNvPr id="32" name="Shape 29"/>
+          <p:cNvPr id="31" name="Shape 29"/>
           <p:cNvSpPr/>
           <p:nvPr/>
         </p:nvSpPr>
@@ -28341,7 +28276,7 @@
       </p:sp>
       <p:sp>
         <p:nvSpPr>
-          <p:cNvPr id="33" name="Shape 30"/>
+          <p:cNvPr id="32" name="Shape 30"/>
           <p:cNvSpPr/>
           <p:nvPr/>
         </p:nvSpPr>
@@ -28366,7 +28301,7 @@
       </p:sp>
       <p:sp>
         <p:nvSpPr>
-          <p:cNvPr id="34" name="Shape 31"/>
+          <p:cNvPr id="33" name="Shape 31"/>
           <p:cNvSpPr/>
           <p:nvPr/>
         </p:nvSpPr>
@@ -28391,7 +28326,7 @@
       </p:sp>
       <p:sp>
         <p:nvSpPr>
-          <p:cNvPr id="35" name="Shape 32"/>
+          <p:cNvPr id="34" name="Shape 32"/>
           <p:cNvSpPr/>
           <p:nvPr/>
         </p:nvSpPr>
@@ -28416,7 +28351,7 @@
       </p:sp>
       <p:sp>
         <p:nvSpPr>
-          <p:cNvPr id="36" name="Shape 33"/>
+          <p:cNvPr id="35" name="Shape 33"/>
           <p:cNvSpPr/>
           <p:nvPr/>
         </p:nvSpPr>
@@ -28441,7 +28376,7 @@
       </p:sp>
       <p:sp>
         <p:nvSpPr>
-          <p:cNvPr id="37" name="Shape 34"/>
+          <p:cNvPr id="36" name="Shape 34"/>
           <p:cNvSpPr/>
           <p:nvPr/>
         </p:nvSpPr>
@@ -28466,7 +28401,7 @@
       </p:sp>
       <p:sp>
         <p:nvSpPr>
-          <p:cNvPr id="38" name="Shape 35"/>
+          <p:cNvPr id="37" name="Shape 35"/>
           <p:cNvSpPr/>
           <p:nvPr/>
         </p:nvSpPr>
@@ -28491,7 +28426,7 @@
       </p:sp>
       <p:sp>
         <p:nvSpPr>
-          <p:cNvPr id="39" name="Shape 36"/>
+          <p:cNvPr id="38" name="Shape 36"/>
           <p:cNvSpPr/>
           <p:nvPr/>
         </p:nvSpPr>
@@ -28516,7 +28451,7 @@
       </p:sp>
       <p:sp>
         <p:nvSpPr>
-          <p:cNvPr id="40" name="Shape 37"/>
+          <p:cNvPr id="39" name="Shape 37"/>
           <p:cNvSpPr/>
           <p:nvPr/>
         </p:nvSpPr>
@@ -28541,7 +28476,7 @@
       </p:sp>
       <p:sp>
         <p:nvSpPr>
-          <p:cNvPr id="41" name="Shape 38"/>
+          <p:cNvPr id="40" name="Shape 38"/>
           <p:cNvSpPr/>
           <p:nvPr/>
         </p:nvSpPr>
@@ -28566,7 +28501,7 @@
       </p:sp>
       <p:sp>
         <p:nvSpPr>
-          <p:cNvPr id="42" name="Shape 39"/>
+          <p:cNvPr id="41" name="Shape 39"/>
           <p:cNvSpPr/>
           <p:nvPr/>
         </p:nvSpPr>
@@ -28591,7 +28526,7 @@
       </p:sp>
       <p:sp>
         <p:nvSpPr>
-          <p:cNvPr id="43" name="Shape 40"/>
+          <p:cNvPr id="42" name="Shape 40"/>
           <p:cNvSpPr/>
           <p:nvPr/>
         </p:nvSpPr>
@@ -28616,7 +28551,7 @@
       </p:sp>
       <p:sp>
         <p:nvSpPr>
-          <p:cNvPr id="44" name="Shape 41"/>
+          <p:cNvPr id="43" name="Shape 41"/>
           <p:cNvSpPr/>
           <p:nvPr/>
         </p:nvSpPr>
@@ -28641,7 +28576,7 @@
       </p:sp>
       <p:sp>
         <p:nvSpPr>
-          <p:cNvPr id="45" name="Shape 42"/>
+          <p:cNvPr id="44" name="Shape 42"/>
           <p:cNvSpPr/>
           <p:nvPr/>
         </p:nvSpPr>
@@ -28666,7 +28601,7 @@
       </p:sp>
       <p:sp>
         <p:nvSpPr>
-          <p:cNvPr id="46" name="Shape 43"/>
+          <p:cNvPr id="45" name="Shape 43"/>
           <p:cNvSpPr/>
           <p:nvPr/>
         </p:nvSpPr>
@@ -28691,7 +28626,7 @@
       </p:sp>
       <p:sp>
         <p:nvSpPr>
-          <p:cNvPr id="47" name="Shape 44"/>
+          <p:cNvPr id="46" name="Shape 44"/>
           <p:cNvSpPr/>
           <p:nvPr/>
         </p:nvSpPr>
@@ -28716,7 +28651,7 @@
       </p:sp>
       <p:sp>
         <p:nvSpPr>
-          <p:cNvPr id="48" name="Shape 45"/>
+          <p:cNvPr id="47" name="Shape 45"/>
           <p:cNvSpPr/>
           <p:nvPr/>
         </p:nvSpPr>
@@ -28741,7 +28676,7 @@
       </p:sp>
       <p:sp>
         <p:nvSpPr>
-          <p:cNvPr id="49" name="Shape 46"/>
+          <p:cNvPr id="48" name="Shape 46"/>
           <p:cNvSpPr/>
           <p:nvPr/>
         </p:nvSpPr>
@@ -28766,7 +28701,7 @@
       </p:sp>
       <p:sp>
         <p:nvSpPr>
-          <p:cNvPr id="50" name="Shape 47"/>
+          <p:cNvPr id="49" name="Shape 47"/>
           <p:cNvSpPr/>
           <p:nvPr/>
         </p:nvSpPr>
@@ -28791,7 +28726,7 @@
       </p:sp>
       <p:sp>
         <p:nvSpPr>
-          <p:cNvPr id="51" name="Shape 48"/>
+          <p:cNvPr id="50" name="Shape 48"/>
           <p:cNvSpPr/>
           <p:nvPr/>
         </p:nvSpPr>
@@ -28816,7 +28751,7 @@
       </p:sp>
       <p:sp>
         <p:nvSpPr>
-          <p:cNvPr id="52" name="Shape 49"/>
+          <p:cNvPr id="51" name="Shape 49"/>
           <p:cNvSpPr/>
           <p:nvPr/>
         </p:nvSpPr>
@@ -28841,7 +28776,7 @@
       </p:sp>
       <p:sp>
         <p:nvSpPr>
-          <p:cNvPr id="53" name="Shape 50"/>
+          <p:cNvPr id="52" name="Shape 50"/>
           <p:cNvSpPr/>
           <p:nvPr/>
         </p:nvSpPr>
@@ -28866,7 +28801,7 @@
       </p:sp>
       <p:sp>
         <p:nvSpPr>
-          <p:cNvPr id="54" name="Shape 51"/>
+          <p:cNvPr id="53" name="Shape 51"/>
           <p:cNvSpPr/>
           <p:nvPr/>
         </p:nvSpPr>
@@ -28891,7 +28826,7 @@
       </p:sp>
       <p:sp>
         <p:nvSpPr>
-          <p:cNvPr id="55" name="Shape 52"/>
+          <p:cNvPr id="54" name="Shape 52"/>
           <p:cNvSpPr/>
           <p:nvPr/>
         </p:nvSpPr>
@@ -28916,7 +28851,7 @@
       </p:sp>
       <p:sp>
         <p:nvSpPr>
-          <p:cNvPr id="56" name="Shape 53"/>
+          <p:cNvPr id="55" name="Shape 53"/>
           <p:cNvSpPr/>
           <p:nvPr/>
         </p:nvSpPr>
@@ -28941,7 +28876,7 @@
       </p:sp>
       <p:sp>
         <p:nvSpPr>
-          <p:cNvPr id="57" name="Shape 54"/>
+          <p:cNvPr id="56" name="Shape 54"/>
           <p:cNvSpPr/>
           <p:nvPr/>
         </p:nvSpPr>
@@ -28966,7 +28901,7 @@
       </p:sp>
       <p:sp>
         <p:nvSpPr>
-          <p:cNvPr id="58" name="Shape 55"/>
+          <p:cNvPr id="57" name="Shape 55"/>
           <p:cNvSpPr/>
           <p:nvPr/>
         </p:nvSpPr>
@@ -28991,7 +28926,7 @@
       </p:sp>
       <p:sp>
         <p:nvSpPr>
-          <p:cNvPr id="59" name="Shape 56"/>
+          <p:cNvPr id="58" name="Shape 56"/>
           <p:cNvSpPr/>
           <p:nvPr/>
         </p:nvSpPr>
@@ -29016,7 +28951,7 @@
       </p:sp>
       <p:sp>
         <p:nvSpPr>
-          <p:cNvPr id="60" name="Shape 57"/>
+          <p:cNvPr id="59" name="Shape 57"/>
           <p:cNvSpPr/>
           <p:nvPr/>
         </p:nvSpPr>
@@ -29041,7 +28976,7 @@
       </p:sp>
       <p:sp>
         <p:nvSpPr>
-          <p:cNvPr id="61" name="Shape 58"/>
+          <p:cNvPr id="60" name="Shape 58"/>
           <p:cNvSpPr/>
           <p:nvPr/>
         </p:nvSpPr>
@@ -29066,7 +29001,7 @@
       </p:sp>
       <p:sp>
         <p:nvSpPr>
-          <p:cNvPr id="62" name="Shape 59"/>
+          <p:cNvPr id="61" name="Shape 59"/>
           <p:cNvSpPr/>
           <p:nvPr/>
         </p:nvSpPr>
@@ -29091,7 +29026,7 @@
       </p:sp>
       <p:sp>
         <p:nvSpPr>
-          <p:cNvPr id="63" name="Shape 60"/>
+          <p:cNvPr id="62" name="Shape 60"/>
           <p:cNvSpPr/>
           <p:nvPr/>
         </p:nvSpPr>
@@ -29116,7 +29051,7 @@
       </p:sp>
       <p:sp>
         <p:nvSpPr>
-          <p:cNvPr id="64" name="Shape 61"/>
+          <p:cNvPr id="63" name="Shape 61"/>
           <p:cNvSpPr/>
           <p:nvPr/>
         </p:nvSpPr>
@@ -29141,7 +29076,7 @@
       </p:sp>
       <p:sp>
         <p:nvSpPr>
-          <p:cNvPr id="65" name="Shape 62"/>
+          <p:cNvPr id="64" name="Shape 62"/>
           <p:cNvSpPr/>
           <p:nvPr/>
         </p:nvSpPr>
@@ -29166,7 +29101,7 @@
       </p:sp>
       <p:sp>
         <p:nvSpPr>
-          <p:cNvPr id="66" name="Shape 63"/>
+          <p:cNvPr id="65" name="Shape 63"/>
           <p:cNvSpPr/>
           <p:nvPr/>
         </p:nvSpPr>
@@ -29191,7 +29126,7 @@
       </p:sp>
       <p:sp>
         <p:nvSpPr>
-          <p:cNvPr id="67" name="Shape 64"/>
+          <p:cNvPr id="66" name="Shape 64"/>
           <p:cNvSpPr/>
           <p:nvPr/>
         </p:nvSpPr>
@@ -29216,7 +29151,7 @@
       </p:sp>
       <p:sp>
         <p:nvSpPr>
-          <p:cNvPr id="68" name="Shape 65"/>
+          <p:cNvPr id="67" name="Shape 65"/>
           <p:cNvSpPr/>
           <p:nvPr/>
         </p:nvSpPr>
@@ -29241,7 +29176,7 @@
       </p:sp>
       <p:sp>
         <p:nvSpPr>
-          <p:cNvPr id="69" name="Shape 66"/>
+          <p:cNvPr id="68" name="Shape 66"/>
           <p:cNvSpPr/>
           <p:nvPr/>
         </p:nvSpPr>
@@ -29266,7 +29201,7 @@
       </p:sp>
       <p:sp>
         <p:nvSpPr>
-          <p:cNvPr id="70" name="Shape 67"/>
+          <p:cNvPr id="69" name="Shape 67"/>
           <p:cNvSpPr/>
           <p:nvPr/>
         </p:nvSpPr>
@@ -29288,7 +29223,7 @@
       </p:sp>
       <p:sp>
         <p:nvSpPr>
-          <p:cNvPr id="71" name="Text 68"/>
+          <p:cNvPr id="70" name="Text 68"/>
           <p:cNvSpPr txBox="1"/>
           <p:nvPr/>
         </p:nvSpPr>
@@ -29327,7 +29262,7 @@
       </p:sp>
       <p:sp>
         <p:nvSpPr>
-          <p:cNvPr id="72" name="Text 69"/>
+          <p:cNvPr id="71" name="Text 69"/>
           <p:cNvSpPr txBox="1"/>
           <p:nvPr/>
         </p:nvSpPr>
@@ -29366,7 +29301,7 @@
       </p:sp>
       <p:sp>
         <p:nvSpPr>
-          <p:cNvPr id="73" name="Text 70"/>
+          <p:cNvPr id="72" name="Text 70"/>
           <p:cNvSpPr txBox="1"/>
           <p:nvPr/>
         </p:nvSpPr>
@@ -29405,7 +29340,7 @@
       </p:sp>
       <p:sp>
         <p:nvSpPr>
-          <p:cNvPr id="74" name="Text 71"/>
+          <p:cNvPr id="73" name="Text 71"/>
           <p:cNvSpPr txBox="1"/>
           <p:nvPr/>
         </p:nvSpPr>
@@ -29444,7 +29379,7 @@
       </p:sp>
       <p:sp>
         <p:nvSpPr>
-          <p:cNvPr id="75" name="Text 72"/>
+          <p:cNvPr id="74" name="Text 72"/>
           <p:cNvSpPr txBox="1"/>
           <p:nvPr/>
         </p:nvSpPr>
@@ -29632,7 +29567,7 @@
       </p:sp>
       <p:pic>
         <p:nvPicPr>
-          <p:cNvPr id="6" name="Image 0" descr="/Users/giovannivasconcelos/Documents/University/tech_summit/attention/slides/assets/eq_temp.png">    </p:cNvPr>
+          <p:cNvPr id="5" name="Image 0" descr="/Users/giovannivasconcelos/Documents/University/tech_summit/attention/slides/assets/eq_temp.png">    </p:cNvPr>
           <p:cNvPicPr>
             <a:picLocks noChangeAspect="1"/>
           </p:cNvPicPr>
@@ -29656,7 +29591,7 @@
       </p:pic>
       <p:sp>
         <p:nvSpPr>
-          <p:cNvPr id="7" name="Text 3"/>
+          <p:cNvPr id="6" name="Text 3"/>
           <p:cNvSpPr txBox="1"/>
           <p:nvPr/>
         </p:nvSpPr>
@@ -29695,7 +29630,7 @@
       </p:sp>
       <p:sp>
         <p:nvSpPr>
-          <p:cNvPr id="8" name="Text 4"/>
+          <p:cNvPr id="7" name="Text 4"/>
           <p:cNvSpPr txBox="1"/>
           <p:nvPr/>
         </p:nvSpPr>
@@ -29734,7 +29669,7 @@
       </p:sp>
       <p:sp>
         <p:nvSpPr>
-          <p:cNvPr id="9" name="Text 5"/>
+          <p:cNvPr id="8" name="Text 5"/>
           <p:cNvSpPr txBox="1"/>
           <p:nvPr/>
         </p:nvSpPr>
@@ -29773,7 +29708,7 @@
       </p:sp>
       <p:pic>
         <p:nvPicPr>
-          <p:cNvPr id="10" name="Image 1" descr="/Users/giovannivasconcelos/Documents/University/tech_summit/attention/slides/assets/ch_temp.png">    </p:cNvPr>
+          <p:cNvPr id="9" name="Image 1" descr="/Users/giovannivasconcelos/Documents/University/tech_summit/attention/slides/assets/ch_temp.png">    </p:cNvPr>
           <p:cNvPicPr>
             <a:picLocks noChangeAspect="1"/>
           </p:cNvPicPr>
@@ -29946,7 +29881,7 @@
       </p:sp>
       <p:sp>
         <p:nvSpPr>
-          <p:cNvPr id="6" name="Text 3"/>
+          <p:cNvPr id="5" name="Text 3"/>
           <p:cNvSpPr txBox="1"/>
           <p:nvPr/>
         </p:nvSpPr>
@@ -29985,7 +29920,7 @@
       </p:sp>
       <p:sp>
         <p:nvSpPr>
-          <p:cNvPr id="7" name="Text 4"/>
+          <p:cNvPr id="6" name="Text 4"/>
           <p:cNvSpPr txBox="1"/>
           <p:nvPr/>
         </p:nvSpPr>
@@ -30024,7 +29959,7 @@
       </p:sp>
       <p:sp>
         <p:nvSpPr>
-          <p:cNvPr id="8" name="Text 5"/>
+          <p:cNvPr id="7" name="Text 5"/>
           <p:cNvSpPr txBox="1"/>
           <p:nvPr/>
         </p:nvSpPr>
@@ -30063,7 +29998,7 @@
       </p:sp>
       <p:sp>
         <p:nvSpPr>
-          <p:cNvPr id="9" name="Text 6"/>
+          <p:cNvPr id="8" name="Text 6"/>
           <p:cNvSpPr txBox="1"/>
           <p:nvPr/>
         </p:nvSpPr>
@@ -30102,7 +30037,7 @@
       </p:sp>
       <p:sp>
         <p:nvSpPr>
-          <p:cNvPr id="10" name="Text 7"/>
+          <p:cNvPr id="9" name="Text 7"/>
           <p:cNvSpPr txBox="1"/>
           <p:nvPr/>
         </p:nvSpPr>
@@ -30141,7 +30076,7 @@
       </p:sp>
       <p:sp>
         <p:nvSpPr>
-          <p:cNvPr id="11" name="Text 8"/>
+          <p:cNvPr id="10" name="Text 8"/>
           <p:cNvSpPr txBox="1"/>
           <p:nvPr/>
         </p:nvSpPr>
@@ -30180,7 +30115,7 @@
       </p:sp>
       <p:sp>
         <p:nvSpPr>
-          <p:cNvPr id="12" name="Text 9"/>
+          <p:cNvPr id="11" name="Text 9"/>
           <p:cNvSpPr txBox="1"/>
           <p:nvPr/>
         </p:nvSpPr>
@@ -30219,7 +30154,7 @@
       </p:sp>
       <p:sp>
         <p:nvSpPr>
-          <p:cNvPr id="13" name="Text 10"/>
+          <p:cNvPr id="12" name="Text 10"/>
           <p:cNvSpPr txBox="1"/>
           <p:nvPr/>
         </p:nvSpPr>
@@ -30258,7 +30193,7 @@
       </p:sp>
       <p:sp>
         <p:nvSpPr>
-          <p:cNvPr id="14" name="Text 11"/>
+          <p:cNvPr id="13" name="Text 11"/>
           <p:cNvSpPr txBox="1"/>
           <p:nvPr/>
         </p:nvSpPr>
@@ -30297,7 +30232,7 @@
       </p:sp>
       <p:sp>
         <p:nvSpPr>
-          <p:cNvPr id="15" name="Text 12"/>
+          <p:cNvPr id="14" name="Text 12"/>
           <p:cNvSpPr txBox="1"/>
           <p:nvPr/>
         </p:nvSpPr>
@@ -30336,7 +30271,7 @@
       </p:sp>
       <p:sp>
         <p:nvSpPr>
-          <p:cNvPr id="16" name="Text 13"/>
+          <p:cNvPr id="15" name="Text 13"/>
           <p:cNvSpPr txBox="1"/>
           <p:nvPr/>
         </p:nvSpPr>
@@ -30375,7 +30310,7 @@
       </p:sp>
       <p:sp>
         <p:nvSpPr>
-          <p:cNvPr id="17" name="Text 14"/>
+          <p:cNvPr id="16" name="Text 14"/>
           <p:cNvSpPr txBox="1"/>
           <p:nvPr/>
         </p:nvSpPr>
@@ -30414,7 +30349,7 @@
       </p:sp>
       <p:sp>
         <p:nvSpPr>
-          <p:cNvPr id="18" name="Shape 15"/>
+          <p:cNvPr id="17" name="Shape 15"/>
           <p:cNvSpPr/>
           <p:nvPr/>
         </p:nvSpPr>
@@ -30439,7 +30374,7 @@
       </p:sp>
       <p:sp>
         <p:nvSpPr>
-          <p:cNvPr id="19" name="Text 16"/>
+          <p:cNvPr id="18" name="Text 16"/>
           <p:cNvSpPr txBox="1"/>
           <p:nvPr/>
         </p:nvSpPr>
@@ -31838,7 +31773,7 @@
       </p:graphicFrame>
       <p:sp>
         <p:nvSpPr>
-          <p:cNvPr id="7" name="Text 3"/>
+          <p:cNvPr id="6" name="Text 3"/>
           <p:cNvSpPr txBox="1"/>
           <p:nvPr/>
         </p:nvSpPr>
@@ -32026,7 +31961,7 @@
       </p:sp>
       <p:sp>
         <p:nvSpPr>
-          <p:cNvPr id="6" name="Text 3"/>
+          <p:cNvPr id="5" name="Text 3"/>
           <p:cNvSpPr txBox="1"/>
           <p:nvPr/>
         </p:nvSpPr>
@@ -32270,7 +32205,7 @@
       </p:sp>
       <p:sp>
         <p:nvSpPr>
-          <p:cNvPr id="7" name="Text 4"/>
+          <p:cNvPr id="6" name="Text 4"/>
           <p:cNvSpPr txBox="1"/>
           <p:nvPr/>
         </p:nvSpPr>
@@ -32309,7 +32244,7 @@
       </p:sp>
       <p:sp>
         <p:nvSpPr>
-          <p:cNvPr id="8" name="Text 5"/>
+          <p:cNvPr id="7" name="Text 5"/>
           <p:cNvSpPr txBox="1"/>
           <p:nvPr/>
         </p:nvSpPr>
@@ -32497,7 +32432,7 @@
       </p:sp>
       <p:sp>
         <p:nvSpPr>
-          <p:cNvPr id="6" name="Shape 3"/>
+          <p:cNvPr id="5" name="Shape 3"/>
           <p:cNvSpPr/>
           <p:nvPr/>
         </p:nvSpPr>
@@ -32522,7 +32457,7 @@
       </p:sp>
       <p:sp>
         <p:nvSpPr>
-          <p:cNvPr id="7" name="Text 4"/>
+          <p:cNvPr id="6" name="Text 4"/>
           <p:cNvSpPr txBox="1"/>
           <p:nvPr/>
         </p:nvSpPr>
@@ -32621,7 +32556,7 @@
       </p:sp>
       <p:sp>
         <p:nvSpPr>
-          <p:cNvPr id="8" name="Text 5"/>
+          <p:cNvPr id="7" name="Text 5"/>
           <p:cNvSpPr txBox="1"/>
           <p:nvPr/>
         </p:nvSpPr>
@@ -32660,7 +32595,7 @@
       </p:sp>
       <p:sp>
         <p:nvSpPr>
-          <p:cNvPr id="9" name="Shape 6"/>
+          <p:cNvPr id="8" name="Shape 6"/>
           <p:cNvSpPr/>
           <p:nvPr/>
         </p:nvSpPr>
@@ -32684,7 +32619,7 @@
       </p:sp>
       <p:sp>
         <p:nvSpPr>
-          <p:cNvPr id="10" name="Shape 7"/>
+          <p:cNvPr id="9" name="Shape 7"/>
           <p:cNvSpPr/>
           <p:nvPr/>
         </p:nvSpPr>
@@ -32709,7 +32644,7 @@
       </p:sp>
       <p:sp>
         <p:nvSpPr>
-          <p:cNvPr id="11" name="Shape 8"/>
+          <p:cNvPr id="10" name="Shape 8"/>
           <p:cNvSpPr/>
           <p:nvPr/>
         </p:nvSpPr>
@@ -32734,7 +32669,7 @@
       </p:sp>
       <p:sp>
         <p:nvSpPr>
-          <p:cNvPr id="12" name="Shape 9"/>
+          <p:cNvPr id="11" name="Shape 9"/>
           <p:cNvSpPr/>
           <p:nvPr/>
         </p:nvSpPr>
@@ -32759,7 +32694,7 @@
       </p:sp>
       <p:sp>
         <p:nvSpPr>
-          <p:cNvPr id="13" name="Shape 10"/>
+          <p:cNvPr id="12" name="Shape 10"/>
           <p:cNvSpPr/>
           <p:nvPr/>
         </p:nvSpPr>
@@ -32784,7 +32719,7 @@
       </p:sp>
       <p:sp>
         <p:nvSpPr>
-          <p:cNvPr id="14" name="Shape 11"/>
+          <p:cNvPr id="13" name="Shape 11"/>
           <p:cNvSpPr/>
           <p:nvPr/>
         </p:nvSpPr>
@@ -32809,7 +32744,7 @@
       </p:sp>
       <p:sp>
         <p:nvSpPr>
-          <p:cNvPr id="15" name="Shape 12"/>
+          <p:cNvPr id="14" name="Shape 12"/>
           <p:cNvSpPr/>
           <p:nvPr/>
         </p:nvSpPr>
@@ -32834,7 +32769,7 @@
       </p:sp>
       <p:sp>
         <p:nvSpPr>
-          <p:cNvPr id="16" name="Shape 13"/>
+          <p:cNvPr id="15" name="Shape 13"/>
           <p:cNvSpPr/>
           <p:nvPr/>
         </p:nvSpPr>
@@ -32859,7 +32794,7 @@
       </p:sp>
       <p:sp>
         <p:nvSpPr>
-          <p:cNvPr id="17" name="Shape 14"/>
+          <p:cNvPr id="16" name="Shape 14"/>
           <p:cNvSpPr/>
           <p:nvPr/>
         </p:nvSpPr>
@@ -32884,7 +32819,7 @@
       </p:sp>
       <p:sp>
         <p:nvSpPr>
-          <p:cNvPr id="18" name="Shape 15"/>
+          <p:cNvPr id="17" name="Shape 15"/>
           <p:cNvSpPr/>
           <p:nvPr/>
         </p:nvSpPr>
@@ -32909,7 +32844,7 @@
       </p:sp>
       <p:sp>
         <p:nvSpPr>
-          <p:cNvPr id="19" name="Shape 16"/>
+          <p:cNvPr id="18" name="Shape 16"/>
           <p:cNvSpPr/>
           <p:nvPr/>
         </p:nvSpPr>
@@ -32934,7 +32869,7 @@
       </p:sp>
       <p:sp>
         <p:nvSpPr>
-          <p:cNvPr id="20" name="Shape 17"/>
+          <p:cNvPr id="19" name="Shape 17"/>
           <p:cNvSpPr/>
           <p:nvPr/>
         </p:nvSpPr>
@@ -32959,7 +32894,7 @@
       </p:sp>
       <p:sp>
         <p:nvSpPr>
-          <p:cNvPr id="21" name="Shape 18"/>
+          <p:cNvPr id="20" name="Shape 18"/>
           <p:cNvSpPr/>
           <p:nvPr/>
         </p:nvSpPr>
@@ -32984,7 +32919,7 @@
       </p:sp>
       <p:sp>
         <p:nvSpPr>
-          <p:cNvPr id="22" name="Shape 19"/>
+          <p:cNvPr id="21" name="Shape 19"/>
           <p:cNvSpPr/>
           <p:nvPr/>
         </p:nvSpPr>
@@ -33009,7 +32944,7 @@
       </p:sp>
       <p:sp>
         <p:nvSpPr>
-          <p:cNvPr id="23" name="Shape 20"/>
+          <p:cNvPr id="22" name="Shape 20"/>
           <p:cNvSpPr/>
           <p:nvPr/>
         </p:nvSpPr>
@@ -33034,7 +32969,7 @@
       </p:sp>
       <p:sp>
         <p:nvSpPr>
-          <p:cNvPr id="24" name="Shape 21"/>
+          <p:cNvPr id="23" name="Shape 21"/>
           <p:cNvSpPr/>
           <p:nvPr/>
         </p:nvSpPr>
@@ -33059,7 +32994,7 @@
       </p:sp>
       <p:sp>
         <p:nvSpPr>
-          <p:cNvPr id="25" name="Shape 22"/>
+          <p:cNvPr id="24" name="Shape 22"/>
           <p:cNvSpPr/>
           <p:nvPr/>
         </p:nvSpPr>
@@ -33084,7 +33019,7 @@
       </p:sp>
       <p:sp>
         <p:nvSpPr>
-          <p:cNvPr id="26" name="Shape 23"/>
+          <p:cNvPr id="25" name="Shape 23"/>
           <p:cNvSpPr/>
           <p:nvPr/>
         </p:nvSpPr>
@@ -33109,7 +33044,7 @@
       </p:sp>
       <p:sp>
         <p:nvSpPr>
-          <p:cNvPr id="27" name="Shape 24"/>
+          <p:cNvPr id="26" name="Shape 24"/>
           <p:cNvSpPr/>
           <p:nvPr/>
         </p:nvSpPr>
@@ -33134,7 +33069,7 @@
       </p:sp>
       <p:sp>
         <p:nvSpPr>
-          <p:cNvPr id="28" name="Shape 25"/>
+          <p:cNvPr id="27" name="Shape 25"/>
           <p:cNvSpPr/>
           <p:nvPr/>
         </p:nvSpPr>
@@ -33159,7 +33094,7 @@
       </p:sp>
       <p:sp>
         <p:nvSpPr>
-          <p:cNvPr id="29" name="Shape 26"/>
+          <p:cNvPr id="28" name="Shape 26"/>
           <p:cNvSpPr/>
           <p:nvPr/>
         </p:nvSpPr>
@@ -33184,7 +33119,7 @@
       </p:sp>
       <p:sp>
         <p:nvSpPr>
-          <p:cNvPr id="30" name="Shape 27"/>
+          <p:cNvPr id="29" name="Shape 27"/>
           <p:cNvSpPr/>
           <p:nvPr/>
         </p:nvSpPr>
@@ -33209,7 +33144,7 @@
       </p:sp>
       <p:sp>
         <p:nvSpPr>
-          <p:cNvPr id="31" name="Shape 28"/>
+          <p:cNvPr id="30" name="Shape 28"/>
           <p:cNvSpPr/>
           <p:nvPr/>
         </p:nvSpPr>
@@ -33234,7 +33169,7 @@
       </p:sp>
       <p:sp>
         <p:nvSpPr>
-          <p:cNvPr id="32" name="Shape 29"/>
+          <p:cNvPr id="31" name="Shape 29"/>
           <p:cNvSpPr/>
           <p:nvPr/>
         </p:nvSpPr>
@@ -33259,7 +33194,7 @@
       </p:sp>
       <p:sp>
         <p:nvSpPr>
-          <p:cNvPr id="33" name="Shape 30"/>
+          <p:cNvPr id="32" name="Shape 30"/>
           <p:cNvSpPr/>
           <p:nvPr/>
         </p:nvSpPr>
@@ -33284,7 +33219,7 @@
       </p:sp>
       <p:sp>
         <p:nvSpPr>
-          <p:cNvPr id="34" name="Shape 31"/>
+          <p:cNvPr id="33" name="Shape 31"/>
           <p:cNvSpPr/>
           <p:nvPr/>
         </p:nvSpPr>
@@ -33309,7 +33244,7 @@
       </p:sp>
       <p:sp>
         <p:nvSpPr>
-          <p:cNvPr id="35" name="Shape 32"/>
+          <p:cNvPr id="34" name="Shape 32"/>
           <p:cNvSpPr/>
           <p:nvPr/>
         </p:nvSpPr>
@@ -33334,7 +33269,7 @@
       </p:sp>
       <p:sp>
         <p:nvSpPr>
-          <p:cNvPr id="36" name="Shape 33"/>
+          <p:cNvPr id="35" name="Shape 33"/>
           <p:cNvSpPr/>
           <p:nvPr/>
         </p:nvSpPr>
@@ -33359,7 +33294,7 @@
       </p:sp>
       <p:sp>
         <p:nvSpPr>
-          <p:cNvPr id="37" name="Shape 34"/>
+          <p:cNvPr id="36" name="Shape 34"/>
           <p:cNvSpPr/>
           <p:nvPr/>
         </p:nvSpPr>
@@ -33384,7 +33319,7 @@
       </p:sp>
       <p:sp>
         <p:nvSpPr>
-          <p:cNvPr id="38" name="Shape 35"/>
+          <p:cNvPr id="37" name="Shape 35"/>
           <p:cNvSpPr/>
           <p:nvPr/>
         </p:nvSpPr>
@@ -33409,7 +33344,7 @@
       </p:sp>
       <p:sp>
         <p:nvSpPr>
-          <p:cNvPr id="39" name="Shape 36"/>
+          <p:cNvPr id="38" name="Shape 36"/>
           <p:cNvSpPr/>
           <p:nvPr/>
         </p:nvSpPr>
@@ -33434,7 +33369,7 @@
       </p:sp>
       <p:sp>
         <p:nvSpPr>
-          <p:cNvPr id="40" name="Shape 37"/>
+          <p:cNvPr id="39" name="Shape 37"/>
           <p:cNvSpPr/>
           <p:nvPr/>
         </p:nvSpPr>
@@ -33459,7 +33394,7 @@
       </p:sp>
       <p:sp>
         <p:nvSpPr>
-          <p:cNvPr id="41" name="Shape 38"/>
+          <p:cNvPr id="40" name="Shape 38"/>
           <p:cNvSpPr/>
           <p:nvPr/>
         </p:nvSpPr>
@@ -33484,7 +33419,7 @@
       </p:sp>
       <p:sp>
         <p:nvSpPr>
-          <p:cNvPr id="42" name="Shape 39"/>
+          <p:cNvPr id="41" name="Shape 39"/>
           <p:cNvSpPr/>
           <p:nvPr/>
         </p:nvSpPr>
@@ -33509,7 +33444,7 @@
       </p:sp>
       <p:sp>
         <p:nvSpPr>
-          <p:cNvPr id="43" name="Shape 40"/>
+          <p:cNvPr id="42" name="Shape 40"/>
           <p:cNvSpPr/>
           <p:nvPr/>
         </p:nvSpPr>
@@ -33534,7 +33469,7 @@
       </p:sp>
       <p:sp>
         <p:nvSpPr>
-          <p:cNvPr id="44" name="Shape 41"/>
+          <p:cNvPr id="43" name="Shape 41"/>
           <p:cNvSpPr/>
           <p:nvPr/>
         </p:nvSpPr>
@@ -33559,7 +33494,7 @@
       </p:sp>
       <p:sp>
         <p:nvSpPr>
-          <p:cNvPr id="45" name="Shape 42"/>
+          <p:cNvPr id="44" name="Shape 42"/>
           <p:cNvSpPr/>
           <p:nvPr/>
         </p:nvSpPr>
@@ -33584,7 +33519,7 @@
       </p:sp>
       <p:sp>
         <p:nvSpPr>
-          <p:cNvPr id="46" name="Shape 43"/>
+          <p:cNvPr id="45" name="Shape 43"/>
           <p:cNvSpPr/>
           <p:nvPr/>
         </p:nvSpPr>
@@ -33609,7 +33544,7 @@
       </p:sp>
       <p:sp>
         <p:nvSpPr>
-          <p:cNvPr id="47" name="Shape 44"/>
+          <p:cNvPr id="46" name="Shape 44"/>
           <p:cNvSpPr/>
           <p:nvPr/>
         </p:nvSpPr>
@@ -33634,7 +33569,7 @@
       </p:sp>
       <p:sp>
         <p:nvSpPr>
-          <p:cNvPr id="48" name="Shape 45"/>
+          <p:cNvPr id="47" name="Shape 45"/>
           <p:cNvSpPr/>
           <p:nvPr/>
         </p:nvSpPr>
@@ -33659,7 +33594,7 @@
       </p:sp>
       <p:sp>
         <p:nvSpPr>
-          <p:cNvPr id="49" name="Shape 46"/>
+          <p:cNvPr id="48" name="Shape 46"/>
           <p:cNvSpPr/>
           <p:nvPr/>
         </p:nvSpPr>
@@ -33684,7 +33619,7 @@
       </p:sp>
       <p:sp>
         <p:nvSpPr>
-          <p:cNvPr id="50" name="Shape 47"/>
+          <p:cNvPr id="49" name="Shape 47"/>
           <p:cNvSpPr/>
           <p:nvPr/>
         </p:nvSpPr>
@@ -33709,7 +33644,7 @@
       </p:sp>
       <p:sp>
         <p:nvSpPr>
-          <p:cNvPr id="51" name="Shape 48"/>
+          <p:cNvPr id="50" name="Shape 48"/>
           <p:cNvSpPr/>
           <p:nvPr/>
         </p:nvSpPr>
@@ -33734,7 +33669,7 @@
       </p:sp>
       <p:sp>
         <p:nvSpPr>
-          <p:cNvPr id="52" name="Shape 49"/>
+          <p:cNvPr id="51" name="Shape 49"/>
           <p:cNvSpPr/>
           <p:nvPr/>
         </p:nvSpPr>
@@ -33759,7 +33694,7 @@
       </p:sp>
       <p:sp>
         <p:nvSpPr>
-          <p:cNvPr id="53" name="Shape 50"/>
+          <p:cNvPr id="52" name="Shape 50"/>
           <p:cNvSpPr/>
           <p:nvPr/>
         </p:nvSpPr>
@@ -33784,7 +33719,7 @@
       </p:sp>
       <p:sp>
         <p:nvSpPr>
-          <p:cNvPr id="54" name="Shape 51"/>
+          <p:cNvPr id="53" name="Shape 51"/>
           <p:cNvSpPr/>
           <p:nvPr/>
         </p:nvSpPr>
@@ -33809,7 +33744,7 @@
       </p:sp>
       <p:sp>
         <p:nvSpPr>
-          <p:cNvPr id="55" name="Shape 52"/>
+          <p:cNvPr id="54" name="Shape 52"/>
           <p:cNvSpPr/>
           <p:nvPr/>
         </p:nvSpPr>
@@ -33834,7 +33769,7 @@
       </p:sp>
       <p:sp>
         <p:nvSpPr>
-          <p:cNvPr id="56" name="Shape 53"/>
+          <p:cNvPr id="55" name="Shape 53"/>
           <p:cNvSpPr/>
           <p:nvPr/>
         </p:nvSpPr>
@@ -33859,7 +33794,7 @@
       </p:sp>
       <p:sp>
         <p:nvSpPr>
-          <p:cNvPr id="57" name="Shape 54"/>
+          <p:cNvPr id="56" name="Shape 54"/>
           <p:cNvSpPr/>
           <p:nvPr/>
         </p:nvSpPr>
@@ -33884,7 +33819,7 @@
       </p:sp>
       <p:sp>
         <p:nvSpPr>
-          <p:cNvPr id="58" name="Shape 55"/>
+          <p:cNvPr id="57" name="Shape 55"/>
           <p:cNvSpPr/>
           <p:nvPr/>
         </p:nvSpPr>
@@ -33909,7 +33844,7 @@
       </p:sp>
       <p:sp>
         <p:nvSpPr>
-          <p:cNvPr id="59" name="Shape 56"/>
+          <p:cNvPr id="58" name="Shape 56"/>
           <p:cNvSpPr/>
           <p:nvPr/>
         </p:nvSpPr>
@@ -33934,7 +33869,7 @@
       </p:sp>
       <p:sp>
         <p:nvSpPr>
-          <p:cNvPr id="60" name="Shape 57"/>
+          <p:cNvPr id="59" name="Shape 57"/>
           <p:cNvSpPr/>
           <p:nvPr/>
         </p:nvSpPr>
@@ -33959,7 +33894,7 @@
       </p:sp>
       <p:sp>
         <p:nvSpPr>
-          <p:cNvPr id="61" name="Shape 58"/>
+          <p:cNvPr id="60" name="Shape 58"/>
           <p:cNvSpPr/>
           <p:nvPr/>
         </p:nvSpPr>
@@ -33984,7 +33919,7 @@
       </p:sp>
       <p:sp>
         <p:nvSpPr>
-          <p:cNvPr id="62" name="Shape 59"/>
+          <p:cNvPr id="61" name="Shape 59"/>
           <p:cNvSpPr/>
           <p:nvPr/>
         </p:nvSpPr>
@@ -34009,7 +33944,7 @@
       </p:sp>
       <p:sp>
         <p:nvSpPr>
-          <p:cNvPr id="63" name="Shape 60"/>
+          <p:cNvPr id="62" name="Shape 60"/>
           <p:cNvSpPr/>
           <p:nvPr/>
         </p:nvSpPr>
@@ -34034,7 +33969,7 @@
       </p:sp>
       <p:sp>
         <p:nvSpPr>
-          <p:cNvPr id="64" name="Shape 61"/>
+          <p:cNvPr id="63" name="Shape 61"/>
           <p:cNvSpPr/>
           <p:nvPr/>
         </p:nvSpPr>
@@ -34059,7 +33994,7 @@
       </p:sp>
       <p:sp>
         <p:nvSpPr>
-          <p:cNvPr id="65" name="Shape 62"/>
+          <p:cNvPr id="64" name="Shape 62"/>
           <p:cNvSpPr/>
           <p:nvPr/>
         </p:nvSpPr>
@@ -34084,7 +34019,7 @@
       </p:sp>
       <p:sp>
         <p:nvSpPr>
-          <p:cNvPr id="66" name="Shape 63"/>
+          <p:cNvPr id="65" name="Shape 63"/>
           <p:cNvSpPr/>
           <p:nvPr/>
         </p:nvSpPr>
@@ -34109,7 +34044,7 @@
       </p:sp>
       <p:sp>
         <p:nvSpPr>
-          <p:cNvPr id="67" name="Shape 64"/>
+          <p:cNvPr id="66" name="Shape 64"/>
           <p:cNvSpPr/>
           <p:nvPr/>
         </p:nvSpPr>
@@ -34134,7 +34069,7 @@
       </p:sp>
       <p:sp>
         <p:nvSpPr>
-          <p:cNvPr id="68" name="Shape 65"/>
+          <p:cNvPr id="67" name="Shape 65"/>
           <p:cNvSpPr/>
           <p:nvPr/>
         </p:nvSpPr>
@@ -34159,7 +34094,7 @@
       </p:sp>
       <p:sp>
         <p:nvSpPr>
-          <p:cNvPr id="69" name="Shape 66"/>
+          <p:cNvPr id="68" name="Shape 66"/>
           <p:cNvSpPr/>
           <p:nvPr/>
         </p:nvSpPr>
@@ -34184,7 +34119,7 @@
       </p:sp>
       <p:sp>
         <p:nvSpPr>
-          <p:cNvPr id="70" name="Shape 67"/>
+          <p:cNvPr id="69" name="Shape 67"/>
           <p:cNvSpPr/>
           <p:nvPr/>
         </p:nvSpPr>
@@ -34209,7 +34144,7 @@
       </p:sp>
       <p:sp>
         <p:nvSpPr>
-          <p:cNvPr id="71" name="Shape 68"/>
+          <p:cNvPr id="70" name="Shape 68"/>
           <p:cNvSpPr/>
           <p:nvPr/>
         </p:nvSpPr>
@@ -34234,7 +34169,7 @@
       </p:sp>
       <p:sp>
         <p:nvSpPr>
-          <p:cNvPr id="72" name="Shape 69"/>
+          <p:cNvPr id="71" name="Shape 69"/>
           <p:cNvSpPr/>
           <p:nvPr/>
         </p:nvSpPr>
@@ -34259,7 +34194,7 @@
       </p:sp>
       <p:sp>
         <p:nvSpPr>
-          <p:cNvPr id="73" name="Shape 70"/>
+          <p:cNvPr id="72" name="Shape 70"/>
           <p:cNvSpPr/>
           <p:nvPr/>
         </p:nvSpPr>
@@ -34284,7 +34219,7 @@
       </p:sp>
       <p:sp>
         <p:nvSpPr>
-          <p:cNvPr id="74" name="Shape 71"/>
+          <p:cNvPr id="73" name="Shape 71"/>
           <p:cNvSpPr/>
           <p:nvPr/>
         </p:nvSpPr>
@@ -34306,7 +34241,7 @@
       </p:sp>
       <p:sp>
         <p:nvSpPr>
-          <p:cNvPr id="75" name="Text 72"/>
+          <p:cNvPr id="74" name="Text 72"/>
           <p:cNvSpPr txBox="1"/>
           <p:nvPr/>
         </p:nvSpPr>
@@ -34345,7 +34280,7 @@
       </p:sp>
       <p:sp>
         <p:nvSpPr>
-          <p:cNvPr id="76" name="Text 73"/>
+          <p:cNvPr id="75" name="Text 73"/>
           <p:cNvSpPr txBox="1"/>
           <p:nvPr/>
         </p:nvSpPr>
@@ -34455,7 +34390,7 @@
       </p:sp>
       <p:sp>
         <p:nvSpPr>
-          <p:cNvPr id="4" name="Text 1"/>
+          <p:cNvPr id="3" name="Text 1"/>
           <p:cNvSpPr txBox="1"/>
           <p:nvPr/>
         </p:nvSpPr>
@@ -34494,7 +34429,7 @@
       </p:sp>
       <p:sp>
         <p:nvSpPr>
-          <p:cNvPr id="5" name="Text 2"/>
+          <p:cNvPr id="4" name="Text 2"/>
           <p:cNvSpPr txBox="1"/>
           <p:nvPr/>
         </p:nvSpPr>
@@ -34533,7 +34468,7 @@
       </p:sp>
       <p:sp>
         <p:nvSpPr>
-          <p:cNvPr id="6" name="Text 3"/>
+          <p:cNvPr id="5" name="Text 3"/>
           <p:cNvSpPr txBox="1"/>
           <p:nvPr/>
         </p:nvSpPr>
@@ -34572,7 +34507,7 @@
       </p:sp>
       <p:sp>
         <p:nvSpPr>
-          <p:cNvPr id="7" name="Text 4"/>
+          <p:cNvPr id="6" name="Text 4"/>
           <p:cNvSpPr txBox="1"/>
           <p:nvPr/>
         </p:nvSpPr>
@@ -34611,7 +34546,7 @@
       </p:sp>
       <p:sp>
         <p:nvSpPr>
-          <p:cNvPr id="8" name="Shape 5"/>
+          <p:cNvPr id="7" name="Shape 5"/>
           <p:cNvSpPr/>
           <p:nvPr/>
         </p:nvSpPr>
@@ -34636,7 +34571,7 @@
       </p:sp>
       <p:sp>
         <p:nvSpPr>
-          <p:cNvPr id="9" name="Shape 6"/>
+          <p:cNvPr id="8" name="Shape 6"/>
           <p:cNvSpPr/>
           <p:nvPr/>
         </p:nvSpPr>
@@ -34661,7 +34596,7 @@
       </p:sp>
       <p:sp>
         <p:nvSpPr>
-          <p:cNvPr id="10" name="Shape 7"/>
+          <p:cNvPr id="9" name="Shape 7"/>
           <p:cNvSpPr/>
           <p:nvPr/>
         </p:nvSpPr>
@@ -34686,7 +34621,7 @@
       </p:sp>
       <p:sp>
         <p:nvSpPr>
-          <p:cNvPr id="11" name="Shape 8"/>
+          <p:cNvPr id="10" name="Shape 8"/>
           <p:cNvSpPr/>
           <p:nvPr/>
         </p:nvSpPr>
@@ -34711,7 +34646,7 @@
       </p:sp>
       <p:sp>
         <p:nvSpPr>
-          <p:cNvPr id="12" name="Shape 9"/>
+          <p:cNvPr id="11" name="Shape 9"/>
           <p:cNvSpPr/>
           <p:nvPr/>
         </p:nvSpPr>
@@ -34736,7 +34671,7 @@
       </p:sp>
       <p:sp>
         <p:nvSpPr>
-          <p:cNvPr id="13" name="Shape 10"/>
+          <p:cNvPr id="12" name="Shape 10"/>
           <p:cNvSpPr/>
           <p:nvPr/>
         </p:nvSpPr>
@@ -34761,7 +34696,7 @@
       </p:sp>
       <p:sp>
         <p:nvSpPr>
-          <p:cNvPr id="14" name="Shape 11"/>
+          <p:cNvPr id="13" name="Shape 11"/>
           <p:cNvSpPr/>
           <p:nvPr/>
         </p:nvSpPr>
@@ -34786,7 +34721,7 @@
       </p:sp>
       <p:sp>
         <p:nvSpPr>
-          <p:cNvPr id="15" name="Shape 12"/>
+          <p:cNvPr id="14" name="Shape 12"/>
           <p:cNvSpPr/>
           <p:nvPr/>
         </p:nvSpPr>
@@ -34811,7 +34746,7 @@
       </p:sp>
       <p:sp>
         <p:nvSpPr>
-          <p:cNvPr id="16" name="Shape 13"/>
+          <p:cNvPr id="15" name="Shape 13"/>
           <p:cNvSpPr/>
           <p:nvPr/>
         </p:nvSpPr>
@@ -34836,7 +34771,7 @@
       </p:sp>
       <p:sp>
         <p:nvSpPr>
-          <p:cNvPr id="17" name="Shape 14"/>
+          <p:cNvPr id="16" name="Shape 14"/>
           <p:cNvSpPr/>
           <p:nvPr/>
         </p:nvSpPr>
@@ -34861,7 +34796,7 @@
       </p:sp>
       <p:sp>
         <p:nvSpPr>
-          <p:cNvPr id="18" name="Shape 15"/>
+          <p:cNvPr id="17" name="Shape 15"/>
           <p:cNvSpPr/>
           <p:nvPr/>
         </p:nvSpPr>
@@ -34886,7 +34821,7 @@
       </p:sp>
       <p:sp>
         <p:nvSpPr>
-          <p:cNvPr id="19" name="Shape 16"/>
+          <p:cNvPr id="18" name="Shape 16"/>
           <p:cNvSpPr/>
           <p:nvPr/>
         </p:nvSpPr>
@@ -34911,7 +34846,7 @@
       </p:sp>
       <p:sp>
         <p:nvSpPr>
-          <p:cNvPr id="20" name="Shape 17"/>
+          <p:cNvPr id="19" name="Shape 17"/>
           <p:cNvSpPr/>
           <p:nvPr/>
         </p:nvSpPr>
@@ -34936,7 +34871,7 @@
       </p:sp>
       <p:sp>
         <p:nvSpPr>
-          <p:cNvPr id="21" name="Shape 18"/>
+          <p:cNvPr id="20" name="Shape 18"/>
           <p:cNvSpPr/>
           <p:nvPr/>
         </p:nvSpPr>
@@ -34961,7 +34896,7 @@
       </p:sp>
       <p:sp>
         <p:nvSpPr>
-          <p:cNvPr id="22" name="Shape 19"/>
+          <p:cNvPr id="21" name="Shape 19"/>
           <p:cNvSpPr/>
           <p:nvPr/>
         </p:nvSpPr>
@@ -34986,7 +34921,7 @@
       </p:sp>
       <p:sp>
         <p:nvSpPr>
-          <p:cNvPr id="23" name="Shape 20"/>
+          <p:cNvPr id="22" name="Shape 20"/>
           <p:cNvSpPr/>
           <p:nvPr/>
         </p:nvSpPr>
@@ -35011,7 +34946,7 @@
       </p:sp>
       <p:sp>
         <p:nvSpPr>
-          <p:cNvPr id="24" name="Shape 21"/>
+          <p:cNvPr id="23" name="Shape 21"/>
           <p:cNvSpPr/>
           <p:nvPr/>
         </p:nvSpPr>
@@ -35036,7 +34971,7 @@
       </p:sp>
       <p:sp>
         <p:nvSpPr>
-          <p:cNvPr id="25" name="Shape 22"/>
+          <p:cNvPr id="24" name="Shape 22"/>
           <p:cNvSpPr/>
           <p:nvPr/>
         </p:nvSpPr>
@@ -35061,7 +34996,7 @@
       </p:sp>
       <p:sp>
         <p:nvSpPr>
-          <p:cNvPr id="26" name="Shape 23"/>
+          <p:cNvPr id="25" name="Shape 23"/>
           <p:cNvSpPr/>
           <p:nvPr/>
         </p:nvSpPr>
@@ -35086,7 +35021,7 @@
       </p:sp>
       <p:sp>
         <p:nvSpPr>
-          <p:cNvPr id="27" name="Shape 24"/>
+          <p:cNvPr id="26" name="Shape 24"/>
           <p:cNvSpPr/>
           <p:nvPr/>
         </p:nvSpPr>
@@ -35111,7 +35046,7 @@
       </p:sp>
       <p:sp>
         <p:nvSpPr>
-          <p:cNvPr id="28" name="Shape 25"/>
+          <p:cNvPr id="27" name="Shape 25"/>
           <p:cNvSpPr/>
           <p:nvPr/>
         </p:nvSpPr>
@@ -35136,7 +35071,7 @@
       </p:sp>
       <p:sp>
         <p:nvSpPr>
-          <p:cNvPr id="29" name="Shape 26"/>
+          <p:cNvPr id="28" name="Shape 26"/>
           <p:cNvSpPr/>
           <p:nvPr/>
         </p:nvSpPr>
@@ -35161,7 +35096,7 @@
       </p:sp>
       <p:sp>
         <p:nvSpPr>
-          <p:cNvPr id="30" name="Shape 27"/>
+          <p:cNvPr id="29" name="Shape 27"/>
           <p:cNvSpPr/>
           <p:nvPr/>
         </p:nvSpPr>
@@ -35186,7 +35121,7 @@
       </p:sp>
       <p:sp>
         <p:nvSpPr>
-          <p:cNvPr id="31" name="Shape 28"/>
+          <p:cNvPr id="30" name="Shape 28"/>
           <p:cNvSpPr/>
           <p:nvPr/>
         </p:nvSpPr>
@@ -35211,7 +35146,7 @@
       </p:sp>
       <p:sp>
         <p:nvSpPr>
-          <p:cNvPr id="32" name="Shape 29"/>
+          <p:cNvPr id="31" name="Shape 29"/>
           <p:cNvSpPr/>
           <p:nvPr/>
         </p:nvSpPr>
@@ -35236,7 +35171,7 @@
       </p:sp>
       <p:sp>
         <p:nvSpPr>
-          <p:cNvPr id="33" name="Shape 30"/>
+          <p:cNvPr id="32" name="Shape 30"/>
           <p:cNvSpPr/>
           <p:nvPr/>
         </p:nvSpPr>
@@ -35261,7 +35196,7 @@
       </p:sp>
       <p:sp>
         <p:nvSpPr>
-          <p:cNvPr id="34" name="Shape 31"/>
+          <p:cNvPr id="33" name="Shape 31"/>
           <p:cNvSpPr/>
           <p:nvPr/>
         </p:nvSpPr>
@@ -35286,7 +35221,7 @@
       </p:sp>
       <p:sp>
         <p:nvSpPr>
-          <p:cNvPr id="35" name="Shape 32"/>
+          <p:cNvPr id="34" name="Shape 32"/>
           <p:cNvSpPr/>
           <p:nvPr/>
         </p:nvSpPr>
@@ -35311,7 +35246,7 @@
       </p:sp>
       <p:sp>
         <p:nvSpPr>
-          <p:cNvPr id="36" name="Shape 33"/>
+          <p:cNvPr id="35" name="Shape 33"/>
           <p:cNvSpPr/>
           <p:nvPr/>
         </p:nvSpPr>
@@ -35336,7 +35271,7 @@
       </p:sp>
       <p:sp>
         <p:nvSpPr>
-          <p:cNvPr id="37" name="Shape 34"/>
+          <p:cNvPr id="36" name="Shape 34"/>
           <p:cNvSpPr/>
           <p:nvPr/>
         </p:nvSpPr>
@@ -35361,7 +35296,7 @@
       </p:sp>
       <p:sp>
         <p:nvSpPr>
-          <p:cNvPr id="38" name="Shape 35"/>
+          <p:cNvPr id="37" name="Shape 35"/>
           <p:cNvSpPr/>
           <p:nvPr/>
         </p:nvSpPr>
@@ -35386,7 +35321,7 @@
       </p:sp>
       <p:sp>
         <p:nvSpPr>
-          <p:cNvPr id="39" name="Shape 36"/>
+          <p:cNvPr id="38" name="Shape 36"/>
           <p:cNvSpPr/>
           <p:nvPr/>
         </p:nvSpPr>
@@ -35411,7 +35346,7 @@
       </p:sp>
       <p:sp>
         <p:nvSpPr>
-          <p:cNvPr id="40" name="Shape 37"/>
+          <p:cNvPr id="39" name="Shape 37"/>
           <p:cNvSpPr/>
           <p:nvPr/>
         </p:nvSpPr>
@@ -35436,7 +35371,7 @@
       </p:sp>
       <p:sp>
         <p:nvSpPr>
-          <p:cNvPr id="41" name="Shape 38"/>
+          <p:cNvPr id="40" name="Shape 38"/>
           <p:cNvSpPr/>
           <p:nvPr/>
         </p:nvSpPr>
@@ -35461,7 +35396,7 @@
       </p:sp>
       <p:sp>
         <p:nvSpPr>
-          <p:cNvPr id="42" name="Shape 39"/>
+          <p:cNvPr id="41" name="Shape 39"/>
           <p:cNvSpPr/>
           <p:nvPr/>
         </p:nvSpPr>
@@ -35486,7 +35421,7 @@
       </p:sp>
       <p:sp>
         <p:nvSpPr>
-          <p:cNvPr id="43" name="Shape 40"/>
+          <p:cNvPr id="42" name="Shape 40"/>
           <p:cNvSpPr/>
           <p:nvPr/>
         </p:nvSpPr>
@@ -35660,7 +35595,7 @@
       </p:sp>
       <p:sp>
         <p:nvSpPr>
-          <p:cNvPr id="6" name="Text 3"/>
+          <p:cNvPr id="5" name="Text 3"/>
           <p:cNvSpPr txBox="1"/>
           <p:nvPr/>
         </p:nvSpPr>
@@ -35699,7 +35634,7 @@
       </p:sp>
       <p:sp>
         <p:nvSpPr>
-          <p:cNvPr id="7" name="Text 4"/>
+          <p:cNvPr id="6" name="Text 4"/>
           <p:cNvSpPr txBox="1"/>
           <p:nvPr/>
         </p:nvSpPr>
@@ -35738,7 +35673,7 @@
       </p:sp>
       <p:sp>
         <p:nvSpPr>
-          <p:cNvPr id="8" name="Text 5"/>
+          <p:cNvPr id="7" name="Text 5"/>
           <p:cNvSpPr txBox="1"/>
           <p:nvPr/>
         </p:nvSpPr>
@@ -35777,7 +35712,7 @@
       </p:sp>
       <p:sp>
         <p:nvSpPr>
-          <p:cNvPr id="9" name="Text 6"/>
+          <p:cNvPr id="8" name="Text 6"/>
           <p:cNvSpPr txBox="1"/>
           <p:nvPr/>
         </p:nvSpPr>
@@ -35816,7 +35751,7 @@
       </p:sp>
       <p:sp>
         <p:nvSpPr>
-          <p:cNvPr id="10" name="Text 7"/>
+          <p:cNvPr id="9" name="Text 7"/>
           <p:cNvSpPr txBox="1"/>
           <p:nvPr/>
         </p:nvSpPr>
@@ -35855,7 +35790,7 @@
       </p:sp>
       <p:sp>
         <p:nvSpPr>
-          <p:cNvPr id="11" name="Text 8"/>
+          <p:cNvPr id="10" name="Text 8"/>
           <p:cNvSpPr txBox="1"/>
           <p:nvPr/>
         </p:nvSpPr>
@@ -35894,7 +35829,7 @@
       </p:sp>
       <p:sp>
         <p:nvSpPr>
-          <p:cNvPr id="12" name="Text 9"/>
+          <p:cNvPr id="11" name="Text 9"/>
           <p:cNvSpPr txBox="1"/>
           <p:nvPr/>
         </p:nvSpPr>
@@ -35933,7 +35868,7 @@
       </p:sp>
       <p:sp>
         <p:nvSpPr>
-          <p:cNvPr id="13" name="Text 10"/>
+          <p:cNvPr id="12" name="Text 10"/>
           <p:cNvSpPr txBox="1"/>
           <p:nvPr/>
         </p:nvSpPr>
@@ -35972,7 +35907,7 @@
       </p:sp>
       <p:sp>
         <p:nvSpPr>
-          <p:cNvPr id="14" name="Text 11"/>
+          <p:cNvPr id="13" name="Text 11"/>
           <p:cNvSpPr txBox="1"/>
           <p:nvPr/>
         </p:nvSpPr>
@@ -36011,7 +35946,7 @@
       </p:sp>
       <p:sp>
         <p:nvSpPr>
-          <p:cNvPr id="15" name="Text 12"/>
+          <p:cNvPr id="14" name="Text 12"/>
           <p:cNvSpPr txBox="1"/>
           <p:nvPr/>
         </p:nvSpPr>
@@ -36050,7 +35985,7 @@
       </p:sp>
       <p:sp>
         <p:nvSpPr>
-          <p:cNvPr id="16" name="Text 13"/>
+          <p:cNvPr id="15" name="Text 13"/>
           <p:cNvSpPr txBox="1"/>
           <p:nvPr/>
         </p:nvSpPr>
@@ -36089,7 +36024,7 @@
       </p:sp>
       <p:sp>
         <p:nvSpPr>
-          <p:cNvPr id="17" name="Text 14"/>
+          <p:cNvPr id="16" name="Text 14"/>
           <p:cNvSpPr txBox="1"/>
           <p:nvPr/>
         </p:nvSpPr>
@@ -36128,7 +36063,7 @@
       </p:sp>
       <p:sp>
         <p:nvSpPr>
-          <p:cNvPr id="18" name="Text 15"/>
+          <p:cNvPr id="17" name="Text 15"/>
           <p:cNvSpPr txBox="1"/>
           <p:nvPr/>
         </p:nvSpPr>
@@ -36316,7 +36251,7 @@
       </p:sp>
       <p:sp>
         <p:nvSpPr>
-          <p:cNvPr id="6" name="Text 3"/>
+          <p:cNvPr id="5" name="Text 3"/>
           <p:cNvSpPr txBox="1"/>
           <p:nvPr/>
         </p:nvSpPr>
@@ -36369,7 +36304,7 @@
       </p:sp>
       <p:pic>
         <p:nvPicPr>
-          <p:cNvPr id="7" name="Image 0" descr="/Users/giovannivasconcelos/Documents/University/tech_summit/attention/slides/assets/eq_loss.png">    </p:cNvPr>
+          <p:cNvPr id="6" name="Image 0" descr="/Users/giovannivasconcelos/Documents/University/tech_summit/attention/slides/assets/eq_loss.png">    </p:cNvPr>
           <p:cNvPicPr>
             <a:picLocks noChangeAspect="1"/>
           </p:cNvPicPr>
@@ -36393,7 +36328,7 @@
       </p:pic>
       <p:sp>
         <p:nvSpPr>
-          <p:cNvPr id="8" name="Text 4"/>
+          <p:cNvPr id="7" name="Text 4"/>
           <p:cNvSpPr txBox="1"/>
           <p:nvPr/>
         </p:nvSpPr>
@@ -36432,7 +36367,7 @@
       </p:sp>
       <p:sp>
         <p:nvSpPr>
-          <p:cNvPr id="9" name="Text 5"/>
+          <p:cNvPr id="8" name="Text 5"/>
           <p:cNvSpPr txBox="1"/>
           <p:nvPr/>
         </p:nvSpPr>
@@ -36471,7 +36406,7 @@
       </p:sp>
       <p:pic>
         <p:nvPicPr>
-          <p:cNvPr id="10" name="Image 1" descr="/Users/giovannivasconcelos/Documents/University/tech_summit/attention/slides/assets/ch_nexttoken.png">    </p:cNvPr>
+          <p:cNvPr id="9" name="Image 1" descr="/Users/giovannivasconcelos/Documents/University/tech_summit/attention/slides/assets/ch_nexttoken.png">    </p:cNvPr>
           <p:cNvPicPr>
             <a:picLocks noChangeAspect="1"/>
           </p:cNvPicPr>
@@ -36644,7 +36579,7 @@
       </p:sp>
       <p:sp>
         <p:nvSpPr>
-          <p:cNvPr id="6" name="Shape 3"/>
+          <p:cNvPr id="5" name="Shape 3"/>
           <p:cNvSpPr/>
           <p:nvPr/>
         </p:nvSpPr>
@@ -36669,7 +36604,7 @@
       </p:sp>
       <p:sp>
         <p:nvSpPr>
-          <p:cNvPr id="7" name="Text 4"/>
+          <p:cNvPr id="6" name="Text 4"/>
           <p:cNvSpPr txBox="1"/>
           <p:nvPr/>
         </p:nvSpPr>
@@ -36708,7 +36643,7 @@
       </p:sp>
       <p:sp>
         <p:nvSpPr>
-          <p:cNvPr id="8" name="Text 5"/>
+          <p:cNvPr id="7" name="Text 5"/>
           <p:cNvSpPr txBox="1"/>
           <p:nvPr/>
         </p:nvSpPr>
@@ -36747,7 +36682,7 @@
       </p:sp>
       <p:sp>
         <p:nvSpPr>
-          <p:cNvPr id="9" name="Shape 6"/>
+          <p:cNvPr id="8" name="Shape 6"/>
           <p:cNvSpPr/>
           <p:nvPr/>
         </p:nvSpPr>
@@ -36771,7 +36706,7 @@
       </p:sp>
       <p:sp>
         <p:nvSpPr>
-          <p:cNvPr id="10" name="Shape 7"/>
+          <p:cNvPr id="9" name="Shape 7"/>
           <p:cNvSpPr/>
           <p:nvPr/>
         </p:nvSpPr>
@@ -36795,7 +36730,7 @@
       </p:sp>
       <p:sp>
         <p:nvSpPr>
-          <p:cNvPr id="11" name="Shape 8"/>
+          <p:cNvPr id="10" name="Shape 8"/>
           <p:cNvSpPr/>
           <p:nvPr/>
         </p:nvSpPr>
@@ -36820,7 +36755,7 @@
       </p:sp>
       <p:sp>
         <p:nvSpPr>
-          <p:cNvPr id="12" name="Text 9"/>
+          <p:cNvPr id="11" name="Text 9"/>
           <p:cNvSpPr txBox="1"/>
           <p:nvPr/>
         </p:nvSpPr>
@@ -36859,7 +36794,7 @@
       </p:sp>
       <p:sp>
         <p:nvSpPr>
-          <p:cNvPr id="13" name="Text 10"/>
+          <p:cNvPr id="12" name="Text 10"/>
           <p:cNvSpPr txBox="1"/>
           <p:nvPr/>
         </p:nvSpPr>
@@ -36898,7 +36833,7 @@
       </p:sp>
       <p:sp>
         <p:nvSpPr>
-          <p:cNvPr id="14" name="Shape 11"/>
+          <p:cNvPr id="13" name="Shape 11"/>
           <p:cNvSpPr/>
           <p:nvPr/>
         </p:nvSpPr>
@@ -36922,7 +36857,7 @@
       </p:sp>
       <p:sp>
         <p:nvSpPr>
-          <p:cNvPr id="15" name="Shape 12"/>
+          <p:cNvPr id="14" name="Shape 12"/>
           <p:cNvSpPr/>
           <p:nvPr/>
         </p:nvSpPr>
@@ -36946,7 +36881,7 @@
       </p:sp>
       <p:sp>
         <p:nvSpPr>
-          <p:cNvPr id="16" name="Shape 13"/>
+          <p:cNvPr id="15" name="Shape 13"/>
           <p:cNvSpPr/>
           <p:nvPr/>
         </p:nvSpPr>
@@ -36971,7 +36906,7 @@
       </p:sp>
       <p:sp>
         <p:nvSpPr>
-          <p:cNvPr id="17" name="Text 14"/>
+          <p:cNvPr id="16" name="Text 14"/>
           <p:cNvSpPr txBox="1"/>
           <p:nvPr/>
         </p:nvSpPr>
@@ -37010,7 +36945,7 @@
       </p:sp>
       <p:sp>
         <p:nvSpPr>
-          <p:cNvPr id="18" name="Text 15"/>
+          <p:cNvPr id="17" name="Text 15"/>
           <p:cNvSpPr txBox="1"/>
           <p:nvPr/>
         </p:nvSpPr>
@@ -37049,7 +36984,7 @@
       </p:sp>
       <p:sp>
         <p:nvSpPr>
-          <p:cNvPr id="19" name="Shape 16"/>
+          <p:cNvPr id="18" name="Shape 16"/>
           <p:cNvSpPr/>
           <p:nvPr/>
         </p:nvSpPr>
@@ -37073,7 +37008,7 @@
       </p:sp>
       <p:sp>
         <p:nvSpPr>
-          <p:cNvPr id="20" name="Shape 17"/>
+          <p:cNvPr id="19" name="Shape 17"/>
           <p:cNvSpPr/>
           <p:nvPr/>
         </p:nvSpPr>
@@ -37097,7 +37032,7 @@
       </p:sp>
       <p:sp>
         <p:nvSpPr>
-          <p:cNvPr id="21" name="Shape 18"/>
+          <p:cNvPr id="20" name="Shape 18"/>
           <p:cNvSpPr/>
           <p:nvPr/>
         </p:nvSpPr>
@@ -37122,7 +37057,7 @@
       </p:sp>
       <p:sp>
         <p:nvSpPr>
-          <p:cNvPr id="22" name="Text 19"/>
+          <p:cNvPr id="21" name="Text 19"/>
           <p:cNvSpPr txBox="1"/>
           <p:nvPr/>
         </p:nvSpPr>
@@ -37161,7 +37096,7 @@
       </p:sp>
       <p:sp>
         <p:nvSpPr>
-          <p:cNvPr id="23" name="Text 20"/>
+          <p:cNvPr id="22" name="Text 20"/>
           <p:cNvSpPr txBox="1"/>
           <p:nvPr/>
         </p:nvSpPr>
@@ -37200,7 +37135,7 @@
       </p:sp>
       <p:sp>
         <p:nvSpPr>
-          <p:cNvPr id="24" name="Shape 21"/>
+          <p:cNvPr id="23" name="Shape 21"/>
           <p:cNvSpPr/>
           <p:nvPr/>
         </p:nvSpPr>
@@ -37224,7 +37159,7 @@
       </p:sp>
       <p:sp>
         <p:nvSpPr>
-          <p:cNvPr id="25" name="Shape 22"/>
+          <p:cNvPr id="24" name="Shape 22"/>
           <p:cNvSpPr/>
           <p:nvPr/>
         </p:nvSpPr>
@@ -37248,7 +37183,7 @@
       </p:sp>
       <p:sp>
         <p:nvSpPr>
-          <p:cNvPr id="26" name="Shape 23"/>
+          <p:cNvPr id="25" name="Shape 23"/>
           <p:cNvSpPr/>
           <p:nvPr/>
         </p:nvSpPr>
@@ -37273,7 +37208,7 @@
       </p:sp>
       <p:sp>
         <p:nvSpPr>
-          <p:cNvPr id="27" name="Text 24"/>
+          <p:cNvPr id="26" name="Text 24"/>
           <p:cNvSpPr txBox="1"/>
           <p:nvPr/>
         </p:nvSpPr>
@@ -37312,7 +37247,7 @@
       </p:sp>
       <p:sp>
         <p:nvSpPr>
-          <p:cNvPr id="28" name="Text 25"/>
+          <p:cNvPr id="27" name="Text 25"/>
           <p:cNvSpPr txBox="1"/>
           <p:nvPr/>
         </p:nvSpPr>
@@ -37351,7 +37286,7 @@
       </p:sp>
       <p:sp>
         <p:nvSpPr>
-          <p:cNvPr id="29" name="Shape 26"/>
+          <p:cNvPr id="28" name="Shape 26"/>
           <p:cNvSpPr/>
           <p:nvPr/>
         </p:nvSpPr>
@@ -37375,7 +37310,7 @@
       </p:sp>
       <p:sp>
         <p:nvSpPr>
-          <p:cNvPr id="30" name="Text 27"/>
+          <p:cNvPr id="29" name="Text 27"/>
           <p:cNvSpPr txBox="1"/>
           <p:nvPr/>
         </p:nvSpPr>
@@ -37414,7 +37349,7 @@
       </p:sp>
       <p:sp>
         <p:nvSpPr>
-          <p:cNvPr id="31" name="Text 28"/>
+          <p:cNvPr id="30" name="Text 28"/>
           <p:cNvSpPr txBox="1"/>
           <p:nvPr/>
         </p:nvSpPr>
@@ -37453,7 +37388,7 @@
       </p:sp>
       <p:sp>
         <p:nvSpPr>
-          <p:cNvPr id="32" name="Text 29"/>
+          <p:cNvPr id="31" name="Text 29"/>
           <p:cNvSpPr txBox="1"/>
           <p:nvPr/>
         </p:nvSpPr>
@@ -37492,7 +37427,7 @@
       </p:sp>
       <p:sp>
         <p:nvSpPr>
-          <p:cNvPr id="33" name="Text 30"/>
+          <p:cNvPr id="32" name="Text 30"/>
           <p:cNvSpPr txBox="1"/>
           <p:nvPr/>
         </p:nvSpPr>
@@ -37531,7 +37466,7 @@
       </p:sp>
       <p:sp>
         <p:nvSpPr>
-          <p:cNvPr id="34" name="Text 31"/>
+          <p:cNvPr id="33" name="Text 31"/>
           <p:cNvSpPr txBox="1"/>
           <p:nvPr/>
         </p:nvSpPr>
@@ -38811,7 +38746,7 @@
       </p:graphicFrame>
       <p:sp>
         <p:nvSpPr>
-          <p:cNvPr id="7" name="Text 3"/>
+          <p:cNvPr id="6" name="Text 3"/>
           <p:cNvSpPr txBox="1"/>
           <p:nvPr/>
         </p:nvSpPr>
@@ -38850,7 +38785,7 @@
       </p:sp>
       <p:sp>
         <p:nvSpPr>
-          <p:cNvPr id="8" name="Text 4"/>
+          <p:cNvPr id="7" name="Text 4"/>
           <p:cNvSpPr txBox="1"/>
           <p:nvPr/>
         </p:nvSpPr>
@@ -39038,7 +38973,7 @@
       </p:sp>
       <p:sp>
         <p:nvSpPr>
-          <p:cNvPr id="6" name="Shape 3"/>
+          <p:cNvPr id="5" name="Shape 3"/>
           <p:cNvSpPr/>
           <p:nvPr/>
         </p:nvSpPr>
@@ -39063,7 +38998,7 @@
       </p:sp>
       <p:sp>
         <p:nvSpPr>
-          <p:cNvPr id="7" name="Text 4"/>
+          <p:cNvPr id="6" name="Text 4"/>
           <p:cNvSpPr txBox="1"/>
           <p:nvPr/>
         </p:nvSpPr>
@@ -39102,7 +39037,7 @@
       </p:sp>
       <p:sp>
         <p:nvSpPr>
-          <p:cNvPr id="8" name="Text 5"/>
+          <p:cNvPr id="7" name="Text 5"/>
           <p:cNvSpPr txBox="1"/>
           <p:nvPr/>
         </p:nvSpPr>
@@ -39141,7 +39076,7 @@
       </p:sp>
       <p:sp>
         <p:nvSpPr>
-          <p:cNvPr id="9" name="Text 6"/>
+          <p:cNvPr id="8" name="Text 6"/>
           <p:cNvSpPr txBox="1"/>
           <p:nvPr/>
         </p:nvSpPr>
@@ -39180,7 +39115,7 @@
       </p:sp>
       <p:sp>
         <p:nvSpPr>
-          <p:cNvPr id="10" name="Text 7"/>
+          <p:cNvPr id="9" name="Text 7"/>
           <p:cNvSpPr txBox="1"/>
           <p:nvPr/>
         </p:nvSpPr>
@@ -39219,7 +39154,7 @@
       </p:sp>
       <p:sp>
         <p:nvSpPr>
-          <p:cNvPr id="11" name="Text 8"/>
+          <p:cNvPr id="10" name="Text 8"/>
           <p:cNvSpPr txBox="1"/>
           <p:nvPr/>
         </p:nvSpPr>
@@ -39258,7 +39193,7 @@
       </p:sp>
       <p:sp>
         <p:nvSpPr>
-          <p:cNvPr id="12" name="Shape 9"/>
+          <p:cNvPr id="11" name="Shape 9"/>
           <p:cNvSpPr/>
           <p:nvPr/>
         </p:nvSpPr>
@@ -39283,7 +39218,7 @@
       </p:sp>
       <p:sp>
         <p:nvSpPr>
-          <p:cNvPr id="13" name="Text 10"/>
+          <p:cNvPr id="12" name="Text 10"/>
           <p:cNvSpPr txBox="1"/>
           <p:nvPr/>
         </p:nvSpPr>
@@ -39322,7 +39257,7 @@
       </p:sp>
       <p:sp>
         <p:nvSpPr>
-          <p:cNvPr id="14" name="Shape 11"/>
+          <p:cNvPr id="13" name="Shape 11"/>
           <p:cNvSpPr/>
           <p:nvPr/>
         </p:nvSpPr>
@@ -39347,7 +39282,7 @@
       </p:sp>
       <p:sp>
         <p:nvSpPr>
-          <p:cNvPr id="15" name="Text 12"/>
+          <p:cNvPr id="14" name="Text 12"/>
           <p:cNvSpPr txBox="1"/>
           <p:nvPr/>
         </p:nvSpPr>
@@ -39386,7 +39321,7 @@
       </p:sp>
       <p:sp>
         <p:nvSpPr>
-          <p:cNvPr id="16" name="Shape 13"/>
+          <p:cNvPr id="15" name="Shape 13"/>
           <p:cNvSpPr/>
           <p:nvPr/>
         </p:nvSpPr>
@@ -39411,7 +39346,7 @@
       </p:sp>
       <p:sp>
         <p:nvSpPr>
-          <p:cNvPr id="17" name="Text 14"/>
+          <p:cNvPr id="16" name="Text 14"/>
           <p:cNvSpPr txBox="1"/>
           <p:nvPr/>
         </p:nvSpPr>
@@ -39450,7 +39385,7 @@
       </p:sp>
       <p:sp>
         <p:nvSpPr>
-          <p:cNvPr id="18" name="Shape 15"/>
+          <p:cNvPr id="17" name="Shape 15"/>
           <p:cNvSpPr/>
           <p:nvPr/>
         </p:nvSpPr>
@@ -39475,7 +39410,7 @@
       </p:sp>
       <p:sp>
         <p:nvSpPr>
-          <p:cNvPr id="19" name="Text 16"/>
+          <p:cNvPr id="18" name="Text 16"/>
           <p:cNvSpPr txBox="1"/>
           <p:nvPr/>
         </p:nvSpPr>
@@ -39514,7 +39449,7 @@
       </p:sp>
       <p:sp>
         <p:nvSpPr>
-          <p:cNvPr id="20" name="Shape 17"/>
+          <p:cNvPr id="19" name="Shape 17"/>
           <p:cNvSpPr/>
           <p:nvPr/>
         </p:nvSpPr>
@@ -39539,7 +39474,7 @@
       </p:sp>
       <p:sp>
         <p:nvSpPr>
-          <p:cNvPr id="21" name="Text 18"/>
+          <p:cNvPr id="20" name="Text 18"/>
           <p:cNvSpPr txBox="1"/>
           <p:nvPr/>
         </p:nvSpPr>
@@ -39578,7 +39513,7 @@
       </p:sp>
       <p:sp>
         <p:nvSpPr>
-          <p:cNvPr id="22" name="Shape 19"/>
+          <p:cNvPr id="21" name="Shape 19"/>
           <p:cNvSpPr/>
           <p:nvPr/>
         </p:nvSpPr>
@@ -39603,7 +39538,7 @@
       </p:sp>
       <p:sp>
         <p:nvSpPr>
-          <p:cNvPr id="23" name="Text 20"/>
+          <p:cNvPr id="22" name="Text 20"/>
           <p:cNvSpPr txBox="1"/>
           <p:nvPr/>
         </p:nvSpPr>
@@ -39642,7 +39577,7 @@
       </p:sp>
       <p:sp>
         <p:nvSpPr>
-          <p:cNvPr id="24" name="Shape 21"/>
+          <p:cNvPr id="23" name="Shape 21"/>
           <p:cNvSpPr/>
           <p:nvPr/>
         </p:nvSpPr>
@@ -39667,7 +39602,7 @@
       </p:sp>
       <p:sp>
         <p:nvSpPr>
-          <p:cNvPr id="25" name="Text 22"/>
+          <p:cNvPr id="24" name="Text 22"/>
           <p:cNvSpPr txBox="1"/>
           <p:nvPr/>
         </p:nvSpPr>
@@ -39706,7 +39641,7 @@
       </p:sp>
       <p:sp>
         <p:nvSpPr>
-          <p:cNvPr id="26" name="Shape 23"/>
+          <p:cNvPr id="25" name="Shape 23"/>
           <p:cNvSpPr/>
           <p:nvPr/>
         </p:nvSpPr>
@@ -39731,7 +39666,7 @@
       </p:sp>
       <p:sp>
         <p:nvSpPr>
-          <p:cNvPr id="27" name="Text 24"/>
+          <p:cNvPr id="26" name="Text 24"/>
           <p:cNvSpPr txBox="1"/>
           <p:nvPr/>
         </p:nvSpPr>
@@ -39770,7 +39705,7 @@
       </p:sp>
       <p:sp>
         <p:nvSpPr>
-          <p:cNvPr id="28" name="Shape 25"/>
+          <p:cNvPr id="27" name="Shape 25"/>
           <p:cNvSpPr/>
           <p:nvPr/>
         </p:nvSpPr>
@@ -39795,7 +39730,7 @@
       </p:sp>
       <p:sp>
         <p:nvSpPr>
-          <p:cNvPr id="29" name="Text 26"/>
+          <p:cNvPr id="28" name="Text 26"/>
           <p:cNvSpPr txBox="1"/>
           <p:nvPr/>
         </p:nvSpPr>
@@ -39834,7 +39769,7 @@
       </p:sp>
       <p:sp>
         <p:nvSpPr>
-          <p:cNvPr id="30" name="Shape 27"/>
+          <p:cNvPr id="29" name="Shape 27"/>
           <p:cNvSpPr/>
           <p:nvPr/>
         </p:nvSpPr>
@@ -39859,7 +39794,7 @@
       </p:sp>
       <p:sp>
         <p:nvSpPr>
-          <p:cNvPr id="31" name="Text 28"/>
+          <p:cNvPr id="30" name="Text 28"/>
           <p:cNvSpPr txBox="1"/>
           <p:nvPr/>
         </p:nvSpPr>
@@ -39898,7 +39833,7 @@
       </p:sp>
       <p:sp>
         <p:nvSpPr>
-          <p:cNvPr id="32" name="Shape 29"/>
+          <p:cNvPr id="31" name="Shape 29"/>
           <p:cNvSpPr/>
           <p:nvPr/>
         </p:nvSpPr>
@@ -39923,7 +39858,7 @@
       </p:sp>
       <p:sp>
         <p:nvSpPr>
-          <p:cNvPr id="33" name="Text 30"/>
+          <p:cNvPr id="32" name="Text 30"/>
           <p:cNvSpPr txBox="1"/>
           <p:nvPr/>
         </p:nvSpPr>
@@ -39962,7 +39897,7 @@
       </p:sp>
       <p:sp>
         <p:nvSpPr>
-          <p:cNvPr id="34" name="Shape 31"/>
+          <p:cNvPr id="33" name="Shape 31"/>
           <p:cNvSpPr/>
           <p:nvPr/>
         </p:nvSpPr>
@@ -39987,7 +39922,7 @@
       </p:sp>
       <p:sp>
         <p:nvSpPr>
-          <p:cNvPr id="35" name="Text 32"/>
+          <p:cNvPr id="34" name="Text 32"/>
           <p:cNvSpPr txBox="1"/>
           <p:nvPr/>
         </p:nvSpPr>
@@ -40026,7 +39961,7 @@
       </p:sp>
       <p:sp>
         <p:nvSpPr>
-          <p:cNvPr id="36" name="Shape 33"/>
+          <p:cNvPr id="35" name="Shape 33"/>
           <p:cNvSpPr/>
           <p:nvPr/>
         </p:nvSpPr>
@@ -40051,7 +39986,7 @@
       </p:sp>
       <p:sp>
         <p:nvSpPr>
-          <p:cNvPr id="37" name="Text 34"/>
+          <p:cNvPr id="36" name="Text 34"/>
           <p:cNvSpPr txBox="1"/>
           <p:nvPr/>
         </p:nvSpPr>
@@ -40090,7 +40025,7 @@
       </p:sp>
       <p:sp>
         <p:nvSpPr>
-          <p:cNvPr id="38" name="Shape 35"/>
+          <p:cNvPr id="37" name="Shape 35"/>
           <p:cNvSpPr/>
           <p:nvPr/>
         </p:nvSpPr>
@@ -40115,7 +40050,7 @@
       </p:sp>
       <p:sp>
         <p:nvSpPr>
-          <p:cNvPr id="39" name="Text 36"/>
+          <p:cNvPr id="38" name="Text 36"/>
           <p:cNvSpPr txBox="1"/>
           <p:nvPr/>
         </p:nvSpPr>
@@ -40154,7 +40089,7 @@
       </p:sp>
       <p:sp>
         <p:nvSpPr>
-          <p:cNvPr id="40" name="Shape 37"/>
+          <p:cNvPr id="39" name="Shape 37"/>
           <p:cNvSpPr/>
           <p:nvPr/>
         </p:nvSpPr>
@@ -40179,7 +40114,7 @@
       </p:sp>
       <p:sp>
         <p:nvSpPr>
-          <p:cNvPr id="41" name="Text 38"/>
+          <p:cNvPr id="40" name="Text 38"/>
           <p:cNvSpPr txBox="1"/>
           <p:nvPr/>
         </p:nvSpPr>
@@ -40218,7 +40153,7 @@
       </p:sp>
       <p:sp>
         <p:nvSpPr>
-          <p:cNvPr id="42" name="Shape 39"/>
+          <p:cNvPr id="41" name="Shape 39"/>
           <p:cNvSpPr/>
           <p:nvPr/>
         </p:nvSpPr>
@@ -40242,7 +40177,7 @@
       </p:sp>
       <p:sp>
         <p:nvSpPr>
-          <p:cNvPr id="43" name="Shape 40"/>
+          <p:cNvPr id="42" name="Shape 40"/>
           <p:cNvSpPr/>
           <p:nvPr/>
         </p:nvSpPr>
@@ -40266,7 +40201,7 @@
       </p:sp>
       <p:sp>
         <p:nvSpPr>
-          <p:cNvPr id="44" name="Text 41"/>
+          <p:cNvPr id="43" name="Text 41"/>
           <p:cNvSpPr txBox="1"/>
           <p:nvPr/>
         </p:nvSpPr>
@@ -40305,7 +40240,7 @@
       </p:sp>
       <p:sp>
         <p:nvSpPr>
-          <p:cNvPr id="45" name="Shape 42"/>
+          <p:cNvPr id="44" name="Shape 42"/>
           <p:cNvSpPr/>
           <p:nvPr/>
         </p:nvSpPr>
@@ -40330,7 +40265,7 @@
       </p:sp>
       <p:sp>
         <p:nvSpPr>
-          <p:cNvPr id="46" name="Text 43"/>
+          <p:cNvPr id="45" name="Text 43"/>
           <p:cNvSpPr txBox="1"/>
           <p:nvPr/>
         </p:nvSpPr>
@@ -40369,7 +40304,7 @@
       </p:sp>
       <p:sp>
         <p:nvSpPr>
-          <p:cNvPr id="47" name="Text 44"/>
+          <p:cNvPr id="46" name="Text 44"/>
           <p:cNvSpPr txBox="1"/>
           <p:nvPr/>
         </p:nvSpPr>
@@ -40408,7 +40343,7 @@
       </p:sp>
       <p:sp>
         <p:nvSpPr>
-          <p:cNvPr id="48" name="Text 45"/>
+          <p:cNvPr id="47" name="Text 45"/>
           <p:cNvSpPr txBox="1"/>
           <p:nvPr/>
         </p:nvSpPr>
@@ -40596,7 +40531,7 @@
       </p:sp>
       <p:pic>
         <p:nvPicPr>
-          <p:cNvPr id="6" name="Image 0" descr="/Users/giovannivasconcelos/Documents/University/tech_summit/attention/slides/assets/eq_qkv.png">    </p:cNvPr>
+          <p:cNvPr id="5" name="Image 0" descr="/Users/giovannivasconcelos/Documents/University/tech_summit/attention/slides/assets/eq_qkv.png">    </p:cNvPr>
           <p:cNvPicPr>
             <a:picLocks noChangeAspect="1"/>
           </p:cNvPicPr>
@@ -40620,7 +40555,7 @@
       </p:pic>
       <p:sp>
         <p:nvSpPr>
-          <p:cNvPr id="7" name="Shape 3"/>
+          <p:cNvPr id="6" name="Shape 3"/>
           <p:cNvSpPr/>
           <p:nvPr/>
         </p:nvSpPr>
@@ -40645,7 +40580,7 @@
       </p:sp>
       <p:sp>
         <p:nvSpPr>
-          <p:cNvPr id="8" name="Shape 4"/>
+          <p:cNvPr id="7" name="Shape 4"/>
           <p:cNvSpPr/>
           <p:nvPr/>
         </p:nvSpPr>
@@ -40670,7 +40605,7 @@
       </p:sp>
       <p:sp>
         <p:nvSpPr>
-          <p:cNvPr id="9" name="Shape 5"/>
+          <p:cNvPr id="8" name="Shape 5"/>
           <p:cNvSpPr/>
           <p:nvPr/>
         </p:nvSpPr>
@@ -40695,7 +40630,7 @@
       </p:sp>
       <p:sp>
         <p:nvSpPr>
-          <p:cNvPr id="10" name="Shape 6"/>
+          <p:cNvPr id="9" name="Shape 6"/>
           <p:cNvSpPr/>
           <p:nvPr/>
         </p:nvSpPr>
@@ -40720,7 +40655,7 @@
       </p:sp>
       <p:sp>
         <p:nvSpPr>
-          <p:cNvPr id="11" name="Shape 7"/>
+          <p:cNvPr id="10" name="Shape 7"/>
           <p:cNvSpPr/>
           <p:nvPr/>
         </p:nvSpPr>
@@ -40745,7 +40680,7 @@
       </p:sp>
       <p:sp>
         <p:nvSpPr>
-          <p:cNvPr id="12" name="Shape 8"/>
+          <p:cNvPr id="11" name="Shape 8"/>
           <p:cNvSpPr/>
           <p:nvPr/>
         </p:nvSpPr>
@@ -40770,7 +40705,7 @@
       </p:sp>
       <p:sp>
         <p:nvSpPr>
-          <p:cNvPr id="13" name="Shape 9"/>
+          <p:cNvPr id="12" name="Shape 9"/>
           <p:cNvSpPr/>
           <p:nvPr/>
         </p:nvSpPr>
@@ -40795,7 +40730,7 @@
       </p:sp>
       <p:sp>
         <p:nvSpPr>
-          <p:cNvPr id="14" name="Shape 10"/>
+          <p:cNvPr id="13" name="Shape 10"/>
           <p:cNvSpPr/>
           <p:nvPr/>
         </p:nvSpPr>
@@ -40820,7 +40755,7 @@
       </p:sp>
       <p:sp>
         <p:nvSpPr>
-          <p:cNvPr id="15" name="Shape 11"/>
+          <p:cNvPr id="14" name="Shape 11"/>
           <p:cNvSpPr/>
           <p:nvPr/>
         </p:nvSpPr>
@@ -40845,7 +40780,7 @@
       </p:sp>
       <p:sp>
         <p:nvSpPr>
-          <p:cNvPr id="16" name="Shape 12"/>
+          <p:cNvPr id="15" name="Shape 12"/>
           <p:cNvSpPr/>
           <p:nvPr/>
         </p:nvSpPr>
@@ -40870,7 +40805,7 @@
       </p:sp>
       <p:sp>
         <p:nvSpPr>
-          <p:cNvPr id="17" name="Shape 13"/>
+          <p:cNvPr id="16" name="Shape 13"/>
           <p:cNvSpPr/>
           <p:nvPr/>
         </p:nvSpPr>
@@ -40895,7 +40830,7 @@
       </p:sp>
       <p:sp>
         <p:nvSpPr>
-          <p:cNvPr id="18" name="Shape 14"/>
+          <p:cNvPr id="17" name="Shape 14"/>
           <p:cNvSpPr/>
           <p:nvPr/>
         </p:nvSpPr>
@@ -40920,7 +40855,7 @@
       </p:sp>
       <p:sp>
         <p:nvSpPr>
-          <p:cNvPr id="19" name="Shape 15"/>
+          <p:cNvPr id="18" name="Shape 15"/>
           <p:cNvSpPr/>
           <p:nvPr/>
         </p:nvSpPr>
@@ -40945,7 +40880,7 @@
       </p:sp>
       <p:sp>
         <p:nvSpPr>
-          <p:cNvPr id="20" name="Shape 16"/>
+          <p:cNvPr id="19" name="Shape 16"/>
           <p:cNvSpPr/>
           <p:nvPr/>
         </p:nvSpPr>
@@ -40970,7 +40905,7 @@
       </p:sp>
       <p:sp>
         <p:nvSpPr>
-          <p:cNvPr id="21" name="Shape 17"/>
+          <p:cNvPr id="20" name="Shape 17"/>
           <p:cNvSpPr/>
           <p:nvPr/>
         </p:nvSpPr>
@@ -40995,7 +40930,7 @@
       </p:sp>
       <p:sp>
         <p:nvSpPr>
-          <p:cNvPr id="22" name="Shape 18"/>
+          <p:cNvPr id="21" name="Shape 18"/>
           <p:cNvSpPr/>
           <p:nvPr/>
         </p:nvSpPr>
@@ -41020,7 +40955,7 @@
       </p:sp>
       <p:sp>
         <p:nvSpPr>
-          <p:cNvPr id="23" name="Shape 19"/>
+          <p:cNvPr id="22" name="Shape 19"/>
           <p:cNvSpPr/>
           <p:nvPr/>
         </p:nvSpPr>
@@ -41045,7 +40980,7 @@
       </p:sp>
       <p:sp>
         <p:nvSpPr>
-          <p:cNvPr id="24" name="Shape 20"/>
+          <p:cNvPr id="23" name="Shape 20"/>
           <p:cNvSpPr/>
           <p:nvPr/>
         </p:nvSpPr>
@@ -41070,7 +41005,7 @@
       </p:sp>
       <p:sp>
         <p:nvSpPr>
-          <p:cNvPr id="25" name="Shape 21"/>
+          <p:cNvPr id="24" name="Shape 21"/>
           <p:cNvSpPr/>
           <p:nvPr/>
         </p:nvSpPr>
@@ -41095,7 +41030,7 @@
       </p:sp>
       <p:sp>
         <p:nvSpPr>
-          <p:cNvPr id="26" name="Shape 22"/>
+          <p:cNvPr id="25" name="Shape 22"/>
           <p:cNvSpPr/>
           <p:nvPr/>
         </p:nvSpPr>
@@ -41120,7 +41055,7 @@
       </p:sp>
       <p:sp>
         <p:nvSpPr>
-          <p:cNvPr id="27" name="Shape 23"/>
+          <p:cNvPr id="26" name="Shape 23"/>
           <p:cNvSpPr/>
           <p:nvPr/>
         </p:nvSpPr>
@@ -41145,7 +41080,7 @@
       </p:sp>
       <p:sp>
         <p:nvSpPr>
-          <p:cNvPr id="28" name="Shape 24"/>
+          <p:cNvPr id="27" name="Shape 24"/>
           <p:cNvSpPr/>
           <p:nvPr/>
         </p:nvSpPr>
@@ -41170,7 +41105,7 @@
       </p:sp>
       <p:sp>
         <p:nvSpPr>
-          <p:cNvPr id="29" name="Shape 25"/>
+          <p:cNvPr id="28" name="Shape 25"/>
           <p:cNvSpPr/>
           <p:nvPr/>
         </p:nvSpPr>
@@ -41195,7 +41130,7 @@
       </p:sp>
       <p:sp>
         <p:nvSpPr>
-          <p:cNvPr id="30" name="Shape 26"/>
+          <p:cNvPr id="29" name="Shape 26"/>
           <p:cNvSpPr/>
           <p:nvPr/>
         </p:nvSpPr>
@@ -41220,7 +41155,7 @@
       </p:sp>
       <p:sp>
         <p:nvSpPr>
-          <p:cNvPr id="31" name="Shape 27"/>
+          <p:cNvPr id="30" name="Shape 27"/>
           <p:cNvSpPr/>
           <p:nvPr/>
         </p:nvSpPr>
@@ -41245,7 +41180,7 @@
       </p:sp>
       <p:sp>
         <p:nvSpPr>
-          <p:cNvPr id="32" name="Shape 28"/>
+          <p:cNvPr id="31" name="Shape 28"/>
           <p:cNvSpPr/>
           <p:nvPr/>
         </p:nvSpPr>
@@ -41270,7 +41205,7 @@
       </p:sp>
       <p:sp>
         <p:nvSpPr>
-          <p:cNvPr id="33" name="Shape 29"/>
+          <p:cNvPr id="32" name="Shape 29"/>
           <p:cNvSpPr/>
           <p:nvPr/>
         </p:nvSpPr>
@@ -41295,7 +41230,7 @@
       </p:sp>
       <p:sp>
         <p:nvSpPr>
-          <p:cNvPr id="34" name="Shape 30"/>
+          <p:cNvPr id="33" name="Shape 30"/>
           <p:cNvSpPr/>
           <p:nvPr/>
         </p:nvSpPr>
@@ -41320,7 +41255,7 @@
       </p:sp>
       <p:sp>
         <p:nvSpPr>
-          <p:cNvPr id="35" name="Shape 31"/>
+          <p:cNvPr id="34" name="Shape 31"/>
           <p:cNvSpPr/>
           <p:nvPr/>
         </p:nvSpPr>
@@ -41345,7 +41280,7 @@
       </p:sp>
       <p:sp>
         <p:nvSpPr>
-          <p:cNvPr id="36" name="Shape 32"/>
+          <p:cNvPr id="35" name="Shape 32"/>
           <p:cNvSpPr/>
           <p:nvPr/>
         </p:nvSpPr>
@@ -41370,7 +41305,7 @@
       </p:sp>
       <p:sp>
         <p:nvSpPr>
-          <p:cNvPr id="37" name="Text 33"/>
+          <p:cNvPr id="36" name="Text 33"/>
           <p:cNvSpPr txBox="1"/>
           <p:nvPr/>
         </p:nvSpPr>
@@ -41409,7 +41344,7 @@
       </p:sp>
       <p:sp>
         <p:nvSpPr>
-          <p:cNvPr id="38" name="Text 34"/>
+          <p:cNvPr id="37" name="Text 34"/>
           <p:cNvSpPr txBox="1"/>
           <p:nvPr/>
         </p:nvSpPr>
@@ -41448,7 +41383,7 @@
       </p:sp>
       <p:sp>
         <p:nvSpPr>
-          <p:cNvPr id="39" name="Shape 35"/>
+          <p:cNvPr id="38" name="Shape 35"/>
           <p:cNvSpPr/>
           <p:nvPr/>
         </p:nvSpPr>
@@ -41472,7 +41407,7 @@
       </p:sp>
       <p:sp>
         <p:nvSpPr>
-          <p:cNvPr id="40" name="Shape 36"/>
+          <p:cNvPr id="39" name="Shape 36"/>
           <p:cNvSpPr/>
           <p:nvPr/>
         </p:nvSpPr>
@@ -41497,7 +41432,7 @@
       </p:sp>
       <p:sp>
         <p:nvSpPr>
-          <p:cNvPr id="41" name="Shape 37"/>
+          <p:cNvPr id="40" name="Shape 37"/>
           <p:cNvSpPr/>
           <p:nvPr/>
         </p:nvSpPr>
@@ -41522,7 +41457,7 @@
       </p:sp>
       <p:sp>
         <p:nvSpPr>
-          <p:cNvPr id="42" name="Shape 38"/>
+          <p:cNvPr id="41" name="Shape 38"/>
           <p:cNvSpPr/>
           <p:nvPr/>
         </p:nvSpPr>
@@ -41547,7 +41482,7 @@
       </p:sp>
       <p:sp>
         <p:nvSpPr>
-          <p:cNvPr id="43" name="Shape 39"/>
+          <p:cNvPr id="42" name="Shape 39"/>
           <p:cNvSpPr/>
           <p:nvPr/>
         </p:nvSpPr>
@@ -41572,7 +41507,7 @@
       </p:sp>
       <p:sp>
         <p:nvSpPr>
-          <p:cNvPr id="44" name="Shape 40"/>
+          <p:cNvPr id="43" name="Shape 40"/>
           <p:cNvSpPr/>
           <p:nvPr/>
         </p:nvSpPr>
@@ -41597,7 +41532,7 @@
       </p:sp>
       <p:sp>
         <p:nvSpPr>
-          <p:cNvPr id="45" name="Shape 41"/>
+          <p:cNvPr id="44" name="Shape 41"/>
           <p:cNvSpPr/>
           <p:nvPr/>
         </p:nvSpPr>
@@ -41622,7 +41557,7 @@
       </p:sp>
       <p:sp>
         <p:nvSpPr>
-          <p:cNvPr id="46" name="Shape 42"/>
+          <p:cNvPr id="45" name="Shape 42"/>
           <p:cNvSpPr/>
           <p:nvPr/>
         </p:nvSpPr>
@@ -41647,7 +41582,7 @@
       </p:sp>
       <p:sp>
         <p:nvSpPr>
-          <p:cNvPr id="47" name="Shape 43"/>
+          <p:cNvPr id="46" name="Shape 43"/>
           <p:cNvSpPr/>
           <p:nvPr/>
         </p:nvSpPr>
@@ -41672,7 +41607,7 @@
       </p:sp>
       <p:sp>
         <p:nvSpPr>
-          <p:cNvPr id="48" name="Shape 44"/>
+          <p:cNvPr id="47" name="Shape 44"/>
           <p:cNvSpPr/>
           <p:nvPr/>
         </p:nvSpPr>
@@ -41697,7 +41632,7 @@
       </p:sp>
       <p:sp>
         <p:nvSpPr>
-          <p:cNvPr id="49" name="Shape 45"/>
+          <p:cNvPr id="48" name="Shape 45"/>
           <p:cNvSpPr/>
           <p:nvPr/>
         </p:nvSpPr>
@@ -41722,7 +41657,7 @@
       </p:sp>
       <p:sp>
         <p:nvSpPr>
-          <p:cNvPr id="50" name="Shape 46"/>
+          <p:cNvPr id="49" name="Shape 46"/>
           <p:cNvSpPr/>
           <p:nvPr/>
         </p:nvSpPr>
@@ -41747,7 +41682,7 @@
       </p:sp>
       <p:sp>
         <p:nvSpPr>
-          <p:cNvPr id="51" name="Shape 47"/>
+          <p:cNvPr id="50" name="Shape 47"/>
           <p:cNvSpPr/>
           <p:nvPr/>
         </p:nvSpPr>
@@ -41772,7 +41707,7 @@
       </p:sp>
       <p:sp>
         <p:nvSpPr>
-          <p:cNvPr id="52" name="Shape 48"/>
+          <p:cNvPr id="51" name="Shape 48"/>
           <p:cNvSpPr/>
           <p:nvPr/>
         </p:nvSpPr>
@@ -41797,7 +41732,7 @@
       </p:sp>
       <p:sp>
         <p:nvSpPr>
-          <p:cNvPr id="53" name="Shape 49"/>
+          <p:cNvPr id="52" name="Shape 49"/>
           <p:cNvSpPr/>
           <p:nvPr/>
         </p:nvSpPr>
@@ -41822,7 +41757,7 @@
       </p:sp>
       <p:sp>
         <p:nvSpPr>
-          <p:cNvPr id="54" name="Shape 50"/>
+          <p:cNvPr id="53" name="Shape 50"/>
           <p:cNvSpPr/>
           <p:nvPr/>
         </p:nvSpPr>
@@ -41847,7 +41782,7 @@
       </p:sp>
       <p:sp>
         <p:nvSpPr>
-          <p:cNvPr id="55" name="Shape 51"/>
+          <p:cNvPr id="54" name="Shape 51"/>
           <p:cNvSpPr/>
           <p:nvPr/>
         </p:nvSpPr>
@@ -41872,7 +41807,7 @@
       </p:sp>
       <p:sp>
         <p:nvSpPr>
-          <p:cNvPr id="56" name="Shape 52"/>
+          <p:cNvPr id="55" name="Shape 52"/>
           <p:cNvSpPr/>
           <p:nvPr/>
         </p:nvSpPr>
@@ -41897,7 +41832,7 @@
       </p:sp>
       <p:sp>
         <p:nvSpPr>
-          <p:cNvPr id="57" name="Shape 53"/>
+          <p:cNvPr id="56" name="Shape 53"/>
           <p:cNvSpPr/>
           <p:nvPr/>
         </p:nvSpPr>
@@ -41922,7 +41857,7 @@
       </p:sp>
       <p:sp>
         <p:nvSpPr>
-          <p:cNvPr id="58" name="Shape 54"/>
+          <p:cNvPr id="57" name="Shape 54"/>
           <p:cNvSpPr/>
           <p:nvPr/>
         </p:nvSpPr>
@@ -41947,7 +41882,7 @@
       </p:sp>
       <p:sp>
         <p:nvSpPr>
-          <p:cNvPr id="59" name="Shape 55"/>
+          <p:cNvPr id="58" name="Shape 55"/>
           <p:cNvSpPr/>
           <p:nvPr/>
         </p:nvSpPr>
@@ -41972,7 +41907,7 @@
       </p:sp>
       <p:sp>
         <p:nvSpPr>
-          <p:cNvPr id="60" name="Text 56"/>
+          <p:cNvPr id="59" name="Text 56"/>
           <p:cNvSpPr txBox="1"/>
           <p:nvPr/>
         </p:nvSpPr>
@@ -42011,7 +41946,7 @@
       </p:sp>
       <p:sp>
         <p:nvSpPr>
-          <p:cNvPr id="61" name="Text 57"/>
+          <p:cNvPr id="60" name="Text 57"/>
           <p:cNvSpPr txBox="1"/>
           <p:nvPr/>
         </p:nvSpPr>
@@ -42050,7 +41985,7 @@
       </p:sp>
       <p:sp>
         <p:nvSpPr>
-          <p:cNvPr id="62" name="Shape 58"/>
+          <p:cNvPr id="61" name="Shape 58"/>
           <p:cNvSpPr/>
           <p:nvPr/>
         </p:nvSpPr>
@@ -42074,7 +42009,7 @@
       </p:sp>
       <p:sp>
         <p:nvSpPr>
-          <p:cNvPr id="63" name="Shape 59"/>
+          <p:cNvPr id="62" name="Shape 59"/>
           <p:cNvSpPr/>
           <p:nvPr/>
         </p:nvSpPr>
@@ -42099,7 +42034,7 @@
       </p:sp>
       <p:sp>
         <p:nvSpPr>
-          <p:cNvPr id="64" name="Shape 60"/>
+          <p:cNvPr id="63" name="Shape 60"/>
           <p:cNvSpPr/>
           <p:nvPr/>
         </p:nvSpPr>
@@ -42124,7 +42059,7 @@
       </p:sp>
       <p:sp>
         <p:nvSpPr>
-          <p:cNvPr id="65" name="Shape 61"/>
+          <p:cNvPr id="64" name="Shape 61"/>
           <p:cNvSpPr/>
           <p:nvPr/>
         </p:nvSpPr>
@@ -42149,7 +42084,7 @@
       </p:sp>
       <p:sp>
         <p:nvSpPr>
-          <p:cNvPr id="66" name="Shape 62"/>
+          <p:cNvPr id="65" name="Shape 62"/>
           <p:cNvSpPr/>
           <p:nvPr/>
         </p:nvSpPr>
@@ -42174,7 +42109,7 @@
       </p:sp>
       <p:sp>
         <p:nvSpPr>
-          <p:cNvPr id="67" name="Shape 63"/>
+          <p:cNvPr id="66" name="Shape 63"/>
           <p:cNvSpPr/>
           <p:nvPr/>
         </p:nvSpPr>
@@ -42199,7 +42134,7 @@
       </p:sp>
       <p:sp>
         <p:nvSpPr>
-          <p:cNvPr id="68" name="Shape 64"/>
+          <p:cNvPr id="67" name="Shape 64"/>
           <p:cNvSpPr/>
           <p:nvPr/>
         </p:nvSpPr>
@@ -42224,7 +42159,7 @@
       </p:sp>
       <p:sp>
         <p:nvSpPr>
-          <p:cNvPr id="69" name="Shape 65"/>
+          <p:cNvPr id="68" name="Shape 65"/>
           <p:cNvSpPr/>
           <p:nvPr/>
         </p:nvSpPr>
@@ -42249,7 +42184,7 @@
       </p:sp>
       <p:sp>
         <p:nvSpPr>
-          <p:cNvPr id="70" name="Shape 66"/>
+          <p:cNvPr id="69" name="Shape 66"/>
           <p:cNvSpPr/>
           <p:nvPr/>
         </p:nvSpPr>
@@ -42274,7 +42209,7 @@
       </p:sp>
       <p:sp>
         <p:nvSpPr>
-          <p:cNvPr id="71" name="Shape 67"/>
+          <p:cNvPr id="70" name="Shape 67"/>
           <p:cNvSpPr/>
           <p:nvPr/>
         </p:nvSpPr>
@@ -42299,7 +42234,7 @@
       </p:sp>
       <p:sp>
         <p:nvSpPr>
-          <p:cNvPr id="72" name="Shape 68"/>
+          <p:cNvPr id="71" name="Shape 68"/>
           <p:cNvSpPr/>
           <p:nvPr/>
         </p:nvSpPr>
@@ -42324,7 +42259,7 @@
       </p:sp>
       <p:sp>
         <p:nvSpPr>
-          <p:cNvPr id="73" name="Shape 69"/>
+          <p:cNvPr id="72" name="Shape 69"/>
           <p:cNvSpPr/>
           <p:nvPr/>
         </p:nvSpPr>
@@ -42349,7 +42284,7 @@
       </p:sp>
       <p:sp>
         <p:nvSpPr>
-          <p:cNvPr id="74" name="Shape 70"/>
+          <p:cNvPr id="73" name="Shape 70"/>
           <p:cNvSpPr/>
           <p:nvPr/>
         </p:nvSpPr>
@@ -42374,7 +42309,7 @@
       </p:sp>
       <p:sp>
         <p:nvSpPr>
-          <p:cNvPr id="75" name="Shape 71"/>
+          <p:cNvPr id="74" name="Shape 71"/>
           <p:cNvSpPr/>
           <p:nvPr/>
         </p:nvSpPr>
@@ -42399,7 +42334,7 @@
       </p:sp>
       <p:sp>
         <p:nvSpPr>
-          <p:cNvPr id="76" name="Shape 72"/>
+          <p:cNvPr id="75" name="Shape 72"/>
           <p:cNvSpPr/>
           <p:nvPr/>
         </p:nvSpPr>
@@ -42424,7 +42359,7 @@
       </p:sp>
       <p:sp>
         <p:nvSpPr>
-          <p:cNvPr id="77" name="Shape 73"/>
+          <p:cNvPr id="76" name="Shape 73"/>
           <p:cNvSpPr/>
           <p:nvPr/>
         </p:nvSpPr>
@@ -42449,7 +42384,7 @@
       </p:sp>
       <p:sp>
         <p:nvSpPr>
-          <p:cNvPr id="78" name="Shape 74"/>
+          <p:cNvPr id="77" name="Shape 74"/>
           <p:cNvSpPr/>
           <p:nvPr/>
         </p:nvSpPr>
@@ -42474,7 +42409,7 @@
       </p:sp>
       <p:sp>
         <p:nvSpPr>
-          <p:cNvPr id="79" name="Shape 75"/>
+          <p:cNvPr id="78" name="Shape 75"/>
           <p:cNvSpPr/>
           <p:nvPr/>
         </p:nvSpPr>
@@ -42499,7 +42434,7 @@
       </p:sp>
       <p:sp>
         <p:nvSpPr>
-          <p:cNvPr id="80" name="Shape 76"/>
+          <p:cNvPr id="79" name="Shape 76"/>
           <p:cNvSpPr/>
           <p:nvPr/>
         </p:nvSpPr>
@@ -42524,7 +42459,7 @@
       </p:sp>
       <p:sp>
         <p:nvSpPr>
-          <p:cNvPr id="81" name="Shape 77"/>
+          <p:cNvPr id="80" name="Shape 77"/>
           <p:cNvSpPr/>
           <p:nvPr/>
         </p:nvSpPr>
@@ -42549,7 +42484,7 @@
       </p:sp>
       <p:sp>
         <p:nvSpPr>
-          <p:cNvPr id="82" name="Shape 78"/>
+          <p:cNvPr id="81" name="Shape 78"/>
           <p:cNvSpPr/>
           <p:nvPr/>
         </p:nvSpPr>
@@ -42574,7 +42509,7 @@
       </p:sp>
       <p:sp>
         <p:nvSpPr>
-          <p:cNvPr id="83" name="Text 79"/>
+          <p:cNvPr id="82" name="Text 79"/>
           <p:cNvSpPr txBox="1"/>
           <p:nvPr/>
         </p:nvSpPr>
@@ -42613,7 +42548,7 @@
       </p:sp>
       <p:sp>
         <p:nvSpPr>
-          <p:cNvPr id="84" name="Text 80"/>
+          <p:cNvPr id="83" name="Text 80"/>
           <p:cNvSpPr txBox="1"/>
           <p:nvPr/>
         </p:nvSpPr>
@@ -42652,7 +42587,7 @@
       </p:sp>
       <p:sp>
         <p:nvSpPr>
-          <p:cNvPr id="85" name="Shape 81"/>
+          <p:cNvPr id="84" name="Shape 81"/>
           <p:cNvSpPr/>
           <p:nvPr/>
         </p:nvSpPr>
@@ -42676,7 +42611,7 @@
       </p:sp>
       <p:sp>
         <p:nvSpPr>
-          <p:cNvPr id="86" name="Shape 82"/>
+          <p:cNvPr id="85" name="Shape 82"/>
           <p:cNvSpPr/>
           <p:nvPr/>
         </p:nvSpPr>
@@ -42701,7 +42636,7 @@
       </p:sp>
       <p:sp>
         <p:nvSpPr>
-          <p:cNvPr id="87" name="Shape 83"/>
+          <p:cNvPr id="86" name="Shape 83"/>
           <p:cNvSpPr/>
           <p:nvPr/>
         </p:nvSpPr>
@@ -42726,7 +42661,7 @@
       </p:sp>
       <p:sp>
         <p:nvSpPr>
-          <p:cNvPr id="88" name="Shape 84"/>
+          <p:cNvPr id="87" name="Shape 84"/>
           <p:cNvSpPr/>
           <p:nvPr/>
         </p:nvSpPr>
@@ -42751,7 +42686,7 @@
       </p:sp>
       <p:sp>
         <p:nvSpPr>
-          <p:cNvPr id="89" name="Shape 85"/>
+          <p:cNvPr id="88" name="Shape 85"/>
           <p:cNvSpPr/>
           <p:nvPr/>
         </p:nvSpPr>
@@ -42776,7 +42711,7 @@
       </p:sp>
       <p:sp>
         <p:nvSpPr>
-          <p:cNvPr id="90" name="Shape 86"/>
+          <p:cNvPr id="89" name="Shape 86"/>
           <p:cNvSpPr/>
           <p:nvPr/>
         </p:nvSpPr>
@@ -42801,7 +42736,7 @@
       </p:sp>
       <p:sp>
         <p:nvSpPr>
-          <p:cNvPr id="91" name="Shape 87"/>
+          <p:cNvPr id="90" name="Shape 87"/>
           <p:cNvSpPr/>
           <p:nvPr/>
         </p:nvSpPr>
@@ -42826,7 +42761,7 @@
       </p:sp>
       <p:sp>
         <p:nvSpPr>
-          <p:cNvPr id="92" name="Shape 88"/>
+          <p:cNvPr id="91" name="Shape 88"/>
           <p:cNvSpPr/>
           <p:nvPr/>
         </p:nvSpPr>
@@ -42851,7 +42786,7 @@
       </p:sp>
       <p:sp>
         <p:nvSpPr>
-          <p:cNvPr id="93" name="Shape 89"/>
+          <p:cNvPr id="92" name="Shape 89"/>
           <p:cNvSpPr/>
           <p:nvPr/>
         </p:nvSpPr>
@@ -42876,7 +42811,7 @@
       </p:sp>
       <p:sp>
         <p:nvSpPr>
-          <p:cNvPr id="94" name="Shape 90"/>
+          <p:cNvPr id="93" name="Shape 90"/>
           <p:cNvSpPr/>
           <p:nvPr/>
         </p:nvSpPr>
@@ -42901,7 +42836,7 @@
       </p:sp>
       <p:sp>
         <p:nvSpPr>
-          <p:cNvPr id="95" name="Shape 91"/>
+          <p:cNvPr id="94" name="Shape 91"/>
           <p:cNvSpPr/>
           <p:nvPr/>
         </p:nvSpPr>
@@ -42926,7 +42861,7 @@
       </p:sp>
       <p:sp>
         <p:nvSpPr>
-          <p:cNvPr id="96" name="Shape 92"/>
+          <p:cNvPr id="95" name="Shape 92"/>
           <p:cNvSpPr/>
           <p:nvPr/>
         </p:nvSpPr>
@@ -42951,7 +42886,7 @@
       </p:sp>
       <p:sp>
         <p:nvSpPr>
-          <p:cNvPr id="97" name="Shape 93"/>
+          <p:cNvPr id="96" name="Shape 93"/>
           <p:cNvSpPr/>
           <p:nvPr/>
         </p:nvSpPr>
@@ -42976,7 +42911,7 @@
       </p:sp>
       <p:sp>
         <p:nvSpPr>
-          <p:cNvPr id="98" name="Shape 94"/>
+          <p:cNvPr id="97" name="Shape 94"/>
           <p:cNvSpPr/>
           <p:nvPr/>
         </p:nvSpPr>
@@ -43001,7 +42936,7 @@
       </p:sp>
       <p:sp>
         <p:nvSpPr>
-          <p:cNvPr id="99" name="Shape 95"/>
+          <p:cNvPr id="98" name="Shape 95"/>
           <p:cNvSpPr/>
           <p:nvPr/>
         </p:nvSpPr>
@@ -43026,7 +42961,7 @@
       </p:sp>
       <p:sp>
         <p:nvSpPr>
-          <p:cNvPr id="100" name="Shape 96"/>
+          <p:cNvPr id="99" name="Shape 96"/>
           <p:cNvSpPr/>
           <p:nvPr/>
         </p:nvSpPr>
@@ -43051,7 +42986,7 @@
       </p:sp>
       <p:sp>
         <p:nvSpPr>
-          <p:cNvPr id="101" name="Shape 97"/>
+          <p:cNvPr id="100" name="Shape 97"/>
           <p:cNvSpPr/>
           <p:nvPr/>
         </p:nvSpPr>
@@ -43076,7 +43011,7 @@
       </p:sp>
       <p:sp>
         <p:nvSpPr>
-          <p:cNvPr id="102" name="Shape 98"/>
+          <p:cNvPr id="101" name="Shape 98"/>
           <p:cNvSpPr/>
           <p:nvPr/>
         </p:nvSpPr>
@@ -43101,7 +43036,7 @@
       </p:sp>
       <p:sp>
         <p:nvSpPr>
-          <p:cNvPr id="103" name="Shape 99"/>
+          <p:cNvPr id="102" name="Shape 99"/>
           <p:cNvSpPr/>
           <p:nvPr/>
         </p:nvSpPr>
@@ -43126,7 +43061,7 @@
       </p:sp>
       <p:sp>
         <p:nvSpPr>
-          <p:cNvPr id="104" name="Shape 100"/>
+          <p:cNvPr id="103" name="Shape 100"/>
           <p:cNvSpPr/>
           <p:nvPr/>
         </p:nvSpPr>
@@ -43151,7 +43086,7 @@
       </p:sp>
       <p:sp>
         <p:nvSpPr>
-          <p:cNvPr id="105" name="Shape 101"/>
+          <p:cNvPr id="104" name="Shape 101"/>
           <p:cNvSpPr/>
           <p:nvPr/>
         </p:nvSpPr>
@@ -43176,7 +43111,7 @@
       </p:sp>
       <p:sp>
         <p:nvSpPr>
-          <p:cNvPr id="106" name="Text 102"/>
+          <p:cNvPr id="105" name="Text 102"/>
           <p:cNvSpPr txBox="1"/>
           <p:nvPr/>
         </p:nvSpPr>
@@ -43215,7 +43150,7 @@
       </p:sp>
       <p:sp>
         <p:nvSpPr>
-          <p:cNvPr id="107" name="Text 103"/>
+          <p:cNvPr id="106" name="Text 103"/>
           <p:cNvSpPr txBox="1"/>
           <p:nvPr/>
         </p:nvSpPr>
@@ -43254,7 +43189,7 @@
       </p:sp>
       <p:sp>
         <p:nvSpPr>
-          <p:cNvPr id="108" name="Shape 104"/>
+          <p:cNvPr id="107" name="Shape 104"/>
           <p:cNvSpPr/>
           <p:nvPr/>
         </p:nvSpPr>
@@ -43279,7 +43214,7 @@
       </p:sp>
       <p:sp>
         <p:nvSpPr>
-          <p:cNvPr id="109" name="Text 105"/>
+          <p:cNvPr id="108" name="Text 105"/>
           <p:cNvSpPr txBox="1"/>
           <p:nvPr/>
         </p:nvSpPr>

--- a/slides/attention_workshop.pptx
+++ b/slides/attention_workshop.pptx
@@ -488,6 +488,1631 @@
 </p:notesMaster>
 </file>
 
+<file path=ppt/notesSlides/notesSlide1.xml><?xml version="1.0" encoding="utf-8"?>
+<p:notes xmlns:a="http://schemas.openxmlformats.org/drawingml/2006/main" xmlns:r="http://schemas.openxmlformats.org/officeDocument/2006/relationships" xmlns:p="http://schemas.openxmlformats.org/presentationml/2006/main" xmlns:m="http://schemas.openxmlformats.org/officeDocument/2006/math" xmlns:a14="http://schemas.microsoft.com/office/drawing/2010/main" showMasterSp="1" showMasterPhAnim="1">
+  <p:cSld>
+    <p:spTree>
+      <p:nvGrpSpPr>
+        <p:cNvPr id="1" name=""/>
+        <p:cNvGrpSpPr/>
+        <p:nvPr/>
+      </p:nvGrpSpPr>
+      <p:grpSpPr>
+        <a:xfrm>
+          <a:off x="0" y="0"/>
+          <a:ext cx="0" cy="0"/>
+          <a:chOff x="0" y="0"/>
+          <a:chExt cx="0" cy="0"/>
+        </a:xfrm>
+      </p:grpSpPr>
+      <p:sp>
+        <p:nvSpPr>
+          <p:cNvPr id="91" name="Shape 91"/>
+          <p:cNvSpPr/>
+          <p:nvPr>
+            <p:ph type="sldImg"/>
+          </p:nvPr>
+        </p:nvSpPr>
+        <p:spPr>
+          <a:prstGeom prst="rect">
+            <a:avLst/>
+          </a:prstGeom>
+        </p:spPr>
+        <p:txBody>
+          <a:bodyPr/>
+          <a:lstStyle/>
+          <a:p>
+            <a:pPr/>
+          </a:p>
+        </p:txBody>
+      </p:sp>
+      <p:sp>
+        <p:nvSpPr>
+          <p:cNvPr id="92" name="Shape 92"/>
+          <p:cNvSpPr/>
+          <p:nvPr>
+            <p:ph type="body" sz="quarter" idx="1"/>
+          </p:nvPr>
+        </p:nvSpPr>
+        <p:spPr>
+          <a:prstGeom prst="rect">
+            <a:avLst/>
+          </a:prstGeom>
+        </p:spPr>
+        <p:txBody>
+          <a:bodyPr/>
+          <a:lstStyle/>
+          <a:p/>
+        </p:txBody>
+      </p:sp>
+    </p:spTree>
+  </p:cSld>
+  <p:clrMapOvr>
+    <a:masterClrMapping/>
+  </p:clrMapOvr>
+</p:notes>
+</file>
+
+<file path=ppt/notesSlides/notesSlide10.xml><?xml version="1.0" encoding="utf-8"?>
+<p:notes xmlns:a="http://schemas.openxmlformats.org/drawingml/2006/main" xmlns:r="http://schemas.openxmlformats.org/officeDocument/2006/relationships" xmlns:p="http://schemas.openxmlformats.org/presentationml/2006/main" xmlns:m="http://schemas.openxmlformats.org/officeDocument/2006/math" xmlns:a14="http://schemas.microsoft.com/office/drawing/2010/main" showMasterSp="1" showMasterPhAnim="1">
+  <p:cSld>
+    <p:spTree>
+      <p:nvGrpSpPr>
+        <p:cNvPr id="1" name=""/>
+        <p:cNvGrpSpPr/>
+        <p:nvPr/>
+      </p:nvGrpSpPr>
+      <p:grpSpPr>
+        <a:xfrm>
+          <a:off x="0" y="0"/>
+          <a:ext cx="0" cy="0"/>
+          <a:chOff x="0" y="0"/>
+          <a:chExt cx="0" cy="0"/>
+        </a:xfrm>
+      </p:grpSpPr>
+      <p:sp>
+        <p:nvSpPr>
+          <p:cNvPr id="368" name="Shape 368"/>
+          <p:cNvSpPr/>
+          <p:nvPr>
+            <p:ph type="sldImg"/>
+          </p:nvPr>
+        </p:nvSpPr>
+        <p:spPr>
+          <a:prstGeom prst="rect">
+            <a:avLst/>
+          </a:prstGeom>
+        </p:spPr>
+        <p:txBody>
+          <a:bodyPr/>
+          <a:lstStyle/>
+          <a:p>
+            <a:pPr/>
+          </a:p>
+        </p:txBody>
+      </p:sp>
+      <p:sp>
+        <p:nvSpPr>
+          <p:cNvPr id="369" name="Shape 369"/>
+          <p:cNvSpPr/>
+          <p:nvPr>
+            <p:ph type="body" sz="quarter" idx="1"/>
+          </p:nvPr>
+        </p:nvSpPr>
+        <p:spPr>
+          <a:prstGeom prst="rect">
+            <a:avLst/>
+          </a:prstGeom>
+        </p:spPr>
+        <p:txBody>
+          <a:bodyPr/>
+          <a:lstStyle/>
+          <a:p/>
+        </p:txBody>
+      </p:sp>
+    </p:spTree>
+  </p:cSld>
+  <p:clrMapOvr>
+    <a:masterClrMapping/>
+  </p:clrMapOvr>
+</p:notes>
+</file>
+
+<file path=ppt/notesSlides/notesSlide11.xml><?xml version="1.0" encoding="utf-8"?>
+<p:notes xmlns:a="http://schemas.openxmlformats.org/drawingml/2006/main" xmlns:r="http://schemas.openxmlformats.org/officeDocument/2006/relationships" xmlns:p="http://schemas.openxmlformats.org/presentationml/2006/main" xmlns:m="http://schemas.openxmlformats.org/officeDocument/2006/math" xmlns:a14="http://schemas.microsoft.com/office/drawing/2010/main" showMasterSp="1" showMasterPhAnim="1">
+  <p:cSld>
+    <p:spTree>
+      <p:nvGrpSpPr>
+        <p:cNvPr id="1" name=""/>
+        <p:cNvGrpSpPr/>
+        <p:nvPr/>
+      </p:nvGrpSpPr>
+      <p:grpSpPr>
+        <a:xfrm>
+          <a:off x="0" y="0"/>
+          <a:ext cx="0" cy="0"/>
+          <a:chOff x="0" y="0"/>
+          <a:chExt cx="0" cy="0"/>
+        </a:xfrm>
+      </p:grpSpPr>
+      <p:sp>
+        <p:nvSpPr>
+          <p:cNvPr id="417" name="Shape 417"/>
+          <p:cNvSpPr/>
+          <p:nvPr>
+            <p:ph type="sldImg"/>
+          </p:nvPr>
+        </p:nvSpPr>
+        <p:spPr>
+          <a:prstGeom prst="rect">
+            <a:avLst/>
+          </a:prstGeom>
+        </p:spPr>
+        <p:txBody>
+          <a:bodyPr/>
+          <a:lstStyle/>
+          <a:p>
+            <a:pPr/>
+          </a:p>
+        </p:txBody>
+      </p:sp>
+      <p:sp>
+        <p:nvSpPr>
+          <p:cNvPr id="418" name="Shape 418"/>
+          <p:cNvSpPr/>
+          <p:nvPr>
+            <p:ph type="body" sz="quarter" idx="1"/>
+          </p:nvPr>
+        </p:nvSpPr>
+        <p:spPr>
+          <a:prstGeom prst="rect">
+            <a:avLst/>
+          </a:prstGeom>
+        </p:spPr>
+        <p:txBody>
+          <a:bodyPr/>
+          <a:lstStyle/>
+          <a:p/>
+        </p:txBody>
+      </p:sp>
+    </p:spTree>
+  </p:cSld>
+  <p:clrMapOvr>
+    <a:masterClrMapping/>
+  </p:clrMapOvr>
+</p:notes>
+</file>
+
+<file path=ppt/notesSlides/notesSlide12.xml><?xml version="1.0" encoding="utf-8"?>
+<p:notes xmlns:a="http://schemas.openxmlformats.org/drawingml/2006/main" xmlns:r="http://schemas.openxmlformats.org/officeDocument/2006/relationships" xmlns:p="http://schemas.openxmlformats.org/presentationml/2006/main" xmlns:m="http://schemas.openxmlformats.org/officeDocument/2006/math" xmlns:a14="http://schemas.microsoft.com/office/drawing/2010/main" showMasterSp="1" showMasterPhAnim="1">
+  <p:cSld>
+    <p:spTree>
+      <p:nvGrpSpPr>
+        <p:cNvPr id="1" name=""/>
+        <p:cNvGrpSpPr/>
+        <p:nvPr/>
+      </p:nvGrpSpPr>
+      <p:grpSpPr>
+        <a:xfrm>
+          <a:off x="0" y="0"/>
+          <a:ext cx="0" cy="0"/>
+          <a:chOff x="0" y="0"/>
+          <a:chExt cx="0" cy="0"/>
+        </a:xfrm>
+      </p:grpSpPr>
+      <p:sp>
+        <p:nvSpPr>
+          <p:cNvPr id="454" name="Shape 454"/>
+          <p:cNvSpPr/>
+          <p:nvPr>
+            <p:ph type="sldImg"/>
+          </p:nvPr>
+        </p:nvSpPr>
+        <p:spPr>
+          <a:prstGeom prst="rect">
+            <a:avLst/>
+          </a:prstGeom>
+        </p:spPr>
+        <p:txBody>
+          <a:bodyPr/>
+          <a:lstStyle/>
+          <a:p>
+            <a:pPr/>
+          </a:p>
+        </p:txBody>
+      </p:sp>
+      <p:sp>
+        <p:nvSpPr>
+          <p:cNvPr id="455" name="Shape 455"/>
+          <p:cNvSpPr/>
+          <p:nvPr>
+            <p:ph type="body" sz="quarter" idx="1"/>
+          </p:nvPr>
+        </p:nvSpPr>
+        <p:spPr>
+          <a:prstGeom prst="rect">
+            <a:avLst/>
+          </a:prstGeom>
+        </p:spPr>
+        <p:txBody>
+          <a:bodyPr/>
+          <a:lstStyle/>
+          <a:p/>
+        </p:txBody>
+      </p:sp>
+    </p:spTree>
+  </p:cSld>
+  <p:clrMapOvr>
+    <a:masterClrMapping/>
+  </p:clrMapOvr>
+</p:notes>
+</file>
+
+<file path=ppt/notesSlides/notesSlide13.xml><?xml version="1.0" encoding="utf-8"?>
+<p:notes xmlns:a="http://schemas.openxmlformats.org/drawingml/2006/main" xmlns:r="http://schemas.openxmlformats.org/officeDocument/2006/relationships" xmlns:p="http://schemas.openxmlformats.org/presentationml/2006/main" xmlns:m="http://schemas.openxmlformats.org/officeDocument/2006/math" xmlns:a14="http://schemas.microsoft.com/office/drawing/2010/main" showMasterSp="1" showMasterPhAnim="1">
+  <p:cSld>
+    <p:spTree>
+      <p:nvGrpSpPr>
+        <p:cNvPr id="1" name=""/>
+        <p:cNvGrpSpPr/>
+        <p:nvPr/>
+      </p:nvGrpSpPr>
+      <p:grpSpPr>
+        <a:xfrm>
+          <a:off x="0" y="0"/>
+          <a:ext cx="0" cy="0"/>
+          <a:chOff x="0" y="0"/>
+          <a:chExt cx="0" cy="0"/>
+        </a:xfrm>
+      </p:grpSpPr>
+      <p:sp>
+        <p:nvSpPr>
+          <p:cNvPr id="490" name="Shape 490"/>
+          <p:cNvSpPr/>
+          <p:nvPr>
+            <p:ph type="sldImg"/>
+          </p:nvPr>
+        </p:nvSpPr>
+        <p:spPr>
+          <a:prstGeom prst="rect">
+            <a:avLst/>
+          </a:prstGeom>
+        </p:spPr>
+        <p:txBody>
+          <a:bodyPr/>
+          <a:lstStyle/>
+          <a:p>
+            <a:pPr/>
+          </a:p>
+        </p:txBody>
+      </p:sp>
+      <p:sp>
+        <p:nvSpPr>
+          <p:cNvPr id="491" name="Shape 491"/>
+          <p:cNvSpPr/>
+          <p:nvPr>
+            <p:ph type="body" sz="quarter" idx="1"/>
+          </p:nvPr>
+        </p:nvSpPr>
+        <p:spPr>
+          <a:prstGeom prst="rect">
+            <a:avLst/>
+          </a:prstGeom>
+        </p:spPr>
+        <p:txBody>
+          <a:bodyPr/>
+          <a:lstStyle/>
+          <a:p/>
+        </p:txBody>
+      </p:sp>
+    </p:spTree>
+  </p:cSld>
+  <p:clrMapOvr>
+    <a:masterClrMapping/>
+  </p:clrMapOvr>
+</p:notes>
+</file>
+
+<file path=ppt/notesSlides/notesSlide14.xml><?xml version="1.0" encoding="utf-8"?>
+<p:notes xmlns:a="http://schemas.openxmlformats.org/drawingml/2006/main" xmlns:r="http://schemas.openxmlformats.org/officeDocument/2006/relationships" xmlns:p="http://schemas.openxmlformats.org/presentationml/2006/main" xmlns:m="http://schemas.openxmlformats.org/officeDocument/2006/math" xmlns:a14="http://schemas.microsoft.com/office/drawing/2010/main" showMasterSp="1" showMasterPhAnim="1">
+  <p:cSld>
+    <p:spTree>
+      <p:nvGrpSpPr>
+        <p:cNvPr id="1" name=""/>
+        <p:cNvGrpSpPr/>
+        <p:nvPr/>
+      </p:nvGrpSpPr>
+      <p:grpSpPr>
+        <a:xfrm>
+          <a:off x="0" y="0"/>
+          <a:ext cx="0" cy="0"/>
+          <a:chOff x="0" y="0"/>
+          <a:chExt cx="0" cy="0"/>
+        </a:xfrm>
+      </p:grpSpPr>
+      <p:sp>
+        <p:nvSpPr>
+          <p:cNvPr id="535" name="Shape 535"/>
+          <p:cNvSpPr/>
+          <p:nvPr>
+            <p:ph type="sldImg"/>
+          </p:nvPr>
+        </p:nvSpPr>
+        <p:spPr>
+          <a:prstGeom prst="rect">
+            <a:avLst/>
+          </a:prstGeom>
+        </p:spPr>
+        <p:txBody>
+          <a:bodyPr/>
+          <a:lstStyle/>
+          <a:p>
+            <a:pPr/>
+          </a:p>
+        </p:txBody>
+      </p:sp>
+      <p:sp>
+        <p:nvSpPr>
+          <p:cNvPr id="536" name="Shape 536"/>
+          <p:cNvSpPr/>
+          <p:nvPr>
+            <p:ph type="body" sz="quarter" idx="1"/>
+          </p:nvPr>
+        </p:nvSpPr>
+        <p:spPr>
+          <a:prstGeom prst="rect">
+            <a:avLst/>
+          </a:prstGeom>
+        </p:spPr>
+        <p:txBody>
+          <a:bodyPr/>
+          <a:lstStyle/>
+          <a:p/>
+        </p:txBody>
+      </p:sp>
+    </p:spTree>
+  </p:cSld>
+  <p:clrMapOvr>
+    <a:masterClrMapping/>
+  </p:clrMapOvr>
+</p:notes>
+</file>
+
+<file path=ppt/notesSlides/notesSlide15.xml><?xml version="1.0" encoding="utf-8"?>
+<p:notes xmlns:a="http://schemas.openxmlformats.org/drawingml/2006/main" xmlns:r="http://schemas.openxmlformats.org/officeDocument/2006/relationships" xmlns:p="http://schemas.openxmlformats.org/presentationml/2006/main" xmlns:m="http://schemas.openxmlformats.org/officeDocument/2006/math" xmlns:a14="http://schemas.microsoft.com/office/drawing/2010/main" showMasterSp="1" showMasterPhAnim="1">
+  <p:cSld>
+    <p:spTree>
+      <p:nvGrpSpPr>
+        <p:cNvPr id="1" name=""/>
+        <p:cNvGrpSpPr/>
+        <p:nvPr/>
+      </p:nvGrpSpPr>
+      <p:grpSpPr>
+        <a:xfrm>
+          <a:off x="0" y="0"/>
+          <a:ext cx="0" cy="0"/>
+          <a:chOff x="0" y="0"/>
+          <a:chExt cx="0" cy="0"/>
+        </a:xfrm>
+      </p:grpSpPr>
+      <p:sp>
+        <p:nvSpPr>
+          <p:cNvPr id="552" name="Shape 552"/>
+          <p:cNvSpPr/>
+          <p:nvPr>
+            <p:ph type="sldImg"/>
+          </p:nvPr>
+        </p:nvSpPr>
+        <p:spPr>
+          <a:prstGeom prst="rect">
+            <a:avLst/>
+          </a:prstGeom>
+        </p:spPr>
+        <p:txBody>
+          <a:bodyPr/>
+          <a:lstStyle/>
+          <a:p>
+            <a:pPr/>
+          </a:p>
+        </p:txBody>
+      </p:sp>
+      <p:sp>
+        <p:nvSpPr>
+          <p:cNvPr id="553" name="Shape 553"/>
+          <p:cNvSpPr/>
+          <p:nvPr>
+            <p:ph type="body" sz="quarter" idx="1"/>
+          </p:nvPr>
+        </p:nvSpPr>
+        <p:spPr>
+          <a:prstGeom prst="rect">
+            <a:avLst/>
+          </a:prstGeom>
+        </p:spPr>
+        <p:txBody>
+          <a:bodyPr/>
+          <a:lstStyle/>
+          <a:p/>
+        </p:txBody>
+      </p:sp>
+    </p:spTree>
+  </p:cSld>
+  <p:clrMapOvr>
+    <a:masterClrMapping/>
+  </p:clrMapOvr>
+</p:notes>
+</file>
+
+<file path=ppt/notesSlides/notesSlide16.xml><?xml version="1.0" encoding="utf-8"?>
+<p:notes xmlns:a="http://schemas.openxmlformats.org/drawingml/2006/main" xmlns:r="http://schemas.openxmlformats.org/officeDocument/2006/relationships" xmlns:p="http://schemas.openxmlformats.org/presentationml/2006/main" xmlns:m="http://schemas.openxmlformats.org/officeDocument/2006/math" xmlns:a14="http://schemas.microsoft.com/office/drawing/2010/main" showMasterSp="1" showMasterPhAnim="1">
+  <p:cSld>
+    <p:spTree>
+      <p:nvGrpSpPr>
+        <p:cNvPr id="1" name=""/>
+        <p:cNvGrpSpPr/>
+        <p:nvPr/>
+      </p:nvGrpSpPr>
+      <p:grpSpPr>
+        <a:xfrm>
+          <a:off x="0" y="0"/>
+          <a:ext cx="0" cy="0"/>
+          <a:chOff x="0" y="0"/>
+          <a:chExt cx="0" cy="0"/>
+        </a:xfrm>
+      </p:grpSpPr>
+      <p:sp>
+        <p:nvSpPr>
+          <p:cNvPr id="624" name="Shape 624"/>
+          <p:cNvSpPr/>
+          <p:nvPr>
+            <p:ph type="sldImg"/>
+          </p:nvPr>
+        </p:nvSpPr>
+        <p:spPr>
+          <a:prstGeom prst="rect">
+            <a:avLst/>
+          </a:prstGeom>
+        </p:spPr>
+        <p:txBody>
+          <a:bodyPr/>
+          <a:lstStyle/>
+          <a:p>
+            <a:pPr/>
+          </a:p>
+        </p:txBody>
+      </p:sp>
+      <p:sp>
+        <p:nvSpPr>
+          <p:cNvPr id="625" name="Shape 625"/>
+          <p:cNvSpPr/>
+          <p:nvPr>
+            <p:ph type="body" sz="quarter" idx="1"/>
+          </p:nvPr>
+        </p:nvSpPr>
+        <p:spPr>
+          <a:prstGeom prst="rect">
+            <a:avLst/>
+          </a:prstGeom>
+        </p:spPr>
+        <p:txBody>
+          <a:bodyPr/>
+          <a:lstStyle/>
+          <a:p/>
+        </p:txBody>
+      </p:sp>
+    </p:spTree>
+  </p:cSld>
+  <p:clrMapOvr>
+    <a:masterClrMapping/>
+  </p:clrMapOvr>
+</p:notes>
+</file>
+
+<file path=ppt/notesSlides/notesSlide17.xml><?xml version="1.0" encoding="utf-8"?>
+<p:notes xmlns:a="http://schemas.openxmlformats.org/drawingml/2006/main" xmlns:r="http://schemas.openxmlformats.org/officeDocument/2006/relationships" xmlns:p="http://schemas.openxmlformats.org/presentationml/2006/main" xmlns:m="http://schemas.openxmlformats.org/officeDocument/2006/math" xmlns:a14="http://schemas.microsoft.com/office/drawing/2010/main" showMasterSp="1" showMasterPhAnim="1">
+  <p:cSld>
+    <p:spTree>
+      <p:nvGrpSpPr>
+        <p:cNvPr id="1" name=""/>
+        <p:cNvGrpSpPr/>
+        <p:nvPr/>
+      </p:nvGrpSpPr>
+      <p:grpSpPr>
+        <a:xfrm>
+          <a:off x="0" y="0"/>
+          <a:ext cx="0" cy="0"/>
+          <a:chOff x="0" y="0"/>
+          <a:chExt cx="0" cy="0"/>
+        </a:xfrm>
+      </p:grpSpPr>
+      <p:sp>
+        <p:nvSpPr>
+          <p:cNvPr id="642" name="Shape 642"/>
+          <p:cNvSpPr/>
+          <p:nvPr>
+            <p:ph type="sldImg"/>
+          </p:nvPr>
+        </p:nvSpPr>
+        <p:spPr>
+          <a:prstGeom prst="rect">
+            <a:avLst/>
+          </a:prstGeom>
+        </p:spPr>
+        <p:txBody>
+          <a:bodyPr/>
+          <a:lstStyle/>
+          <a:p>
+            <a:pPr/>
+          </a:p>
+        </p:txBody>
+      </p:sp>
+      <p:sp>
+        <p:nvSpPr>
+          <p:cNvPr id="643" name="Shape 643"/>
+          <p:cNvSpPr/>
+          <p:nvPr>
+            <p:ph type="body" sz="quarter" idx="1"/>
+          </p:nvPr>
+        </p:nvSpPr>
+        <p:spPr>
+          <a:prstGeom prst="rect">
+            <a:avLst/>
+          </a:prstGeom>
+        </p:spPr>
+        <p:txBody>
+          <a:bodyPr/>
+          <a:lstStyle/>
+          <a:p/>
+        </p:txBody>
+      </p:sp>
+    </p:spTree>
+  </p:cSld>
+  <p:clrMapOvr>
+    <a:masterClrMapping/>
+  </p:clrMapOvr>
+</p:notes>
+</file>
+
+<file path=ppt/notesSlides/notesSlide18.xml><?xml version="1.0" encoding="utf-8"?>
+<p:notes xmlns:a="http://schemas.openxmlformats.org/drawingml/2006/main" xmlns:r="http://schemas.openxmlformats.org/officeDocument/2006/relationships" xmlns:p="http://schemas.openxmlformats.org/presentationml/2006/main" xmlns:m="http://schemas.openxmlformats.org/officeDocument/2006/math" xmlns:a14="http://schemas.microsoft.com/office/drawing/2010/main" showMasterSp="1" showMasterPhAnim="1">
+  <p:cSld>
+    <p:spTree>
+      <p:nvGrpSpPr>
+        <p:cNvPr id="1" name=""/>
+        <p:cNvGrpSpPr/>
+        <p:nvPr/>
+      </p:nvGrpSpPr>
+      <p:grpSpPr>
+        <a:xfrm>
+          <a:off x="0" y="0"/>
+          <a:ext cx="0" cy="0"/>
+          <a:chOff x="0" y="0"/>
+          <a:chExt cx="0" cy="0"/>
+        </a:xfrm>
+      </p:grpSpPr>
+      <p:sp>
+        <p:nvSpPr>
+          <p:cNvPr id="670" name="Shape 670"/>
+          <p:cNvSpPr/>
+          <p:nvPr>
+            <p:ph type="sldImg"/>
+          </p:nvPr>
+        </p:nvSpPr>
+        <p:spPr>
+          <a:prstGeom prst="rect">
+            <a:avLst/>
+          </a:prstGeom>
+        </p:spPr>
+        <p:txBody>
+          <a:bodyPr/>
+          <a:lstStyle/>
+          <a:p>
+            <a:pPr/>
+          </a:p>
+        </p:txBody>
+      </p:sp>
+      <p:sp>
+        <p:nvSpPr>
+          <p:cNvPr id="671" name="Shape 671"/>
+          <p:cNvSpPr/>
+          <p:nvPr>
+            <p:ph type="body" sz="quarter" idx="1"/>
+          </p:nvPr>
+        </p:nvSpPr>
+        <p:spPr>
+          <a:prstGeom prst="rect">
+            <a:avLst/>
+          </a:prstGeom>
+        </p:spPr>
+        <p:txBody>
+          <a:bodyPr/>
+          <a:lstStyle/>
+          <a:p/>
+        </p:txBody>
+      </p:sp>
+    </p:spTree>
+  </p:cSld>
+  <p:clrMapOvr>
+    <a:masterClrMapping/>
+  </p:clrMapOvr>
+</p:notes>
+</file>
+
+<file path=ppt/notesSlides/notesSlide19.xml><?xml version="1.0" encoding="utf-8"?>
+<p:notes xmlns:a="http://schemas.openxmlformats.org/drawingml/2006/main" xmlns:r="http://schemas.openxmlformats.org/officeDocument/2006/relationships" xmlns:p="http://schemas.openxmlformats.org/presentationml/2006/main" xmlns:m="http://schemas.openxmlformats.org/officeDocument/2006/math" xmlns:a14="http://schemas.microsoft.com/office/drawing/2010/main" showMasterSp="1" showMasterPhAnim="1">
+  <p:cSld>
+    <p:spTree>
+      <p:nvGrpSpPr>
+        <p:cNvPr id="1" name=""/>
+        <p:cNvGrpSpPr/>
+        <p:nvPr/>
+      </p:nvGrpSpPr>
+      <p:grpSpPr>
+        <a:xfrm>
+          <a:off x="0" y="0"/>
+          <a:ext cx="0" cy="0"/>
+          <a:chOff x="0" y="0"/>
+          <a:chExt cx="0" cy="0"/>
+        </a:xfrm>
+      </p:grpSpPr>
+      <p:sp>
+        <p:nvSpPr>
+          <p:cNvPr id="688" name="Shape 688"/>
+          <p:cNvSpPr/>
+          <p:nvPr>
+            <p:ph type="sldImg"/>
+          </p:nvPr>
+        </p:nvSpPr>
+        <p:spPr>
+          <a:prstGeom prst="rect">
+            <a:avLst/>
+          </a:prstGeom>
+        </p:spPr>
+        <p:txBody>
+          <a:bodyPr/>
+          <a:lstStyle/>
+          <a:p>
+            <a:pPr/>
+          </a:p>
+        </p:txBody>
+      </p:sp>
+      <p:sp>
+        <p:nvSpPr>
+          <p:cNvPr id="689" name="Shape 689"/>
+          <p:cNvSpPr/>
+          <p:nvPr>
+            <p:ph type="body" sz="quarter" idx="1"/>
+          </p:nvPr>
+        </p:nvSpPr>
+        <p:spPr>
+          <a:prstGeom prst="rect">
+            <a:avLst/>
+          </a:prstGeom>
+        </p:spPr>
+        <p:txBody>
+          <a:bodyPr/>
+          <a:lstStyle/>
+          <a:p/>
+        </p:txBody>
+      </p:sp>
+    </p:spTree>
+  </p:cSld>
+  <p:clrMapOvr>
+    <a:masterClrMapping/>
+  </p:clrMapOvr>
+</p:notes>
+</file>
+
+<file path=ppt/notesSlides/notesSlide2.xml><?xml version="1.0" encoding="utf-8"?>
+<p:notes xmlns:a="http://schemas.openxmlformats.org/drawingml/2006/main" xmlns:r="http://schemas.openxmlformats.org/officeDocument/2006/relationships" xmlns:p="http://schemas.openxmlformats.org/presentationml/2006/main" xmlns:m="http://schemas.openxmlformats.org/officeDocument/2006/math" xmlns:a14="http://schemas.microsoft.com/office/drawing/2010/main" showMasterSp="1" showMasterPhAnim="1">
+  <p:cSld>
+    <p:spTree>
+      <p:nvGrpSpPr>
+        <p:cNvPr id="1" name=""/>
+        <p:cNvGrpSpPr/>
+        <p:nvPr/>
+      </p:nvGrpSpPr>
+      <p:grpSpPr>
+        <a:xfrm>
+          <a:off x="0" y="0"/>
+          <a:ext cx="0" cy="0"/>
+          <a:chOff x="0" y="0"/>
+          <a:chExt cx="0" cy="0"/>
+        </a:xfrm>
+      </p:grpSpPr>
+      <p:sp>
+        <p:nvSpPr>
+          <p:cNvPr id="113" name="Shape 113"/>
+          <p:cNvSpPr/>
+          <p:nvPr>
+            <p:ph type="sldImg"/>
+          </p:nvPr>
+        </p:nvSpPr>
+        <p:spPr>
+          <a:prstGeom prst="rect">
+            <a:avLst/>
+          </a:prstGeom>
+        </p:spPr>
+        <p:txBody>
+          <a:bodyPr/>
+          <a:lstStyle/>
+          <a:p>
+            <a:pPr/>
+          </a:p>
+        </p:txBody>
+      </p:sp>
+      <p:sp>
+        <p:nvSpPr>
+          <p:cNvPr id="114" name="Shape 114"/>
+          <p:cNvSpPr/>
+          <p:nvPr>
+            <p:ph type="body" sz="quarter" idx="1"/>
+          </p:nvPr>
+        </p:nvSpPr>
+        <p:spPr>
+          <a:prstGeom prst="rect">
+            <a:avLst/>
+          </a:prstGeom>
+        </p:spPr>
+        <p:txBody>
+          <a:bodyPr/>
+          <a:lstStyle/>
+          <a:p/>
+        </p:txBody>
+      </p:sp>
+    </p:spTree>
+  </p:cSld>
+  <p:clrMapOvr>
+    <a:masterClrMapping/>
+  </p:clrMapOvr>
+</p:notes>
+</file>
+
+<file path=ppt/notesSlides/notesSlide20.xml><?xml version="1.0" encoding="utf-8"?>
+<p:notes xmlns:a="http://schemas.openxmlformats.org/drawingml/2006/main" xmlns:r="http://schemas.openxmlformats.org/officeDocument/2006/relationships" xmlns:p="http://schemas.openxmlformats.org/presentationml/2006/main" xmlns:m="http://schemas.openxmlformats.org/officeDocument/2006/math" xmlns:a14="http://schemas.microsoft.com/office/drawing/2010/main" showMasterSp="1" showMasterPhAnim="1">
+  <p:cSld>
+    <p:spTree>
+      <p:nvGrpSpPr>
+        <p:cNvPr id="1" name=""/>
+        <p:cNvGrpSpPr/>
+        <p:nvPr/>
+      </p:nvGrpSpPr>
+      <p:grpSpPr>
+        <a:xfrm>
+          <a:off x="0" y="0"/>
+          <a:ext cx="0" cy="0"/>
+          <a:chOff x="0" y="0"/>
+          <a:chExt cx="0" cy="0"/>
+        </a:xfrm>
+      </p:grpSpPr>
+      <p:sp>
+        <p:nvSpPr>
+          <p:cNvPr id="698" name="Shape 698"/>
+          <p:cNvSpPr/>
+          <p:nvPr>
+            <p:ph type="sldImg"/>
+          </p:nvPr>
+        </p:nvSpPr>
+        <p:spPr>
+          <a:prstGeom prst="rect">
+            <a:avLst/>
+          </a:prstGeom>
+        </p:spPr>
+        <p:txBody>
+          <a:bodyPr/>
+          <a:lstStyle/>
+          <a:p>
+            <a:pPr/>
+          </a:p>
+        </p:txBody>
+      </p:sp>
+      <p:sp>
+        <p:nvSpPr>
+          <p:cNvPr id="699" name="Shape 699"/>
+          <p:cNvSpPr/>
+          <p:nvPr>
+            <p:ph type="body" sz="quarter" idx="1"/>
+          </p:nvPr>
+        </p:nvSpPr>
+        <p:spPr>
+          <a:prstGeom prst="rect">
+            <a:avLst/>
+          </a:prstGeom>
+        </p:spPr>
+        <p:txBody>
+          <a:bodyPr/>
+          <a:lstStyle/>
+          <a:p/>
+        </p:txBody>
+      </p:sp>
+    </p:spTree>
+  </p:cSld>
+  <p:clrMapOvr>
+    <a:masterClrMapping/>
+  </p:clrMapOvr>
+</p:notes>
+</file>
+
+<file path=ppt/notesSlides/notesSlide21.xml><?xml version="1.0" encoding="utf-8"?>
+<p:notes xmlns:a="http://schemas.openxmlformats.org/drawingml/2006/main" xmlns:r="http://schemas.openxmlformats.org/officeDocument/2006/relationships" xmlns:p="http://schemas.openxmlformats.org/presentationml/2006/main" xmlns:m="http://schemas.openxmlformats.org/officeDocument/2006/math" xmlns:a14="http://schemas.microsoft.com/office/drawing/2010/main" showMasterSp="1" showMasterPhAnim="1">
+  <p:cSld>
+    <p:spTree>
+      <p:nvGrpSpPr>
+        <p:cNvPr id="1" name=""/>
+        <p:cNvGrpSpPr/>
+        <p:nvPr/>
+      </p:nvGrpSpPr>
+      <p:grpSpPr>
+        <a:xfrm>
+          <a:off x="0" y="0"/>
+          <a:ext cx="0" cy="0"/>
+          <a:chOff x="0" y="0"/>
+          <a:chExt cx="0" cy="0"/>
+        </a:xfrm>
+      </p:grpSpPr>
+      <p:sp>
+        <p:nvSpPr>
+          <p:cNvPr id="771" name="Shape 771"/>
+          <p:cNvSpPr/>
+          <p:nvPr>
+            <p:ph type="sldImg"/>
+          </p:nvPr>
+        </p:nvSpPr>
+        <p:spPr>
+          <a:prstGeom prst="rect">
+            <a:avLst/>
+          </a:prstGeom>
+        </p:spPr>
+        <p:txBody>
+          <a:bodyPr/>
+          <a:lstStyle/>
+          <a:p>
+            <a:pPr/>
+          </a:p>
+        </p:txBody>
+      </p:sp>
+      <p:sp>
+        <p:nvSpPr>
+          <p:cNvPr id="772" name="Shape 772"/>
+          <p:cNvSpPr/>
+          <p:nvPr>
+            <p:ph type="body" sz="quarter" idx="1"/>
+          </p:nvPr>
+        </p:nvSpPr>
+        <p:spPr>
+          <a:prstGeom prst="rect">
+            <a:avLst/>
+          </a:prstGeom>
+        </p:spPr>
+        <p:txBody>
+          <a:bodyPr/>
+          <a:lstStyle/>
+          <a:p/>
+        </p:txBody>
+      </p:sp>
+    </p:spTree>
+  </p:cSld>
+  <p:clrMapOvr>
+    <a:masterClrMapping/>
+  </p:clrMapOvr>
+</p:notes>
+</file>
+
+<file path=ppt/notesSlides/notesSlide22.xml><?xml version="1.0" encoding="utf-8"?>
+<p:notes xmlns:a="http://schemas.openxmlformats.org/drawingml/2006/main" xmlns:r="http://schemas.openxmlformats.org/officeDocument/2006/relationships" xmlns:p="http://schemas.openxmlformats.org/presentationml/2006/main" xmlns:m="http://schemas.openxmlformats.org/officeDocument/2006/math" xmlns:a14="http://schemas.microsoft.com/office/drawing/2010/main" showMasterSp="1" showMasterPhAnim="1">
+  <p:cSld>
+    <p:spTree>
+      <p:nvGrpSpPr>
+        <p:cNvPr id="1" name=""/>
+        <p:cNvGrpSpPr/>
+        <p:nvPr/>
+      </p:nvGrpSpPr>
+      <p:grpSpPr>
+        <a:xfrm>
+          <a:off x="0" y="0"/>
+          <a:ext cx="0" cy="0"/>
+          <a:chOff x="0" y="0"/>
+          <a:chExt cx="0" cy="0"/>
+        </a:xfrm>
+      </p:grpSpPr>
+      <p:sp>
+        <p:nvSpPr>
+          <p:cNvPr id="787" name="Shape 787"/>
+          <p:cNvSpPr/>
+          <p:nvPr>
+            <p:ph type="sldImg"/>
+          </p:nvPr>
+        </p:nvSpPr>
+        <p:spPr>
+          <a:prstGeom prst="rect">
+            <a:avLst/>
+          </a:prstGeom>
+        </p:spPr>
+        <p:txBody>
+          <a:bodyPr/>
+          <a:lstStyle/>
+          <a:p>
+            <a:pPr/>
+          </a:p>
+        </p:txBody>
+      </p:sp>
+      <p:sp>
+        <p:nvSpPr>
+          <p:cNvPr id="788" name="Shape 788"/>
+          <p:cNvSpPr/>
+          <p:nvPr>
+            <p:ph type="body" sz="quarter" idx="1"/>
+          </p:nvPr>
+        </p:nvSpPr>
+        <p:spPr>
+          <a:prstGeom prst="rect">
+            <a:avLst/>
+          </a:prstGeom>
+        </p:spPr>
+        <p:txBody>
+          <a:bodyPr/>
+          <a:lstStyle/>
+          <a:p/>
+        </p:txBody>
+      </p:sp>
+    </p:spTree>
+  </p:cSld>
+  <p:clrMapOvr>
+    <a:masterClrMapping/>
+  </p:clrMapOvr>
+</p:notes>
+</file>
+
+<file path=ppt/notesSlides/notesSlide23.xml><?xml version="1.0" encoding="utf-8"?>
+<p:notes xmlns:a="http://schemas.openxmlformats.org/drawingml/2006/main" xmlns:r="http://schemas.openxmlformats.org/officeDocument/2006/relationships" xmlns:p="http://schemas.openxmlformats.org/presentationml/2006/main" xmlns:m="http://schemas.openxmlformats.org/officeDocument/2006/math" xmlns:a14="http://schemas.microsoft.com/office/drawing/2010/main" showMasterSp="1" showMasterPhAnim="1">
+  <p:cSld>
+    <p:spTree>
+      <p:nvGrpSpPr>
+        <p:cNvPr id="1" name=""/>
+        <p:cNvGrpSpPr/>
+        <p:nvPr/>
+      </p:nvGrpSpPr>
+      <p:grpSpPr>
+        <a:xfrm>
+          <a:off x="0" y="0"/>
+          <a:ext cx="0" cy="0"/>
+          <a:chOff x="0" y="0"/>
+          <a:chExt cx="0" cy="0"/>
+        </a:xfrm>
+      </p:grpSpPr>
+      <p:sp>
+        <p:nvSpPr>
+          <p:cNvPr id="803" name="Shape 803"/>
+          <p:cNvSpPr/>
+          <p:nvPr>
+            <p:ph type="sldImg"/>
+          </p:nvPr>
+        </p:nvSpPr>
+        <p:spPr>
+          <a:prstGeom prst="rect">
+            <a:avLst/>
+          </a:prstGeom>
+        </p:spPr>
+        <p:txBody>
+          <a:bodyPr/>
+          <a:lstStyle/>
+          <a:p>
+            <a:pPr/>
+          </a:p>
+        </p:txBody>
+      </p:sp>
+      <p:sp>
+        <p:nvSpPr>
+          <p:cNvPr id="804" name="Shape 804"/>
+          <p:cNvSpPr/>
+          <p:nvPr>
+            <p:ph type="body" sz="quarter" idx="1"/>
+          </p:nvPr>
+        </p:nvSpPr>
+        <p:spPr>
+          <a:prstGeom prst="rect">
+            <a:avLst/>
+          </a:prstGeom>
+        </p:spPr>
+        <p:txBody>
+          <a:bodyPr/>
+          <a:lstStyle/>
+          <a:p/>
+        </p:txBody>
+      </p:sp>
+    </p:spTree>
+  </p:cSld>
+  <p:clrMapOvr>
+    <a:masterClrMapping/>
+  </p:clrMapOvr>
+</p:notes>
+</file>
+
+<file path=ppt/notesSlides/notesSlide24.xml><?xml version="1.0" encoding="utf-8"?>
+<p:notes xmlns:a="http://schemas.openxmlformats.org/drawingml/2006/main" xmlns:r="http://schemas.openxmlformats.org/officeDocument/2006/relationships" xmlns:p="http://schemas.openxmlformats.org/presentationml/2006/main" xmlns:m="http://schemas.openxmlformats.org/officeDocument/2006/math" xmlns:a14="http://schemas.microsoft.com/office/drawing/2010/main" showMasterSp="1" showMasterPhAnim="1">
+  <p:cSld>
+    <p:spTree>
+      <p:nvGrpSpPr>
+        <p:cNvPr id="1" name=""/>
+        <p:cNvGrpSpPr/>
+        <p:nvPr/>
+      </p:nvGrpSpPr>
+      <p:grpSpPr>
+        <a:xfrm>
+          <a:off x="0" y="0"/>
+          <a:ext cx="0" cy="0"/>
+          <a:chOff x="0" y="0"/>
+          <a:chExt cx="0" cy="0"/>
+        </a:xfrm>
+      </p:grpSpPr>
+      <p:sp>
+        <p:nvSpPr>
+          <p:cNvPr id="820" name="Shape 820"/>
+          <p:cNvSpPr/>
+          <p:nvPr>
+            <p:ph type="sldImg"/>
+          </p:nvPr>
+        </p:nvSpPr>
+        <p:spPr>
+          <a:prstGeom prst="rect">
+            <a:avLst/>
+          </a:prstGeom>
+        </p:spPr>
+        <p:txBody>
+          <a:bodyPr/>
+          <a:lstStyle/>
+          <a:p>
+            <a:pPr/>
+          </a:p>
+        </p:txBody>
+      </p:sp>
+      <p:sp>
+        <p:nvSpPr>
+          <p:cNvPr id="821" name="Shape 821"/>
+          <p:cNvSpPr/>
+          <p:nvPr>
+            <p:ph type="body" sz="quarter" idx="1"/>
+          </p:nvPr>
+        </p:nvSpPr>
+        <p:spPr>
+          <a:prstGeom prst="rect">
+            <a:avLst/>
+          </a:prstGeom>
+        </p:spPr>
+        <p:txBody>
+          <a:bodyPr/>
+          <a:lstStyle/>
+          <a:p/>
+        </p:txBody>
+      </p:sp>
+    </p:spTree>
+  </p:cSld>
+  <p:clrMapOvr>
+    <a:masterClrMapping/>
+  </p:clrMapOvr>
+</p:notes>
+</file>
+
+<file path=ppt/notesSlides/notesSlide25.xml><?xml version="1.0" encoding="utf-8"?>
+<p:notes xmlns:a="http://schemas.openxmlformats.org/drawingml/2006/main" xmlns:r="http://schemas.openxmlformats.org/officeDocument/2006/relationships" xmlns:p="http://schemas.openxmlformats.org/presentationml/2006/main" xmlns:m="http://schemas.openxmlformats.org/officeDocument/2006/math" xmlns:a14="http://schemas.microsoft.com/office/drawing/2010/main" showMasterSp="1" showMasterPhAnim="1">
+  <p:cSld>
+    <p:spTree>
+      <p:nvGrpSpPr>
+        <p:cNvPr id="1" name=""/>
+        <p:cNvGrpSpPr/>
+        <p:nvPr/>
+      </p:nvGrpSpPr>
+      <p:grpSpPr>
+        <a:xfrm>
+          <a:off x="0" y="0"/>
+          <a:ext cx="0" cy="0"/>
+          <a:chOff x="0" y="0"/>
+          <a:chExt cx="0" cy="0"/>
+        </a:xfrm>
+      </p:grpSpPr>
+      <p:sp>
+        <p:nvSpPr>
+          <p:cNvPr id="833" name="Shape 833"/>
+          <p:cNvSpPr/>
+          <p:nvPr>
+            <p:ph type="sldImg"/>
+          </p:nvPr>
+        </p:nvSpPr>
+        <p:spPr>
+          <a:prstGeom prst="rect">
+            <a:avLst/>
+          </a:prstGeom>
+        </p:spPr>
+        <p:txBody>
+          <a:bodyPr/>
+          <a:lstStyle/>
+          <a:p>
+            <a:pPr/>
+          </a:p>
+        </p:txBody>
+      </p:sp>
+      <p:sp>
+        <p:nvSpPr>
+          <p:cNvPr id="834" name="Shape 834"/>
+          <p:cNvSpPr/>
+          <p:nvPr>
+            <p:ph type="body" sz="quarter" idx="1"/>
+          </p:nvPr>
+        </p:nvSpPr>
+        <p:spPr>
+          <a:prstGeom prst="rect">
+            <a:avLst/>
+          </a:prstGeom>
+        </p:spPr>
+        <p:txBody>
+          <a:bodyPr/>
+          <a:lstStyle/>
+          <a:p/>
+        </p:txBody>
+      </p:sp>
+    </p:spTree>
+  </p:cSld>
+  <p:clrMapOvr>
+    <a:masterClrMapping/>
+  </p:clrMapOvr>
+</p:notes>
+</file>
+
+<file path=ppt/notesSlides/notesSlide3.xml><?xml version="1.0" encoding="utf-8"?>
+<p:notes xmlns:a="http://schemas.openxmlformats.org/drawingml/2006/main" xmlns:r="http://schemas.openxmlformats.org/officeDocument/2006/relationships" xmlns:p="http://schemas.openxmlformats.org/presentationml/2006/main" xmlns:m="http://schemas.openxmlformats.org/officeDocument/2006/math" xmlns:a14="http://schemas.microsoft.com/office/drawing/2010/main" showMasterSp="1" showMasterPhAnim="1">
+  <p:cSld>
+    <p:spTree>
+      <p:nvGrpSpPr>
+        <p:cNvPr id="1" name=""/>
+        <p:cNvGrpSpPr/>
+        <p:nvPr/>
+      </p:nvGrpSpPr>
+      <p:grpSpPr>
+        <a:xfrm>
+          <a:off x="0" y="0"/>
+          <a:ext cx="0" cy="0"/>
+          <a:chOff x="0" y="0"/>
+          <a:chExt cx="0" cy="0"/>
+        </a:xfrm>
+      </p:grpSpPr>
+      <p:sp>
+        <p:nvSpPr>
+          <p:cNvPr id="190" name="Shape 190"/>
+          <p:cNvSpPr/>
+          <p:nvPr>
+            <p:ph type="sldImg"/>
+          </p:nvPr>
+        </p:nvSpPr>
+        <p:spPr>
+          <a:prstGeom prst="rect">
+            <a:avLst/>
+          </a:prstGeom>
+        </p:spPr>
+        <p:txBody>
+          <a:bodyPr/>
+          <a:lstStyle/>
+          <a:p>
+            <a:pPr/>
+          </a:p>
+        </p:txBody>
+      </p:sp>
+      <p:sp>
+        <p:nvSpPr>
+          <p:cNvPr id="191" name="Shape 191"/>
+          <p:cNvSpPr/>
+          <p:nvPr>
+            <p:ph type="body" sz="quarter" idx="1"/>
+          </p:nvPr>
+        </p:nvSpPr>
+        <p:spPr>
+          <a:prstGeom prst="rect">
+            <a:avLst/>
+          </a:prstGeom>
+        </p:spPr>
+        <p:txBody>
+          <a:bodyPr/>
+          <a:lstStyle/>
+          <a:p/>
+        </p:txBody>
+      </p:sp>
+    </p:spTree>
+  </p:cSld>
+  <p:clrMapOvr>
+    <a:masterClrMapping/>
+  </p:clrMapOvr>
+</p:notes>
+</file>
+
+<file path=ppt/notesSlides/notesSlide4.xml><?xml version="1.0" encoding="utf-8"?>
+<p:notes xmlns:a="http://schemas.openxmlformats.org/drawingml/2006/main" xmlns:r="http://schemas.openxmlformats.org/officeDocument/2006/relationships" xmlns:p="http://schemas.openxmlformats.org/presentationml/2006/main" xmlns:m="http://schemas.openxmlformats.org/officeDocument/2006/math" xmlns:a14="http://schemas.microsoft.com/office/drawing/2010/main" showMasterSp="1" showMasterPhAnim="1">
+  <p:cSld>
+    <p:spTree>
+      <p:nvGrpSpPr>
+        <p:cNvPr id="1" name=""/>
+        <p:cNvGrpSpPr/>
+        <p:nvPr/>
+      </p:nvGrpSpPr>
+      <p:grpSpPr>
+        <a:xfrm>
+          <a:off x="0" y="0"/>
+          <a:ext cx="0" cy="0"/>
+          <a:chOff x="0" y="0"/>
+          <a:chExt cx="0" cy="0"/>
+        </a:xfrm>
+      </p:grpSpPr>
+      <p:sp>
+        <p:nvSpPr>
+          <p:cNvPr id="209" name="Shape 209"/>
+          <p:cNvSpPr/>
+          <p:nvPr>
+            <p:ph type="sldImg"/>
+          </p:nvPr>
+        </p:nvSpPr>
+        <p:spPr>
+          <a:prstGeom prst="rect">
+            <a:avLst/>
+          </a:prstGeom>
+        </p:spPr>
+        <p:txBody>
+          <a:bodyPr/>
+          <a:lstStyle/>
+          <a:p>
+            <a:pPr/>
+          </a:p>
+        </p:txBody>
+      </p:sp>
+      <p:sp>
+        <p:nvSpPr>
+          <p:cNvPr id="210" name="Shape 210"/>
+          <p:cNvSpPr/>
+          <p:nvPr>
+            <p:ph type="body" sz="quarter" idx="1"/>
+          </p:nvPr>
+        </p:nvSpPr>
+        <p:spPr>
+          <a:prstGeom prst="rect">
+            <a:avLst/>
+          </a:prstGeom>
+        </p:spPr>
+        <p:txBody>
+          <a:bodyPr/>
+          <a:lstStyle/>
+          <a:p/>
+        </p:txBody>
+      </p:sp>
+    </p:spTree>
+  </p:cSld>
+  <p:clrMapOvr>
+    <a:masterClrMapping/>
+  </p:clrMapOvr>
+</p:notes>
+</file>
+
+<file path=ppt/notesSlides/notesSlide5.xml><?xml version="1.0" encoding="utf-8"?>
+<p:notes xmlns:a="http://schemas.openxmlformats.org/drawingml/2006/main" xmlns:r="http://schemas.openxmlformats.org/officeDocument/2006/relationships" xmlns:p="http://schemas.openxmlformats.org/presentationml/2006/main" xmlns:m="http://schemas.openxmlformats.org/officeDocument/2006/math" xmlns:a14="http://schemas.microsoft.com/office/drawing/2010/main" showMasterSp="1" showMasterPhAnim="1">
+  <p:cSld>
+    <p:spTree>
+      <p:nvGrpSpPr>
+        <p:cNvPr id="1" name=""/>
+        <p:cNvGrpSpPr/>
+        <p:nvPr/>
+      </p:nvGrpSpPr>
+      <p:grpSpPr>
+        <a:xfrm>
+          <a:off x="0" y="0"/>
+          <a:ext cx="0" cy="0"/>
+          <a:chOff x="0" y="0"/>
+          <a:chExt cx="0" cy="0"/>
+        </a:xfrm>
+      </p:grpSpPr>
+      <p:sp>
+        <p:nvSpPr>
+          <p:cNvPr id="233" name="Shape 233"/>
+          <p:cNvSpPr/>
+          <p:nvPr>
+            <p:ph type="sldImg"/>
+          </p:nvPr>
+        </p:nvSpPr>
+        <p:spPr>
+          <a:prstGeom prst="rect">
+            <a:avLst/>
+          </a:prstGeom>
+        </p:spPr>
+        <p:txBody>
+          <a:bodyPr/>
+          <a:lstStyle/>
+          <a:p>
+            <a:pPr/>
+          </a:p>
+        </p:txBody>
+      </p:sp>
+      <p:sp>
+        <p:nvSpPr>
+          <p:cNvPr id="234" name="Shape 234"/>
+          <p:cNvSpPr/>
+          <p:nvPr>
+            <p:ph type="body" sz="quarter" idx="1"/>
+          </p:nvPr>
+        </p:nvSpPr>
+        <p:spPr>
+          <a:prstGeom prst="rect">
+            <a:avLst/>
+          </a:prstGeom>
+        </p:spPr>
+        <p:txBody>
+          <a:bodyPr/>
+          <a:lstStyle/>
+          <a:p/>
+        </p:txBody>
+      </p:sp>
+    </p:spTree>
+  </p:cSld>
+  <p:clrMapOvr>
+    <a:masterClrMapping/>
+  </p:clrMapOvr>
+</p:notes>
+</file>
+
+<file path=ppt/notesSlides/notesSlide6.xml><?xml version="1.0" encoding="utf-8"?>
+<p:notes xmlns:a="http://schemas.openxmlformats.org/drawingml/2006/main" xmlns:r="http://schemas.openxmlformats.org/officeDocument/2006/relationships" xmlns:p="http://schemas.openxmlformats.org/presentationml/2006/main" xmlns:m="http://schemas.openxmlformats.org/officeDocument/2006/math" xmlns:a14="http://schemas.microsoft.com/office/drawing/2010/main" showMasterSp="1" showMasterPhAnim="1">
+  <p:cSld>
+    <p:spTree>
+      <p:nvGrpSpPr>
+        <p:cNvPr id="1" name=""/>
+        <p:cNvGrpSpPr/>
+        <p:nvPr/>
+      </p:nvGrpSpPr>
+      <p:grpSpPr>
+        <a:xfrm>
+          <a:off x="0" y="0"/>
+          <a:ext cx="0" cy="0"/>
+          <a:chOff x="0" y="0"/>
+          <a:chExt cx="0" cy="0"/>
+        </a:xfrm>
+      </p:grpSpPr>
+      <p:sp>
+        <p:nvSpPr>
+          <p:cNvPr id="265" name="Shape 265"/>
+          <p:cNvSpPr/>
+          <p:nvPr>
+            <p:ph type="sldImg"/>
+          </p:nvPr>
+        </p:nvSpPr>
+        <p:spPr>
+          <a:prstGeom prst="rect">
+            <a:avLst/>
+          </a:prstGeom>
+        </p:spPr>
+        <p:txBody>
+          <a:bodyPr/>
+          <a:lstStyle/>
+          <a:p>
+            <a:pPr/>
+          </a:p>
+        </p:txBody>
+      </p:sp>
+      <p:sp>
+        <p:nvSpPr>
+          <p:cNvPr id="266" name="Shape 266"/>
+          <p:cNvSpPr/>
+          <p:nvPr>
+            <p:ph type="body" sz="quarter" idx="1"/>
+          </p:nvPr>
+        </p:nvSpPr>
+        <p:spPr>
+          <a:prstGeom prst="rect">
+            <a:avLst/>
+          </a:prstGeom>
+        </p:spPr>
+        <p:txBody>
+          <a:bodyPr/>
+          <a:lstStyle/>
+          <a:p/>
+        </p:txBody>
+      </p:sp>
+    </p:spTree>
+  </p:cSld>
+  <p:clrMapOvr>
+    <a:masterClrMapping/>
+  </p:clrMapOvr>
+</p:notes>
+</file>
+
+<file path=ppt/notesSlides/notesSlide7.xml><?xml version="1.0" encoding="utf-8"?>
+<p:notes xmlns:a="http://schemas.openxmlformats.org/drawingml/2006/main" xmlns:r="http://schemas.openxmlformats.org/officeDocument/2006/relationships" xmlns:p="http://schemas.openxmlformats.org/presentationml/2006/main" xmlns:m="http://schemas.openxmlformats.org/officeDocument/2006/math" xmlns:a14="http://schemas.microsoft.com/office/drawing/2010/main" showMasterSp="1" showMasterPhAnim="1">
+  <p:cSld>
+    <p:spTree>
+      <p:nvGrpSpPr>
+        <p:cNvPr id="1" name=""/>
+        <p:cNvGrpSpPr/>
+        <p:nvPr/>
+      </p:nvGrpSpPr>
+      <p:grpSpPr>
+        <a:xfrm>
+          <a:off x="0" y="0"/>
+          <a:ext cx="0" cy="0"/>
+          <a:chOff x="0" y="0"/>
+          <a:chExt cx="0" cy="0"/>
+        </a:xfrm>
+      </p:grpSpPr>
+      <p:sp>
+        <p:nvSpPr>
+          <p:cNvPr id="277" name="Shape 277"/>
+          <p:cNvSpPr/>
+          <p:nvPr>
+            <p:ph type="sldImg"/>
+          </p:nvPr>
+        </p:nvSpPr>
+        <p:spPr>
+          <a:prstGeom prst="rect">
+            <a:avLst/>
+          </a:prstGeom>
+        </p:spPr>
+        <p:txBody>
+          <a:bodyPr/>
+          <a:lstStyle/>
+          <a:p>
+            <a:pPr/>
+          </a:p>
+        </p:txBody>
+      </p:sp>
+      <p:sp>
+        <p:nvSpPr>
+          <p:cNvPr id="278" name="Shape 278"/>
+          <p:cNvSpPr/>
+          <p:nvPr>
+            <p:ph type="body" sz="quarter" idx="1"/>
+          </p:nvPr>
+        </p:nvSpPr>
+        <p:spPr>
+          <a:prstGeom prst="rect">
+            <a:avLst/>
+          </a:prstGeom>
+        </p:spPr>
+        <p:txBody>
+          <a:bodyPr/>
+          <a:lstStyle/>
+          <a:p/>
+        </p:txBody>
+      </p:sp>
+    </p:spTree>
+  </p:cSld>
+  <p:clrMapOvr>
+    <a:masterClrMapping/>
+  </p:clrMapOvr>
+</p:notes>
+</file>
+
+<file path=ppt/notesSlides/notesSlide8.xml><?xml version="1.0" encoding="utf-8"?>
+<p:notes xmlns:a="http://schemas.openxmlformats.org/drawingml/2006/main" xmlns:r="http://schemas.openxmlformats.org/officeDocument/2006/relationships" xmlns:p="http://schemas.openxmlformats.org/presentationml/2006/main" xmlns:m="http://schemas.openxmlformats.org/officeDocument/2006/math" xmlns:a14="http://schemas.microsoft.com/office/drawing/2010/main" showMasterSp="1" showMasterPhAnim="1">
+  <p:cSld>
+    <p:spTree>
+      <p:nvGrpSpPr>
+        <p:cNvPr id="1" name=""/>
+        <p:cNvGrpSpPr/>
+        <p:nvPr/>
+      </p:nvGrpSpPr>
+      <p:grpSpPr>
+        <a:xfrm>
+          <a:off x="0" y="0"/>
+          <a:ext cx="0" cy="0"/>
+          <a:chOff x="0" y="0"/>
+          <a:chExt cx="0" cy="0"/>
+        </a:xfrm>
+      </p:grpSpPr>
+      <p:sp>
+        <p:nvSpPr>
+          <p:cNvPr id="313" name="Shape 313"/>
+          <p:cNvSpPr/>
+          <p:nvPr>
+            <p:ph type="sldImg"/>
+          </p:nvPr>
+        </p:nvSpPr>
+        <p:spPr>
+          <a:prstGeom prst="rect">
+            <a:avLst/>
+          </a:prstGeom>
+        </p:spPr>
+        <p:txBody>
+          <a:bodyPr/>
+          <a:lstStyle/>
+          <a:p>
+            <a:pPr/>
+          </a:p>
+        </p:txBody>
+      </p:sp>
+      <p:sp>
+        <p:nvSpPr>
+          <p:cNvPr id="314" name="Shape 314"/>
+          <p:cNvSpPr/>
+          <p:nvPr>
+            <p:ph type="body" sz="quarter" idx="1"/>
+          </p:nvPr>
+        </p:nvSpPr>
+        <p:spPr>
+          <a:prstGeom prst="rect">
+            <a:avLst/>
+          </a:prstGeom>
+        </p:spPr>
+        <p:txBody>
+          <a:bodyPr/>
+          <a:lstStyle/>
+          <a:p/>
+        </p:txBody>
+      </p:sp>
+    </p:spTree>
+  </p:cSld>
+  <p:clrMapOvr>
+    <a:masterClrMapping/>
+  </p:clrMapOvr>
+</p:notes>
+</file>
+
+<file path=ppt/notesSlides/notesSlide9.xml><?xml version="1.0" encoding="utf-8"?>
+<p:notes xmlns:a="http://schemas.openxmlformats.org/drawingml/2006/main" xmlns:r="http://schemas.openxmlformats.org/officeDocument/2006/relationships" xmlns:p="http://schemas.openxmlformats.org/presentationml/2006/main" xmlns:m="http://schemas.openxmlformats.org/officeDocument/2006/math" xmlns:a14="http://schemas.microsoft.com/office/drawing/2010/main" showMasterSp="1" showMasterPhAnim="1">
+  <p:cSld>
+    <p:spTree>
+      <p:nvGrpSpPr>
+        <p:cNvPr id="1" name=""/>
+        <p:cNvGrpSpPr/>
+        <p:nvPr/>
+      </p:nvGrpSpPr>
+      <p:grpSpPr>
+        <a:xfrm>
+          <a:off x="0" y="0"/>
+          <a:ext cx="0" cy="0"/>
+          <a:chOff x="0" y="0"/>
+          <a:chExt cx="0" cy="0"/>
+        </a:xfrm>
+      </p:grpSpPr>
+      <p:sp>
+        <p:nvSpPr>
+          <p:cNvPr id="342" name="Shape 342"/>
+          <p:cNvSpPr/>
+          <p:nvPr>
+            <p:ph type="sldImg"/>
+          </p:nvPr>
+        </p:nvSpPr>
+        <p:spPr>
+          <a:prstGeom prst="rect">
+            <a:avLst/>
+          </a:prstGeom>
+        </p:spPr>
+        <p:txBody>
+          <a:bodyPr/>
+          <a:lstStyle/>
+          <a:p>
+            <a:pPr/>
+          </a:p>
+        </p:txBody>
+      </p:sp>
+      <p:sp>
+        <p:nvSpPr>
+          <p:cNvPr id="343" name="Shape 343"/>
+          <p:cNvSpPr/>
+          <p:nvPr>
+            <p:ph type="body" sz="quarter" idx="1"/>
+          </p:nvPr>
+        </p:nvSpPr>
+        <p:spPr>
+          <a:prstGeom prst="rect">
+            <a:avLst/>
+          </a:prstGeom>
+        </p:spPr>
+        <p:txBody>
+          <a:bodyPr/>
+          <a:lstStyle/>
+          <a:p/>
+        </p:txBody>
+      </p:sp>
+    </p:spTree>
+  </p:cSld>
+  <p:clrMapOvr>
+    <a:masterClrMapping/>
+  </p:clrMapOvr>
+</p:notes>
+</file>
+
 <file path=ppt/slideLayouts/slideLayout1.xml><?xml version="1.0" encoding="utf-8"?>
 <p:sldLayout xmlns:a="http://schemas.openxmlformats.org/drawingml/2006/main" xmlns:r="http://schemas.openxmlformats.org/officeDocument/2006/relationships" xmlns:p="http://schemas.openxmlformats.org/presentationml/2006/main" xmlns:m="http://schemas.openxmlformats.org/officeDocument/2006/math" xmlns:a14="http://schemas.microsoft.com/office/drawing/2010/main" type="tx" showMasterSp="1" showMasterPhAnim="1">
   <p:cSld name="DEFAULT">
@@ -571,7 +2196,7 @@
         <p:spPr>
           <a:xfrm>
             <a:off x="609600" y="92074"/>
-            <a:ext cx="10972800" cy="1508127"/>
+            <a:ext cx="10972800" cy="1508126"/>
           </a:xfrm>
           <a:prstGeom prst="rect">
             <a:avLst/>
@@ -3684,6 +5309,36 @@
           </a:p>
         </p:txBody>
       </p:sp>
+      <p:pic>
+        <p:nvPicPr>
+          <p:cNvPr id="90" name="pasted-movie.png" descr="pasted-movie.png"/>
+          <p:cNvPicPr>
+            <a:picLocks noChangeAspect="1"/>
+          </p:cNvPicPr>
+          <p:nvPr/>
+        </p:nvPicPr>
+        <p:blipFill>
+          <a:blip r:embed="rId3">
+            <a:alphaModFix amt="25750"/>
+            <a:extLst/>
+          </a:blip>
+          <a:stretch>
+            <a:fillRect/>
+          </a:stretch>
+        </p:blipFill>
+        <p:spPr>
+          <a:xfrm>
+            <a:off x="5463997" y="1352675"/>
+            <a:ext cx="2834373" cy="3779163"/>
+          </a:xfrm>
+          <a:prstGeom prst="rect">
+            <a:avLst/>
+          </a:prstGeom>
+          <a:ln w="12700">
+            <a:miter lim="400000"/>
+          </a:ln>
+        </p:spPr>
+      </p:pic>
     </p:spTree>
   </p:cSld>
   <p:clrMapOvr>
@@ -3712,7 +5367,7 @@
       </p:grpSpPr>
       <p:sp>
         <p:nvSpPr>
-          <p:cNvPr id="326" name="Text 0"/>
+          <p:cNvPr id="345" name="Text 0"/>
           <p:cNvSpPr txBox="1"/>
           <p:nvPr/>
         </p:nvSpPr>
@@ -3756,7 +5411,7 @@
       </p:sp>
       <p:sp>
         <p:nvSpPr>
-          <p:cNvPr id="327" name="Text 1"/>
+          <p:cNvPr id="346" name="Text 1"/>
           <p:cNvSpPr txBox="1"/>
           <p:nvPr/>
         </p:nvSpPr>
@@ -3804,7 +5459,7 @@
       </p:sp>
       <p:sp>
         <p:nvSpPr>
-          <p:cNvPr id="328" name="Text 2"/>
+          <p:cNvPr id="347" name="Text 2"/>
           <p:cNvSpPr txBox="1"/>
           <p:nvPr/>
         </p:nvSpPr>
@@ -3848,7 +5503,7 @@
       </p:sp>
       <p:sp>
         <p:nvSpPr>
-          <p:cNvPr id="329" name="Text 3"/>
+          <p:cNvPr id="348" name="Text 3"/>
           <p:cNvSpPr txBox="1"/>
           <p:nvPr/>
         </p:nvSpPr>
@@ -3896,7 +5551,7 @@
       </p:sp>
       <p:sp>
         <p:nvSpPr>
-          <p:cNvPr id="330" name="Text 4"/>
+          <p:cNvPr id="349" name="Text 4"/>
           <p:cNvSpPr txBox="1"/>
           <p:nvPr/>
         </p:nvSpPr>
@@ -3940,7 +5595,7 @@
       </p:sp>
       <p:sp>
         <p:nvSpPr>
-          <p:cNvPr id="331" name="Text 5"/>
+          <p:cNvPr id="350" name="Text 5"/>
           <p:cNvSpPr txBox="1"/>
           <p:nvPr/>
         </p:nvSpPr>
@@ -3984,7 +5639,7 @@
       </p:sp>
       <p:sp>
         <p:nvSpPr>
-          <p:cNvPr id="332" name="Text 6"/>
+          <p:cNvPr id="351" name="Text 6"/>
           <p:cNvSpPr txBox="1"/>
           <p:nvPr/>
         </p:nvSpPr>
@@ -4028,7 +5683,7 @@
       </p:sp>
       <p:sp>
         <p:nvSpPr>
-          <p:cNvPr id="333" name="Text 7"/>
+          <p:cNvPr id="352" name="Text 7"/>
           <p:cNvSpPr txBox="1"/>
           <p:nvPr/>
         </p:nvSpPr>
@@ -4072,7 +5727,7 @@
       </p:sp>
       <p:sp>
         <p:nvSpPr>
-          <p:cNvPr id="334" name="Text 8"/>
+          <p:cNvPr id="353" name="Text 8"/>
           <p:cNvSpPr txBox="1"/>
           <p:nvPr/>
         </p:nvSpPr>
@@ -4116,14 +5771,14 @@
       </p:sp>
       <p:sp>
         <p:nvSpPr>
-          <p:cNvPr id="335" name="Text 9"/>
-          <p:cNvSpPr txBox="1"/>
-          <p:nvPr/>
-        </p:nvSpPr>
-        <p:spPr>
-          <a:xfrm>
-            <a:off x="4343399" y="1554480"/>
-            <a:ext cx="3474722" cy="393701"/>
+          <p:cNvPr id="354" name="Text 9"/>
+          <p:cNvSpPr txBox="1"/>
+          <p:nvPr/>
+        </p:nvSpPr>
+        <p:spPr>
+          <a:xfrm>
+            <a:off x="4343400" y="1554480"/>
+            <a:ext cx="3474721" cy="393701"/>
           </a:xfrm>
           <a:prstGeom prst="rect">
             <a:avLst/>
@@ -4164,14 +5819,14 @@
       </p:sp>
       <p:sp>
         <p:nvSpPr>
-          <p:cNvPr id="336" name="Text 10"/>
-          <p:cNvSpPr txBox="1"/>
-          <p:nvPr/>
-        </p:nvSpPr>
-        <p:spPr>
-          <a:xfrm>
-            <a:off x="4343399" y="2148839"/>
-            <a:ext cx="3474722" cy="166763"/>
+          <p:cNvPr id="355" name="Text 10"/>
+          <p:cNvSpPr txBox="1"/>
+          <p:nvPr/>
+        </p:nvSpPr>
+        <p:spPr>
+          <a:xfrm>
+            <a:off x="4343400" y="2148839"/>
+            <a:ext cx="3474721" cy="166763"/>
           </a:xfrm>
           <a:prstGeom prst="rect">
             <a:avLst/>
@@ -4208,14 +5863,14 @@
       </p:sp>
       <p:sp>
         <p:nvSpPr>
-          <p:cNvPr id="337" name="Text 11"/>
-          <p:cNvSpPr txBox="1"/>
-          <p:nvPr/>
-        </p:nvSpPr>
-        <p:spPr>
-          <a:xfrm>
-            <a:off x="4343399" y="2468879"/>
-            <a:ext cx="3474722" cy="241649"/>
+          <p:cNvPr id="356" name="Text 11"/>
+          <p:cNvSpPr txBox="1"/>
+          <p:nvPr/>
+        </p:nvSpPr>
+        <p:spPr>
+          <a:xfrm>
+            <a:off x="4343400" y="2468879"/>
+            <a:ext cx="3474721" cy="241649"/>
           </a:xfrm>
           <a:prstGeom prst="rect">
             <a:avLst/>
@@ -4252,14 +5907,14 @@
       </p:sp>
       <p:sp>
         <p:nvSpPr>
-          <p:cNvPr id="338" name="Text 12"/>
-          <p:cNvSpPr txBox="1"/>
-          <p:nvPr/>
-        </p:nvSpPr>
-        <p:spPr>
-          <a:xfrm>
-            <a:off x="4343399" y="2880360"/>
-            <a:ext cx="3474722" cy="186557"/>
+          <p:cNvPr id="357" name="Text 12"/>
+          <p:cNvSpPr txBox="1"/>
+          <p:nvPr/>
+        </p:nvSpPr>
+        <p:spPr>
+          <a:xfrm>
+            <a:off x="4343400" y="2880360"/>
+            <a:ext cx="3474721" cy="186557"/>
           </a:xfrm>
           <a:prstGeom prst="rect">
             <a:avLst/>
@@ -4296,14 +5951,14 @@
       </p:sp>
       <p:sp>
         <p:nvSpPr>
-          <p:cNvPr id="339" name="Text 13"/>
-          <p:cNvSpPr txBox="1"/>
-          <p:nvPr/>
-        </p:nvSpPr>
-        <p:spPr>
-          <a:xfrm>
-            <a:off x="4343399" y="3474720"/>
-            <a:ext cx="3474722" cy="166762"/>
+          <p:cNvPr id="358" name="Text 13"/>
+          <p:cNvSpPr txBox="1"/>
+          <p:nvPr/>
+        </p:nvSpPr>
+        <p:spPr>
+          <a:xfrm>
+            <a:off x="4343400" y="3474720"/>
+            <a:ext cx="3474721" cy="166762"/>
           </a:xfrm>
           <a:prstGeom prst="rect">
             <a:avLst/>
@@ -4340,14 +5995,14 @@
       </p:sp>
       <p:sp>
         <p:nvSpPr>
-          <p:cNvPr id="340" name="Text 14"/>
-          <p:cNvSpPr txBox="1"/>
-          <p:nvPr/>
-        </p:nvSpPr>
-        <p:spPr>
-          <a:xfrm>
-            <a:off x="4343399" y="3794759"/>
-            <a:ext cx="3474722" cy="241649"/>
+          <p:cNvPr id="359" name="Text 14"/>
+          <p:cNvSpPr txBox="1"/>
+          <p:nvPr/>
+        </p:nvSpPr>
+        <p:spPr>
+          <a:xfrm>
+            <a:off x="4343400" y="3794759"/>
+            <a:ext cx="3474721" cy="241649"/>
           </a:xfrm>
           <a:prstGeom prst="rect">
             <a:avLst/>
@@ -4384,7 +6039,7 @@
       </p:sp>
       <p:sp>
         <p:nvSpPr>
-          <p:cNvPr id="341" name="Text 15"/>
+          <p:cNvPr id="360" name="Text 15"/>
           <p:cNvSpPr txBox="1"/>
           <p:nvPr/>
         </p:nvSpPr>
@@ -4432,7 +6087,7 @@
       </p:sp>
       <p:sp>
         <p:nvSpPr>
-          <p:cNvPr id="342" name="Text 16"/>
+          <p:cNvPr id="361" name="Text 16"/>
           <p:cNvSpPr txBox="1"/>
           <p:nvPr/>
         </p:nvSpPr>
@@ -4476,7 +6131,7 @@
       </p:sp>
       <p:sp>
         <p:nvSpPr>
-          <p:cNvPr id="343" name="Text 17"/>
+          <p:cNvPr id="362" name="Text 17"/>
           <p:cNvSpPr txBox="1"/>
           <p:nvPr/>
         </p:nvSpPr>
@@ -4520,7 +6175,7 @@
       </p:sp>
       <p:sp>
         <p:nvSpPr>
-          <p:cNvPr id="344" name="Text 18"/>
+          <p:cNvPr id="363" name="Text 18"/>
           <p:cNvSpPr txBox="1"/>
           <p:nvPr/>
         </p:nvSpPr>
@@ -4564,7 +6219,7 @@
       </p:sp>
       <p:sp>
         <p:nvSpPr>
-          <p:cNvPr id="345" name="Text 19"/>
+          <p:cNvPr id="364" name="Text 19"/>
           <p:cNvSpPr txBox="1"/>
           <p:nvPr/>
         </p:nvSpPr>
@@ -4608,7 +6263,7 @@
       </p:sp>
       <p:sp>
         <p:nvSpPr>
-          <p:cNvPr id="346" name="Text 20"/>
+          <p:cNvPr id="365" name="Text 20"/>
           <p:cNvSpPr txBox="1"/>
           <p:nvPr/>
         </p:nvSpPr>
@@ -4652,7 +6307,7 @@
       </p:sp>
       <p:sp>
         <p:nvSpPr>
-          <p:cNvPr id="347" name="Shape 21"/>
+          <p:cNvPr id="366" name="Shape 21"/>
           <p:cNvSpPr/>
           <p:nvPr/>
         </p:nvSpPr>
@@ -4683,7 +6338,7 @@
       </p:sp>
       <p:sp>
         <p:nvSpPr>
-          <p:cNvPr id="348" name="Text 22"/>
+          <p:cNvPr id="367" name="Text 22"/>
           <p:cNvSpPr txBox="1"/>
           <p:nvPr/>
         </p:nvSpPr>
@@ -4753,7 +6408,7 @@
       </p:grpSpPr>
       <p:sp>
         <p:nvSpPr>
-          <p:cNvPr id="350" name="Text 0"/>
+          <p:cNvPr id="371" name="Text 0"/>
           <p:cNvSpPr txBox="1"/>
           <p:nvPr/>
         </p:nvSpPr>
@@ -4797,7 +6452,7 @@
       </p:sp>
       <p:sp>
         <p:nvSpPr>
-          <p:cNvPr id="351" name="Text 1"/>
+          <p:cNvPr id="372" name="Text 1"/>
           <p:cNvSpPr txBox="1"/>
           <p:nvPr/>
         </p:nvSpPr>
@@ -4845,7 +6500,7 @@
       </p:sp>
       <p:sp>
         <p:nvSpPr>
-          <p:cNvPr id="352" name="Text 2"/>
+          <p:cNvPr id="373" name="Text 2"/>
           <p:cNvSpPr txBox="1"/>
           <p:nvPr/>
         </p:nvSpPr>
@@ -4889,14 +6544,14 @@
       </p:sp>
       <p:sp>
         <p:nvSpPr>
-          <p:cNvPr id="353" name="Shape 3"/>
-          <p:cNvSpPr/>
-          <p:nvPr/>
-        </p:nvSpPr>
-        <p:spPr>
-          <a:xfrm>
-            <a:off x="640079" y="2697479"/>
-            <a:ext cx="2194562" cy="822961"/>
+          <p:cNvPr id="374" name="Shape 3"/>
+          <p:cNvSpPr/>
+          <p:nvPr/>
+        </p:nvSpPr>
+        <p:spPr>
+          <a:xfrm>
+            <a:off x="640080" y="2697479"/>
+            <a:ext cx="2194561" cy="822961"/>
           </a:xfrm>
           <a:prstGeom prst="rect">
             <a:avLst/>
@@ -4920,14 +6575,14 @@
       </p:sp>
       <p:sp>
         <p:nvSpPr>
-          <p:cNvPr id="354" name="Text 4"/>
-          <p:cNvSpPr txBox="1"/>
-          <p:nvPr/>
-        </p:nvSpPr>
-        <p:spPr>
-          <a:xfrm>
-            <a:off x="640079" y="3004383"/>
-            <a:ext cx="2194562" cy="209154"/>
+          <p:cNvPr id="375" name="Text 4"/>
+          <p:cNvSpPr txBox="1"/>
+          <p:nvPr/>
+        </p:nvSpPr>
+        <p:spPr>
+          <a:xfrm>
+            <a:off x="640080" y="3004383"/>
+            <a:ext cx="2194561" cy="209154"/>
           </a:xfrm>
           <a:prstGeom prst="rect">
             <a:avLst/>
@@ -4964,14 +6619,14 @@
       </p:sp>
       <p:sp>
         <p:nvSpPr>
-          <p:cNvPr id="355" name="Text 5"/>
-          <p:cNvSpPr txBox="1"/>
-          <p:nvPr/>
-        </p:nvSpPr>
-        <p:spPr>
-          <a:xfrm>
-            <a:off x="457199" y="2285999"/>
-            <a:ext cx="2560322" cy="166763"/>
+          <p:cNvPr id="376" name="Text 5"/>
+          <p:cNvSpPr txBox="1"/>
+          <p:nvPr/>
+        </p:nvSpPr>
+        <p:spPr>
+          <a:xfrm>
+            <a:off x="457199" y="2286000"/>
+            <a:ext cx="2560322" cy="166762"/>
           </a:xfrm>
           <a:prstGeom prst="rect">
             <a:avLst/>
@@ -5008,14 +6663,14 @@
       </p:sp>
       <p:sp>
         <p:nvSpPr>
-          <p:cNvPr id="356" name="Text 6"/>
-          <p:cNvSpPr txBox="1"/>
-          <p:nvPr/>
-        </p:nvSpPr>
-        <p:spPr>
-          <a:xfrm>
-            <a:off x="3749040" y="1371599"/>
-            <a:ext cx="1828801" cy="166763"/>
+          <p:cNvPr id="377" name="Text 6"/>
+          <p:cNvSpPr txBox="1"/>
+          <p:nvPr/>
+        </p:nvSpPr>
+        <p:spPr>
+          <a:xfrm>
+            <a:off x="3749040" y="1371600"/>
+            <a:ext cx="1828801" cy="166762"/>
           </a:xfrm>
           <a:prstGeom prst="rect">
             <a:avLst/>
@@ -5052,14 +6707,14 @@
       </p:sp>
       <p:sp>
         <p:nvSpPr>
-          <p:cNvPr id="357" name="Text 7"/>
-          <p:cNvSpPr txBox="1"/>
-          <p:nvPr/>
-        </p:nvSpPr>
-        <p:spPr>
-          <a:xfrm>
-            <a:off x="5669279" y="1371599"/>
-            <a:ext cx="1280161" cy="166763"/>
+          <p:cNvPr id="378" name="Text 7"/>
+          <p:cNvSpPr txBox="1"/>
+          <p:nvPr/>
+        </p:nvSpPr>
+        <p:spPr>
+          <a:xfrm>
+            <a:off x="5669279" y="1371600"/>
+            <a:ext cx="1280161" cy="166762"/>
           </a:xfrm>
           <a:prstGeom prst="rect">
             <a:avLst/>
@@ -5096,14 +6751,14 @@
       </p:sp>
       <p:sp>
         <p:nvSpPr>
-          <p:cNvPr id="358" name="Text 8"/>
-          <p:cNvSpPr txBox="1"/>
-          <p:nvPr/>
-        </p:nvSpPr>
-        <p:spPr>
-          <a:xfrm>
-            <a:off x="6949440" y="1371599"/>
-            <a:ext cx="1463041" cy="166763"/>
+          <p:cNvPr id="379" name="Text 8"/>
+          <p:cNvSpPr txBox="1"/>
+          <p:nvPr/>
+        </p:nvSpPr>
+        <p:spPr>
+          <a:xfrm>
+            <a:off x="6949440" y="1371600"/>
+            <a:ext cx="1463041" cy="166762"/>
           </a:xfrm>
           <a:prstGeom prst="rect">
             <a:avLst/>
@@ -5140,7 +6795,7 @@
       </p:sp>
       <p:sp>
         <p:nvSpPr>
-          <p:cNvPr id="359" name="Shape 9"/>
+          <p:cNvPr id="380" name="Shape 9"/>
           <p:cNvSpPr/>
           <p:nvPr/>
         </p:nvSpPr>
@@ -5171,7 +6826,7 @@
       </p:sp>
       <p:sp>
         <p:nvSpPr>
-          <p:cNvPr id="360" name="Text 10"/>
+          <p:cNvPr id="381" name="Text 10"/>
           <p:cNvSpPr txBox="1"/>
           <p:nvPr/>
         </p:nvSpPr>
@@ -5215,7 +6870,7 @@
       </p:sp>
       <p:sp>
         <p:nvSpPr>
-          <p:cNvPr id="361" name="Shape 11"/>
+          <p:cNvPr id="382" name="Shape 11"/>
           <p:cNvSpPr/>
           <p:nvPr/>
         </p:nvSpPr>
@@ -5246,7 +6901,7 @@
       </p:sp>
       <p:sp>
         <p:nvSpPr>
-          <p:cNvPr id="362" name="Text 12"/>
+          <p:cNvPr id="383" name="Text 12"/>
           <p:cNvSpPr txBox="1"/>
           <p:nvPr/>
         </p:nvSpPr>
@@ -5290,7 +6945,7 @@
       </p:sp>
       <p:sp>
         <p:nvSpPr>
-          <p:cNvPr id="363" name="Shape 13"/>
+          <p:cNvPr id="384" name="Shape 13"/>
           <p:cNvSpPr/>
           <p:nvPr/>
         </p:nvSpPr>
@@ -5321,7 +6976,7 @@
       </p:sp>
       <p:sp>
         <p:nvSpPr>
-          <p:cNvPr id="364" name="Text 14"/>
+          <p:cNvPr id="385" name="Text 14"/>
           <p:cNvSpPr txBox="1"/>
           <p:nvPr/>
         </p:nvSpPr>
@@ -5365,14 +7020,14 @@
       </p:sp>
       <p:sp>
         <p:nvSpPr>
-          <p:cNvPr id="365" name="Shape 15"/>
-          <p:cNvSpPr/>
-          <p:nvPr/>
-        </p:nvSpPr>
-        <p:spPr>
-          <a:xfrm>
-            <a:off x="3840479" y="2285999"/>
-            <a:ext cx="1645921" cy="429770"/>
+          <p:cNvPr id="386" name="Shape 15"/>
+          <p:cNvSpPr/>
+          <p:nvPr/>
+        </p:nvSpPr>
+        <p:spPr>
+          <a:xfrm>
+            <a:off x="3840479" y="2286000"/>
+            <a:ext cx="1645921" cy="429769"/>
           </a:xfrm>
           <a:prstGeom prst="rect">
             <a:avLst/>
@@ -5396,7 +7051,7 @@
       </p:sp>
       <p:sp>
         <p:nvSpPr>
-          <p:cNvPr id="366" name="Text 16"/>
+          <p:cNvPr id="387" name="Text 16"/>
           <p:cNvSpPr txBox="1"/>
           <p:nvPr/>
         </p:nvSpPr>
@@ -5440,14 +7095,14 @@
       </p:sp>
       <p:sp>
         <p:nvSpPr>
-          <p:cNvPr id="367" name="Shape 17"/>
-          <p:cNvSpPr/>
-          <p:nvPr/>
-        </p:nvSpPr>
-        <p:spPr>
-          <a:xfrm>
-            <a:off x="5669279" y="2285999"/>
-            <a:ext cx="1280161" cy="429770"/>
+          <p:cNvPr id="388" name="Shape 17"/>
+          <p:cNvSpPr/>
+          <p:nvPr/>
+        </p:nvSpPr>
+        <p:spPr>
+          <a:xfrm>
+            <a:off x="5669279" y="2286000"/>
+            <a:ext cx="1280161" cy="429769"/>
           </a:xfrm>
           <a:prstGeom prst="rect">
             <a:avLst/>
@@ -5471,7 +7126,7 @@
       </p:sp>
       <p:sp>
         <p:nvSpPr>
-          <p:cNvPr id="368" name="Text 18"/>
+          <p:cNvPr id="389" name="Text 18"/>
           <p:cNvSpPr txBox="1"/>
           <p:nvPr/>
         </p:nvSpPr>
@@ -5515,14 +7170,14 @@
       </p:sp>
       <p:sp>
         <p:nvSpPr>
-          <p:cNvPr id="369" name="Shape 19"/>
-          <p:cNvSpPr/>
-          <p:nvPr/>
-        </p:nvSpPr>
-        <p:spPr>
-          <a:xfrm>
-            <a:off x="7132319" y="2285999"/>
-            <a:ext cx="1097281" cy="429770"/>
+          <p:cNvPr id="390" name="Shape 19"/>
+          <p:cNvSpPr/>
+          <p:nvPr/>
+        </p:nvSpPr>
+        <p:spPr>
+          <a:xfrm>
+            <a:off x="7132319" y="2286000"/>
+            <a:ext cx="1097281" cy="429769"/>
           </a:xfrm>
           <a:prstGeom prst="rect">
             <a:avLst/>
@@ -5546,7 +7201,7 @@
       </p:sp>
       <p:sp>
         <p:nvSpPr>
-          <p:cNvPr id="370" name="Text 20"/>
+          <p:cNvPr id="391" name="Text 20"/>
           <p:cNvSpPr txBox="1"/>
           <p:nvPr/>
         </p:nvSpPr>
@@ -5590,7 +7245,7 @@
       </p:sp>
       <p:sp>
         <p:nvSpPr>
-          <p:cNvPr id="371" name="Shape 21"/>
+          <p:cNvPr id="392" name="Shape 21"/>
           <p:cNvSpPr/>
           <p:nvPr/>
         </p:nvSpPr>
@@ -5621,7 +7276,7 @@
       </p:sp>
       <p:sp>
         <p:nvSpPr>
-          <p:cNvPr id="372" name="Text 22"/>
+          <p:cNvPr id="393" name="Text 22"/>
           <p:cNvSpPr txBox="1"/>
           <p:nvPr/>
         </p:nvSpPr>
@@ -5665,7 +7320,7 @@
       </p:sp>
       <p:sp>
         <p:nvSpPr>
-          <p:cNvPr id="373" name="Shape 23"/>
+          <p:cNvPr id="394" name="Shape 23"/>
           <p:cNvSpPr/>
           <p:nvPr/>
         </p:nvSpPr>
@@ -5696,7 +7351,7 @@
       </p:sp>
       <p:sp>
         <p:nvSpPr>
-          <p:cNvPr id="374" name="Text 24"/>
+          <p:cNvPr id="395" name="Text 24"/>
           <p:cNvSpPr txBox="1"/>
           <p:nvPr/>
         </p:nvSpPr>
@@ -5740,7 +7395,7 @@
       </p:sp>
       <p:sp>
         <p:nvSpPr>
-          <p:cNvPr id="375" name="Shape 25"/>
+          <p:cNvPr id="396" name="Shape 25"/>
           <p:cNvSpPr/>
           <p:nvPr/>
         </p:nvSpPr>
@@ -5771,7 +7426,7 @@
       </p:sp>
       <p:sp>
         <p:nvSpPr>
-          <p:cNvPr id="376" name="Text 26"/>
+          <p:cNvPr id="397" name="Text 26"/>
           <p:cNvSpPr txBox="1"/>
           <p:nvPr/>
         </p:nvSpPr>
@@ -5815,7 +7470,7 @@
       </p:sp>
       <p:sp>
         <p:nvSpPr>
-          <p:cNvPr id="377" name="Shape 27"/>
+          <p:cNvPr id="398" name="Shape 27"/>
           <p:cNvSpPr/>
           <p:nvPr/>
         </p:nvSpPr>
@@ -5846,7 +7501,7 @@
       </p:sp>
       <p:sp>
         <p:nvSpPr>
-          <p:cNvPr id="378" name="Text 28"/>
+          <p:cNvPr id="399" name="Text 28"/>
           <p:cNvSpPr txBox="1"/>
           <p:nvPr/>
         </p:nvSpPr>
@@ -5890,7 +7545,7 @@
       </p:sp>
       <p:sp>
         <p:nvSpPr>
-          <p:cNvPr id="379" name="Shape 29"/>
+          <p:cNvPr id="400" name="Shape 29"/>
           <p:cNvSpPr/>
           <p:nvPr/>
         </p:nvSpPr>
@@ -5921,7 +7576,7 @@
       </p:sp>
       <p:sp>
         <p:nvSpPr>
-          <p:cNvPr id="380" name="Text 30"/>
+          <p:cNvPr id="401" name="Text 30"/>
           <p:cNvSpPr txBox="1"/>
           <p:nvPr/>
         </p:nvSpPr>
@@ -5965,7 +7620,7 @@
       </p:sp>
       <p:sp>
         <p:nvSpPr>
-          <p:cNvPr id="381" name="Shape 31"/>
+          <p:cNvPr id="402" name="Shape 31"/>
           <p:cNvSpPr/>
           <p:nvPr/>
         </p:nvSpPr>
@@ -5996,7 +7651,7 @@
       </p:sp>
       <p:sp>
         <p:nvSpPr>
-          <p:cNvPr id="382" name="Text 32"/>
+          <p:cNvPr id="403" name="Text 32"/>
           <p:cNvSpPr txBox="1"/>
           <p:nvPr/>
         </p:nvSpPr>
@@ -6040,7 +7695,7 @@
       </p:sp>
       <p:sp>
         <p:nvSpPr>
-          <p:cNvPr id="383" name="Shape 33"/>
+          <p:cNvPr id="404" name="Shape 33"/>
           <p:cNvSpPr/>
           <p:nvPr/>
         </p:nvSpPr>
@@ -6071,14 +7726,14 @@
       </p:sp>
       <p:sp>
         <p:nvSpPr>
-          <p:cNvPr id="384" name="Text 34"/>
+          <p:cNvPr id="405" name="Text 34"/>
           <p:cNvSpPr txBox="1"/>
           <p:nvPr/>
         </p:nvSpPr>
         <p:spPr>
           <a:xfrm>
             <a:off x="3840479" y="3916365"/>
-            <a:ext cx="1645921" cy="186557"/>
+            <a:ext cx="1645921" cy="186558"/>
           </a:xfrm>
           <a:prstGeom prst="rect">
             <a:avLst/>
@@ -6115,7 +7770,7 @@
       </p:sp>
       <p:sp>
         <p:nvSpPr>
-          <p:cNvPr id="385" name="Shape 35"/>
+          <p:cNvPr id="406" name="Shape 35"/>
           <p:cNvSpPr/>
           <p:nvPr/>
         </p:nvSpPr>
@@ -6146,14 +7801,14 @@
       </p:sp>
       <p:sp>
         <p:nvSpPr>
-          <p:cNvPr id="386" name="Text 36"/>
+          <p:cNvPr id="407" name="Text 36"/>
           <p:cNvSpPr txBox="1"/>
           <p:nvPr/>
         </p:nvSpPr>
         <p:spPr>
           <a:xfrm>
             <a:off x="5669279" y="3916365"/>
-            <a:ext cx="1280161" cy="186557"/>
+            <a:ext cx="1280161" cy="186558"/>
           </a:xfrm>
           <a:prstGeom prst="rect">
             <a:avLst/>
@@ -6190,7 +7845,7 @@
       </p:sp>
       <p:sp>
         <p:nvSpPr>
-          <p:cNvPr id="387" name="Shape 37"/>
+          <p:cNvPr id="408" name="Shape 37"/>
           <p:cNvSpPr/>
           <p:nvPr/>
         </p:nvSpPr>
@@ -6221,14 +7876,14 @@
       </p:sp>
       <p:sp>
         <p:nvSpPr>
-          <p:cNvPr id="388" name="Text 38"/>
+          <p:cNvPr id="409" name="Text 38"/>
           <p:cNvSpPr txBox="1"/>
           <p:nvPr/>
         </p:nvSpPr>
         <p:spPr>
           <a:xfrm>
             <a:off x="7132319" y="3916365"/>
-            <a:ext cx="1097281" cy="186557"/>
+            <a:ext cx="1097281" cy="186558"/>
           </a:xfrm>
           <a:prstGeom prst="rect">
             <a:avLst/>
@@ -6265,7 +7920,7 @@
       </p:sp>
       <p:sp>
         <p:nvSpPr>
-          <p:cNvPr id="389" name="Shape 39"/>
+          <p:cNvPr id="410" name="Shape 39"/>
           <p:cNvSpPr/>
           <p:nvPr/>
         </p:nvSpPr>
@@ -6294,7 +7949,7 @@
       </p:sp>
       <p:sp>
         <p:nvSpPr>
-          <p:cNvPr id="390" name="Shape 40"/>
+          <p:cNvPr id="411" name="Shape 40"/>
           <p:cNvSpPr/>
           <p:nvPr/>
         </p:nvSpPr>
@@ -6323,7 +7978,7 @@
       </p:sp>
       <p:sp>
         <p:nvSpPr>
-          <p:cNvPr id="391" name="Text 41"/>
+          <p:cNvPr id="412" name="Text 41"/>
           <p:cNvSpPr txBox="1"/>
           <p:nvPr/>
         </p:nvSpPr>
@@ -6367,7 +8022,7 @@
       </p:sp>
       <p:sp>
         <p:nvSpPr>
-          <p:cNvPr id="392" name="Shape 42"/>
+          <p:cNvPr id="413" name="Shape 42"/>
           <p:cNvSpPr/>
           <p:nvPr/>
         </p:nvSpPr>
@@ -6398,7 +8053,7 @@
       </p:sp>
       <p:sp>
         <p:nvSpPr>
-          <p:cNvPr id="393" name="Text 43"/>
+          <p:cNvPr id="414" name="Text 43"/>
           <p:cNvSpPr txBox="1"/>
           <p:nvPr/>
         </p:nvSpPr>
@@ -6446,14 +8101,14 @@
       </p:sp>
       <p:sp>
         <p:nvSpPr>
-          <p:cNvPr id="394" name="Text 44"/>
-          <p:cNvSpPr txBox="1"/>
-          <p:nvPr/>
-        </p:nvSpPr>
-        <p:spPr>
-          <a:xfrm>
-            <a:off x="9555480" y="2285999"/>
-            <a:ext cx="1828801" cy="166763"/>
+          <p:cNvPr id="415" name="Text 44"/>
+          <p:cNvSpPr txBox="1"/>
+          <p:nvPr/>
+        </p:nvSpPr>
+        <p:spPr>
+          <a:xfrm>
+            <a:off x="9555480" y="2286000"/>
+            <a:ext cx="1828801" cy="166762"/>
           </a:xfrm>
           <a:prstGeom prst="rect">
             <a:avLst/>
@@ -6490,14 +8145,14 @@
       </p:sp>
       <p:sp>
         <p:nvSpPr>
-          <p:cNvPr id="395" name="Text 45"/>
-          <p:cNvSpPr txBox="1"/>
-          <p:nvPr/>
-        </p:nvSpPr>
-        <p:spPr>
-          <a:xfrm>
-            <a:off x="640079" y="4800599"/>
-            <a:ext cx="10789922" cy="530946"/>
+          <p:cNvPr id="416" name="Text 45"/>
+          <p:cNvSpPr txBox="1"/>
+          <p:nvPr/>
+        </p:nvSpPr>
+        <p:spPr>
+          <a:xfrm>
+            <a:off x="640079" y="4800600"/>
+            <a:ext cx="10789922" cy="530945"/>
           </a:xfrm>
           <a:prstGeom prst="rect">
             <a:avLst/>
@@ -6560,7 +8215,7 @@
       </p:grpSpPr>
       <p:sp>
         <p:nvSpPr>
-          <p:cNvPr id="397" name="Text 0"/>
+          <p:cNvPr id="420" name="Text 0"/>
           <p:cNvSpPr txBox="1"/>
           <p:nvPr/>
         </p:nvSpPr>
@@ -6604,7 +8259,7 @@
       </p:sp>
       <p:sp>
         <p:nvSpPr>
-          <p:cNvPr id="398" name="Text 1"/>
+          <p:cNvPr id="421" name="Text 1"/>
           <p:cNvSpPr txBox="1"/>
           <p:nvPr/>
         </p:nvSpPr>
@@ -6652,7 +8307,7 @@
       </p:sp>
       <p:sp>
         <p:nvSpPr>
-          <p:cNvPr id="399" name="Text 2"/>
+          <p:cNvPr id="422" name="Text 2"/>
           <p:cNvSpPr txBox="1"/>
           <p:nvPr/>
         </p:nvSpPr>
@@ -6696,7 +8351,7 @@
       </p:sp>
       <p:sp>
         <p:nvSpPr>
-          <p:cNvPr id="400" name="Text 3"/>
+          <p:cNvPr id="423" name="Text 3"/>
           <p:cNvSpPr txBox="1"/>
           <p:nvPr/>
         </p:nvSpPr>
@@ -6744,7 +8399,7 @@
       </p:sp>
       <p:sp>
         <p:nvSpPr>
-          <p:cNvPr id="401" name="Text 4"/>
+          <p:cNvPr id="424" name="Text 4"/>
           <p:cNvSpPr txBox="1"/>
           <p:nvPr/>
         </p:nvSpPr>
@@ -6788,7 +8443,7 @@
       </p:sp>
       <p:sp>
         <p:nvSpPr>
-          <p:cNvPr id="402" name="Text 5"/>
+          <p:cNvPr id="425" name="Text 5"/>
           <p:cNvSpPr txBox="1"/>
           <p:nvPr/>
         </p:nvSpPr>
@@ -6832,7 +8487,7 @@
       </p:sp>
       <p:sp>
         <p:nvSpPr>
-          <p:cNvPr id="403" name="Shape 6"/>
+          <p:cNvPr id="426" name="Shape 6"/>
           <p:cNvSpPr/>
           <p:nvPr/>
         </p:nvSpPr>
@@ -6863,7 +8518,7 @@
       </p:sp>
       <p:sp>
         <p:nvSpPr>
-          <p:cNvPr id="404" name="Text 7"/>
+          <p:cNvPr id="427" name="Text 7"/>
           <p:cNvSpPr txBox="1"/>
           <p:nvPr/>
         </p:nvSpPr>
@@ -6923,7 +8578,7 @@
       </p:sp>
       <p:sp>
         <p:nvSpPr>
-          <p:cNvPr id="405" name="Text 8"/>
+          <p:cNvPr id="428" name="Text 8"/>
           <p:cNvSpPr txBox="1"/>
           <p:nvPr/>
         </p:nvSpPr>
@@ -6967,14 +8622,14 @@
       </p:sp>
       <p:sp>
         <p:nvSpPr>
-          <p:cNvPr id="406" name="Shape 9"/>
-          <p:cNvSpPr/>
-          <p:nvPr/>
-        </p:nvSpPr>
-        <p:spPr>
-          <a:xfrm>
-            <a:off x="7772399" y="2103120"/>
-            <a:ext cx="1051562" cy="1051561"/>
+          <p:cNvPr id="429" name="Shape 9"/>
+          <p:cNvSpPr/>
+          <p:nvPr/>
+        </p:nvSpPr>
+        <p:spPr>
+          <a:xfrm>
+            <a:off x="7772400" y="2103120"/>
+            <a:ext cx="1051561" cy="1051561"/>
           </a:xfrm>
           <a:prstGeom prst="rect">
             <a:avLst/>
@@ -6998,14 +8653,14 @@
       </p:sp>
       <p:sp>
         <p:nvSpPr>
-          <p:cNvPr id="407" name="Text 10"/>
-          <p:cNvSpPr txBox="1"/>
-          <p:nvPr/>
-        </p:nvSpPr>
-        <p:spPr>
-          <a:xfrm>
-            <a:off x="7772399" y="2535622"/>
-            <a:ext cx="1051562" cy="186557"/>
+          <p:cNvPr id="430" name="Text 10"/>
+          <p:cNvSpPr txBox="1"/>
+          <p:nvPr/>
+        </p:nvSpPr>
+        <p:spPr>
+          <a:xfrm>
+            <a:off x="7772400" y="2535621"/>
+            <a:ext cx="1051561" cy="186558"/>
           </a:xfrm>
           <a:prstGeom prst="rect">
             <a:avLst/>
@@ -7042,7 +8697,7 @@
       </p:sp>
       <p:sp>
         <p:nvSpPr>
-          <p:cNvPr id="408" name="Shape 11"/>
+          <p:cNvPr id="431" name="Shape 11"/>
           <p:cNvSpPr/>
           <p:nvPr/>
         </p:nvSpPr>
@@ -7073,14 +8728,14 @@
       </p:sp>
       <p:sp>
         <p:nvSpPr>
-          <p:cNvPr id="409" name="Text 12"/>
-          <p:cNvSpPr txBox="1"/>
-          <p:nvPr/>
-        </p:nvSpPr>
-        <p:spPr>
-          <a:xfrm>
-            <a:off x="8823959" y="2535622"/>
-            <a:ext cx="1051561" cy="186557"/>
+          <p:cNvPr id="432" name="Text 12"/>
+          <p:cNvSpPr txBox="1"/>
+          <p:nvPr/>
+        </p:nvSpPr>
+        <p:spPr>
+          <a:xfrm>
+            <a:off x="8823959" y="2535621"/>
+            <a:ext cx="1051561" cy="186558"/>
           </a:xfrm>
           <a:prstGeom prst="rect">
             <a:avLst/>
@@ -7117,7 +8772,7 @@
       </p:sp>
       <p:sp>
         <p:nvSpPr>
-          <p:cNvPr id="410" name="Shape 13"/>
+          <p:cNvPr id="433" name="Shape 13"/>
           <p:cNvSpPr/>
           <p:nvPr/>
         </p:nvSpPr>
@@ -7148,14 +8803,14 @@
       </p:sp>
       <p:sp>
         <p:nvSpPr>
-          <p:cNvPr id="411" name="Text 14"/>
-          <p:cNvSpPr txBox="1"/>
-          <p:nvPr/>
-        </p:nvSpPr>
-        <p:spPr>
-          <a:xfrm>
-            <a:off x="9875519" y="2535622"/>
-            <a:ext cx="1051561" cy="186557"/>
+          <p:cNvPr id="434" name="Text 14"/>
+          <p:cNvSpPr txBox="1"/>
+          <p:nvPr/>
+        </p:nvSpPr>
+        <p:spPr>
+          <a:xfrm>
+            <a:off x="9875519" y="2535621"/>
+            <a:ext cx="1051561" cy="186558"/>
           </a:xfrm>
           <a:prstGeom prst="rect">
             <a:avLst/>
@@ -7192,14 +8847,14 @@
       </p:sp>
       <p:sp>
         <p:nvSpPr>
-          <p:cNvPr id="412" name="Shape 15"/>
-          <p:cNvSpPr/>
-          <p:nvPr/>
-        </p:nvSpPr>
-        <p:spPr>
-          <a:xfrm>
-            <a:off x="7772399" y="3154679"/>
-            <a:ext cx="1051562" cy="1051561"/>
+          <p:cNvPr id="435" name="Shape 15"/>
+          <p:cNvSpPr/>
+          <p:nvPr/>
+        </p:nvSpPr>
+        <p:spPr>
+          <a:xfrm>
+            <a:off x="7772400" y="3154679"/>
+            <a:ext cx="1051561" cy="1051561"/>
           </a:xfrm>
           <a:prstGeom prst="rect">
             <a:avLst/>
@@ -7223,14 +8878,14 @@
       </p:sp>
       <p:sp>
         <p:nvSpPr>
-          <p:cNvPr id="413" name="Text 16"/>
-          <p:cNvSpPr txBox="1"/>
-          <p:nvPr/>
-        </p:nvSpPr>
-        <p:spPr>
-          <a:xfrm>
-            <a:off x="7772399" y="3587181"/>
-            <a:ext cx="1051562" cy="186557"/>
+          <p:cNvPr id="436" name="Text 16"/>
+          <p:cNvSpPr txBox="1"/>
+          <p:nvPr/>
+        </p:nvSpPr>
+        <p:spPr>
+          <a:xfrm>
+            <a:off x="7772400" y="3587181"/>
+            <a:ext cx="1051561" cy="186557"/>
           </a:xfrm>
           <a:prstGeom prst="rect">
             <a:avLst/>
@@ -7267,7 +8922,7 @@
       </p:sp>
       <p:sp>
         <p:nvSpPr>
-          <p:cNvPr id="414" name="Shape 17"/>
+          <p:cNvPr id="437" name="Shape 17"/>
           <p:cNvSpPr/>
           <p:nvPr/>
         </p:nvSpPr>
@@ -7298,7 +8953,7 @@
       </p:sp>
       <p:sp>
         <p:nvSpPr>
-          <p:cNvPr id="415" name="Text 18"/>
+          <p:cNvPr id="438" name="Text 18"/>
           <p:cNvSpPr txBox="1"/>
           <p:nvPr/>
         </p:nvSpPr>
@@ -7342,7 +8997,7 @@
       </p:sp>
       <p:sp>
         <p:nvSpPr>
-          <p:cNvPr id="416" name="Shape 19"/>
+          <p:cNvPr id="439" name="Shape 19"/>
           <p:cNvSpPr/>
           <p:nvPr/>
         </p:nvSpPr>
@@ -7373,7 +9028,7 @@
       </p:sp>
       <p:sp>
         <p:nvSpPr>
-          <p:cNvPr id="417" name="Text 20"/>
+          <p:cNvPr id="440" name="Text 20"/>
           <p:cNvSpPr txBox="1"/>
           <p:nvPr/>
         </p:nvSpPr>
@@ -7417,14 +9072,14 @@
       </p:sp>
       <p:sp>
         <p:nvSpPr>
-          <p:cNvPr id="418" name="Shape 21"/>
-          <p:cNvSpPr/>
-          <p:nvPr/>
-        </p:nvSpPr>
-        <p:spPr>
-          <a:xfrm>
-            <a:off x="7772399" y="4206240"/>
-            <a:ext cx="1051562" cy="1051561"/>
+          <p:cNvPr id="441" name="Shape 21"/>
+          <p:cNvSpPr/>
+          <p:nvPr/>
+        </p:nvSpPr>
+        <p:spPr>
+          <a:xfrm>
+            <a:off x="7772400" y="4206240"/>
+            <a:ext cx="1051561" cy="1051561"/>
           </a:xfrm>
           <a:prstGeom prst="rect">
             <a:avLst/>
@@ -7448,14 +9103,14 @@
       </p:sp>
       <p:sp>
         <p:nvSpPr>
-          <p:cNvPr id="419" name="Text 22"/>
-          <p:cNvSpPr txBox="1"/>
-          <p:nvPr/>
-        </p:nvSpPr>
-        <p:spPr>
-          <a:xfrm>
-            <a:off x="7772399" y="4638742"/>
-            <a:ext cx="1051562" cy="186557"/>
+          <p:cNvPr id="442" name="Text 22"/>
+          <p:cNvSpPr txBox="1"/>
+          <p:nvPr/>
+        </p:nvSpPr>
+        <p:spPr>
+          <a:xfrm>
+            <a:off x="7772400" y="4638742"/>
+            <a:ext cx="1051561" cy="186557"/>
           </a:xfrm>
           <a:prstGeom prst="rect">
             <a:avLst/>
@@ -7492,7 +9147,7 @@
       </p:sp>
       <p:sp>
         <p:nvSpPr>
-          <p:cNvPr id="420" name="Shape 23"/>
+          <p:cNvPr id="443" name="Shape 23"/>
           <p:cNvSpPr/>
           <p:nvPr/>
         </p:nvSpPr>
@@ -7523,7 +9178,7 @@
       </p:sp>
       <p:sp>
         <p:nvSpPr>
-          <p:cNvPr id="421" name="Text 24"/>
+          <p:cNvPr id="444" name="Text 24"/>
           <p:cNvSpPr txBox="1"/>
           <p:nvPr/>
         </p:nvSpPr>
@@ -7567,7 +9222,7 @@
       </p:sp>
       <p:sp>
         <p:nvSpPr>
-          <p:cNvPr id="422" name="Shape 25"/>
+          <p:cNvPr id="445" name="Shape 25"/>
           <p:cNvSpPr/>
           <p:nvPr/>
         </p:nvSpPr>
@@ -7598,7 +9253,7 @@
       </p:sp>
       <p:sp>
         <p:nvSpPr>
-          <p:cNvPr id="423" name="Text 26"/>
+          <p:cNvPr id="446" name="Text 26"/>
           <p:cNvSpPr txBox="1"/>
           <p:nvPr/>
         </p:nvSpPr>
@@ -7642,7 +9297,7 @@
       </p:sp>
       <p:sp>
         <p:nvSpPr>
-          <p:cNvPr id="424" name="Text 27"/>
+          <p:cNvPr id="447" name="Text 27"/>
           <p:cNvSpPr txBox="1"/>
           <p:nvPr/>
         </p:nvSpPr>
@@ -7686,7 +9341,7 @@
       </p:sp>
       <p:sp>
         <p:nvSpPr>
-          <p:cNvPr id="425" name="Text 28"/>
+          <p:cNvPr id="448" name="Text 28"/>
           <p:cNvSpPr txBox="1"/>
           <p:nvPr/>
         </p:nvSpPr>
@@ -7730,7 +9385,7 @@
       </p:sp>
       <p:sp>
         <p:nvSpPr>
-          <p:cNvPr id="426" name="Text 29"/>
+          <p:cNvPr id="449" name="Text 29"/>
           <p:cNvSpPr txBox="1"/>
           <p:nvPr/>
         </p:nvSpPr>
@@ -7774,7 +9429,7 @@
       </p:sp>
       <p:sp>
         <p:nvSpPr>
-          <p:cNvPr id="427" name="Text 30"/>
+          <p:cNvPr id="450" name="Text 30"/>
           <p:cNvSpPr txBox="1"/>
           <p:nvPr/>
         </p:nvSpPr>
@@ -7818,7 +9473,7 @@
       </p:sp>
       <p:sp>
         <p:nvSpPr>
-          <p:cNvPr id="428" name="Text 31"/>
+          <p:cNvPr id="451" name="Text 31"/>
           <p:cNvSpPr txBox="1"/>
           <p:nvPr/>
         </p:nvSpPr>
@@ -7862,7 +9517,7 @@
       </p:sp>
       <p:sp>
         <p:nvSpPr>
-          <p:cNvPr id="429" name="Text 32"/>
+          <p:cNvPr id="452" name="Text 32"/>
           <p:cNvSpPr txBox="1"/>
           <p:nvPr/>
         </p:nvSpPr>
@@ -7906,14 +9561,14 @@
       </p:sp>
       <p:sp>
         <p:nvSpPr>
-          <p:cNvPr id="430" name="Text 33"/>
-          <p:cNvSpPr txBox="1"/>
-          <p:nvPr/>
-        </p:nvSpPr>
-        <p:spPr>
-          <a:xfrm>
-            <a:off x="7772399" y="5349240"/>
-            <a:ext cx="3154682" cy="189360"/>
+          <p:cNvPr id="453" name="Text 33"/>
+          <p:cNvSpPr txBox="1"/>
+          <p:nvPr/>
+        </p:nvSpPr>
+        <p:spPr>
+          <a:xfrm>
+            <a:off x="7772400" y="5349240"/>
+            <a:ext cx="3154681" cy="189360"/>
           </a:xfrm>
           <a:prstGeom prst="rect">
             <a:avLst/>
@@ -7976,7 +9631,7 @@
       </p:grpSpPr>
       <p:sp>
         <p:nvSpPr>
-          <p:cNvPr id="432" name="Text 0"/>
+          <p:cNvPr id="457" name="Text 0"/>
           <p:cNvSpPr txBox="1"/>
           <p:nvPr/>
         </p:nvSpPr>
@@ -8020,7 +9675,7 @@
       </p:sp>
       <p:sp>
         <p:nvSpPr>
-          <p:cNvPr id="433" name="Text 1"/>
+          <p:cNvPr id="458" name="Text 1"/>
           <p:cNvSpPr txBox="1"/>
           <p:nvPr/>
         </p:nvSpPr>
@@ -8068,7 +9723,7 @@
       </p:sp>
       <p:sp>
         <p:nvSpPr>
-          <p:cNvPr id="434" name="Text 2"/>
+          <p:cNvPr id="459" name="Text 2"/>
           <p:cNvSpPr txBox="1"/>
           <p:nvPr/>
         </p:nvSpPr>
@@ -8112,7 +9767,7 @@
       </p:sp>
       <p:sp>
         <p:nvSpPr>
-          <p:cNvPr id="435" name="Text 3"/>
+          <p:cNvPr id="460" name="Text 3"/>
           <p:cNvSpPr txBox="1"/>
           <p:nvPr/>
         </p:nvSpPr>
@@ -8160,7 +9815,7 @@
       </p:sp>
       <p:sp>
         <p:nvSpPr>
-          <p:cNvPr id="436" name="Text 4"/>
+          <p:cNvPr id="461" name="Text 4"/>
           <p:cNvSpPr txBox="1"/>
           <p:nvPr/>
         </p:nvSpPr>
@@ -8204,7 +9859,7 @@
       </p:sp>
       <p:sp>
         <p:nvSpPr>
-          <p:cNvPr id="437" name="Text 5"/>
+          <p:cNvPr id="462" name="Text 5"/>
           <p:cNvSpPr txBox="1"/>
           <p:nvPr/>
         </p:nvSpPr>
@@ -8248,7 +9903,7 @@
       </p:sp>
       <p:sp>
         <p:nvSpPr>
-          <p:cNvPr id="438" name="Shape 6"/>
+          <p:cNvPr id="463" name="Shape 6"/>
           <p:cNvSpPr/>
           <p:nvPr/>
         </p:nvSpPr>
@@ -8279,7 +9934,7 @@
       </p:sp>
       <p:sp>
         <p:nvSpPr>
-          <p:cNvPr id="439" name="Text 7"/>
+          <p:cNvPr id="464" name="Text 7"/>
           <p:cNvSpPr txBox="1"/>
           <p:nvPr/>
         </p:nvSpPr>
@@ -8339,14 +9994,14 @@
       </p:sp>
       <p:sp>
         <p:nvSpPr>
-          <p:cNvPr id="440" name="Shape 8"/>
-          <p:cNvSpPr/>
-          <p:nvPr/>
-        </p:nvSpPr>
-        <p:spPr>
-          <a:xfrm>
-            <a:off x="7772399" y="2103120"/>
-            <a:ext cx="1051562" cy="1051561"/>
+          <p:cNvPr id="465" name="Shape 8"/>
+          <p:cNvSpPr/>
+          <p:nvPr/>
+        </p:nvSpPr>
+        <p:spPr>
+          <a:xfrm>
+            <a:off x="7772400" y="2103120"/>
+            <a:ext cx="1051561" cy="1051561"/>
           </a:xfrm>
           <a:prstGeom prst="rect">
             <a:avLst/>
@@ -8370,14 +10025,14 @@
       </p:sp>
       <p:sp>
         <p:nvSpPr>
-          <p:cNvPr id="441" name="Text 9"/>
-          <p:cNvSpPr txBox="1"/>
-          <p:nvPr/>
-        </p:nvSpPr>
-        <p:spPr>
-          <a:xfrm>
-            <a:off x="7772399" y="2535622"/>
-            <a:ext cx="1051562" cy="186557"/>
+          <p:cNvPr id="466" name="Text 9"/>
+          <p:cNvSpPr txBox="1"/>
+          <p:nvPr/>
+        </p:nvSpPr>
+        <p:spPr>
+          <a:xfrm>
+            <a:off x="7772400" y="2535621"/>
+            <a:ext cx="1051561" cy="186558"/>
           </a:xfrm>
           <a:prstGeom prst="rect">
             <a:avLst/>
@@ -8414,7 +10069,7 @@
       </p:sp>
       <p:sp>
         <p:nvSpPr>
-          <p:cNvPr id="442" name="Shape 10"/>
+          <p:cNvPr id="467" name="Shape 10"/>
           <p:cNvSpPr/>
           <p:nvPr/>
         </p:nvSpPr>
@@ -8445,14 +10100,14 @@
       </p:sp>
       <p:sp>
         <p:nvSpPr>
-          <p:cNvPr id="443" name="Text 11"/>
-          <p:cNvSpPr txBox="1"/>
-          <p:nvPr/>
-        </p:nvSpPr>
-        <p:spPr>
-          <a:xfrm>
-            <a:off x="8823959" y="2535622"/>
-            <a:ext cx="1051561" cy="186557"/>
+          <p:cNvPr id="468" name="Text 11"/>
+          <p:cNvSpPr txBox="1"/>
+          <p:nvPr/>
+        </p:nvSpPr>
+        <p:spPr>
+          <a:xfrm>
+            <a:off x="8823959" y="2535621"/>
+            <a:ext cx="1051561" cy="186558"/>
           </a:xfrm>
           <a:prstGeom prst="rect">
             <a:avLst/>
@@ -8489,7 +10144,7 @@
       </p:sp>
       <p:sp>
         <p:nvSpPr>
-          <p:cNvPr id="444" name="Shape 12"/>
+          <p:cNvPr id="469" name="Shape 12"/>
           <p:cNvSpPr/>
           <p:nvPr/>
         </p:nvSpPr>
@@ -8520,14 +10175,14 @@
       </p:sp>
       <p:sp>
         <p:nvSpPr>
-          <p:cNvPr id="445" name="Text 13"/>
-          <p:cNvSpPr txBox="1"/>
-          <p:nvPr/>
-        </p:nvSpPr>
-        <p:spPr>
-          <a:xfrm>
-            <a:off x="9875519" y="2535622"/>
-            <a:ext cx="1051561" cy="186557"/>
+          <p:cNvPr id="470" name="Text 13"/>
+          <p:cNvSpPr txBox="1"/>
+          <p:nvPr/>
+        </p:nvSpPr>
+        <p:spPr>
+          <a:xfrm>
+            <a:off x="9875519" y="2535621"/>
+            <a:ext cx="1051561" cy="186558"/>
           </a:xfrm>
           <a:prstGeom prst="rect">
             <a:avLst/>
@@ -8564,14 +10219,14 @@
       </p:sp>
       <p:sp>
         <p:nvSpPr>
-          <p:cNvPr id="446" name="Shape 14"/>
-          <p:cNvSpPr/>
-          <p:nvPr/>
-        </p:nvSpPr>
-        <p:spPr>
-          <a:xfrm>
-            <a:off x="7772399" y="3154679"/>
-            <a:ext cx="1051562" cy="1051561"/>
+          <p:cNvPr id="471" name="Shape 14"/>
+          <p:cNvSpPr/>
+          <p:nvPr/>
+        </p:nvSpPr>
+        <p:spPr>
+          <a:xfrm>
+            <a:off x="7772400" y="3154679"/>
+            <a:ext cx="1051561" cy="1051561"/>
           </a:xfrm>
           <a:prstGeom prst="rect">
             <a:avLst/>
@@ -8595,14 +10250,14 @@
       </p:sp>
       <p:sp>
         <p:nvSpPr>
-          <p:cNvPr id="447" name="Text 15"/>
-          <p:cNvSpPr txBox="1"/>
-          <p:nvPr/>
-        </p:nvSpPr>
-        <p:spPr>
-          <a:xfrm>
-            <a:off x="7772399" y="3587181"/>
-            <a:ext cx="1051562" cy="186557"/>
+          <p:cNvPr id="472" name="Text 15"/>
+          <p:cNvSpPr txBox="1"/>
+          <p:nvPr/>
+        </p:nvSpPr>
+        <p:spPr>
+          <a:xfrm>
+            <a:off x="7772400" y="3587181"/>
+            <a:ext cx="1051561" cy="186557"/>
           </a:xfrm>
           <a:prstGeom prst="rect">
             <a:avLst/>
@@ -8639,7 +10294,7 @@
       </p:sp>
       <p:sp>
         <p:nvSpPr>
-          <p:cNvPr id="448" name="Shape 16"/>
+          <p:cNvPr id="473" name="Shape 16"/>
           <p:cNvSpPr/>
           <p:nvPr/>
         </p:nvSpPr>
@@ -8670,7 +10325,7 @@
       </p:sp>
       <p:sp>
         <p:nvSpPr>
-          <p:cNvPr id="449" name="Text 17"/>
+          <p:cNvPr id="474" name="Text 17"/>
           <p:cNvSpPr txBox="1"/>
           <p:nvPr/>
         </p:nvSpPr>
@@ -8714,7 +10369,7 @@
       </p:sp>
       <p:sp>
         <p:nvSpPr>
-          <p:cNvPr id="450" name="Shape 18"/>
+          <p:cNvPr id="475" name="Shape 18"/>
           <p:cNvSpPr/>
           <p:nvPr/>
         </p:nvSpPr>
@@ -8745,7 +10400,7 @@
       </p:sp>
       <p:sp>
         <p:nvSpPr>
-          <p:cNvPr id="451" name="Text 19"/>
+          <p:cNvPr id="476" name="Text 19"/>
           <p:cNvSpPr txBox="1"/>
           <p:nvPr/>
         </p:nvSpPr>
@@ -8789,14 +10444,14 @@
       </p:sp>
       <p:sp>
         <p:nvSpPr>
-          <p:cNvPr id="452" name="Shape 20"/>
-          <p:cNvSpPr/>
-          <p:nvPr/>
-        </p:nvSpPr>
-        <p:spPr>
-          <a:xfrm>
-            <a:off x="7772399" y="4206240"/>
-            <a:ext cx="1051562" cy="1051561"/>
+          <p:cNvPr id="477" name="Shape 20"/>
+          <p:cNvSpPr/>
+          <p:nvPr/>
+        </p:nvSpPr>
+        <p:spPr>
+          <a:xfrm>
+            <a:off x="7772400" y="4206240"/>
+            <a:ext cx="1051561" cy="1051561"/>
           </a:xfrm>
           <a:prstGeom prst="rect">
             <a:avLst/>
@@ -8820,14 +10475,14 @@
       </p:sp>
       <p:sp>
         <p:nvSpPr>
-          <p:cNvPr id="453" name="Text 21"/>
-          <p:cNvSpPr txBox="1"/>
-          <p:nvPr/>
-        </p:nvSpPr>
-        <p:spPr>
-          <a:xfrm>
-            <a:off x="7772399" y="4638742"/>
-            <a:ext cx="1051562" cy="186557"/>
+          <p:cNvPr id="478" name="Text 21"/>
+          <p:cNvSpPr txBox="1"/>
+          <p:nvPr/>
+        </p:nvSpPr>
+        <p:spPr>
+          <a:xfrm>
+            <a:off x="7772400" y="4638742"/>
+            <a:ext cx="1051561" cy="186557"/>
           </a:xfrm>
           <a:prstGeom prst="rect">
             <a:avLst/>
@@ -8864,7 +10519,7 @@
       </p:sp>
       <p:sp>
         <p:nvSpPr>
-          <p:cNvPr id="454" name="Shape 22"/>
+          <p:cNvPr id="479" name="Shape 22"/>
           <p:cNvSpPr/>
           <p:nvPr/>
         </p:nvSpPr>
@@ -8895,7 +10550,7 @@
       </p:sp>
       <p:sp>
         <p:nvSpPr>
-          <p:cNvPr id="455" name="Text 23"/>
+          <p:cNvPr id="480" name="Text 23"/>
           <p:cNvSpPr txBox="1"/>
           <p:nvPr/>
         </p:nvSpPr>
@@ -8939,7 +10594,7 @@
       </p:sp>
       <p:sp>
         <p:nvSpPr>
-          <p:cNvPr id="456" name="Shape 24"/>
+          <p:cNvPr id="481" name="Shape 24"/>
           <p:cNvSpPr/>
           <p:nvPr/>
         </p:nvSpPr>
@@ -8970,7 +10625,7 @@
       </p:sp>
       <p:sp>
         <p:nvSpPr>
-          <p:cNvPr id="457" name="Text 25"/>
+          <p:cNvPr id="482" name="Text 25"/>
           <p:cNvSpPr txBox="1"/>
           <p:nvPr/>
         </p:nvSpPr>
@@ -9014,7 +10669,7 @@
       </p:sp>
       <p:sp>
         <p:nvSpPr>
-          <p:cNvPr id="458" name="Text 26"/>
+          <p:cNvPr id="483" name="Text 26"/>
           <p:cNvSpPr txBox="1"/>
           <p:nvPr/>
         </p:nvSpPr>
@@ -9058,7 +10713,7 @@
       </p:sp>
       <p:sp>
         <p:nvSpPr>
-          <p:cNvPr id="459" name="Text 27"/>
+          <p:cNvPr id="484" name="Text 27"/>
           <p:cNvSpPr txBox="1"/>
           <p:nvPr/>
         </p:nvSpPr>
@@ -9102,7 +10757,7 @@
       </p:sp>
       <p:sp>
         <p:nvSpPr>
-          <p:cNvPr id="460" name="Text 28"/>
+          <p:cNvPr id="485" name="Text 28"/>
           <p:cNvSpPr txBox="1"/>
           <p:nvPr/>
         </p:nvSpPr>
@@ -9146,7 +10801,7 @@
       </p:sp>
       <p:sp>
         <p:nvSpPr>
-          <p:cNvPr id="461" name="Text 29"/>
+          <p:cNvPr id="486" name="Text 29"/>
           <p:cNvSpPr txBox="1"/>
           <p:nvPr/>
         </p:nvSpPr>
@@ -9190,7 +10845,7 @@
       </p:sp>
       <p:sp>
         <p:nvSpPr>
-          <p:cNvPr id="462" name="Text 30"/>
+          <p:cNvPr id="487" name="Text 30"/>
           <p:cNvSpPr txBox="1"/>
           <p:nvPr/>
         </p:nvSpPr>
@@ -9234,7 +10889,7 @@
       </p:sp>
       <p:sp>
         <p:nvSpPr>
-          <p:cNvPr id="463" name="Text 31"/>
+          <p:cNvPr id="488" name="Text 31"/>
           <p:cNvSpPr txBox="1"/>
           <p:nvPr/>
         </p:nvSpPr>
@@ -9278,14 +10933,14 @@
       </p:sp>
       <p:sp>
         <p:nvSpPr>
-          <p:cNvPr id="464" name="Text 32"/>
-          <p:cNvSpPr txBox="1"/>
-          <p:nvPr/>
-        </p:nvSpPr>
-        <p:spPr>
-          <a:xfrm>
-            <a:off x="7772399" y="5349240"/>
-            <a:ext cx="3154682" cy="189360"/>
+          <p:cNvPr id="489" name="Text 32"/>
+          <p:cNvSpPr txBox="1"/>
+          <p:nvPr/>
+        </p:nvSpPr>
+        <p:spPr>
+          <a:xfrm>
+            <a:off x="7772400" y="5349240"/>
+            <a:ext cx="3154681" cy="189360"/>
           </a:xfrm>
           <a:prstGeom prst="rect">
             <a:avLst/>
@@ -9348,7 +11003,7 @@
       </p:grpSpPr>
       <p:sp>
         <p:nvSpPr>
-          <p:cNvPr id="466" name="Text 0"/>
+          <p:cNvPr id="493" name="Text 0"/>
           <p:cNvSpPr txBox="1"/>
           <p:nvPr/>
         </p:nvSpPr>
@@ -9392,7 +11047,7 @@
       </p:sp>
       <p:sp>
         <p:nvSpPr>
-          <p:cNvPr id="467" name="Text 1"/>
+          <p:cNvPr id="494" name="Text 1"/>
           <p:cNvSpPr txBox="1"/>
           <p:nvPr/>
         </p:nvSpPr>
@@ -9440,7 +11095,7 @@
       </p:sp>
       <p:sp>
         <p:nvSpPr>
-          <p:cNvPr id="468" name="Text 2"/>
+          <p:cNvPr id="495" name="Text 2"/>
           <p:cNvSpPr txBox="1"/>
           <p:nvPr/>
         </p:nvSpPr>
@@ -9484,7 +11139,7 @@
       </p:sp>
       <p:sp>
         <p:nvSpPr>
-          <p:cNvPr id="469" name="Text 3"/>
+          <p:cNvPr id="496" name="Text 3"/>
           <p:cNvSpPr txBox="1"/>
           <p:nvPr/>
         </p:nvSpPr>
@@ -9532,7 +11187,7 @@
       </p:sp>
       <p:sp>
         <p:nvSpPr>
-          <p:cNvPr id="470" name="Text 4"/>
+          <p:cNvPr id="497" name="Text 4"/>
           <p:cNvSpPr txBox="1"/>
           <p:nvPr/>
         </p:nvSpPr>
@@ -9576,7 +11231,7 @@
       </p:sp>
       <p:sp>
         <p:nvSpPr>
-          <p:cNvPr id="471" name="Shape 5"/>
+          <p:cNvPr id="498" name="Shape 5"/>
           <p:cNvSpPr/>
           <p:nvPr/>
         </p:nvSpPr>
@@ -9607,7 +11262,7 @@
       </p:sp>
       <p:sp>
         <p:nvSpPr>
-          <p:cNvPr id="472" name="Text 6"/>
+          <p:cNvPr id="499" name="Text 6"/>
           <p:cNvSpPr txBox="1"/>
           <p:nvPr/>
         </p:nvSpPr>
@@ -9664,7 +11319,7 @@
       </p:sp>
       <p:sp>
         <p:nvSpPr>
-          <p:cNvPr id="473" name="Shape 7"/>
+          <p:cNvPr id="500" name="Shape 7"/>
           <p:cNvSpPr/>
           <p:nvPr/>
         </p:nvSpPr>
@@ -9695,7 +11350,7 @@
       </p:sp>
       <p:sp>
         <p:nvSpPr>
-          <p:cNvPr id="474" name="Text 8"/>
+          <p:cNvPr id="501" name="Text 8"/>
           <p:cNvSpPr txBox="1"/>
           <p:nvPr/>
         </p:nvSpPr>
@@ -9770,7 +11425,7 @@
       </p:sp>
       <p:sp>
         <p:nvSpPr>
-          <p:cNvPr id="475" name="Shape 9"/>
+          <p:cNvPr id="502" name="Shape 9"/>
           <p:cNvSpPr/>
           <p:nvPr/>
         </p:nvSpPr>
@@ -9801,7 +11456,7 @@
       </p:sp>
       <p:sp>
         <p:nvSpPr>
-          <p:cNvPr id="476" name="Text 10"/>
+          <p:cNvPr id="503" name="Text 10"/>
           <p:cNvSpPr txBox="1"/>
           <p:nvPr/>
         </p:nvSpPr>
@@ -9845,14 +11500,14 @@
       </p:sp>
       <p:sp>
         <p:nvSpPr>
-          <p:cNvPr id="477" name="Shape 11"/>
-          <p:cNvSpPr/>
-          <p:nvPr/>
-        </p:nvSpPr>
-        <p:spPr>
-          <a:xfrm>
-            <a:off x="8000999" y="2103120"/>
-            <a:ext cx="777242" cy="777241"/>
+          <p:cNvPr id="504" name="Shape 11"/>
+          <p:cNvSpPr/>
+          <p:nvPr/>
+        </p:nvSpPr>
+        <p:spPr>
+          <a:xfrm>
+            <a:off x="8001000" y="2103120"/>
+            <a:ext cx="777241" cy="777241"/>
           </a:xfrm>
           <a:prstGeom prst="rect">
             <a:avLst/>
@@ -9876,14 +11531,14 @@
       </p:sp>
       <p:sp>
         <p:nvSpPr>
-          <p:cNvPr id="478" name="Text 12"/>
-          <p:cNvSpPr txBox="1"/>
-          <p:nvPr/>
-        </p:nvSpPr>
-        <p:spPr>
-          <a:xfrm>
-            <a:off x="8000999" y="2398462"/>
-            <a:ext cx="777242" cy="186557"/>
+          <p:cNvPr id="505" name="Text 12"/>
+          <p:cNvSpPr txBox="1"/>
+          <p:nvPr/>
+        </p:nvSpPr>
+        <p:spPr>
+          <a:xfrm>
+            <a:off x="8001000" y="2398462"/>
+            <a:ext cx="777241" cy="186557"/>
           </a:xfrm>
           <a:prstGeom prst="rect">
             <a:avLst/>
@@ -9920,7 +11575,7 @@
       </p:sp>
       <p:sp>
         <p:nvSpPr>
-          <p:cNvPr id="479" name="Shape 13"/>
+          <p:cNvPr id="506" name="Shape 13"/>
           <p:cNvSpPr/>
           <p:nvPr/>
         </p:nvSpPr>
@@ -9951,13 +11606,13 @@
       </p:sp>
       <p:sp>
         <p:nvSpPr>
-          <p:cNvPr id="480" name="Text 14"/>
-          <p:cNvSpPr txBox="1"/>
-          <p:nvPr/>
-        </p:nvSpPr>
-        <p:spPr>
-          <a:xfrm>
-            <a:off x="7223759" y="3175702"/>
+          <p:cNvPr id="507" name="Text 14"/>
+          <p:cNvSpPr txBox="1"/>
+          <p:nvPr/>
+        </p:nvSpPr>
+        <p:spPr>
+          <a:xfrm>
+            <a:off x="7223759" y="3175701"/>
             <a:ext cx="777241" cy="186557"/>
           </a:xfrm>
           <a:prstGeom prst="rect">
@@ -9995,14 +11650,14 @@
       </p:sp>
       <p:sp>
         <p:nvSpPr>
-          <p:cNvPr id="481" name="Shape 15"/>
-          <p:cNvSpPr/>
-          <p:nvPr/>
-        </p:nvSpPr>
-        <p:spPr>
-          <a:xfrm>
-            <a:off x="8000999" y="2880360"/>
-            <a:ext cx="777242" cy="777241"/>
+          <p:cNvPr id="508" name="Shape 15"/>
+          <p:cNvSpPr/>
+          <p:nvPr/>
+        </p:nvSpPr>
+        <p:spPr>
+          <a:xfrm>
+            <a:off x="8001000" y="2880360"/>
+            <a:ext cx="777241" cy="777241"/>
           </a:xfrm>
           <a:prstGeom prst="rect">
             <a:avLst/>
@@ -10026,14 +11681,14 @@
       </p:sp>
       <p:sp>
         <p:nvSpPr>
-          <p:cNvPr id="482" name="Text 16"/>
-          <p:cNvSpPr txBox="1"/>
-          <p:nvPr/>
-        </p:nvSpPr>
-        <p:spPr>
-          <a:xfrm>
-            <a:off x="8000999" y="3175702"/>
-            <a:ext cx="777242" cy="186557"/>
+          <p:cNvPr id="509" name="Text 16"/>
+          <p:cNvSpPr txBox="1"/>
+          <p:nvPr/>
+        </p:nvSpPr>
+        <p:spPr>
+          <a:xfrm>
+            <a:off x="8001000" y="3175701"/>
+            <a:ext cx="777241" cy="186557"/>
           </a:xfrm>
           <a:prstGeom prst="rect">
             <a:avLst/>
@@ -10070,14 +11725,14 @@
       </p:sp>
       <p:sp>
         <p:nvSpPr>
-          <p:cNvPr id="483" name="Shape 17"/>
-          <p:cNvSpPr/>
-          <p:nvPr/>
-        </p:nvSpPr>
-        <p:spPr>
-          <a:xfrm>
-            <a:off x="7223759" y="3657599"/>
-            <a:ext cx="777241" cy="777242"/>
+          <p:cNvPr id="510" name="Shape 17"/>
+          <p:cNvSpPr/>
+          <p:nvPr/>
+        </p:nvSpPr>
+        <p:spPr>
+          <a:xfrm>
+            <a:off x="7223759" y="3657600"/>
+            <a:ext cx="777241" cy="777241"/>
           </a:xfrm>
           <a:prstGeom prst="rect">
             <a:avLst/>
@@ -10101,14 +11756,14 @@
       </p:sp>
       <p:sp>
         <p:nvSpPr>
-          <p:cNvPr id="484" name="Text 18"/>
-          <p:cNvSpPr txBox="1"/>
-          <p:nvPr/>
-        </p:nvSpPr>
-        <p:spPr>
-          <a:xfrm>
-            <a:off x="7223759" y="3952941"/>
-            <a:ext cx="777241" cy="186558"/>
+          <p:cNvPr id="511" name="Text 18"/>
+          <p:cNvSpPr txBox="1"/>
+          <p:nvPr/>
+        </p:nvSpPr>
+        <p:spPr>
+          <a:xfrm>
+            <a:off x="7223759" y="3952942"/>
+            <a:ext cx="777241" cy="186557"/>
           </a:xfrm>
           <a:prstGeom prst="rect">
             <a:avLst/>
@@ -10145,14 +11800,14 @@
       </p:sp>
       <p:sp>
         <p:nvSpPr>
-          <p:cNvPr id="485" name="Shape 19"/>
-          <p:cNvSpPr/>
-          <p:nvPr/>
-        </p:nvSpPr>
-        <p:spPr>
-          <a:xfrm>
-            <a:off x="8000999" y="3657599"/>
-            <a:ext cx="777242" cy="777242"/>
+          <p:cNvPr id="512" name="Shape 19"/>
+          <p:cNvSpPr/>
+          <p:nvPr/>
+        </p:nvSpPr>
+        <p:spPr>
+          <a:xfrm>
+            <a:off x="8001000" y="3657600"/>
+            <a:ext cx="777241" cy="777241"/>
           </a:xfrm>
           <a:prstGeom prst="rect">
             <a:avLst/>
@@ -10176,14 +11831,14 @@
       </p:sp>
       <p:sp>
         <p:nvSpPr>
-          <p:cNvPr id="486" name="Text 20"/>
-          <p:cNvSpPr txBox="1"/>
-          <p:nvPr/>
-        </p:nvSpPr>
-        <p:spPr>
-          <a:xfrm>
-            <a:off x="8000999" y="3952941"/>
-            <a:ext cx="777242" cy="186558"/>
+          <p:cNvPr id="513" name="Text 20"/>
+          <p:cNvSpPr txBox="1"/>
+          <p:nvPr/>
+        </p:nvSpPr>
+        <p:spPr>
+          <a:xfrm>
+            <a:off x="8001000" y="3952942"/>
+            <a:ext cx="777241" cy="186557"/>
           </a:xfrm>
           <a:prstGeom prst="rect">
             <a:avLst/>
@@ -10220,7 +11875,7 @@
       </p:sp>
       <p:sp>
         <p:nvSpPr>
-          <p:cNvPr id="487" name="Text 21"/>
+          <p:cNvPr id="514" name="Text 21"/>
           <p:cNvSpPr txBox="1"/>
           <p:nvPr/>
         </p:nvSpPr>
@@ -10264,7 +11919,7 @@
       </p:sp>
       <p:sp>
         <p:nvSpPr>
-          <p:cNvPr id="488" name="Text 22"/>
+          <p:cNvPr id="515" name="Text 22"/>
           <p:cNvSpPr txBox="1"/>
           <p:nvPr/>
         </p:nvSpPr>
@@ -10308,7 +11963,7 @@
       </p:sp>
       <p:sp>
         <p:nvSpPr>
-          <p:cNvPr id="489" name="Text 23"/>
+          <p:cNvPr id="516" name="Text 23"/>
           <p:cNvSpPr txBox="1"/>
           <p:nvPr/>
         </p:nvSpPr>
@@ -10352,7 +12007,7 @@
       </p:sp>
       <p:sp>
         <p:nvSpPr>
-          <p:cNvPr id="490" name="Text 26"/>
+          <p:cNvPr id="517" name="Text 26"/>
           <p:cNvSpPr txBox="1"/>
           <p:nvPr/>
         </p:nvSpPr>
@@ -10396,7 +12051,7 @@
       </p:sp>
       <p:sp>
         <p:nvSpPr>
-          <p:cNvPr id="491" name="Shape 27"/>
+          <p:cNvPr id="518" name="Shape 27"/>
           <p:cNvSpPr/>
           <p:nvPr/>
         </p:nvSpPr>
@@ -10425,7 +12080,7 @@
       </p:sp>
       <p:sp>
         <p:nvSpPr>
-          <p:cNvPr id="492" name="Shape 28"/>
+          <p:cNvPr id="519" name="Shape 28"/>
           <p:cNvSpPr/>
           <p:nvPr/>
         </p:nvSpPr>
@@ -10456,7 +12111,7 @@
       </p:sp>
       <p:sp>
         <p:nvSpPr>
-          <p:cNvPr id="493" name="Text 29"/>
+          <p:cNvPr id="520" name="Text 29"/>
           <p:cNvSpPr txBox="1"/>
           <p:nvPr/>
         </p:nvSpPr>
@@ -10500,14 +12155,14 @@
       </p:sp>
       <p:sp>
         <p:nvSpPr>
-          <p:cNvPr id="494" name="Shape 30"/>
-          <p:cNvSpPr/>
-          <p:nvPr/>
-        </p:nvSpPr>
-        <p:spPr>
-          <a:xfrm>
-            <a:off x="11201399" y="2103120"/>
-            <a:ext cx="777242" cy="777241"/>
+          <p:cNvPr id="521" name="Shape 30"/>
+          <p:cNvSpPr/>
+          <p:nvPr/>
+        </p:nvSpPr>
+        <p:spPr>
+          <a:xfrm>
+            <a:off x="11201400" y="2103120"/>
+            <a:ext cx="777241" cy="777241"/>
           </a:xfrm>
           <a:prstGeom prst="rect">
             <a:avLst/>
@@ -10531,14 +12186,14 @@
       </p:sp>
       <p:sp>
         <p:nvSpPr>
-          <p:cNvPr id="495" name="Text 31"/>
-          <p:cNvSpPr txBox="1"/>
-          <p:nvPr/>
-        </p:nvSpPr>
-        <p:spPr>
-          <a:xfrm>
-            <a:off x="11201399" y="2398462"/>
-            <a:ext cx="777242" cy="186557"/>
+          <p:cNvPr id="522" name="Text 31"/>
+          <p:cNvSpPr txBox="1"/>
+          <p:nvPr/>
+        </p:nvSpPr>
+        <p:spPr>
+          <a:xfrm>
+            <a:off x="11201400" y="2398462"/>
+            <a:ext cx="777241" cy="186557"/>
           </a:xfrm>
           <a:prstGeom prst="rect">
             <a:avLst/>
@@ -10575,7 +12230,7 @@
       </p:sp>
       <p:sp>
         <p:nvSpPr>
-          <p:cNvPr id="496" name="Shape 32"/>
+          <p:cNvPr id="523" name="Shape 32"/>
           <p:cNvSpPr/>
           <p:nvPr/>
         </p:nvSpPr>
@@ -10606,13 +12261,13 @@
       </p:sp>
       <p:sp>
         <p:nvSpPr>
-          <p:cNvPr id="497" name="Text 33"/>
-          <p:cNvSpPr txBox="1"/>
-          <p:nvPr/>
-        </p:nvSpPr>
-        <p:spPr>
-          <a:xfrm>
-            <a:off x="10424159" y="3175702"/>
+          <p:cNvPr id="524" name="Text 33"/>
+          <p:cNvSpPr txBox="1"/>
+          <p:nvPr/>
+        </p:nvSpPr>
+        <p:spPr>
+          <a:xfrm>
+            <a:off x="10424159" y="3175701"/>
             <a:ext cx="777241" cy="186557"/>
           </a:xfrm>
           <a:prstGeom prst="rect">
@@ -10650,14 +12305,14 @@
       </p:sp>
       <p:sp>
         <p:nvSpPr>
-          <p:cNvPr id="498" name="Shape 34"/>
-          <p:cNvSpPr/>
-          <p:nvPr/>
-        </p:nvSpPr>
-        <p:spPr>
-          <a:xfrm>
-            <a:off x="11201399" y="2880360"/>
-            <a:ext cx="777242" cy="777241"/>
+          <p:cNvPr id="525" name="Shape 34"/>
+          <p:cNvSpPr/>
+          <p:nvPr/>
+        </p:nvSpPr>
+        <p:spPr>
+          <a:xfrm>
+            <a:off x="11201400" y="2880360"/>
+            <a:ext cx="777241" cy="777241"/>
           </a:xfrm>
           <a:prstGeom prst="rect">
             <a:avLst/>
@@ -10681,14 +12336,14 @@
       </p:sp>
       <p:sp>
         <p:nvSpPr>
-          <p:cNvPr id="499" name="Text 35"/>
-          <p:cNvSpPr txBox="1"/>
-          <p:nvPr/>
-        </p:nvSpPr>
-        <p:spPr>
-          <a:xfrm>
-            <a:off x="11201399" y="3175702"/>
-            <a:ext cx="777242" cy="186557"/>
+          <p:cNvPr id="526" name="Text 35"/>
+          <p:cNvSpPr txBox="1"/>
+          <p:nvPr/>
+        </p:nvSpPr>
+        <p:spPr>
+          <a:xfrm>
+            <a:off x="11201400" y="3175701"/>
+            <a:ext cx="777241" cy="186557"/>
           </a:xfrm>
           <a:prstGeom prst="rect">
             <a:avLst/>
@@ -10725,14 +12380,14 @@
       </p:sp>
       <p:sp>
         <p:nvSpPr>
-          <p:cNvPr id="500" name="Shape 36"/>
-          <p:cNvSpPr/>
-          <p:nvPr/>
-        </p:nvSpPr>
-        <p:spPr>
-          <a:xfrm>
-            <a:off x="10424159" y="3657599"/>
-            <a:ext cx="777241" cy="777242"/>
+          <p:cNvPr id="527" name="Shape 36"/>
+          <p:cNvSpPr/>
+          <p:nvPr/>
+        </p:nvSpPr>
+        <p:spPr>
+          <a:xfrm>
+            <a:off x="10424159" y="3657600"/>
+            <a:ext cx="777241" cy="777241"/>
           </a:xfrm>
           <a:prstGeom prst="rect">
             <a:avLst/>
@@ -10756,14 +12411,14 @@
       </p:sp>
       <p:sp>
         <p:nvSpPr>
-          <p:cNvPr id="501" name="Text 37"/>
-          <p:cNvSpPr txBox="1"/>
-          <p:nvPr/>
-        </p:nvSpPr>
-        <p:spPr>
-          <a:xfrm>
-            <a:off x="10424159" y="3952941"/>
-            <a:ext cx="777241" cy="186558"/>
+          <p:cNvPr id="528" name="Text 37"/>
+          <p:cNvSpPr txBox="1"/>
+          <p:nvPr/>
+        </p:nvSpPr>
+        <p:spPr>
+          <a:xfrm>
+            <a:off x="10424159" y="3952942"/>
+            <a:ext cx="777241" cy="186557"/>
           </a:xfrm>
           <a:prstGeom prst="rect">
             <a:avLst/>
@@ -10800,14 +12455,14 @@
       </p:sp>
       <p:sp>
         <p:nvSpPr>
-          <p:cNvPr id="502" name="Shape 38"/>
-          <p:cNvSpPr/>
-          <p:nvPr/>
-        </p:nvSpPr>
-        <p:spPr>
-          <a:xfrm>
-            <a:off x="11201399" y="3657599"/>
-            <a:ext cx="777242" cy="777242"/>
+          <p:cNvPr id="529" name="Shape 38"/>
+          <p:cNvSpPr/>
+          <p:nvPr/>
+        </p:nvSpPr>
+        <p:spPr>
+          <a:xfrm>
+            <a:off x="11201400" y="3657600"/>
+            <a:ext cx="777241" cy="777241"/>
           </a:xfrm>
           <a:prstGeom prst="rect">
             <a:avLst/>
@@ -10831,14 +12486,14 @@
       </p:sp>
       <p:sp>
         <p:nvSpPr>
-          <p:cNvPr id="503" name="Text 39"/>
-          <p:cNvSpPr txBox="1"/>
-          <p:nvPr/>
-        </p:nvSpPr>
-        <p:spPr>
-          <a:xfrm>
-            <a:off x="11201399" y="3952941"/>
-            <a:ext cx="777242" cy="186558"/>
+          <p:cNvPr id="530" name="Text 39"/>
+          <p:cNvSpPr txBox="1"/>
+          <p:nvPr/>
+        </p:nvSpPr>
+        <p:spPr>
+          <a:xfrm>
+            <a:off x="11201400" y="3952942"/>
+            <a:ext cx="777241" cy="186557"/>
           </a:xfrm>
           <a:prstGeom prst="rect">
             <a:avLst/>
@@ -10875,7 +12530,7 @@
       </p:sp>
       <p:sp>
         <p:nvSpPr>
-          <p:cNvPr id="504" name="Text 40"/>
+          <p:cNvPr id="531" name="Text 40"/>
           <p:cNvSpPr txBox="1"/>
           <p:nvPr/>
         </p:nvSpPr>
@@ -10919,7 +12574,7 @@
       </p:sp>
       <p:sp>
         <p:nvSpPr>
-          <p:cNvPr id="505" name="Text 41"/>
+          <p:cNvPr id="532" name="Text 41"/>
           <p:cNvSpPr txBox="1"/>
           <p:nvPr/>
         </p:nvSpPr>
@@ -10963,7 +12618,7 @@
       </p:sp>
       <p:sp>
         <p:nvSpPr>
-          <p:cNvPr id="506" name="Text 42"/>
+          <p:cNvPr id="533" name="Text 42"/>
           <p:cNvSpPr txBox="1"/>
           <p:nvPr/>
         </p:nvSpPr>
@@ -11007,7 +12662,7 @@
       </p:sp>
       <p:sp>
         <p:nvSpPr>
-          <p:cNvPr id="507" name="Text 45"/>
+          <p:cNvPr id="534" name="Text 45"/>
           <p:cNvSpPr txBox="1"/>
           <p:nvPr/>
         </p:nvSpPr>
@@ -11077,7 +12732,7 @@
       </p:grpSpPr>
       <p:sp>
         <p:nvSpPr>
-          <p:cNvPr id="509" name="Text 0"/>
+          <p:cNvPr id="538" name="Text 0"/>
           <p:cNvSpPr txBox="1"/>
           <p:nvPr/>
         </p:nvSpPr>
@@ -11121,7 +12776,7 @@
       </p:sp>
       <p:sp>
         <p:nvSpPr>
-          <p:cNvPr id="510" name="Text 1"/>
+          <p:cNvPr id="539" name="Text 1"/>
           <p:cNvSpPr txBox="1"/>
           <p:nvPr/>
         </p:nvSpPr>
@@ -11169,7 +12824,7 @@
       </p:sp>
       <p:sp>
         <p:nvSpPr>
-          <p:cNvPr id="511" name="Text 2"/>
+          <p:cNvPr id="540" name="Text 2"/>
           <p:cNvSpPr txBox="1"/>
           <p:nvPr/>
         </p:nvSpPr>
@@ -11213,14 +12868,14 @@
       </p:sp>
       <p:pic>
         <p:nvPicPr>
-          <p:cNvPr id="512" name="Image 0" descr="Image 0"/>
+          <p:cNvPr id="541" name="Image 0" descr="Image 0"/>
           <p:cNvPicPr>
             <a:picLocks noChangeAspect="1"/>
           </p:cNvPicPr>
           <p:nvPr/>
         </p:nvPicPr>
         <p:blipFill>
-          <a:blip r:embed="rId2">
+          <a:blip r:embed="rId3">
             <a:extLst/>
           </a:blip>
           <a:stretch>
@@ -11242,7 +12897,7 @@
       </p:pic>
       <p:sp>
         <p:nvSpPr>
-          <p:cNvPr id="513" name="Text 3"/>
+          <p:cNvPr id="542" name="Text 3"/>
           <p:cNvSpPr txBox="1"/>
           <p:nvPr/>
         </p:nvSpPr>
@@ -11290,14 +12945,14 @@
       </p:sp>
       <p:sp>
         <p:nvSpPr>
-          <p:cNvPr id="514" name="Text 4"/>
+          <p:cNvPr id="543" name="Text 4"/>
           <p:cNvSpPr txBox="1"/>
           <p:nvPr/>
         </p:nvSpPr>
         <p:spPr>
           <a:xfrm>
             <a:off x="1188719" y="3611879"/>
-            <a:ext cx="2926082" cy="248743"/>
+            <a:ext cx="2926081" cy="248743"/>
           </a:xfrm>
           <a:prstGeom prst="rect">
             <a:avLst/>
@@ -11334,14 +12989,14 @@
       </p:sp>
       <p:sp>
         <p:nvSpPr>
-          <p:cNvPr id="515" name="Text 5"/>
+          <p:cNvPr id="544" name="Text 5"/>
           <p:cNvSpPr txBox="1"/>
           <p:nvPr/>
         </p:nvSpPr>
         <p:spPr>
           <a:xfrm>
             <a:off x="1188719" y="4069079"/>
-            <a:ext cx="2926082" cy="241301"/>
+            <a:ext cx="2926081" cy="241301"/>
           </a:xfrm>
           <a:prstGeom prst="rect">
             <a:avLst/>
@@ -11382,14 +13037,14 @@
       </p:sp>
       <p:sp>
         <p:nvSpPr>
-          <p:cNvPr id="516" name="Text 6"/>
-          <p:cNvSpPr txBox="1"/>
-          <p:nvPr/>
-        </p:nvSpPr>
-        <p:spPr>
-          <a:xfrm>
-            <a:off x="4343399" y="3520440"/>
-            <a:ext cx="548642" cy="508001"/>
+          <p:cNvPr id="545" name="Text 6"/>
+          <p:cNvSpPr txBox="1"/>
+          <p:nvPr/>
+        </p:nvSpPr>
+        <p:spPr>
+          <a:xfrm>
+            <a:off x="4343400" y="3520440"/>
+            <a:ext cx="548641" cy="508001"/>
           </a:xfrm>
           <a:prstGeom prst="rect">
             <a:avLst/>
@@ -11430,7 +13085,7 @@
       </p:sp>
       <p:sp>
         <p:nvSpPr>
-          <p:cNvPr id="517" name="Text 7"/>
+          <p:cNvPr id="546" name="Text 7"/>
           <p:cNvSpPr txBox="1"/>
           <p:nvPr/>
         </p:nvSpPr>
@@ -11474,7 +13129,7 @@
       </p:sp>
       <p:sp>
         <p:nvSpPr>
-          <p:cNvPr id="518" name="Text 8"/>
+          <p:cNvPr id="547" name="Text 8"/>
           <p:cNvSpPr txBox="1"/>
           <p:nvPr/>
         </p:nvSpPr>
@@ -11522,7 +13177,7 @@
       </p:sp>
       <p:sp>
         <p:nvSpPr>
-          <p:cNvPr id="519" name="Text 9"/>
+          <p:cNvPr id="548" name="Text 9"/>
           <p:cNvSpPr txBox="1"/>
           <p:nvPr/>
         </p:nvSpPr>
@@ -11570,7 +13225,7 @@
       </p:sp>
       <p:sp>
         <p:nvSpPr>
-          <p:cNvPr id="520" name="Text 10"/>
+          <p:cNvPr id="549" name="Text 10"/>
           <p:cNvSpPr txBox="1"/>
           <p:nvPr/>
         </p:nvSpPr>
@@ -11614,7 +13269,7 @@
       </p:sp>
       <p:sp>
         <p:nvSpPr>
-          <p:cNvPr id="521" name="Text 11"/>
+          <p:cNvPr id="550" name="Text 11"/>
           <p:cNvSpPr txBox="1"/>
           <p:nvPr/>
         </p:nvSpPr>
@@ -11662,14 +13317,14 @@
       </p:sp>
       <p:sp>
         <p:nvSpPr>
-          <p:cNvPr id="522" name="Text 12"/>
-          <p:cNvSpPr txBox="1"/>
-          <p:nvPr/>
-        </p:nvSpPr>
-        <p:spPr>
-          <a:xfrm>
-            <a:off x="640079" y="5257799"/>
-            <a:ext cx="10789922" cy="292101"/>
+          <p:cNvPr id="551" name="Text 12"/>
+          <p:cNvSpPr txBox="1"/>
+          <p:nvPr/>
+        </p:nvSpPr>
+        <p:spPr>
+          <a:xfrm>
+            <a:off x="640079" y="5257800"/>
+            <a:ext cx="10789922" cy="292100"/>
           </a:xfrm>
           <a:prstGeom prst="rect">
             <a:avLst/>
@@ -11736,7 +13391,7 @@
       </p:grpSpPr>
       <p:sp>
         <p:nvSpPr>
-          <p:cNvPr id="524" name="Text 0"/>
+          <p:cNvPr id="555" name="Text 0"/>
           <p:cNvSpPr txBox="1"/>
           <p:nvPr/>
         </p:nvSpPr>
@@ -11780,7 +13435,7 @@
       </p:sp>
       <p:sp>
         <p:nvSpPr>
-          <p:cNvPr id="525" name="Text 1"/>
+          <p:cNvPr id="556" name="Text 1"/>
           <p:cNvSpPr txBox="1"/>
           <p:nvPr/>
         </p:nvSpPr>
@@ -11828,7 +13483,7 @@
       </p:sp>
       <p:sp>
         <p:nvSpPr>
-          <p:cNvPr id="526" name="Text 2"/>
+          <p:cNvPr id="557" name="Text 2"/>
           <p:cNvSpPr txBox="1"/>
           <p:nvPr/>
         </p:nvSpPr>
@@ -11872,7 +13527,7 @@
       </p:sp>
       <p:sp>
         <p:nvSpPr>
-          <p:cNvPr id="527" name="Shape 3"/>
+          <p:cNvPr id="558" name="Shape 3"/>
           <p:cNvSpPr/>
           <p:nvPr/>
         </p:nvSpPr>
@@ -11903,7 +13558,7 @@
       </p:sp>
       <p:sp>
         <p:nvSpPr>
-          <p:cNvPr id="528" name="Text 4"/>
+          <p:cNvPr id="559" name="Text 4"/>
           <p:cNvSpPr txBox="1"/>
           <p:nvPr/>
         </p:nvSpPr>
@@ -11947,7 +13602,7 @@
       </p:sp>
       <p:sp>
         <p:nvSpPr>
-          <p:cNvPr id="529" name="Shape 5"/>
+          <p:cNvPr id="560" name="Shape 5"/>
           <p:cNvSpPr/>
           <p:nvPr/>
         </p:nvSpPr>
@@ -11978,7 +13633,7 @@
       </p:sp>
       <p:sp>
         <p:nvSpPr>
-          <p:cNvPr id="530" name="Text 6"/>
+          <p:cNvPr id="561" name="Text 6"/>
           <p:cNvSpPr txBox="1"/>
           <p:nvPr/>
         </p:nvSpPr>
@@ -12022,7 +13677,7 @@
       </p:sp>
       <p:sp>
         <p:nvSpPr>
-          <p:cNvPr id="531" name="Shape 7"/>
+          <p:cNvPr id="562" name="Shape 7"/>
           <p:cNvSpPr/>
           <p:nvPr/>
         </p:nvSpPr>
@@ -12053,7 +13708,7 @@
       </p:sp>
       <p:sp>
         <p:nvSpPr>
-          <p:cNvPr id="532" name="Text 8"/>
+          <p:cNvPr id="563" name="Text 8"/>
           <p:cNvSpPr txBox="1"/>
           <p:nvPr/>
         </p:nvSpPr>
@@ -12097,7 +13752,7 @@
       </p:sp>
       <p:sp>
         <p:nvSpPr>
-          <p:cNvPr id="533" name="Shape 9"/>
+          <p:cNvPr id="564" name="Shape 9"/>
           <p:cNvSpPr/>
           <p:nvPr/>
         </p:nvSpPr>
@@ -12128,7 +13783,7 @@
       </p:sp>
       <p:sp>
         <p:nvSpPr>
-          <p:cNvPr id="534" name="Text 10"/>
+          <p:cNvPr id="565" name="Text 10"/>
           <p:cNvSpPr txBox="1"/>
           <p:nvPr/>
         </p:nvSpPr>
@@ -12172,7 +13827,7 @@
       </p:sp>
       <p:sp>
         <p:nvSpPr>
-          <p:cNvPr id="535" name="Shape 11"/>
+          <p:cNvPr id="566" name="Shape 11"/>
           <p:cNvSpPr/>
           <p:nvPr/>
         </p:nvSpPr>
@@ -12203,7 +13858,7 @@
       </p:sp>
       <p:sp>
         <p:nvSpPr>
-          <p:cNvPr id="536" name="Text 12"/>
+          <p:cNvPr id="567" name="Text 12"/>
           <p:cNvSpPr txBox="1"/>
           <p:nvPr/>
         </p:nvSpPr>
@@ -12247,14 +13902,14 @@
       </p:sp>
       <p:sp>
         <p:nvSpPr>
-          <p:cNvPr id="537" name="Shape 13"/>
+          <p:cNvPr id="568" name="Shape 13"/>
           <p:cNvSpPr/>
           <p:nvPr/>
         </p:nvSpPr>
         <p:spPr>
           <a:xfrm>
             <a:off x="1920239" y="2633472"/>
-            <a:ext cx="621793" cy="621793"/>
+            <a:ext cx="621793" cy="621792"/>
           </a:xfrm>
           <a:prstGeom prst="rect">
             <a:avLst/>
@@ -12278,14 +13933,14 @@
       </p:sp>
       <p:sp>
         <p:nvSpPr>
-          <p:cNvPr id="538" name="Text 14"/>
-          <p:cNvSpPr txBox="1"/>
-          <p:nvPr/>
-        </p:nvSpPr>
-        <p:spPr>
-          <a:xfrm>
-            <a:off x="1920239" y="2860987"/>
-            <a:ext cx="621793" cy="166762"/>
+          <p:cNvPr id="569" name="Text 14"/>
+          <p:cNvSpPr txBox="1"/>
+          <p:nvPr/>
+        </p:nvSpPr>
+        <p:spPr>
+          <a:xfrm>
+            <a:off x="1920239" y="2860986"/>
+            <a:ext cx="621793" cy="166763"/>
           </a:xfrm>
           <a:prstGeom prst="rect">
             <a:avLst/>
@@ -12322,14 +13977,14 @@
       </p:sp>
       <p:sp>
         <p:nvSpPr>
-          <p:cNvPr id="539" name="Shape 15"/>
+          <p:cNvPr id="570" name="Shape 15"/>
           <p:cNvSpPr/>
           <p:nvPr/>
         </p:nvSpPr>
         <p:spPr>
           <a:xfrm>
             <a:off x="2542032" y="2633472"/>
-            <a:ext cx="621793" cy="621793"/>
+            <a:ext cx="621793" cy="621792"/>
           </a:xfrm>
           <a:prstGeom prst="rect">
             <a:avLst/>
@@ -12353,14 +14008,14 @@
       </p:sp>
       <p:sp>
         <p:nvSpPr>
-          <p:cNvPr id="540" name="Text 16"/>
-          <p:cNvSpPr txBox="1"/>
-          <p:nvPr/>
-        </p:nvSpPr>
-        <p:spPr>
-          <a:xfrm>
-            <a:off x="2542032" y="2860987"/>
-            <a:ext cx="621793" cy="166762"/>
+          <p:cNvPr id="571" name="Text 16"/>
+          <p:cNvSpPr txBox="1"/>
+          <p:nvPr/>
+        </p:nvSpPr>
+        <p:spPr>
+          <a:xfrm>
+            <a:off x="2542032" y="2860986"/>
+            <a:ext cx="621793" cy="166763"/>
           </a:xfrm>
           <a:prstGeom prst="rect">
             <a:avLst/>
@@ -12397,14 +14052,14 @@
       </p:sp>
       <p:sp>
         <p:nvSpPr>
-          <p:cNvPr id="541" name="Shape 17"/>
+          <p:cNvPr id="572" name="Shape 17"/>
           <p:cNvSpPr/>
           <p:nvPr/>
         </p:nvSpPr>
         <p:spPr>
           <a:xfrm>
             <a:off x="3163823" y="2633472"/>
-            <a:ext cx="621793" cy="621793"/>
+            <a:ext cx="621793" cy="621792"/>
           </a:xfrm>
           <a:prstGeom prst="rect">
             <a:avLst/>
@@ -12428,14 +14083,14 @@
       </p:sp>
       <p:sp>
         <p:nvSpPr>
-          <p:cNvPr id="542" name="Text 18"/>
-          <p:cNvSpPr txBox="1"/>
-          <p:nvPr/>
-        </p:nvSpPr>
-        <p:spPr>
-          <a:xfrm>
-            <a:off x="3163823" y="2860987"/>
-            <a:ext cx="621793" cy="166762"/>
+          <p:cNvPr id="573" name="Text 18"/>
+          <p:cNvSpPr txBox="1"/>
+          <p:nvPr/>
+        </p:nvSpPr>
+        <p:spPr>
+          <a:xfrm>
+            <a:off x="3163823" y="2860986"/>
+            <a:ext cx="621793" cy="166763"/>
           </a:xfrm>
           <a:prstGeom prst="rect">
             <a:avLst/>
@@ -12472,14 +14127,14 @@
       </p:sp>
       <p:sp>
         <p:nvSpPr>
-          <p:cNvPr id="543" name="Shape 19"/>
+          <p:cNvPr id="574" name="Shape 19"/>
           <p:cNvSpPr/>
           <p:nvPr/>
         </p:nvSpPr>
         <p:spPr>
           <a:xfrm>
             <a:off x="3785615" y="2633472"/>
-            <a:ext cx="621793" cy="621793"/>
+            <a:ext cx="621793" cy="621792"/>
           </a:xfrm>
           <a:prstGeom prst="rect">
             <a:avLst/>
@@ -12503,14 +14158,14 @@
       </p:sp>
       <p:sp>
         <p:nvSpPr>
-          <p:cNvPr id="544" name="Text 20"/>
-          <p:cNvSpPr txBox="1"/>
-          <p:nvPr/>
-        </p:nvSpPr>
-        <p:spPr>
-          <a:xfrm>
-            <a:off x="3785615" y="2860987"/>
-            <a:ext cx="621793" cy="166762"/>
+          <p:cNvPr id="575" name="Text 20"/>
+          <p:cNvSpPr txBox="1"/>
+          <p:nvPr/>
+        </p:nvSpPr>
+        <p:spPr>
+          <a:xfrm>
+            <a:off x="3785615" y="2860986"/>
+            <a:ext cx="621793" cy="166763"/>
           </a:xfrm>
           <a:prstGeom prst="rect">
             <a:avLst/>
@@ -12547,14 +14202,14 @@
       </p:sp>
       <p:sp>
         <p:nvSpPr>
-          <p:cNvPr id="545" name="Shape 21"/>
+          <p:cNvPr id="576" name="Shape 21"/>
           <p:cNvSpPr/>
           <p:nvPr/>
         </p:nvSpPr>
         <p:spPr>
           <a:xfrm>
             <a:off x="4407408" y="2633472"/>
-            <a:ext cx="621793" cy="621793"/>
+            <a:ext cx="621793" cy="621792"/>
           </a:xfrm>
           <a:prstGeom prst="rect">
             <a:avLst/>
@@ -12578,14 +14233,14 @@
       </p:sp>
       <p:sp>
         <p:nvSpPr>
-          <p:cNvPr id="546" name="Text 22"/>
-          <p:cNvSpPr txBox="1"/>
-          <p:nvPr/>
-        </p:nvSpPr>
-        <p:spPr>
-          <a:xfrm>
-            <a:off x="4407408" y="2860987"/>
-            <a:ext cx="621793" cy="166762"/>
+          <p:cNvPr id="577" name="Text 22"/>
+          <p:cNvSpPr txBox="1"/>
+          <p:nvPr/>
+        </p:nvSpPr>
+        <p:spPr>
+          <a:xfrm>
+            <a:off x="4407408" y="2860986"/>
+            <a:ext cx="621793" cy="166763"/>
           </a:xfrm>
           <a:prstGeom prst="rect">
             <a:avLst/>
@@ -12622,7 +14277,7 @@
       </p:sp>
       <p:sp>
         <p:nvSpPr>
-          <p:cNvPr id="547" name="Shape 23"/>
+          <p:cNvPr id="578" name="Shape 23"/>
           <p:cNvSpPr/>
           <p:nvPr/>
         </p:nvSpPr>
@@ -12653,7 +14308,7 @@
       </p:sp>
       <p:sp>
         <p:nvSpPr>
-          <p:cNvPr id="548" name="Text 24"/>
+          <p:cNvPr id="579" name="Text 24"/>
           <p:cNvSpPr txBox="1"/>
           <p:nvPr/>
         </p:nvSpPr>
@@ -12697,7 +14352,7 @@
       </p:sp>
       <p:sp>
         <p:nvSpPr>
-          <p:cNvPr id="549" name="Shape 25"/>
+          <p:cNvPr id="580" name="Shape 25"/>
           <p:cNvSpPr/>
           <p:nvPr/>
         </p:nvSpPr>
@@ -12728,7 +14383,7 @@
       </p:sp>
       <p:sp>
         <p:nvSpPr>
-          <p:cNvPr id="550" name="Text 26"/>
+          <p:cNvPr id="581" name="Text 26"/>
           <p:cNvSpPr txBox="1"/>
           <p:nvPr/>
         </p:nvSpPr>
@@ -12772,7 +14427,7 @@
       </p:sp>
       <p:sp>
         <p:nvSpPr>
-          <p:cNvPr id="551" name="Shape 27"/>
+          <p:cNvPr id="582" name="Shape 27"/>
           <p:cNvSpPr/>
           <p:nvPr/>
         </p:nvSpPr>
@@ -12803,7 +14458,7 @@
       </p:sp>
       <p:sp>
         <p:nvSpPr>
-          <p:cNvPr id="552" name="Text 28"/>
+          <p:cNvPr id="583" name="Text 28"/>
           <p:cNvSpPr txBox="1"/>
           <p:nvPr/>
         </p:nvSpPr>
@@ -12847,7 +14502,7 @@
       </p:sp>
       <p:sp>
         <p:nvSpPr>
-          <p:cNvPr id="553" name="Shape 29"/>
+          <p:cNvPr id="584" name="Shape 29"/>
           <p:cNvSpPr/>
           <p:nvPr/>
         </p:nvSpPr>
@@ -12878,7 +14533,7 @@
       </p:sp>
       <p:sp>
         <p:nvSpPr>
-          <p:cNvPr id="554" name="Text 30"/>
+          <p:cNvPr id="585" name="Text 30"/>
           <p:cNvSpPr txBox="1"/>
           <p:nvPr/>
         </p:nvSpPr>
@@ -12922,7 +14577,7 @@
       </p:sp>
       <p:sp>
         <p:nvSpPr>
-          <p:cNvPr id="555" name="Shape 31"/>
+          <p:cNvPr id="586" name="Shape 31"/>
           <p:cNvSpPr/>
           <p:nvPr/>
         </p:nvSpPr>
@@ -12953,7 +14608,7 @@
       </p:sp>
       <p:sp>
         <p:nvSpPr>
-          <p:cNvPr id="556" name="Text 32"/>
+          <p:cNvPr id="587" name="Text 32"/>
           <p:cNvSpPr txBox="1"/>
           <p:nvPr/>
         </p:nvSpPr>
@@ -12997,7 +14652,7 @@
       </p:sp>
       <p:sp>
         <p:nvSpPr>
-          <p:cNvPr id="557" name="Shape 33"/>
+          <p:cNvPr id="588" name="Shape 33"/>
           <p:cNvSpPr/>
           <p:nvPr/>
         </p:nvSpPr>
@@ -13028,14 +14683,14 @@
       </p:sp>
       <p:sp>
         <p:nvSpPr>
-          <p:cNvPr id="558" name="Text 34"/>
+          <p:cNvPr id="589" name="Text 34"/>
           <p:cNvSpPr txBox="1"/>
           <p:nvPr/>
         </p:nvSpPr>
         <p:spPr>
           <a:xfrm>
             <a:off x="1920239" y="4104571"/>
-            <a:ext cx="621793" cy="166762"/>
+            <a:ext cx="621793" cy="166763"/>
           </a:xfrm>
           <a:prstGeom prst="rect">
             <a:avLst/>
@@ -13072,7 +14727,7 @@
       </p:sp>
       <p:sp>
         <p:nvSpPr>
-          <p:cNvPr id="559" name="Shape 35"/>
+          <p:cNvPr id="590" name="Shape 35"/>
           <p:cNvSpPr/>
           <p:nvPr/>
         </p:nvSpPr>
@@ -13103,14 +14758,14 @@
       </p:sp>
       <p:sp>
         <p:nvSpPr>
-          <p:cNvPr id="560" name="Text 36"/>
+          <p:cNvPr id="591" name="Text 36"/>
           <p:cNvSpPr txBox="1"/>
           <p:nvPr/>
         </p:nvSpPr>
         <p:spPr>
           <a:xfrm>
             <a:off x="2542032" y="4104571"/>
-            <a:ext cx="621793" cy="166762"/>
+            <a:ext cx="621793" cy="166763"/>
           </a:xfrm>
           <a:prstGeom prst="rect">
             <a:avLst/>
@@ -13147,7 +14802,7 @@
       </p:sp>
       <p:sp>
         <p:nvSpPr>
-          <p:cNvPr id="561" name="Shape 37"/>
+          <p:cNvPr id="592" name="Shape 37"/>
           <p:cNvSpPr/>
           <p:nvPr/>
         </p:nvSpPr>
@@ -13178,14 +14833,14 @@
       </p:sp>
       <p:sp>
         <p:nvSpPr>
-          <p:cNvPr id="562" name="Text 38"/>
+          <p:cNvPr id="593" name="Text 38"/>
           <p:cNvSpPr txBox="1"/>
           <p:nvPr/>
         </p:nvSpPr>
         <p:spPr>
           <a:xfrm>
             <a:off x="3163823" y="4104571"/>
-            <a:ext cx="621793" cy="166762"/>
+            <a:ext cx="621793" cy="166763"/>
           </a:xfrm>
           <a:prstGeom prst="rect">
             <a:avLst/>
@@ -13222,7 +14877,7 @@
       </p:sp>
       <p:sp>
         <p:nvSpPr>
-          <p:cNvPr id="563" name="Shape 39"/>
+          <p:cNvPr id="594" name="Shape 39"/>
           <p:cNvSpPr/>
           <p:nvPr/>
         </p:nvSpPr>
@@ -13253,14 +14908,14 @@
       </p:sp>
       <p:sp>
         <p:nvSpPr>
-          <p:cNvPr id="564" name="Text 40"/>
+          <p:cNvPr id="595" name="Text 40"/>
           <p:cNvSpPr txBox="1"/>
           <p:nvPr/>
         </p:nvSpPr>
         <p:spPr>
           <a:xfrm>
             <a:off x="3785615" y="4104571"/>
-            <a:ext cx="621793" cy="166762"/>
+            <a:ext cx="621793" cy="166763"/>
           </a:xfrm>
           <a:prstGeom prst="rect">
             <a:avLst/>
@@ -13297,7 +14952,7 @@
       </p:sp>
       <p:sp>
         <p:nvSpPr>
-          <p:cNvPr id="565" name="Shape 41"/>
+          <p:cNvPr id="596" name="Shape 41"/>
           <p:cNvSpPr/>
           <p:nvPr/>
         </p:nvSpPr>
@@ -13328,14 +14983,14 @@
       </p:sp>
       <p:sp>
         <p:nvSpPr>
-          <p:cNvPr id="566" name="Text 42"/>
+          <p:cNvPr id="597" name="Text 42"/>
           <p:cNvSpPr txBox="1"/>
           <p:nvPr/>
         </p:nvSpPr>
         <p:spPr>
           <a:xfrm>
             <a:off x="4407408" y="4104571"/>
-            <a:ext cx="621793" cy="166762"/>
+            <a:ext cx="621793" cy="166763"/>
           </a:xfrm>
           <a:prstGeom prst="rect">
             <a:avLst/>
@@ -13372,7 +15027,7 @@
       </p:sp>
       <p:sp>
         <p:nvSpPr>
-          <p:cNvPr id="567" name="Shape 43"/>
+          <p:cNvPr id="598" name="Shape 43"/>
           <p:cNvSpPr/>
           <p:nvPr/>
         </p:nvSpPr>
@@ -13403,14 +15058,14 @@
       </p:sp>
       <p:sp>
         <p:nvSpPr>
-          <p:cNvPr id="568" name="Text 44"/>
-          <p:cNvSpPr txBox="1"/>
-          <p:nvPr/>
-        </p:nvSpPr>
-        <p:spPr>
-          <a:xfrm>
-            <a:off x="1920239" y="4726362"/>
-            <a:ext cx="621793" cy="166763"/>
+          <p:cNvPr id="599" name="Text 44"/>
+          <p:cNvSpPr txBox="1"/>
+          <p:nvPr/>
+        </p:nvSpPr>
+        <p:spPr>
+          <a:xfrm>
+            <a:off x="1920239" y="4726363"/>
+            <a:ext cx="621793" cy="166762"/>
           </a:xfrm>
           <a:prstGeom prst="rect">
             <a:avLst/>
@@ -13447,7 +15102,7 @@
       </p:sp>
       <p:sp>
         <p:nvSpPr>
-          <p:cNvPr id="569" name="Shape 45"/>
+          <p:cNvPr id="600" name="Shape 45"/>
           <p:cNvSpPr/>
           <p:nvPr/>
         </p:nvSpPr>
@@ -13478,14 +15133,14 @@
       </p:sp>
       <p:sp>
         <p:nvSpPr>
-          <p:cNvPr id="570" name="Text 46"/>
-          <p:cNvSpPr txBox="1"/>
-          <p:nvPr/>
-        </p:nvSpPr>
-        <p:spPr>
-          <a:xfrm>
-            <a:off x="2542032" y="4726362"/>
-            <a:ext cx="621793" cy="166763"/>
+          <p:cNvPr id="601" name="Text 46"/>
+          <p:cNvSpPr txBox="1"/>
+          <p:nvPr/>
+        </p:nvSpPr>
+        <p:spPr>
+          <a:xfrm>
+            <a:off x="2542032" y="4726363"/>
+            <a:ext cx="621793" cy="166762"/>
           </a:xfrm>
           <a:prstGeom prst="rect">
             <a:avLst/>
@@ -13522,7 +15177,7 @@
       </p:sp>
       <p:sp>
         <p:nvSpPr>
-          <p:cNvPr id="571" name="Shape 47"/>
+          <p:cNvPr id="602" name="Shape 47"/>
           <p:cNvSpPr/>
           <p:nvPr/>
         </p:nvSpPr>
@@ -13553,14 +15208,14 @@
       </p:sp>
       <p:sp>
         <p:nvSpPr>
-          <p:cNvPr id="572" name="Text 48"/>
-          <p:cNvSpPr txBox="1"/>
-          <p:nvPr/>
-        </p:nvSpPr>
-        <p:spPr>
-          <a:xfrm>
-            <a:off x="3163823" y="4726362"/>
-            <a:ext cx="621793" cy="166763"/>
+          <p:cNvPr id="603" name="Text 48"/>
+          <p:cNvSpPr txBox="1"/>
+          <p:nvPr/>
+        </p:nvSpPr>
+        <p:spPr>
+          <a:xfrm>
+            <a:off x="3163823" y="4726363"/>
+            <a:ext cx="621793" cy="166762"/>
           </a:xfrm>
           <a:prstGeom prst="rect">
             <a:avLst/>
@@ -13597,7 +15252,7 @@
       </p:sp>
       <p:sp>
         <p:nvSpPr>
-          <p:cNvPr id="573" name="Shape 49"/>
+          <p:cNvPr id="604" name="Shape 49"/>
           <p:cNvSpPr/>
           <p:nvPr/>
         </p:nvSpPr>
@@ -13628,14 +15283,14 @@
       </p:sp>
       <p:sp>
         <p:nvSpPr>
-          <p:cNvPr id="574" name="Text 50"/>
-          <p:cNvSpPr txBox="1"/>
-          <p:nvPr/>
-        </p:nvSpPr>
-        <p:spPr>
-          <a:xfrm>
-            <a:off x="3785615" y="4726362"/>
-            <a:ext cx="621793" cy="166763"/>
+          <p:cNvPr id="605" name="Text 50"/>
+          <p:cNvSpPr txBox="1"/>
+          <p:nvPr/>
+        </p:nvSpPr>
+        <p:spPr>
+          <a:xfrm>
+            <a:off x="3785615" y="4726363"/>
+            <a:ext cx="621793" cy="166762"/>
           </a:xfrm>
           <a:prstGeom prst="rect">
             <a:avLst/>
@@ -13672,7 +15327,7 @@
       </p:sp>
       <p:sp>
         <p:nvSpPr>
-          <p:cNvPr id="575" name="Shape 51"/>
+          <p:cNvPr id="606" name="Shape 51"/>
           <p:cNvSpPr/>
           <p:nvPr/>
         </p:nvSpPr>
@@ -13703,14 +15358,14 @@
       </p:sp>
       <p:sp>
         <p:nvSpPr>
-          <p:cNvPr id="576" name="Text 52"/>
-          <p:cNvSpPr txBox="1"/>
-          <p:nvPr/>
-        </p:nvSpPr>
-        <p:spPr>
-          <a:xfrm>
-            <a:off x="4407408" y="4726362"/>
-            <a:ext cx="621793" cy="166763"/>
+          <p:cNvPr id="607" name="Text 52"/>
+          <p:cNvSpPr txBox="1"/>
+          <p:nvPr/>
+        </p:nvSpPr>
+        <p:spPr>
+          <a:xfrm>
+            <a:off x="4407408" y="4726363"/>
+            <a:ext cx="621793" cy="166762"/>
           </a:xfrm>
           <a:prstGeom prst="rect">
             <a:avLst/>
@@ -13747,7 +15402,7 @@
       </p:sp>
       <p:sp>
         <p:nvSpPr>
-          <p:cNvPr id="577" name="Text 53"/>
+          <p:cNvPr id="608" name="Text 53"/>
           <p:cNvSpPr txBox="1"/>
           <p:nvPr/>
         </p:nvSpPr>
@@ -13791,7 +15446,7 @@
       </p:sp>
       <p:sp>
         <p:nvSpPr>
-          <p:cNvPr id="578" name="Text 54"/>
+          <p:cNvPr id="609" name="Text 54"/>
           <p:cNvSpPr txBox="1"/>
           <p:nvPr/>
         </p:nvSpPr>
@@ -13835,7 +15490,7 @@
       </p:sp>
       <p:sp>
         <p:nvSpPr>
-          <p:cNvPr id="579" name="Text 55"/>
+          <p:cNvPr id="610" name="Text 55"/>
           <p:cNvSpPr txBox="1"/>
           <p:nvPr/>
         </p:nvSpPr>
@@ -13879,7 +15534,7 @@
       </p:sp>
       <p:sp>
         <p:nvSpPr>
-          <p:cNvPr id="580" name="Text 56"/>
+          <p:cNvPr id="611" name="Text 56"/>
           <p:cNvSpPr txBox="1"/>
           <p:nvPr/>
         </p:nvSpPr>
@@ -13923,7 +15578,7 @@
       </p:sp>
       <p:sp>
         <p:nvSpPr>
-          <p:cNvPr id="581" name="Text 57"/>
+          <p:cNvPr id="612" name="Text 57"/>
           <p:cNvSpPr txBox="1"/>
           <p:nvPr/>
         </p:nvSpPr>
@@ -13967,7 +15622,7 @@
       </p:sp>
       <p:sp>
         <p:nvSpPr>
-          <p:cNvPr id="582" name="Text 58"/>
+          <p:cNvPr id="613" name="Text 58"/>
           <p:cNvSpPr txBox="1"/>
           <p:nvPr/>
         </p:nvSpPr>
@@ -14011,14 +15666,14 @@
       </p:sp>
       <p:sp>
         <p:nvSpPr>
-          <p:cNvPr id="583" name="Text 59"/>
+          <p:cNvPr id="614" name="Text 59"/>
           <p:cNvSpPr txBox="1"/>
           <p:nvPr/>
         </p:nvSpPr>
         <p:spPr>
           <a:xfrm>
             <a:off x="2267711" y="1691639"/>
-            <a:ext cx="1170433" cy="189360"/>
+            <a:ext cx="1170434" cy="189360"/>
           </a:xfrm>
           <a:prstGeom prst="rect">
             <a:avLst/>
@@ -14055,7 +15710,7 @@
       </p:sp>
       <p:sp>
         <p:nvSpPr>
-          <p:cNvPr id="584" name="Text 60"/>
+          <p:cNvPr id="615" name="Text 60"/>
           <p:cNvSpPr txBox="1"/>
           <p:nvPr/>
         </p:nvSpPr>
@@ -14099,7 +15754,7 @@
       </p:sp>
       <p:sp>
         <p:nvSpPr>
-          <p:cNvPr id="585" name="Text 61"/>
+          <p:cNvPr id="616" name="Text 61"/>
           <p:cNvSpPr txBox="1"/>
           <p:nvPr/>
         </p:nvSpPr>
@@ -14143,7 +15798,7 @@
       </p:sp>
       <p:sp>
         <p:nvSpPr>
-          <p:cNvPr id="586" name="Text 62"/>
+          <p:cNvPr id="617" name="Text 62"/>
           <p:cNvSpPr txBox="1"/>
           <p:nvPr/>
         </p:nvSpPr>
@@ -14187,7 +15842,7 @@
       </p:sp>
       <p:sp>
         <p:nvSpPr>
-          <p:cNvPr id="587" name="Text 63"/>
+          <p:cNvPr id="618" name="Text 63"/>
           <p:cNvSpPr txBox="1"/>
           <p:nvPr/>
         </p:nvSpPr>
@@ -14231,7 +15886,7 @@
       </p:sp>
       <p:sp>
         <p:nvSpPr>
-          <p:cNvPr id="588" name="Text 64"/>
+          <p:cNvPr id="619" name="Text 64"/>
           <p:cNvSpPr txBox="1"/>
           <p:nvPr/>
         </p:nvSpPr>
@@ -14279,7 +15934,7 @@
       </p:sp>
       <p:sp>
         <p:nvSpPr>
-          <p:cNvPr id="589" name="Text 65"/>
+          <p:cNvPr id="620" name="Text 65"/>
           <p:cNvSpPr txBox="1"/>
           <p:nvPr/>
         </p:nvSpPr>
@@ -14323,7 +15978,7 @@
       </p:sp>
       <p:sp>
         <p:nvSpPr>
-          <p:cNvPr id="590" name="Shape 66"/>
+          <p:cNvPr id="621" name="Shape 66"/>
           <p:cNvSpPr/>
           <p:nvPr/>
         </p:nvSpPr>
@@ -14354,7 +16009,7 @@
       </p:sp>
       <p:sp>
         <p:nvSpPr>
-          <p:cNvPr id="591" name="Text 67"/>
+          <p:cNvPr id="622" name="Text 67"/>
           <p:cNvSpPr txBox="1"/>
           <p:nvPr/>
         </p:nvSpPr>
@@ -14414,7 +16069,7 @@
       </p:sp>
       <p:sp>
         <p:nvSpPr>
-          <p:cNvPr id="592" name="Text 68"/>
+          <p:cNvPr id="623" name="Text 68"/>
           <p:cNvSpPr txBox="1"/>
           <p:nvPr/>
         </p:nvSpPr>
@@ -14484,7 +16139,7 @@
       </p:grpSpPr>
       <p:sp>
         <p:nvSpPr>
-          <p:cNvPr id="594" name="Text 0"/>
+          <p:cNvPr id="627" name="Text 0"/>
           <p:cNvSpPr txBox="1"/>
           <p:nvPr/>
         </p:nvSpPr>
@@ -14528,7 +16183,7 @@
       </p:sp>
       <p:sp>
         <p:nvSpPr>
-          <p:cNvPr id="595" name="Text 1"/>
+          <p:cNvPr id="628" name="Text 1"/>
           <p:cNvSpPr txBox="1"/>
           <p:nvPr/>
         </p:nvSpPr>
@@ -14576,7 +16231,7 @@
       </p:sp>
       <p:sp>
         <p:nvSpPr>
-          <p:cNvPr id="596" name="Text 2"/>
+          <p:cNvPr id="629" name="Text 2"/>
           <p:cNvSpPr txBox="1"/>
           <p:nvPr/>
         </p:nvSpPr>
@@ -14620,7 +16275,7 @@
       </p:sp>
       <p:sp>
         <p:nvSpPr>
-          <p:cNvPr id="597" name="Text 3"/>
+          <p:cNvPr id="630" name="Text 3"/>
           <p:cNvSpPr txBox="1"/>
           <p:nvPr/>
         </p:nvSpPr>
@@ -14664,7 +16319,7 @@
       </p:sp>
       <p:sp>
         <p:nvSpPr>
-          <p:cNvPr id="598" name="Text 4"/>
+          <p:cNvPr id="631" name="Text 4"/>
           <p:cNvSpPr txBox="1"/>
           <p:nvPr/>
         </p:nvSpPr>
@@ -14708,7 +16363,7 @@
       </p:sp>
       <p:sp>
         <p:nvSpPr>
-          <p:cNvPr id="599" name="Text 5"/>
+          <p:cNvPr id="632" name="Text 5"/>
           <p:cNvSpPr txBox="1"/>
           <p:nvPr/>
         </p:nvSpPr>
@@ -14752,7 +16407,7 @@
       </p:sp>
       <p:sp>
         <p:nvSpPr>
-          <p:cNvPr id="600" name="Text 6"/>
+          <p:cNvPr id="633" name="Text 6"/>
           <p:cNvSpPr txBox="1"/>
           <p:nvPr/>
         </p:nvSpPr>
@@ -14796,7 +16451,7 @@
       </p:sp>
       <p:sp>
         <p:nvSpPr>
-          <p:cNvPr id="601" name="Text 7"/>
+          <p:cNvPr id="634" name="Text 7"/>
           <p:cNvSpPr txBox="1"/>
           <p:nvPr/>
         </p:nvSpPr>
@@ -14840,7 +16495,7 @@
       </p:sp>
       <p:sp>
         <p:nvSpPr>
-          <p:cNvPr id="602" name="Text 8"/>
+          <p:cNvPr id="635" name="Text 8"/>
           <p:cNvSpPr txBox="1"/>
           <p:nvPr/>
         </p:nvSpPr>
@@ -14884,7 +16539,7 @@
       </p:sp>
       <p:sp>
         <p:nvSpPr>
-          <p:cNvPr id="603" name="Text 9"/>
+          <p:cNvPr id="636" name="Text 9"/>
           <p:cNvSpPr txBox="1"/>
           <p:nvPr/>
         </p:nvSpPr>
@@ -14928,7 +16583,7 @@
       </p:sp>
       <p:sp>
         <p:nvSpPr>
-          <p:cNvPr id="604" name="Text 10"/>
+          <p:cNvPr id="637" name="Text 10"/>
           <p:cNvSpPr txBox="1"/>
           <p:nvPr/>
         </p:nvSpPr>
@@ -14972,14 +16627,14 @@
       </p:sp>
       <p:sp>
         <p:nvSpPr>
-          <p:cNvPr id="605" name="Shape 11"/>
-          <p:cNvSpPr/>
-          <p:nvPr/>
-        </p:nvSpPr>
-        <p:spPr>
-          <a:xfrm>
-            <a:off x="6400799" y="1554480"/>
-            <a:ext cx="5166362" cy="2286001"/>
+          <p:cNvPr id="638" name="Shape 11"/>
+          <p:cNvSpPr/>
+          <p:nvPr/>
+        </p:nvSpPr>
+        <p:spPr>
+          <a:xfrm>
+            <a:off x="6400800" y="1554480"/>
+            <a:ext cx="5166361" cy="2286001"/>
           </a:xfrm>
           <a:prstGeom prst="rect">
             <a:avLst/>
@@ -15003,7 +16658,7 @@
       </p:sp>
       <p:sp>
         <p:nvSpPr>
-          <p:cNvPr id="606" name="Text 12"/>
+          <p:cNvPr id="639" name="Text 12"/>
           <p:cNvSpPr txBox="1"/>
           <p:nvPr/>
         </p:nvSpPr>
@@ -15187,7 +16842,7 @@
       </p:sp>
       <p:sp>
         <p:nvSpPr>
-          <p:cNvPr id="607" name="Shape 13"/>
+          <p:cNvPr id="640" name="Shape 13"/>
           <p:cNvSpPr/>
           <p:nvPr/>
         </p:nvSpPr>
@@ -15218,7 +16873,7 @@
       </p:sp>
       <p:sp>
         <p:nvSpPr>
-          <p:cNvPr id="608" name="Text 14"/>
+          <p:cNvPr id="641" name="Text 14"/>
           <p:cNvSpPr txBox="1"/>
           <p:nvPr/>
         </p:nvSpPr>
@@ -15288,7 +16943,7 @@
       </p:grpSpPr>
       <p:sp>
         <p:nvSpPr>
-          <p:cNvPr id="610" name="Text 0"/>
+          <p:cNvPr id="645" name="Text 0"/>
           <p:cNvSpPr txBox="1"/>
           <p:nvPr/>
         </p:nvSpPr>
@@ -15332,7 +16987,7 @@
       </p:sp>
       <p:sp>
         <p:nvSpPr>
-          <p:cNvPr id="611" name="Text 1"/>
+          <p:cNvPr id="646" name="Text 1"/>
           <p:cNvSpPr txBox="1"/>
           <p:nvPr/>
         </p:nvSpPr>
@@ -15380,7 +17035,7 @@
       </p:sp>
       <p:sp>
         <p:nvSpPr>
-          <p:cNvPr id="612" name="Text 2"/>
+          <p:cNvPr id="647" name="Text 2"/>
           <p:cNvSpPr txBox="1"/>
           <p:nvPr/>
         </p:nvSpPr>
@@ -15424,14 +17079,14 @@
       </p:sp>
       <p:sp>
         <p:nvSpPr>
-          <p:cNvPr id="613" name="Shape 3"/>
+          <p:cNvPr id="648" name="Shape 3"/>
           <p:cNvSpPr/>
           <p:nvPr/>
         </p:nvSpPr>
         <p:spPr>
           <a:xfrm>
             <a:off x="640080" y="2148839"/>
-            <a:ext cx="1600201" cy="1234441"/>
+            <a:ext cx="1600201" cy="1234442"/>
           </a:xfrm>
           <a:prstGeom prst="rect">
             <a:avLst/>
@@ -15455,13 +17110,13 @@
       </p:sp>
       <p:sp>
         <p:nvSpPr>
-          <p:cNvPr id="614" name="Text 4"/>
-          <p:cNvSpPr txBox="1"/>
-          <p:nvPr/>
-        </p:nvSpPr>
-        <p:spPr>
-          <a:xfrm>
-            <a:off x="640080" y="2672781"/>
+          <p:cNvPr id="649" name="Text 4"/>
+          <p:cNvSpPr txBox="1"/>
+          <p:nvPr/>
+        </p:nvSpPr>
+        <p:spPr>
+          <a:xfrm>
+            <a:off x="640080" y="2672782"/>
             <a:ext cx="1600201" cy="186557"/>
           </a:xfrm>
           <a:prstGeom prst="rect">
@@ -15499,13 +17154,13 @@
       </p:sp>
       <p:sp>
         <p:nvSpPr>
-          <p:cNvPr id="615" name="Shape 5"/>
-          <p:cNvSpPr/>
-          <p:nvPr/>
-        </p:nvSpPr>
-        <p:spPr>
-          <a:xfrm>
-            <a:off x="2285999" y="2766060"/>
+          <p:cNvPr id="650" name="Shape 5"/>
+          <p:cNvSpPr/>
+          <p:nvPr/>
+        </p:nvSpPr>
+        <p:spPr>
+          <a:xfrm>
+            <a:off x="2286000" y="2766060"/>
             <a:ext cx="411481" cy="1"/>
           </a:xfrm>
           <a:prstGeom prst="line">
@@ -15528,14 +17183,14 @@
       </p:sp>
       <p:sp>
         <p:nvSpPr>
-          <p:cNvPr id="616" name="Shape 6"/>
+          <p:cNvPr id="651" name="Shape 6"/>
           <p:cNvSpPr/>
           <p:nvPr/>
         </p:nvSpPr>
         <p:spPr>
           <a:xfrm>
             <a:off x="2743200" y="2148839"/>
-            <a:ext cx="1691640" cy="1234441"/>
+            <a:ext cx="1691640" cy="1234442"/>
           </a:xfrm>
           <a:prstGeom prst="rect">
             <a:avLst/>
@@ -15559,13 +17214,13 @@
       </p:sp>
       <p:sp>
         <p:nvSpPr>
-          <p:cNvPr id="617" name="Text 7"/>
-          <p:cNvSpPr txBox="1"/>
-          <p:nvPr/>
-        </p:nvSpPr>
-        <p:spPr>
-          <a:xfrm>
-            <a:off x="2743200" y="2558481"/>
+          <p:cNvPr id="652" name="Text 7"/>
+          <p:cNvSpPr txBox="1"/>
+          <p:nvPr/>
+        </p:nvSpPr>
+        <p:spPr>
+          <a:xfrm>
+            <a:off x="2743200" y="2558482"/>
             <a:ext cx="1691640" cy="415157"/>
           </a:xfrm>
           <a:prstGeom prst="rect">
@@ -15613,7 +17268,7 @@
       </p:sp>
       <p:sp>
         <p:nvSpPr>
-          <p:cNvPr id="618" name="Shape 8"/>
+          <p:cNvPr id="653" name="Shape 8"/>
           <p:cNvSpPr/>
           <p:nvPr/>
         </p:nvSpPr>
@@ -15642,7 +17297,7 @@
       </p:sp>
       <p:sp>
         <p:nvSpPr>
-          <p:cNvPr id="619" name="Shape 9"/>
+          <p:cNvPr id="654" name="Shape 9"/>
           <p:cNvSpPr/>
           <p:nvPr/>
         </p:nvSpPr>
@@ -15674,7 +17329,7 @@
       </p:sp>
       <p:sp>
         <p:nvSpPr>
-          <p:cNvPr id="620" name="Text 10"/>
+          <p:cNvPr id="655" name="Text 10"/>
           <p:cNvSpPr txBox="1"/>
           <p:nvPr/>
         </p:nvSpPr>
@@ -15718,14 +17373,14 @@
       </p:sp>
       <p:sp>
         <p:nvSpPr>
-          <p:cNvPr id="621" name="Shape 11"/>
+          <p:cNvPr id="656" name="Shape 11"/>
           <p:cNvSpPr/>
           <p:nvPr/>
         </p:nvSpPr>
         <p:spPr>
           <a:xfrm>
             <a:off x="5166359" y="2148839"/>
-            <a:ext cx="1600201" cy="1234441"/>
+            <a:ext cx="1600201" cy="1234442"/>
           </a:xfrm>
           <a:prstGeom prst="rect">
             <a:avLst/>
@@ -15749,7 +17404,7 @@
       </p:sp>
       <p:sp>
         <p:nvSpPr>
-          <p:cNvPr id="622" name="Text 12"/>
+          <p:cNvPr id="657" name="Text 12"/>
           <p:cNvSpPr txBox="1"/>
           <p:nvPr/>
         </p:nvSpPr>
@@ -15793,7 +17448,7 @@
       </p:sp>
       <p:sp>
         <p:nvSpPr>
-          <p:cNvPr id="623" name="Shape 13"/>
+          <p:cNvPr id="658" name="Shape 13"/>
           <p:cNvSpPr/>
           <p:nvPr/>
         </p:nvSpPr>
@@ -15822,14 +17477,14 @@
       </p:sp>
       <p:sp>
         <p:nvSpPr>
-          <p:cNvPr id="624" name="Shape 14"/>
+          <p:cNvPr id="659" name="Shape 14"/>
           <p:cNvSpPr/>
           <p:nvPr/>
         </p:nvSpPr>
         <p:spPr>
           <a:xfrm>
             <a:off x="7040880" y="2148839"/>
-            <a:ext cx="1600201" cy="1234441"/>
+            <a:ext cx="1600201" cy="1234442"/>
           </a:xfrm>
           <a:prstGeom prst="rect">
             <a:avLst/>
@@ -15853,7 +17508,7 @@
       </p:sp>
       <p:sp>
         <p:nvSpPr>
-          <p:cNvPr id="625" name="Text 15"/>
+          <p:cNvPr id="660" name="Text 15"/>
           <p:cNvSpPr txBox="1"/>
           <p:nvPr/>
         </p:nvSpPr>
@@ -15907,13 +17562,13 @@
       </p:sp>
       <p:sp>
         <p:nvSpPr>
-          <p:cNvPr id="626" name="Shape 16"/>
-          <p:cNvSpPr/>
-          <p:nvPr/>
-        </p:nvSpPr>
-        <p:spPr>
-          <a:xfrm>
-            <a:off x="8915399" y="2766060"/>
+          <p:cNvPr id="661" name="Shape 16"/>
+          <p:cNvSpPr/>
+          <p:nvPr/>
+        </p:nvSpPr>
+        <p:spPr>
+          <a:xfrm>
+            <a:off x="8915400" y="2766060"/>
             <a:ext cx="411481" cy="1"/>
           </a:xfrm>
           <a:prstGeom prst="line">
@@ -15936,14 +17591,14 @@
       </p:sp>
       <p:sp>
         <p:nvSpPr>
-          <p:cNvPr id="627" name="Shape 17"/>
+          <p:cNvPr id="662" name="Shape 17"/>
           <p:cNvSpPr/>
           <p:nvPr/>
         </p:nvSpPr>
         <p:spPr>
           <a:xfrm>
             <a:off x="9372600" y="2148839"/>
-            <a:ext cx="2148840" cy="1234441"/>
+            <a:ext cx="2148840" cy="1234442"/>
           </a:xfrm>
           <a:prstGeom prst="rect">
             <a:avLst/>
@@ -15967,13 +17622,13 @@
       </p:sp>
       <p:sp>
         <p:nvSpPr>
-          <p:cNvPr id="628" name="Text 18"/>
-          <p:cNvSpPr txBox="1"/>
-          <p:nvPr/>
-        </p:nvSpPr>
-        <p:spPr>
-          <a:xfrm>
-            <a:off x="9372600" y="2558481"/>
+          <p:cNvPr id="663" name="Text 18"/>
+          <p:cNvSpPr txBox="1"/>
+          <p:nvPr/>
+        </p:nvSpPr>
+        <p:spPr>
+          <a:xfrm>
+            <a:off x="9372600" y="2558482"/>
             <a:ext cx="2148840" cy="415157"/>
           </a:xfrm>
           <a:prstGeom prst="rect">
@@ -16021,14 +17676,14 @@
       </p:sp>
       <p:sp>
         <p:nvSpPr>
-          <p:cNvPr id="629" name="Text 19"/>
-          <p:cNvSpPr txBox="1"/>
-          <p:nvPr/>
-        </p:nvSpPr>
-        <p:spPr>
-          <a:xfrm>
-            <a:off x="640079" y="4343399"/>
-            <a:ext cx="3474722" cy="241649"/>
+          <p:cNvPr id="664" name="Text 19"/>
+          <p:cNvSpPr txBox="1"/>
+          <p:nvPr/>
+        </p:nvSpPr>
+        <p:spPr>
+          <a:xfrm>
+            <a:off x="640079" y="4343400"/>
+            <a:ext cx="3474722" cy="241648"/>
           </a:xfrm>
           <a:prstGeom prst="rect">
             <a:avLst/>
@@ -16065,7 +17720,7 @@
       </p:sp>
       <p:sp>
         <p:nvSpPr>
-          <p:cNvPr id="630" name="Text 20"/>
+          <p:cNvPr id="665" name="Text 20"/>
           <p:cNvSpPr txBox="1"/>
           <p:nvPr/>
         </p:nvSpPr>
@@ -16109,14 +17764,14 @@
       </p:sp>
       <p:sp>
         <p:nvSpPr>
-          <p:cNvPr id="631" name="Text 21"/>
-          <p:cNvSpPr txBox="1"/>
-          <p:nvPr/>
-        </p:nvSpPr>
-        <p:spPr>
-          <a:xfrm>
-            <a:off x="4343399" y="4343399"/>
-            <a:ext cx="3474722" cy="241649"/>
+          <p:cNvPr id="666" name="Text 21"/>
+          <p:cNvSpPr txBox="1"/>
+          <p:nvPr/>
+        </p:nvSpPr>
+        <p:spPr>
+          <a:xfrm>
+            <a:off x="4343400" y="4343400"/>
+            <a:ext cx="3474721" cy="241648"/>
           </a:xfrm>
           <a:prstGeom prst="rect">
             <a:avLst/>
@@ -16153,14 +17808,14 @@
       </p:sp>
       <p:sp>
         <p:nvSpPr>
-          <p:cNvPr id="632" name="Text 22"/>
-          <p:cNvSpPr txBox="1"/>
-          <p:nvPr/>
-        </p:nvSpPr>
-        <p:spPr>
-          <a:xfrm>
-            <a:off x="4343399" y="4754879"/>
-            <a:ext cx="3474722" cy="415157"/>
+          <p:cNvPr id="667" name="Text 22"/>
+          <p:cNvSpPr txBox="1"/>
+          <p:nvPr/>
+        </p:nvSpPr>
+        <p:spPr>
+          <a:xfrm>
+            <a:off x="4343400" y="4754879"/>
+            <a:ext cx="3474721" cy="415157"/>
           </a:xfrm>
           <a:prstGeom prst="rect">
             <a:avLst/>
@@ -16197,14 +17852,14 @@
       </p:sp>
       <p:sp>
         <p:nvSpPr>
-          <p:cNvPr id="633" name="Text 23"/>
-          <p:cNvSpPr txBox="1"/>
-          <p:nvPr/>
-        </p:nvSpPr>
-        <p:spPr>
-          <a:xfrm>
-            <a:off x="8046719" y="4343399"/>
-            <a:ext cx="3474721" cy="241649"/>
+          <p:cNvPr id="668" name="Text 23"/>
+          <p:cNvSpPr txBox="1"/>
+          <p:nvPr/>
+        </p:nvSpPr>
+        <p:spPr>
+          <a:xfrm>
+            <a:off x="8046719" y="4343400"/>
+            <a:ext cx="3474721" cy="241648"/>
           </a:xfrm>
           <a:prstGeom prst="rect">
             <a:avLst/>
@@ -16241,7 +17896,7 @@
       </p:sp>
       <p:sp>
         <p:nvSpPr>
-          <p:cNvPr id="634" name="Text 24"/>
+          <p:cNvPr id="669" name="Text 24"/>
           <p:cNvSpPr txBox="1"/>
           <p:nvPr/>
         </p:nvSpPr>
@@ -16311,7 +17966,7 @@
       </p:grpSpPr>
       <p:sp>
         <p:nvSpPr>
-          <p:cNvPr id="636" name="Text 0"/>
+          <p:cNvPr id="673" name="Text 0"/>
           <p:cNvSpPr txBox="1"/>
           <p:nvPr/>
         </p:nvSpPr>
@@ -16355,7 +18010,7 @@
       </p:sp>
       <p:sp>
         <p:nvSpPr>
-          <p:cNvPr id="637" name="Text 1"/>
+          <p:cNvPr id="674" name="Text 1"/>
           <p:cNvSpPr txBox="1"/>
           <p:nvPr/>
         </p:nvSpPr>
@@ -16403,7 +18058,7 @@
       </p:sp>
       <p:sp>
         <p:nvSpPr>
-          <p:cNvPr id="638" name="Text 2"/>
+          <p:cNvPr id="675" name="Text 2"/>
           <p:cNvSpPr txBox="1"/>
           <p:nvPr/>
         </p:nvSpPr>
@@ -16447,7 +18102,7 @@
       </p:sp>
       <p:sp>
         <p:nvSpPr>
-          <p:cNvPr id="639" name="Text 3"/>
+          <p:cNvPr id="676" name="Text 3"/>
           <p:cNvSpPr txBox="1"/>
           <p:nvPr/>
         </p:nvSpPr>
@@ -16491,7 +18146,7 @@
       </p:sp>
       <p:sp>
         <p:nvSpPr>
-          <p:cNvPr id="640" name="Text 4"/>
+          <p:cNvPr id="677" name="Text 4"/>
           <p:cNvSpPr txBox="1"/>
           <p:nvPr/>
         </p:nvSpPr>
@@ -16535,7 +18190,7 @@
       </p:sp>
       <p:sp>
         <p:nvSpPr>
-          <p:cNvPr id="641" name="Text 5"/>
+          <p:cNvPr id="678" name="Text 5"/>
           <p:cNvSpPr txBox="1"/>
           <p:nvPr/>
         </p:nvSpPr>
@@ -16579,7 +18234,7 @@
       </p:sp>
       <p:sp>
         <p:nvSpPr>
-          <p:cNvPr id="642" name="Text 6"/>
+          <p:cNvPr id="679" name="Text 6"/>
           <p:cNvSpPr txBox="1"/>
           <p:nvPr/>
         </p:nvSpPr>
@@ -16623,7 +18278,7 @@
       </p:sp>
       <p:sp>
         <p:nvSpPr>
-          <p:cNvPr id="643" name="Text 7"/>
+          <p:cNvPr id="680" name="Text 7"/>
           <p:cNvSpPr txBox="1"/>
           <p:nvPr/>
         </p:nvSpPr>
@@ -16667,7 +18322,7 @@
       </p:sp>
       <p:sp>
         <p:nvSpPr>
-          <p:cNvPr id="644" name="Text 8"/>
+          <p:cNvPr id="681" name="Text 8"/>
           <p:cNvSpPr txBox="1"/>
           <p:nvPr/>
         </p:nvSpPr>
@@ -16711,7 +18366,7 @@
       </p:sp>
       <p:sp>
         <p:nvSpPr>
-          <p:cNvPr id="645" name="Text 9"/>
+          <p:cNvPr id="682" name="Text 9"/>
           <p:cNvSpPr txBox="1"/>
           <p:nvPr/>
         </p:nvSpPr>
@@ -16755,7 +18410,7 @@
       </p:sp>
       <p:sp>
         <p:nvSpPr>
-          <p:cNvPr id="646" name="Text 10"/>
+          <p:cNvPr id="683" name="Text 10"/>
           <p:cNvSpPr txBox="1"/>
           <p:nvPr/>
         </p:nvSpPr>
@@ -16799,14 +18454,14 @@
       </p:sp>
       <p:sp>
         <p:nvSpPr>
-          <p:cNvPr id="647" name="Shape 11"/>
-          <p:cNvSpPr/>
-          <p:nvPr/>
-        </p:nvSpPr>
-        <p:spPr>
-          <a:xfrm>
-            <a:off x="6400799" y="1554479"/>
-            <a:ext cx="5166362" cy="1517906"/>
+          <p:cNvPr id="684" name="Shape 11"/>
+          <p:cNvSpPr/>
+          <p:nvPr/>
+        </p:nvSpPr>
+        <p:spPr>
+          <a:xfrm>
+            <a:off x="6400800" y="1554480"/>
+            <a:ext cx="5166361" cy="1517905"/>
           </a:xfrm>
           <a:prstGeom prst="rect">
             <a:avLst/>
@@ -16830,7 +18485,7 @@
       </p:sp>
       <p:sp>
         <p:nvSpPr>
-          <p:cNvPr id="648" name="Text 12"/>
+          <p:cNvPr id="685" name="Text 12"/>
           <p:cNvSpPr txBox="1"/>
           <p:nvPr/>
         </p:nvSpPr>
@@ -16939,7 +18594,7 @@
       </p:sp>
       <p:sp>
         <p:nvSpPr>
-          <p:cNvPr id="649" name="Shape 13"/>
+          <p:cNvPr id="686" name="Shape 13"/>
           <p:cNvSpPr/>
           <p:nvPr/>
         </p:nvSpPr>
@@ -16970,7 +18625,7 @@
       </p:sp>
       <p:sp>
         <p:nvSpPr>
-          <p:cNvPr id="650" name="Text 14"/>
+          <p:cNvPr id="687" name="Text 14"/>
           <p:cNvSpPr txBox="1"/>
           <p:nvPr/>
         </p:nvSpPr>
@@ -17040,7 +18695,7 @@
       </p:grpSpPr>
       <p:sp>
         <p:nvSpPr>
-          <p:cNvPr id="91" name="Text 0"/>
+          <p:cNvPr id="94" name="Text 0"/>
           <p:cNvSpPr txBox="1"/>
           <p:nvPr/>
         </p:nvSpPr>
@@ -17084,7 +18739,7 @@
       </p:sp>
       <p:sp>
         <p:nvSpPr>
-          <p:cNvPr id="92" name="Text 1"/>
+          <p:cNvPr id="95" name="Text 1"/>
           <p:cNvSpPr txBox="1"/>
           <p:nvPr/>
         </p:nvSpPr>
@@ -17132,7 +18787,7 @@
       </p:sp>
       <p:sp>
         <p:nvSpPr>
-          <p:cNvPr id="93" name="Text 2"/>
+          <p:cNvPr id="96" name="Text 2"/>
           <p:cNvSpPr txBox="1"/>
           <p:nvPr/>
         </p:nvSpPr>
@@ -17176,7 +18831,7 @@
       </p:sp>
       <p:sp>
         <p:nvSpPr>
-          <p:cNvPr id="94" name="Shape 3"/>
+          <p:cNvPr id="97" name="Shape 3"/>
           <p:cNvSpPr/>
           <p:nvPr/>
         </p:nvSpPr>
@@ -17207,7 +18862,7 @@
       </p:sp>
       <p:sp>
         <p:nvSpPr>
-          <p:cNvPr id="95" name="Text 5"/>
+          <p:cNvPr id="98" name="Text 5"/>
           <p:cNvSpPr txBox="1"/>
           <p:nvPr/>
         </p:nvSpPr>
@@ -17251,7 +18906,7 @@
       </p:sp>
       <p:sp>
         <p:nvSpPr>
-          <p:cNvPr id="96" name="Shape 6"/>
+          <p:cNvPr id="99" name="Shape 6"/>
           <p:cNvSpPr/>
           <p:nvPr/>
         </p:nvSpPr>
@@ -17282,7 +18937,7 @@
       </p:sp>
       <p:sp>
         <p:nvSpPr>
-          <p:cNvPr id="97" name="Text 7"/>
+          <p:cNvPr id="100" name="Text 7"/>
           <p:cNvSpPr txBox="1"/>
           <p:nvPr/>
         </p:nvSpPr>
@@ -17326,7 +18981,7 @@
       </p:sp>
       <p:sp>
         <p:nvSpPr>
-          <p:cNvPr id="98" name="Text 8"/>
+          <p:cNvPr id="101" name="Text 8"/>
           <p:cNvSpPr txBox="1"/>
           <p:nvPr/>
         </p:nvSpPr>
@@ -17370,7 +19025,7 @@
       </p:sp>
       <p:sp>
         <p:nvSpPr>
-          <p:cNvPr id="99" name="Shape 9"/>
+          <p:cNvPr id="102" name="Shape 9"/>
           <p:cNvSpPr/>
           <p:nvPr/>
         </p:nvSpPr>
@@ -17401,7 +19056,7 @@
       </p:sp>
       <p:sp>
         <p:nvSpPr>
-          <p:cNvPr id="100" name="Text 11"/>
+          <p:cNvPr id="103" name="Text 11"/>
           <p:cNvSpPr txBox="1"/>
           <p:nvPr/>
         </p:nvSpPr>
@@ -17445,7 +19100,7 @@
       </p:sp>
       <p:sp>
         <p:nvSpPr>
-          <p:cNvPr id="101" name="Shape 12"/>
+          <p:cNvPr id="104" name="Shape 12"/>
           <p:cNvSpPr/>
           <p:nvPr/>
         </p:nvSpPr>
@@ -17476,7 +19131,7 @@
       </p:sp>
       <p:sp>
         <p:nvSpPr>
-          <p:cNvPr id="102" name="Text 13"/>
+          <p:cNvPr id="105" name="Text 13"/>
           <p:cNvSpPr txBox="1"/>
           <p:nvPr/>
         </p:nvSpPr>
@@ -17520,7 +19175,7 @@
       </p:sp>
       <p:sp>
         <p:nvSpPr>
-          <p:cNvPr id="103" name="Text 14"/>
+          <p:cNvPr id="106" name="Text 14"/>
           <p:cNvSpPr txBox="1"/>
           <p:nvPr/>
         </p:nvSpPr>
@@ -17564,7 +19219,7 @@
       </p:sp>
       <p:sp>
         <p:nvSpPr>
-          <p:cNvPr id="104" name="Shape 15"/>
+          <p:cNvPr id="107" name="Shape 15"/>
           <p:cNvSpPr/>
           <p:nvPr/>
         </p:nvSpPr>
@@ -17595,7 +19250,7 @@
       </p:sp>
       <p:sp>
         <p:nvSpPr>
-          <p:cNvPr id="105" name="Text 17"/>
+          <p:cNvPr id="108" name="Text 17"/>
           <p:cNvSpPr txBox="1"/>
           <p:nvPr/>
         </p:nvSpPr>
@@ -17639,7 +19294,7 @@
       </p:sp>
       <p:sp>
         <p:nvSpPr>
-          <p:cNvPr id="106" name="Shape 18"/>
+          <p:cNvPr id="109" name="Shape 18"/>
           <p:cNvSpPr/>
           <p:nvPr/>
         </p:nvSpPr>
@@ -17670,7 +19325,7 @@
       </p:sp>
       <p:sp>
         <p:nvSpPr>
-          <p:cNvPr id="107" name="Text 19"/>
+          <p:cNvPr id="110" name="Text 19"/>
           <p:cNvSpPr txBox="1"/>
           <p:nvPr/>
         </p:nvSpPr>
@@ -17714,7 +19369,7 @@
       </p:sp>
       <p:sp>
         <p:nvSpPr>
-          <p:cNvPr id="108" name="Text 20"/>
+          <p:cNvPr id="111" name="Text 20"/>
           <p:cNvSpPr txBox="1"/>
           <p:nvPr/>
         </p:nvSpPr>
@@ -17758,7 +19413,7 @@
       </p:sp>
       <p:sp>
         <p:nvSpPr>
-          <p:cNvPr id="109" name="Text 21"/>
+          <p:cNvPr id="112" name="Text 21"/>
           <p:cNvSpPr txBox="1"/>
           <p:nvPr/>
         </p:nvSpPr>
@@ -17828,7 +19483,7 @@
       </p:grpSpPr>
       <p:sp>
         <p:nvSpPr>
-          <p:cNvPr id="652" name="Text 0"/>
+          <p:cNvPr id="691" name="Text 0"/>
           <p:cNvSpPr txBox="1"/>
           <p:nvPr/>
         </p:nvSpPr>
@@ -17872,7 +19527,7 @@
       </p:sp>
       <p:sp>
         <p:nvSpPr>
-          <p:cNvPr id="653" name="Text 1"/>
+          <p:cNvPr id="692" name="Text 1"/>
           <p:cNvSpPr txBox="1"/>
           <p:nvPr/>
         </p:nvSpPr>
@@ -17920,7 +19575,7 @@
       </p:sp>
       <p:sp>
         <p:nvSpPr>
-          <p:cNvPr id="654" name="Text 2"/>
+          <p:cNvPr id="693" name="Text 2"/>
           <p:cNvSpPr txBox="1"/>
           <p:nvPr/>
         </p:nvSpPr>
@@ -17964,14 +19619,14 @@
       </p:sp>
       <p:pic>
         <p:nvPicPr>
-          <p:cNvPr id="655" name="Image 0" descr="Image 0"/>
+          <p:cNvPr id="694" name="Image 0" descr="Image 0"/>
           <p:cNvPicPr>
             <a:picLocks noChangeAspect="1"/>
           </p:cNvPicPr>
           <p:nvPr/>
         </p:nvPicPr>
         <p:blipFill>
-          <a:blip r:embed="rId2">
+          <a:blip r:embed="rId3">
             <a:extLst/>
           </a:blip>
           <a:stretch>
@@ -17993,7 +19648,7 @@
       </p:pic>
       <p:sp>
         <p:nvSpPr>
-          <p:cNvPr id="656" name="Text 3"/>
+          <p:cNvPr id="695" name="Text 3"/>
           <p:cNvSpPr txBox="1"/>
           <p:nvPr/>
         </p:nvSpPr>
@@ -18041,14 +19696,14 @@
       </p:sp>
       <p:sp>
         <p:nvSpPr>
-          <p:cNvPr id="657" name="Text 4"/>
-          <p:cNvSpPr txBox="1"/>
-          <p:nvPr/>
-        </p:nvSpPr>
-        <p:spPr>
-          <a:xfrm>
-            <a:off x="8145663" y="2285999"/>
-            <a:ext cx="3405953" cy="825849"/>
+          <p:cNvPr id="696" name="Text 4"/>
+          <p:cNvSpPr txBox="1"/>
+          <p:nvPr/>
+        </p:nvSpPr>
+        <p:spPr>
+          <a:xfrm>
+            <a:off x="8145663" y="2286000"/>
+            <a:ext cx="3405953" cy="825848"/>
           </a:xfrm>
           <a:prstGeom prst="rect">
             <a:avLst/>
@@ -18085,7 +19740,7 @@
       </p:sp>
       <p:sp>
         <p:nvSpPr>
-          <p:cNvPr id="658" name="Text 5"/>
+          <p:cNvPr id="697" name="Text 5"/>
           <p:cNvSpPr txBox="1"/>
           <p:nvPr/>
         </p:nvSpPr>
@@ -18155,7 +19810,7 @@
       </p:grpSpPr>
       <p:sp>
         <p:nvSpPr>
-          <p:cNvPr id="660" name="Text 0"/>
+          <p:cNvPr id="701" name="Text 0"/>
           <p:cNvSpPr txBox="1"/>
           <p:nvPr/>
         </p:nvSpPr>
@@ -18199,7 +19854,7 @@
       </p:sp>
       <p:sp>
         <p:nvSpPr>
-          <p:cNvPr id="661" name="Text 1"/>
+          <p:cNvPr id="702" name="Text 1"/>
           <p:cNvSpPr txBox="1"/>
           <p:nvPr/>
         </p:nvSpPr>
@@ -18243,7 +19898,7 @@
       </p:sp>
       <p:sp>
         <p:nvSpPr>
-          <p:cNvPr id="662" name="Text 2"/>
+          <p:cNvPr id="703" name="Text 2"/>
           <p:cNvSpPr txBox="1"/>
           <p:nvPr/>
         </p:nvSpPr>
@@ -18291,7 +19946,7 @@
       </p:sp>
       <p:sp>
         <p:nvSpPr>
-          <p:cNvPr id="663" name="Shape 3"/>
+          <p:cNvPr id="704" name="Shape 3"/>
           <p:cNvSpPr/>
           <p:nvPr/>
         </p:nvSpPr>
@@ -18322,7 +19977,7 @@
       </p:sp>
       <p:sp>
         <p:nvSpPr>
-          <p:cNvPr id="664" name="Text 4"/>
+          <p:cNvPr id="705" name="Text 4"/>
           <p:cNvSpPr txBox="1"/>
           <p:nvPr/>
         </p:nvSpPr>
@@ -18382,14 +20037,14 @@
       </p:sp>
       <p:sp>
         <p:nvSpPr>
-          <p:cNvPr id="665" name="Shape 5"/>
-          <p:cNvSpPr/>
-          <p:nvPr/>
-        </p:nvSpPr>
-        <p:spPr>
-          <a:xfrm>
-            <a:off x="8229599" y="1737360"/>
-            <a:ext cx="402338" cy="402337"/>
+          <p:cNvPr id="706" name="Shape 5"/>
+          <p:cNvSpPr/>
+          <p:nvPr/>
+        </p:nvSpPr>
+        <p:spPr>
+          <a:xfrm>
+            <a:off x="8229600" y="1737360"/>
+            <a:ext cx="402337" cy="402337"/>
           </a:xfrm>
           <a:prstGeom prst="rect">
             <a:avLst/>
@@ -18413,7 +20068,7 @@
       </p:sp>
       <p:sp>
         <p:nvSpPr>
-          <p:cNvPr id="666" name="Shape 6"/>
+          <p:cNvPr id="707" name="Shape 6"/>
           <p:cNvSpPr/>
           <p:nvPr/>
         </p:nvSpPr>
@@ -18444,7 +20099,7 @@
       </p:sp>
       <p:sp>
         <p:nvSpPr>
-          <p:cNvPr id="667" name="Shape 7"/>
+          <p:cNvPr id="708" name="Shape 7"/>
           <p:cNvSpPr/>
           <p:nvPr/>
         </p:nvSpPr>
@@ -18475,7 +20130,7 @@
       </p:sp>
       <p:sp>
         <p:nvSpPr>
-          <p:cNvPr id="668" name="Shape 8"/>
+          <p:cNvPr id="709" name="Shape 8"/>
           <p:cNvSpPr/>
           <p:nvPr/>
         </p:nvSpPr>
@@ -18506,7 +20161,7 @@
       </p:sp>
       <p:sp>
         <p:nvSpPr>
-          <p:cNvPr id="669" name="Shape 9"/>
+          <p:cNvPr id="710" name="Shape 9"/>
           <p:cNvSpPr/>
           <p:nvPr/>
         </p:nvSpPr>
@@ -18537,7 +20192,7 @@
       </p:sp>
       <p:sp>
         <p:nvSpPr>
-          <p:cNvPr id="670" name="Shape 10"/>
+          <p:cNvPr id="711" name="Shape 10"/>
           <p:cNvSpPr/>
           <p:nvPr/>
         </p:nvSpPr>
@@ -18568,7 +20223,7 @@
       </p:sp>
       <p:sp>
         <p:nvSpPr>
-          <p:cNvPr id="671" name="Shape 11"/>
+          <p:cNvPr id="712" name="Shape 11"/>
           <p:cNvSpPr/>
           <p:nvPr/>
         </p:nvSpPr>
@@ -18599,7 +20254,7 @@
       </p:sp>
       <p:sp>
         <p:nvSpPr>
-          <p:cNvPr id="672" name="Shape 12"/>
+          <p:cNvPr id="713" name="Shape 12"/>
           <p:cNvSpPr/>
           <p:nvPr/>
         </p:nvSpPr>
@@ -18630,14 +20285,14 @@
       </p:sp>
       <p:sp>
         <p:nvSpPr>
-          <p:cNvPr id="673" name="Shape 13"/>
-          <p:cNvSpPr/>
-          <p:nvPr/>
-        </p:nvSpPr>
-        <p:spPr>
-          <a:xfrm>
-            <a:off x="8229599" y="2139695"/>
-            <a:ext cx="402338" cy="402337"/>
+          <p:cNvPr id="714" name="Shape 13"/>
+          <p:cNvSpPr/>
+          <p:nvPr/>
+        </p:nvSpPr>
+        <p:spPr>
+          <a:xfrm>
+            <a:off x="8229600" y="2139695"/>
+            <a:ext cx="402337" cy="402337"/>
           </a:xfrm>
           <a:prstGeom prst="rect">
             <a:avLst/>
@@ -18661,7 +20316,7 @@
       </p:sp>
       <p:sp>
         <p:nvSpPr>
-          <p:cNvPr id="674" name="Shape 14"/>
+          <p:cNvPr id="715" name="Shape 14"/>
           <p:cNvSpPr/>
           <p:nvPr/>
         </p:nvSpPr>
@@ -18692,7 +20347,7 @@
       </p:sp>
       <p:sp>
         <p:nvSpPr>
-          <p:cNvPr id="675" name="Shape 15"/>
+          <p:cNvPr id="716" name="Shape 15"/>
           <p:cNvSpPr/>
           <p:nvPr/>
         </p:nvSpPr>
@@ -18723,7 +20378,7 @@
       </p:sp>
       <p:sp>
         <p:nvSpPr>
-          <p:cNvPr id="676" name="Shape 16"/>
+          <p:cNvPr id="717" name="Shape 16"/>
           <p:cNvSpPr/>
           <p:nvPr/>
         </p:nvSpPr>
@@ -18754,7 +20409,7 @@
       </p:sp>
       <p:sp>
         <p:nvSpPr>
-          <p:cNvPr id="677" name="Shape 17"/>
+          <p:cNvPr id="718" name="Shape 17"/>
           <p:cNvSpPr/>
           <p:nvPr/>
         </p:nvSpPr>
@@ -18785,7 +20440,7 @@
       </p:sp>
       <p:sp>
         <p:nvSpPr>
-          <p:cNvPr id="678" name="Shape 18"/>
+          <p:cNvPr id="719" name="Shape 18"/>
           <p:cNvSpPr/>
           <p:nvPr/>
         </p:nvSpPr>
@@ -18816,7 +20471,7 @@
       </p:sp>
       <p:sp>
         <p:nvSpPr>
-          <p:cNvPr id="679" name="Shape 19"/>
+          <p:cNvPr id="720" name="Shape 19"/>
           <p:cNvSpPr/>
           <p:nvPr/>
         </p:nvSpPr>
@@ -18847,7 +20502,7 @@
       </p:sp>
       <p:sp>
         <p:nvSpPr>
-          <p:cNvPr id="680" name="Shape 20"/>
+          <p:cNvPr id="721" name="Shape 20"/>
           <p:cNvSpPr/>
           <p:nvPr/>
         </p:nvSpPr>
@@ -18878,14 +20533,14 @@
       </p:sp>
       <p:sp>
         <p:nvSpPr>
-          <p:cNvPr id="681" name="Shape 21"/>
-          <p:cNvSpPr/>
-          <p:nvPr/>
-        </p:nvSpPr>
-        <p:spPr>
-          <a:xfrm>
-            <a:off x="8229599" y="2542032"/>
-            <a:ext cx="402338" cy="402337"/>
+          <p:cNvPr id="722" name="Shape 21"/>
+          <p:cNvSpPr/>
+          <p:nvPr/>
+        </p:nvSpPr>
+        <p:spPr>
+          <a:xfrm>
+            <a:off x="8229600" y="2542032"/>
+            <a:ext cx="402337" cy="402337"/>
           </a:xfrm>
           <a:prstGeom prst="rect">
             <a:avLst/>
@@ -18909,7 +20564,7 @@
       </p:sp>
       <p:sp>
         <p:nvSpPr>
-          <p:cNvPr id="682" name="Shape 22"/>
+          <p:cNvPr id="723" name="Shape 22"/>
           <p:cNvSpPr/>
           <p:nvPr/>
         </p:nvSpPr>
@@ -18940,7 +20595,7 @@
       </p:sp>
       <p:sp>
         <p:nvSpPr>
-          <p:cNvPr id="683" name="Shape 23"/>
+          <p:cNvPr id="724" name="Shape 23"/>
           <p:cNvSpPr/>
           <p:nvPr/>
         </p:nvSpPr>
@@ -18971,7 +20626,7 @@
       </p:sp>
       <p:sp>
         <p:nvSpPr>
-          <p:cNvPr id="684" name="Shape 24"/>
+          <p:cNvPr id="725" name="Shape 24"/>
           <p:cNvSpPr/>
           <p:nvPr/>
         </p:nvSpPr>
@@ -19002,7 +20657,7 @@
       </p:sp>
       <p:sp>
         <p:nvSpPr>
-          <p:cNvPr id="685" name="Shape 25"/>
+          <p:cNvPr id="726" name="Shape 25"/>
           <p:cNvSpPr/>
           <p:nvPr/>
         </p:nvSpPr>
@@ -19033,7 +20688,7 @@
       </p:sp>
       <p:sp>
         <p:nvSpPr>
-          <p:cNvPr id="686" name="Shape 26"/>
+          <p:cNvPr id="727" name="Shape 26"/>
           <p:cNvSpPr/>
           <p:nvPr/>
         </p:nvSpPr>
@@ -19064,7 +20719,7 @@
       </p:sp>
       <p:sp>
         <p:nvSpPr>
-          <p:cNvPr id="687" name="Shape 27"/>
+          <p:cNvPr id="728" name="Shape 27"/>
           <p:cNvSpPr/>
           <p:nvPr/>
         </p:nvSpPr>
@@ -19095,7 +20750,7 @@
       </p:sp>
       <p:sp>
         <p:nvSpPr>
-          <p:cNvPr id="688" name="Shape 28"/>
+          <p:cNvPr id="729" name="Shape 28"/>
           <p:cNvSpPr/>
           <p:nvPr/>
         </p:nvSpPr>
@@ -19126,14 +20781,14 @@
       </p:sp>
       <p:sp>
         <p:nvSpPr>
-          <p:cNvPr id="689" name="Shape 29"/>
-          <p:cNvSpPr/>
-          <p:nvPr/>
-        </p:nvSpPr>
-        <p:spPr>
-          <a:xfrm>
-            <a:off x="8229599" y="2944367"/>
-            <a:ext cx="402338" cy="402337"/>
+          <p:cNvPr id="730" name="Shape 29"/>
+          <p:cNvSpPr/>
+          <p:nvPr/>
+        </p:nvSpPr>
+        <p:spPr>
+          <a:xfrm>
+            <a:off x="8229600" y="2944367"/>
+            <a:ext cx="402337" cy="402337"/>
           </a:xfrm>
           <a:prstGeom prst="rect">
             <a:avLst/>
@@ -19157,7 +20812,7 @@
       </p:sp>
       <p:sp>
         <p:nvSpPr>
-          <p:cNvPr id="690" name="Shape 30"/>
+          <p:cNvPr id="731" name="Shape 30"/>
           <p:cNvSpPr/>
           <p:nvPr/>
         </p:nvSpPr>
@@ -19188,7 +20843,7 @@
       </p:sp>
       <p:sp>
         <p:nvSpPr>
-          <p:cNvPr id="691" name="Shape 31"/>
+          <p:cNvPr id="732" name="Shape 31"/>
           <p:cNvSpPr/>
           <p:nvPr/>
         </p:nvSpPr>
@@ -19219,7 +20874,7 @@
       </p:sp>
       <p:sp>
         <p:nvSpPr>
-          <p:cNvPr id="692" name="Shape 32"/>
+          <p:cNvPr id="733" name="Shape 32"/>
           <p:cNvSpPr/>
           <p:nvPr/>
         </p:nvSpPr>
@@ -19250,7 +20905,7 @@
       </p:sp>
       <p:sp>
         <p:nvSpPr>
-          <p:cNvPr id="693" name="Shape 33"/>
+          <p:cNvPr id="734" name="Shape 33"/>
           <p:cNvSpPr/>
           <p:nvPr/>
         </p:nvSpPr>
@@ -19281,7 +20936,7 @@
       </p:sp>
       <p:sp>
         <p:nvSpPr>
-          <p:cNvPr id="694" name="Shape 34"/>
+          <p:cNvPr id="735" name="Shape 34"/>
           <p:cNvSpPr/>
           <p:nvPr/>
         </p:nvSpPr>
@@ -19312,7 +20967,7 @@
       </p:sp>
       <p:sp>
         <p:nvSpPr>
-          <p:cNvPr id="695" name="Shape 35"/>
+          <p:cNvPr id="736" name="Shape 35"/>
           <p:cNvSpPr/>
           <p:nvPr/>
         </p:nvSpPr>
@@ -19343,7 +20998,7 @@
       </p:sp>
       <p:sp>
         <p:nvSpPr>
-          <p:cNvPr id="696" name="Shape 36"/>
+          <p:cNvPr id="737" name="Shape 36"/>
           <p:cNvSpPr/>
           <p:nvPr/>
         </p:nvSpPr>
@@ -19374,14 +21029,14 @@
       </p:sp>
       <p:sp>
         <p:nvSpPr>
-          <p:cNvPr id="697" name="Shape 37"/>
-          <p:cNvSpPr/>
-          <p:nvPr/>
-        </p:nvSpPr>
-        <p:spPr>
-          <a:xfrm>
-            <a:off x="8229599" y="3346703"/>
-            <a:ext cx="402338" cy="402337"/>
+          <p:cNvPr id="738" name="Shape 37"/>
+          <p:cNvSpPr/>
+          <p:nvPr/>
+        </p:nvSpPr>
+        <p:spPr>
+          <a:xfrm>
+            <a:off x="8229600" y="3346703"/>
+            <a:ext cx="402337" cy="402337"/>
           </a:xfrm>
           <a:prstGeom prst="rect">
             <a:avLst/>
@@ -19405,7 +21060,7 @@
       </p:sp>
       <p:sp>
         <p:nvSpPr>
-          <p:cNvPr id="698" name="Shape 38"/>
+          <p:cNvPr id="739" name="Shape 38"/>
           <p:cNvSpPr/>
           <p:nvPr/>
         </p:nvSpPr>
@@ -19436,7 +21091,7 @@
       </p:sp>
       <p:sp>
         <p:nvSpPr>
-          <p:cNvPr id="699" name="Shape 39"/>
+          <p:cNvPr id="740" name="Shape 39"/>
           <p:cNvSpPr/>
           <p:nvPr/>
         </p:nvSpPr>
@@ -19467,7 +21122,7 @@
       </p:sp>
       <p:sp>
         <p:nvSpPr>
-          <p:cNvPr id="700" name="Shape 40"/>
+          <p:cNvPr id="741" name="Shape 40"/>
           <p:cNvSpPr/>
           <p:nvPr/>
         </p:nvSpPr>
@@ -19498,7 +21153,7 @@
       </p:sp>
       <p:sp>
         <p:nvSpPr>
-          <p:cNvPr id="701" name="Shape 41"/>
+          <p:cNvPr id="742" name="Shape 41"/>
           <p:cNvSpPr/>
           <p:nvPr/>
         </p:nvSpPr>
@@ -19529,7 +21184,7 @@
       </p:sp>
       <p:sp>
         <p:nvSpPr>
-          <p:cNvPr id="702" name="Shape 42"/>
+          <p:cNvPr id="743" name="Shape 42"/>
           <p:cNvSpPr/>
           <p:nvPr/>
         </p:nvSpPr>
@@ -19560,7 +21215,7 @@
       </p:sp>
       <p:sp>
         <p:nvSpPr>
-          <p:cNvPr id="703" name="Shape 43"/>
+          <p:cNvPr id="744" name="Shape 43"/>
           <p:cNvSpPr/>
           <p:nvPr/>
         </p:nvSpPr>
@@ -19591,7 +21246,7 @@
       </p:sp>
       <p:sp>
         <p:nvSpPr>
-          <p:cNvPr id="704" name="Shape 44"/>
+          <p:cNvPr id="745" name="Shape 44"/>
           <p:cNvSpPr/>
           <p:nvPr/>
         </p:nvSpPr>
@@ -19622,14 +21277,14 @@
       </p:sp>
       <p:sp>
         <p:nvSpPr>
-          <p:cNvPr id="705" name="Shape 45"/>
-          <p:cNvSpPr/>
-          <p:nvPr/>
-        </p:nvSpPr>
-        <p:spPr>
-          <a:xfrm>
-            <a:off x="8229599" y="3749040"/>
-            <a:ext cx="402338" cy="402337"/>
+          <p:cNvPr id="746" name="Shape 45"/>
+          <p:cNvSpPr/>
+          <p:nvPr/>
+        </p:nvSpPr>
+        <p:spPr>
+          <a:xfrm>
+            <a:off x="8229600" y="3749040"/>
+            <a:ext cx="402337" cy="402337"/>
           </a:xfrm>
           <a:prstGeom prst="rect">
             <a:avLst/>
@@ -19653,7 +21308,7 @@
       </p:sp>
       <p:sp>
         <p:nvSpPr>
-          <p:cNvPr id="706" name="Shape 46"/>
+          <p:cNvPr id="747" name="Shape 46"/>
           <p:cNvSpPr/>
           <p:nvPr/>
         </p:nvSpPr>
@@ -19684,7 +21339,7 @@
       </p:sp>
       <p:sp>
         <p:nvSpPr>
-          <p:cNvPr id="707" name="Shape 47"/>
+          <p:cNvPr id="748" name="Shape 47"/>
           <p:cNvSpPr/>
           <p:nvPr/>
         </p:nvSpPr>
@@ -19715,7 +21370,7 @@
       </p:sp>
       <p:sp>
         <p:nvSpPr>
-          <p:cNvPr id="708" name="Shape 48"/>
+          <p:cNvPr id="749" name="Shape 48"/>
           <p:cNvSpPr/>
           <p:nvPr/>
         </p:nvSpPr>
@@ -19746,7 +21401,7 @@
       </p:sp>
       <p:sp>
         <p:nvSpPr>
-          <p:cNvPr id="709" name="Shape 49"/>
+          <p:cNvPr id="750" name="Shape 49"/>
           <p:cNvSpPr/>
           <p:nvPr/>
         </p:nvSpPr>
@@ -19777,7 +21432,7 @@
       </p:sp>
       <p:sp>
         <p:nvSpPr>
-          <p:cNvPr id="710" name="Shape 50"/>
+          <p:cNvPr id="751" name="Shape 50"/>
           <p:cNvSpPr/>
           <p:nvPr/>
         </p:nvSpPr>
@@ -19808,7 +21463,7 @@
       </p:sp>
       <p:sp>
         <p:nvSpPr>
-          <p:cNvPr id="711" name="Shape 51"/>
+          <p:cNvPr id="752" name="Shape 51"/>
           <p:cNvSpPr/>
           <p:nvPr/>
         </p:nvSpPr>
@@ -19839,7 +21494,7 @@
       </p:sp>
       <p:sp>
         <p:nvSpPr>
-          <p:cNvPr id="712" name="Shape 52"/>
+          <p:cNvPr id="753" name="Shape 52"/>
           <p:cNvSpPr/>
           <p:nvPr/>
         </p:nvSpPr>
@@ -19870,14 +21525,14 @@
       </p:sp>
       <p:sp>
         <p:nvSpPr>
-          <p:cNvPr id="713" name="Shape 53"/>
-          <p:cNvSpPr/>
-          <p:nvPr/>
-        </p:nvSpPr>
-        <p:spPr>
-          <a:xfrm>
-            <a:off x="8229599" y="4151376"/>
-            <a:ext cx="402338" cy="402337"/>
+          <p:cNvPr id="754" name="Shape 53"/>
+          <p:cNvSpPr/>
+          <p:nvPr/>
+        </p:nvSpPr>
+        <p:spPr>
+          <a:xfrm>
+            <a:off x="8229600" y="4151376"/>
+            <a:ext cx="402337" cy="402337"/>
           </a:xfrm>
           <a:prstGeom prst="rect">
             <a:avLst/>
@@ -19901,7 +21556,7 @@
       </p:sp>
       <p:sp>
         <p:nvSpPr>
-          <p:cNvPr id="714" name="Shape 54"/>
+          <p:cNvPr id="755" name="Shape 54"/>
           <p:cNvSpPr/>
           <p:nvPr/>
         </p:nvSpPr>
@@ -19932,7 +21587,7 @@
       </p:sp>
       <p:sp>
         <p:nvSpPr>
-          <p:cNvPr id="715" name="Shape 55"/>
+          <p:cNvPr id="756" name="Shape 55"/>
           <p:cNvSpPr/>
           <p:nvPr/>
         </p:nvSpPr>
@@ -19963,7 +21618,7 @@
       </p:sp>
       <p:sp>
         <p:nvSpPr>
-          <p:cNvPr id="716" name="Shape 56"/>
+          <p:cNvPr id="757" name="Shape 56"/>
           <p:cNvSpPr/>
           <p:nvPr/>
         </p:nvSpPr>
@@ -19994,7 +21649,7 @@
       </p:sp>
       <p:sp>
         <p:nvSpPr>
-          <p:cNvPr id="717" name="Shape 57"/>
+          <p:cNvPr id="758" name="Shape 57"/>
           <p:cNvSpPr/>
           <p:nvPr/>
         </p:nvSpPr>
@@ -20025,7 +21680,7 @@
       </p:sp>
       <p:sp>
         <p:nvSpPr>
-          <p:cNvPr id="718" name="Shape 58"/>
+          <p:cNvPr id="759" name="Shape 58"/>
           <p:cNvSpPr/>
           <p:nvPr/>
         </p:nvSpPr>
@@ -20056,7 +21711,7 @@
       </p:sp>
       <p:sp>
         <p:nvSpPr>
-          <p:cNvPr id="719" name="Shape 59"/>
+          <p:cNvPr id="760" name="Shape 59"/>
           <p:cNvSpPr/>
           <p:nvPr/>
         </p:nvSpPr>
@@ -20087,7 +21742,7 @@
       </p:sp>
       <p:sp>
         <p:nvSpPr>
-          <p:cNvPr id="720" name="Shape 60"/>
+          <p:cNvPr id="761" name="Shape 60"/>
           <p:cNvSpPr/>
           <p:nvPr/>
         </p:nvSpPr>
@@ -20118,14 +21773,14 @@
       </p:sp>
       <p:sp>
         <p:nvSpPr>
-          <p:cNvPr id="721" name="Shape 61"/>
-          <p:cNvSpPr/>
-          <p:nvPr/>
-        </p:nvSpPr>
-        <p:spPr>
-          <a:xfrm>
-            <a:off x="8229599" y="4553711"/>
-            <a:ext cx="402338" cy="402337"/>
+          <p:cNvPr id="762" name="Shape 61"/>
+          <p:cNvSpPr/>
+          <p:nvPr/>
+        </p:nvSpPr>
+        <p:spPr>
+          <a:xfrm>
+            <a:off x="8229600" y="4553711"/>
+            <a:ext cx="402337" cy="402337"/>
           </a:xfrm>
           <a:prstGeom prst="rect">
             <a:avLst/>
@@ -20149,7 +21804,7 @@
       </p:sp>
       <p:sp>
         <p:nvSpPr>
-          <p:cNvPr id="722" name="Shape 62"/>
+          <p:cNvPr id="763" name="Shape 62"/>
           <p:cNvSpPr/>
           <p:nvPr/>
         </p:nvSpPr>
@@ -20180,7 +21835,7 @@
       </p:sp>
       <p:sp>
         <p:nvSpPr>
-          <p:cNvPr id="723" name="Shape 63"/>
+          <p:cNvPr id="764" name="Shape 63"/>
           <p:cNvSpPr/>
           <p:nvPr/>
         </p:nvSpPr>
@@ -20211,7 +21866,7 @@
       </p:sp>
       <p:sp>
         <p:nvSpPr>
-          <p:cNvPr id="724" name="Shape 64"/>
+          <p:cNvPr id="765" name="Shape 64"/>
           <p:cNvSpPr/>
           <p:nvPr/>
         </p:nvSpPr>
@@ -20242,7 +21897,7 @@
       </p:sp>
       <p:sp>
         <p:nvSpPr>
-          <p:cNvPr id="725" name="Shape 65"/>
+          <p:cNvPr id="766" name="Shape 65"/>
           <p:cNvSpPr/>
           <p:nvPr/>
         </p:nvSpPr>
@@ -20273,7 +21928,7 @@
       </p:sp>
       <p:sp>
         <p:nvSpPr>
-          <p:cNvPr id="726" name="Shape 66"/>
+          <p:cNvPr id="767" name="Shape 66"/>
           <p:cNvSpPr/>
           <p:nvPr/>
         </p:nvSpPr>
@@ -20304,7 +21959,7 @@
       </p:sp>
       <p:sp>
         <p:nvSpPr>
-          <p:cNvPr id="727" name="Shape 67"/>
+          <p:cNvPr id="768" name="Shape 67"/>
           <p:cNvSpPr/>
           <p:nvPr/>
         </p:nvSpPr>
@@ -20335,7 +21990,7 @@
       </p:sp>
       <p:sp>
         <p:nvSpPr>
-          <p:cNvPr id="728" name="Shape 68"/>
+          <p:cNvPr id="769" name="Shape 68"/>
           <p:cNvSpPr/>
           <p:nvPr/>
         </p:nvSpPr>
@@ -20366,14 +22021,14 @@
       </p:sp>
       <p:sp>
         <p:nvSpPr>
-          <p:cNvPr id="729" name="Shape 69"/>
-          <p:cNvSpPr/>
-          <p:nvPr/>
-        </p:nvSpPr>
-        <p:spPr>
-          <a:xfrm>
-            <a:off x="8229599" y="1737360"/>
-            <a:ext cx="3218690" cy="3218689"/>
+          <p:cNvPr id="770" name="Shape 69"/>
+          <p:cNvSpPr/>
+          <p:nvPr/>
+        </p:nvSpPr>
+        <p:spPr>
+          <a:xfrm>
+            <a:off x="8229600" y="1737360"/>
+            <a:ext cx="3218689" cy="3218689"/>
           </a:xfrm>
           <a:prstGeom prst="rect">
             <a:avLst/>
@@ -20420,7 +22075,7 @@
       </p:grpSpPr>
       <p:sp>
         <p:nvSpPr>
-          <p:cNvPr id="731" name="Text 0"/>
+          <p:cNvPr id="774" name="Text 0"/>
           <p:cNvSpPr txBox="1"/>
           <p:nvPr/>
         </p:nvSpPr>
@@ -20464,7 +22119,7 @@
       </p:sp>
       <p:sp>
         <p:nvSpPr>
-          <p:cNvPr id="732" name="Text 1"/>
+          <p:cNvPr id="775" name="Text 1"/>
           <p:cNvSpPr txBox="1"/>
           <p:nvPr/>
         </p:nvSpPr>
@@ -20512,7 +22167,7 @@
       </p:sp>
       <p:sp>
         <p:nvSpPr>
-          <p:cNvPr id="733" name="Text 2"/>
+          <p:cNvPr id="776" name="Text 2"/>
           <p:cNvSpPr txBox="1"/>
           <p:nvPr/>
         </p:nvSpPr>
@@ -20556,7 +22211,7 @@
       </p:sp>
       <p:sp>
         <p:nvSpPr>
-          <p:cNvPr id="734" name="Shape 3"/>
+          <p:cNvPr id="777" name="Shape 3"/>
           <p:cNvSpPr/>
           <p:nvPr/>
         </p:nvSpPr>
@@ -20587,14 +22242,14 @@
       </p:sp>
       <p:sp>
         <p:nvSpPr>
-          <p:cNvPr id="735" name="Text 4"/>
-          <p:cNvSpPr txBox="1"/>
-          <p:nvPr/>
-        </p:nvSpPr>
-        <p:spPr>
-          <a:xfrm>
-            <a:off x="914399" y="1737360"/>
-            <a:ext cx="6217922" cy="558801"/>
+          <p:cNvPr id="778" name="Text 4"/>
+          <p:cNvSpPr txBox="1"/>
+          <p:nvPr/>
+        </p:nvSpPr>
+        <p:spPr>
+          <a:xfrm>
+            <a:off x="914400" y="1737360"/>
+            <a:ext cx="6217921" cy="558801"/>
           </a:xfrm>
           <a:prstGeom prst="rect">
             <a:avLst/>
@@ -20655,7 +22310,7 @@
       </p:sp>
       <p:graphicFrame>
         <p:nvGraphicFramePr>
-          <p:cNvPr id="736" name="Table 0"/>
+          <p:cNvPr id="779" name="Table 0"/>
           <p:cNvGraphicFramePr/>
           <p:nvPr/>
         </p:nvGraphicFramePr>
@@ -21073,14 +22728,14 @@
       </p:graphicFrame>
       <p:sp>
         <p:nvSpPr>
-          <p:cNvPr id="737" name="Text 5"/>
-          <p:cNvSpPr txBox="1"/>
-          <p:nvPr/>
-        </p:nvSpPr>
-        <p:spPr>
-          <a:xfrm>
-            <a:off x="640079" y="3246120"/>
-            <a:ext cx="2194562" cy="596901"/>
+          <p:cNvPr id="780" name="Text 5"/>
+          <p:cNvSpPr txBox="1"/>
+          <p:nvPr/>
+        </p:nvSpPr>
+        <p:spPr>
+          <a:xfrm>
+            <a:off x="640080" y="3246120"/>
+            <a:ext cx="2194561" cy="596901"/>
           </a:xfrm>
           <a:prstGeom prst="rect">
             <a:avLst/>
@@ -21121,14 +22776,14 @@
       </p:sp>
       <p:sp>
         <p:nvSpPr>
-          <p:cNvPr id="738" name="Text 6"/>
-          <p:cNvSpPr txBox="1"/>
-          <p:nvPr/>
-        </p:nvSpPr>
-        <p:spPr>
-          <a:xfrm>
-            <a:off x="640079" y="4069079"/>
-            <a:ext cx="2194562" cy="189360"/>
+          <p:cNvPr id="781" name="Text 6"/>
+          <p:cNvSpPr txBox="1"/>
+          <p:nvPr/>
+        </p:nvSpPr>
+        <p:spPr>
+          <a:xfrm>
+            <a:off x="640080" y="4069079"/>
+            <a:ext cx="2194561" cy="189360"/>
           </a:xfrm>
           <a:prstGeom prst="rect">
             <a:avLst/>
@@ -21165,14 +22820,14 @@
       </p:sp>
       <p:sp>
         <p:nvSpPr>
-          <p:cNvPr id="739" name="Text 7"/>
-          <p:cNvSpPr txBox="1"/>
-          <p:nvPr/>
-        </p:nvSpPr>
-        <p:spPr>
-          <a:xfrm>
-            <a:off x="2971799" y="3246120"/>
-            <a:ext cx="2194562" cy="596901"/>
+          <p:cNvPr id="782" name="Text 7"/>
+          <p:cNvSpPr txBox="1"/>
+          <p:nvPr/>
+        </p:nvSpPr>
+        <p:spPr>
+          <a:xfrm>
+            <a:off x="2971800" y="3246120"/>
+            <a:ext cx="2194561" cy="596901"/>
           </a:xfrm>
           <a:prstGeom prst="rect">
             <a:avLst/>
@@ -21213,14 +22868,14 @@
       </p:sp>
       <p:sp>
         <p:nvSpPr>
-          <p:cNvPr id="740" name="Text 8"/>
-          <p:cNvSpPr txBox="1"/>
-          <p:nvPr/>
-        </p:nvSpPr>
-        <p:spPr>
-          <a:xfrm>
-            <a:off x="2971799" y="4069079"/>
-            <a:ext cx="2194562" cy="189360"/>
+          <p:cNvPr id="783" name="Text 8"/>
+          <p:cNvSpPr txBox="1"/>
+          <p:nvPr/>
+        </p:nvSpPr>
+        <p:spPr>
+          <a:xfrm>
+            <a:off x="2971800" y="4069079"/>
+            <a:ext cx="2194561" cy="189360"/>
           </a:xfrm>
           <a:prstGeom prst="rect">
             <a:avLst/>
@@ -21257,7 +22912,7 @@
       </p:sp>
       <p:sp>
         <p:nvSpPr>
-          <p:cNvPr id="741" name="Text 9"/>
+          <p:cNvPr id="784" name="Text 9"/>
           <p:cNvSpPr txBox="1"/>
           <p:nvPr/>
         </p:nvSpPr>
@@ -21305,7 +22960,7 @@
       </p:sp>
       <p:sp>
         <p:nvSpPr>
-          <p:cNvPr id="742" name="Text 10"/>
+          <p:cNvPr id="785" name="Text 10"/>
           <p:cNvSpPr txBox="1"/>
           <p:nvPr/>
         </p:nvSpPr>
@@ -21349,7 +23004,7 @@
       </p:sp>
       <p:sp>
         <p:nvSpPr>
-          <p:cNvPr id="743" name="Text 11"/>
+          <p:cNvPr id="786" name="Text 11"/>
           <p:cNvSpPr txBox="1"/>
           <p:nvPr/>
         </p:nvSpPr>
@@ -21423,7 +23078,7 @@
       </p:grpSpPr>
       <p:sp>
         <p:nvSpPr>
-          <p:cNvPr id="745" name="Text 0"/>
+          <p:cNvPr id="790" name="Text 0"/>
           <p:cNvSpPr txBox="1"/>
           <p:nvPr/>
         </p:nvSpPr>
@@ -21467,7 +23122,7 @@
       </p:sp>
       <p:sp>
         <p:nvSpPr>
-          <p:cNvPr id="746" name="Text 1"/>
+          <p:cNvPr id="791" name="Text 1"/>
           <p:cNvSpPr txBox="1"/>
           <p:nvPr/>
         </p:nvSpPr>
@@ -21515,7 +23170,7 @@
       </p:sp>
       <p:sp>
         <p:nvSpPr>
-          <p:cNvPr id="747" name="Text 2"/>
+          <p:cNvPr id="792" name="Text 2"/>
           <p:cNvSpPr txBox="1"/>
           <p:nvPr/>
         </p:nvSpPr>
@@ -21559,7 +23214,7 @@
       </p:sp>
       <p:sp>
         <p:nvSpPr>
-          <p:cNvPr id="748" name="Text 3"/>
+          <p:cNvPr id="793" name="Text 3"/>
           <p:cNvSpPr txBox="1"/>
           <p:nvPr/>
         </p:nvSpPr>
@@ -21603,7 +23258,7 @@
       </p:sp>
       <p:sp>
         <p:nvSpPr>
-          <p:cNvPr id="749" name="Text 4"/>
+          <p:cNvPr id="794" name="Text 4"/>
           <p:cNvSpPr txBox="1"/>
           <p:nvPr/>
         </p:nvSpPr>
@@ -21647,7 +23302,7 @@
       </p:sp>
       <p:sp>
         <p:nvSpPr>
-          <p:cNvPr id="750" name="Text 5"/>
+          <p:cNvPr id="795" name="Text 5"/>
           <p:cNvSpPr txBox="1"/>
           <p:nvPr/>
         </p:nvSpPr>
@@ -21691,7 +23346,7 @@
       </p:sp>
       <p:sp>
         <p:nvSpPr>
-          <p:cNvPr id="751" name="Text 6"/>
+          <p:cNvPr id="796" name="Text 6"/>
           <p:cNvSpPr txBox="1"/>
           <p:nvPr/>
         </p:nvSpPr>
@@ -21735,7 +23390,7 @@
       </p:sp>
       <p:sp>
         <p:nvSpPr>
-          <p:cNvPr id="752" name="Text 7"/>
+          <p:cNvPr id="797" name="Text 7"/>
           <p:cNvSpPr txBox="1"/>
           <p:nvPr/>
         </p:nvSpPr>
@@ -21779,7 +23434,7 @@
       </p:sp>
       <p:sp>
         <p:nvSpPr>
-          <p:cNvPr id="753" name="Text 8"/>
+          <p:cNvPr id="798" name="Text 8"/>
           <p:cNvSpPr txBox="1"/>
           <p:nvPr/>
         </p:nvSpPr>
@@ -21823,7 +23478,7 @@
       </p:sp>
       <p:sp>
         <p:nvSpPr>
-          <p:cNvPr id="754" name="Text 9"/>
+          <p:cNvPr id="799" name="Text 9"/>
           <p:cNvSpPr txBox="1"/>
           <p:nvPr/>
         </p:nvSpPr>
@@ -21867,7 +23522,7 @@
       </p:sp>
       <p:sp>
         <p:nvSpPr>
-          <p:cNvPr id="755" name="Text 10"/>
+          <p:cNvPr id="800" name="Text 10"/>
           <p:cNvSpPr txBox="1"/>
           <p:nvPr/>
         </p:nvSpPr>
@@ -21911,7 +23566,7 @@
       </p:sp>
       <p:sp>
         <p:nvSpPr>
-          <p:cNvPr id="756" name="Shape 11"/>
+          <p:cNvPr id="801" name="Shape 11"/>
           <p:cNvSpPr/>
           <p:nvPr/>
         </p:nvSpPr>
@@ -21942,7 +23597,7 @@
       </p:sp>
       <p:sp>
         <p:nvSpPr>
-          <p:cNvPr id="757" name="Text 12"/>
+          <p:cNvPr id="802" name="Text 12"/>
           <p:cNvSpPr txBox="1"/>
           <p:nvPr/>
         </p:nvSpPr>
@@ -22012,7 +23667,7 @@
       </p:grpSpPr>
       <p:sp>
         <p:nvSpPr>
-          <p:cNvPr id="759" name="Text 0"/>
+          <p:cNvPr id="806" name="Text 0"/>
           <p:cNvSpPr txBox="1"/>
           <p:nvPr/>
         </p:nvSpPr>
@@ -22056,7 +23711,7 @@
       </p:sp>
       <p:sp>
         <p:nvSpPr>
-          <p:cNvPr id="760" name="Text 1"/>
+          <p:cNvPr id="807" name="Text 1"/>
           <p:cNvSpPr txBox="1"/>
           <p:nvPr/>
         </p:nvSpPr>
@@ -22104,7 +23759,7 @@
       </p:sp>
       <p:sp>
         <p:nvSpPr>
-          <p:cNvPr id="761" name="Text 2"/>
+          <p:cNvPr id="808" name="Text 2"/>
           <p:cNvSpPr txBox="1"/>
           <p:nvPr/>
         </p:nvSpPr>
@@ -22148,7 +23803,7 @@
       </p:sp>
       <p:sp>
         <p:nvSpPr>
-          <p:cNvPr id="762" name="Text 3"/>
+          <p:cNvPr id="809" name="Text 3"/>
           <p:cNvSpPr txBox="1"/>
           <p:nvPr/>
         </p:nvSpPr>
@@ -22196,14 +23851,14 @@
       </p:sp>
       <p:sp>
         <p:nvSpPr>
-          <p:cNvPr id="763" name="Text 4"/>
+          <p:cNvPr id="810" name="Text 4"/>
           <p:cNvSpPr txBox="1"/>
           <p:nvPr/>
         </p:nvSpPr>
         <p:spPr>
           <a:xfrm>
             <a:off x="1234439" y="1783079"/>
-            <a:ext cx="2926082" cy="301031"/>
+            <a:ext cx="2926081" cy="301031"/>
           </a:xfrm>
           <a:prstGeom prst="rect">
             <a:avLst/>
@@ -22240,7 +23895,7 @@
       </p:sp>
       <p:sp>
         <p:nvSpPr>
-          <p:cNvPr id="764" name="Text 5"/>
+          <p:cNvPr id="811" name="Text 5"/>
           <p:cNvSpPr txBox="1"/>
           <p:nvPr/>
         </p:nvSpPr>
@@ -22284,14 +23939,14 @@
       </p:sp>
       <p:sp>
         <p:nvSpPr>
-          <p:cNvPr id="765" name="Text 6"/>
-          <p:cNvSpPr txBox="1"/>
-          <p:nvPr/>
-        </p:nvSpPr>
-        <p:spPr>
-          <a:xfrm>
-            <a:off x="4343399" y="1645920"/>
-            <a:ext cx="548642" cy="596901"/>
+          <p:cNvPr id="812" name="Text 6"/>
+          <p:cNvSpPr txBox="1"/>
+          <p:nvPr/>
+        </p:nvSpPr>
+        <p:spPr>
+          <a:xfrm>
+            <a:off x="4343400" y="1645920"/>
+            <a:ext cx="548641" cy="596901"/>
           </a:xfrm>
           <a:prstGeom prst="rect">
             <a:avLst/>
@@ -22332,7 +23987,7 @@
       </p:sp>
       <p:sp>
         <p:nvSpPr>
-          <p:cNvPr id="766" name="Text 7"/>
+          <p:cNvPr id="813" name="Text 7"/>
           <p:cNvSpPr txBox="1"/>
           <p:nvPr/>
         </p:nvSpPr>
@@ -22376,7 +24031,7 @@
       </p:sp>
       <p:sp>
         <p:nvSpPr>
-          <p:cNvPr id="767" name="Text 8"/>
+          <p:cNvPr id="814" name="Text 8"/>
           <p:cNvSpPr txBox="1"/>
           <p:nvPr/>
         </p:nvSpPr>
@@ -22420,7 +24075,7 @@
       </p:sp>
       <p:sp>
         <p:nvSpPr>
-          <p:cNvPr id="768" name="Text 9"/>
+          <p:cNvPr id="815" name="Text 9"/>
           <p:cNvSpPr txBox="1"/>
           <p:nvPr/>
         </p:nvSpPr>
@@ -22468,7 +24123,7 @@
       </p:sp>
       <p:sp>
         <p:nvSpPr>
-          <p:cNvPr id="769" name="Text 10"/>
+          <p:cNvPr id="816" name="Text 10"/>
           <p:cNvSpPr txBox="1"/>
           <p:nvPr/>
         </p:nvSpPr>
@@ -22512,7 +24167,7 @@
       </p:sp>
       <p:sp>
         <p:nvSpPr>
-          <p:cNvPr id="770" name="Text 11"/>
+          <p:cNvPr id="817" name="Text 11"/>
           <p:cNvSpPr txBox="1"/>
           <p:nvPr/>
         </p:nvSpPr>
@@ -22556,7 +24211,7 @@
       </p:sp>
       <p:sp>
         <p:nvSpPr>
-          <p:cNvPr id="771" name="Shape 12"/>
+          <p:cNvPr id="818" name="Shape 12"/>
           <p:cNvSpPr/>
           <p:nvPr/>
         </p:nvSpPr>
@@ -22587,7 +24242,7 @@
       </p:sp>
       <p:sp>
         <p:nvSpPr>
-          <p:cNvPr id="772" name="Text 13"/>
+          <p:cNvPr id="819" name="Text 13"/>
           <p:cNvSpPr txBox="1"/>
           <p:nvPr/>
         </p:nvSpPr>
@@ -22661,7 +24316,7 @@
       </p:grpSpPr>
       <p:sp>
         <p:nvSpPr>
-          <p:cNvPr id="774" name="Text 0"/>
+          <p:cNvPr id="823" name="Text 0"/>
           <p:cNvSpPr txBox="1"/>
           <p:nvPr/>
         </p:nvSpPr>
@@ -22705,7 +24360,7 @@
       </p:sp>
       <p:sp>
         <p:nvSpPr>
-          <p:cNvPr id="775" name="Text 1"/>
+          <p:cNvPr id="824" name="Text 1"/>
           <p:cNvSpPr txBox="1"/>
           <p:nvPr/>
         </p:nvSpPr>
@@ -22753,7 +24408,7 @@
       </p:sp>
       <p:sp>
         <p:nvSpPr>
-          <p:cNvPr id="776" name="Text 2"/>
+          <p:cNvPr id="825" name="Text 2"/>
           <p:cNvSpPr txBox="1"/>
           <p:nvPr/>
         </p:nvSpPr>
@@ -22797,7 +24452,7 @@
       </p:sp>
       <p:graphicFrame>
         <p:nvGraphicFramePr>
-          <p:cNvPr id="777" name="Table 0"/>
+          <p:cNvPr id="826" name="Table 0"/>
           <p:cNvGraphicFramePr/>
           <p:nvPr/>
         </p:nvGraphicFramePr>
@@ -23460,7 +25115,7 @@
       </p:graphicFrame>
       <p:sp>
         <p:nvSpPr>
-          <p:cNvPr id="778" name="Text 3"/>
+          <p:cNvPr id="827" name="Text 3"/>
           <p:cNvSpPr txBox="1"/>
           <p:nvPr/>
         </p:nvSpPr>
@@ -23508,7 +25163,7 @@
       </p:sp>
       <p:sp>
         <p:nvSpPr>
-          <p:cNvPr id="779" name="Text 4"/>
+          <p:cNvPr id="828" name="Text 4"/>
           <p:cNvSpPr txBox="1"/>
           <p:nvPr/>
         </p:nvSpPr>
@@ -23552,7 +25207,7 @@
       </p:sp>
       <p:sp>
         <p:nvSpPr>
-          <p:cNvPr id="780" name="Text 5"/>
+          <p:cNvPr id="829" name="Text 5"/>
           <p:cNvSpPr txBox="1"/>
           <p:nvPr/>
         </p:nvSpPr>
@@ -23600,14 +25255,14 @@
       </p:sp>
       <p:sp>
         <p:nvSpPr>
-          <p:cNvPr id="781" name="Text 6"/>
-          <p:cNvSpPr txBox="1"/>
-          <p:nvPr/>
-        </p:nvSpPr>
-        <p:spPr>
-          <a:xfrm>
-            <a:off x="8229600" y="2743199"/>
-            <a:ext cx="3383280" cy="393701"/>
+          <p:cNvPr id="830" name="Text 6"/>
+          <p:cNvSpPr txBox="1"/>
+          <p:nvPr/>
+        </p:nvSpPr>
+        <p:spPr>
+          <a:xfrm>
+            <a:off x="8229600" y="2743200"/>
+            <a:ext cx="3383280" cy="393700"/>
           </a:xfrm>
           <a:prstGeom prst="rect">
             <a:avLst/>
@@ -23648,7 +25303,7 @@
       </p:sp>
       <p:sp>
         <p:nvSpPr>
-          <p:cNvPr id="782" name="Text 8"/>
+          <p:cNvPr id="831" name="Text 8"/>
           <p:cNvSpPr txBox="1"/>
           <p:nvPr/>
         </p:nvSpPr>
@@ -23710,14 +25365,14 @@
       </p:sp>
       <p:pic>
         <p:nvPicPr>
-          <p:cNvPr id="783" name="pasted-movie.png" descr="pasted-movie.png"/>
+          <p:cNvPr id="832" name="pasted-movie.png" descr="pasted-movie.png"/>
           <p:cNvPicPr>
             <a:picLocks noChangeAspect="1"/>
           </p:cNvPicPr>
           <p:nvPr/>
         </p:nvPicPr>
         <p:blipFill>
-          <a:blip r:embed="rId2">
+          <a:blip r:embed="rId3">
             <a:extLst/>
           </a:blip>
           <a:stretch>
@@ -23765,7 +25420,7 @@
       </p:grpSpPr>
       <p:sp>
         <p:nvSpPr>
-          <p:cNvPr id="111" name="Text 0"/>
+          <p:cNvPr id="116" name="Text 0"/>
           <p:cNvSpPr txBox="1"/>
           <p:nvPr/>
         </p:nvSpPr>
@@ -23809,7 +25464,7 @@
       </p:sp>
       <p:sp>
         <p:nvSpPr>
-          <p:cNvPr id="112" name="Text 1"/>
+          <p:cNvPr id="117" name="Text 1"/>
           <p:cNvSpPr txBox="1"/>
           <p:nvPr/>
         </p:nvSpPr>
@@ -23857,7 +25512,7 @@
       </p:sp>
       <p:sp>
         <p:nvSpPr>
-          <p:cNvPr id="113" name="Text 2"/>
+          <p:cNvPr id="118" name="Text 2"/>
           <p:cNvSpPr txBox="1"/>
           <p:nvPr/>
         </p:nvSpPr>
@@ -23901,7 +25556,7 @@
       </p:sp>
       <p:sp>
         <p:nvSpPr>
-          <p:cNvPr id="114" name="Shape 3"/>
+          <p:cNvPr id="119" name="Shape 3"/>
           <p:cNvSpPr/>
           <p:nvPr/>
         </p:nvSpPr>
@@ -23932,7 +25587,7 @@
       </p:sp>
       <p:sp>
         <p:nvSpPr>
-          <p:cNvPr id="115" name="Text 4"/>
+          <p:cNvPr id="120" name="Text 4"/>
           <p:cNvSpPr txBox="1"/>
           <p:nvPr/>
         </p:nvSpPr>
@@ -24027,7 +25682,7 @@
       </p:sp>
       <p:sp>
         <p:nvSpPr>
-          <p:cNvPr id="116" name="Text 5"/>
+          <p:cNvPr id="121" name="Text 5"/>
           <p:cNvSpPr txBox="1"/>
           <p:nvPr/>
         </p:nvSpPr>
@@ -24071,7 +25726,7 @@
       </p:sp>
       <p:sp>
         <p:nvSpPr>
-          <p:cNvPr id="117" name="Shape 6"/>
+          <p:cNvPr id="122" name="Shape 6"/>
           <p:cNvSpPr/>
           <p:nvPr/>
         </p:nvSpPr>
@@ -24100,14 +25755,14 @@
       </p:sp>
       <p:sp>
         <p:nvSpPr>
-          <p:cNvPr id="118" name="Shape 7"/>
-          <p:cNvSpPr/>
-          <p:nvPr/>
-        </p:nvSpPr>
-        <p:spPr>
-          <a:xfrm>
-            <a:off x="7589519" y="1600199"/>
-            <a:ext cx="402337" cy="402338"/>
+          <p:cNvPr id="123" name="Shape 7"/>
+          <p:cNvSpPr/>
+          <p:nvPr/>
+        </p:nvSpPr>
+        <p:spPr>
+          <a:xfrm>
+            <a:off x="7589519" y="1600200"/>
+            <a:ext cx="402337" cy="402337"/>
           </a:xfrm>
           <a:prstGeom prst="rect">
             <a:avLst/>
@@ -24131,14 +25786,14 @@
       </p:sp>
       <p:sp>
         <p:nvSpPr>
-          <p:cNvPr id="119" name="Shape 8"/>
-          <p:cNvSpPr/>
-          <p:nvPr/>
-        </p:nvSpPr>
-        <p:spPr>
-          <a:xfrm>
-            <a:off x="7991856" y="1600199"/>
-            <a:ext cx="402337" cy="402338"/>
+          <p:cNvPr id="124" name="Shape 8"/>
+          <p:cNvSpPr/>
+          <p:nvPr/>
+        </p:nvSpPr>
+        <p:spPr>
+          <a:xfrm>
+            <a:off x="7991856" y="1600200"/>
+            <a:ext cx="402337" cy="402337"/>
           </a:xfrm>
           <a:prstGeom prst="rect">
             <a:avLst/>
@@ -24162,14 +25817,14 @@
       </p:sp>
       <p:sp>
         <p:nvSpPr>
-          <p:cNvPr id="120" name="Shape 9"/>
-          <p:cNvSpPr/>
-          <p:nvPr/>
-        </p:nvSpPr>
-        <p:spPr>
-          <a:xfrm>
-            <a:off x="8394192" y="1600199"/>
-            <a:ext cx="402337" cy="402338"/>
+          <p:cNvPr id="125" name="Shape 9"/>
+          <p:cNvSpPr/>
+          <p:nvPr/>
+        </p:nvSpPr>
+        <p:spPr>
+          <a:xfrm>
+            <a:off x="8394192" y="1600200"/>
+            <a:ext cx="402337" cy="402337"/>
           </a:xfrm>
           <a:prstGeom prst="rect">
             <a:avLst/>
@@ -24193,14 +25848,14 @@
       </p:sp>
       <p:sp>
         <p:nvSpPr>
-          <p:cNvPr id="121" name="Shape 10"/>
-          <p:cNvSpPr/>
-          <p:nvPr/>
-        </p:nvSpPr>
-        <p:spPr>
-          <a:xfrm>
-            <a:off x="8796528" y="1600199"/>
-            <a:ext cx="402337" cy="402338"/>
+          <p:cNvPr id="126" name="Shape 10"/>
+          <p:cNvSpPr/>
+          <p:nvPr/>
+        </p:nvSpPr>
+        <p:spPr>
+          <a:xfrm>
+            <a:off x="8796528" y="1600200"/>
+            <a:ext cx="402337" cy="402337"/>
           </a:xfrm>
           <a:prstGeom prst="rect">
             <a:avLst/>
@@ -24224,14 +25879,14 @@
       </p:sp>
       <p:sp>
         <p:nvSpPr>
-          <p:cNvPr id="122" name="Shape 11"/>
-          <p:cNvSpPr/>
-          <p:nvPr/>
-        </p:nvSpPr>
-        <p:spPr>
-          <a:xfrm>
-            <a:off x="9198864" y="1600199"/>
-            <a:ext cx="402337" cy="402338"/>
+          <p:cNvPr id="127" name="Shape 11"/>
+          <p:cNvSpPr/>
+          <p:nvPr/>
+        </p:nvSpPr>
+        <p:spPr>
+          <a:xfrm>
+            <a:off x="9198864" y="1600200"/>
+            <a:ext cx="402337" cy="402337"/>
           </a:xfrm>
           <a:prstGeom prst="rect">
             <a:avLst/>
@@ -24255,14 +25910,14 @@
       </p:sp>
       <p:sp>
         <p:nvSpPr>
-          <p:cNvPr id="123" name="Shape 12"/>
-          <p:cNvSpPr/>
-          <p:nvPr/>
-        </p:nvSpPr>
-        <p:spPr>
-          <a:xfrm>
-            <a:off x="9601199" y="1600199"/>
-            <a:ext cx="402338" cy="402338"/>
+          <p:cNvPr id="128" name="Shape 12"/>
+          <p:cNvSpPr/>
+          <p:nvPr/>
+        </p:nvSpPr>
+        <p:spPr>
+          <a:xfrm>
+            <a:off x="9601200" y="1600200"/>
+            <a:ext cx="402337" cy="402337"/>
           </a:xfrm>
           <a:prstGeom prst="rect">
             <a:avLst/>
@@ -24286,14 +25941,14 @@
       </p:sp>
       <p:sp>
         <p:nvSpPr>
-          <p:cNvPr id="124" name="Shape 13"/>
-          <p:cNvSpPr/>
-          <p:nvPr/>
-        </p:nvSpPr>
-        <p:spPr>
-          <a:xfrm>
-            <a:off x="10003535" y="1600199"/>
-            <a:ext cx="402337" cy="402338"/>
+          <p:cNvPr id="129" name="Shape 13"/>
+          <p:cNvSpPr/>
+          <p:nvPr/>
+        </p:nvSpPr>
+        <p:spPr>
+          <a:xfrm>
+            <a:off x="10003535" y="1600200"/>
+            <a:ext cx="402337" cy="402337"/>
           </a:xfrm>
           <a:prstGeom prst="rect">
             <a:avLst/>
@@ -24317,14 +25972,14 @@
       </p:sp>
       <p:sp>
         <p:nvSpPr>
-          <p:cNvPr id="125" name="Shape 14"/>
-          <p:cNvSpPr/>
-          <p:nvPr/>
-        </p:nvSpPr>
-        <p:spPr>
-          <a:xfrm>
-            <a:off x="10405871" y="1600199"/>
-            <a:ext cx="402337" cy="402338"/>
+          <p:cNvPr id="130" name="Shape 14"/>
+          <p:cNvSpPr/>
+          <p:nvPr/>
+        </p:nvSpPr>
+        <p:spPr>
+          <a:xfrm>
+            <a:off x="10405871" y="1600200"/>
+            <a:ext cx="402337" cy="402337"/>
           </a:xfrm>
           <a:prstGeom prst="rect">
             <a:avLst/>
@@ -24348,7 +26003,7 @@
       </p:sp>
       <p:sp>
         <p:nvSpPr>
-          <p:cNvPr id="126" name="Shape 15"/>
+          <p:cNvPr id="131" name="Shape 15"/>
           <p:cNvSpPr/>
           <p:nvPr/>
         </p:nvSpPr>
@@ -24379,7 +26034,7 @@
       </p:sp>
       <p:sp>
         <p:nvSpPr>
-          <p:cNvPr id="127" name="Shape 16"/>
+          <p:cNvPr id="132" name="Shape 16"/>
           <p:cNvSpPr/>
           <p:nvPr/>
         </p:nvSpPr>
@@ -24410,7 +26065,7 @@
       </p:sp>
       <p:sp>
         <p:nvSpPr>
-          <p:cNvPr id="128" name="Shape 17"/>
+          <p:cNvPr id="133" name="Shape 17"/>
           <p:cNvSpPr/>
           <p:nvPr/>
         </p:nvSpPr>
@@ -24441,7 +26096,7 @@
       </p:sp>
       <p:sp>
         <p:nvSpPr>
-          <p:cNvPr id="129" name="Shape 18"/>
+          <p:cNvPr id="134" name="Shape 18"/>
           <p:cNvSpPr/>
           <p:nvPr/>
         </p:nvSpPr>
@@ -24472,7 +26127,7 @@
       </p:sp>
       <p:sp>
         <p:nvSpPr>
-          <p:cNvPr id="130" name="Shape 19"/>
+          <p:cNvPr id="135" name="Shape 19"/>
           <p:cNvSpPr/>
           <p:nvPr/>
         </p:nvSpPr>
@@ -24503,14 +26158,14 @@
       </p:sp>
       <p:sp>
         <p:nvSpPr>
-          <p:cNvPr id="131" name="Shape 20"/>
-          <p:cNvSpPr/>
-          <p:nvPr/>
-        </p:nvSpPr>
-        <p:spPr>
-          <a:xfrm>
-            <a:off x="9601199" y="2002535"/>
-            <a:ext cx="402338" cy="402337"/>
+          <p:cNvPr id="136" name="Shape 20"/>
+          <p:cNvSpPr/>
+          <p:nvPr/>
+        </p:nvSpPr>
+        <p:spPr>
+          <a:xfrm>
+            <a:off x="9601200" y="2002535"/>
+            <a:ext cx="402337" cy="402337"/>
           </a:xfrm>
           <a:prstGeom prst="rect">
             <a:avLst/>
@@ -24534,7 +26189,7 @@
       </p:sp>
       <p:sp>
         <p:nvSpPr>
-          <p:cNvPr id="132" name="Shape 21"/>
+          <p:cNvPr id="137" name="Shape 21"/>
           <p:cNvSpPr/>
           <p:nvPr/>
         </p:nvSpPr>
@@ -24565,7 +26220,7 @@
       </p:sp>
       <p:sp>
         <p:nvSpPr>
-          <p:cNvPr id="133" name="Shape 22"/>
+          <p:cNvPr id="138" name="Shape 22"/>
           <p:cNvSpPr/>
           <p:nvPr/>
         </p:nvSpPr>
@@ -24596,7 +26251,7 @@
       </p:sp>
       <p:sp>
         <p:nvSpPr>
-          <p:cNvPr id="134" name="Shape 23"/>
+          <p:cNvPr id="139" name="Shape 23"/>
           <p:cNvSpPr/>
           <p:nvPr/>
         </p:nvSpPr>
@@ -24627,7 +26282,7 @@
       </p:sp>
       <p:sp>
         <p:nvSpPr>
-          <p:cNvPr id="135" name="Shape 24"/>
+          <p:cNvPr id="140" name="Shape 24"/>
           <p:cNvSpPr/>
           <p:nvPr/>
         </p:nvSpPr>
@@ -24658,7 +26313,7 @@
       </p:sp>
       <p:sp>
         <p:nvSpPr>
-          <p:cNvPr id="136" name="Shape 25"/>
+          <p:cNvPr id="141" name="Shape 25"/>
           <p:cNvSpPr/>
           <p:nvPr/>
         </p:nvSpPr>
@@ -24689,7 +26344,7 @@
       </p:sp>
       <p:sp>
         <p:nvSpPr>
-          <p:cNvPr id="137" name="Shape 26"/>
+          <p:cNvPr id="142" name="Shape 26"/>
           <p:cNvSpPr/>
           <p:nvPr/>
         </p:nvSpPr>
@@ -24720,7 +26375,7 @@
       </p:sp>
       <p:sp>
         <p:nvSpPr>
-          <p:cNvPr id="138" name="Shape 27"/>
+          <p:cNvPr id="143" name="Shape 27"/>
           <p:cNvSpPr/>
           <p:nvPr/>
         </p:nvSpPr>
@@ -24751,14 +26406,14 @@
       </p:sp>
       <p:sp>
         <p:nvSpPr>
-          <p:cNvPr id="139" name="Shape 28"/>
-          <p:cNvSpPr/>
-          <p:nvPr/>
-        </p:nvSpPr>
-        <p:spPr>
-          <a:xfrm>
-            <a:off x="9601199" y="2404872"/>
-            <a:ext cx="402338" cy="402337"/>
+          <p:cNvPr id="144" name="Shape 28"/>
+          <p:cNvSpPr/>
+          <p:nvPr/>
+        </p:nvSpPr>
+        <p:spPr>
+          <a:xfrm>
+            <a:off x="9601200" y="2404872"/>
+            <a:ext cx="402337" cy="402337"/>
           </a:xfrm>
           <a:prstGeom prst="rect">
             <a:avLst/>
@@ -24782,7 +26437,7 @@
       </p:sp>
       <p:sp>
         <p:nvSpPr>
-          <p:cNvPr id="140" name="Shape 29"/>
+          <p:cNvPr id="145" name="Shape 29"/>
           <p:cNvSpPr/>
           <p:nvPr/>
         </p:nvSpPr>
@@ -24813,7 +26468,7 @@
       </p:sp>
       <p:sp>
         <p:nvSpPr>
-          <p:cNvPr id="141" name="Shape 30"/>
+          <p:cNvPr id="146" name="Shape 30"/>
           <p:cNvSpPr/>
           <p:nvPr/>
         </p:nvSpPr>
@@ -24844,7 +26499,7 @@
       </p:sp>
       <p:sp>
         <p:nvSpPr>
-          <p:cNvPr id="142" name="Shape 31"/>
+          <p:cNvPr id="147" name="Shape 31"/>
           <p:cNvSpPr/>
           <p:nvPr/>
         </p:nvSpPr>
@@ -24875,7 +26530,7 @@
       </p:sp>
       <p:sp>
         <p:nvSpPr>
-          <p:cNvPr id="143" name="Shape 32"/>
+          <p:cNvPr id="148" name="Shape 32"/>
           <p:cNvSpPr/>
           <p:nvPr/>
         </p:nvSpPr>
@@ -24906,7 +26561,7 @@
       </p:sp>
       <p:sp>
         <p:nvSpPr>
-          <p:cNvPr id="144" name="Shape 33"/>
+          <p:cNvPr id="149" name="Shape 33"/>
           <p:cNvSpPr/>
           <p:nvPr/>
         </p:nvSpPr>
@@ -24937,7 +26592,7 @@
       </p:sp>
       <p:sp>
         <p:nvSpPr>
-          <p:cNvPr id="145" name="Shape 34"/>
+          <p:cNvPr id="150" name="Shape 34"/>
           <p:cNvSpPr/>
           <p:nvPr/>
         </p:nvSpPr>
@@ -24968,7 +26623,7 @@
       </p:sp>
       <p:sp>
         <p:nvSpPr>
-          <p:cNvPr id="146" name="Shape 35"/>
+          <p:cNvPr id="151" name="Shape 35"/>
           <p:cNvSpPr/>
           <p:nvPr/>
         </p:nvSpPr>
@@ -24999,14 +26654,14 @@
       </p:sp>
       <p:sp>
         <p:nvSpPr>
-          <p:cNvPr id="147" name="Shape 36"/>
-          <p:cNvSpPr/>
-          <p:nvPr/>
-        </p:nvSpPr>
-        <p:spPr>
-          <a:xfrm>
-            <a:off x="9601199" y="2807207"/>
-            <a:ext cx="402338" cy="402337"/>
+          <p:cNvPr id="152" name="Shape 36"/>
+          <p:cNvSpPr/>
+          <p:nvPr/>
+        </p:nvSpPr>
+        <p:spPr>
+          <a:xfrm>
+            <a:off x="9601200" y="2807207"/>
+            <a:ext cx="402337" cy="402337"/>
           </a:xfrm>
           <a:prstGeom prst="rect">
             <a:avLst/>
@@ -25030,7 +26685,7 @@
       </p:sp>
       <p:sp>
         <p:nvSpPr>
-          <p:cNvPr id="148" name="Shape 37"/>
+          <p:cNvPr id="153" name="Shape 37"/>
           <p:cNvSpPr/>
           <p:nvPr/>
         </p:nvSpPr>
@@ -25061,7 +26716,7 @@
       </p:sp>
       <p:sp>
         <p:nvSpPr>
-          <p:cNvPr id="149" name="Shape 38"/>
+          <p:cNvPr id="154" name="Shape 38"/>
           <p:cNvSpPr/>
           <p:nvPr/>
         </p:nvSpPr>
@@ -25092,7 +26747,7 @@
       </p:sp>
       <p:sp>
         <p:nvSpPr>
-          <p:cNvPr id="150" name="Shape 39"/>
+          <p:cNvPr id="155" name="Shape 39"/>
           <p:cNvSpPr/>
           <p:nvPr/>
         </p:nvSpPr>
@@ -25123,7 +26778,7 @@
       </p:sp>
       <p:sp>
         <p:nvSpPr>
-          <p:cNvPr id="151" name="Shape 40"/>
+          <p:cNvPr id="156" name="Shape 40"/>
           <p:cNvSpPr/>
           <p:nvPr/>
         </p:nvSpPr>
@@ -25154,7 +26809,7 @@
       </p:sp>
       <p:sp>
         <p:nvSpPr>
-          <p:cNvPr id="152" name="Shape 41"/>
+          <p:cNvPr id="157" name="Shape 41"/>
           <p:cNvSpPr/>
           <p:nvPr/>
         </p:nvSpPr>
@@ -25185,7 +26840,7 @@
       </p:sp>
       <p:sp>
         <p:nvSpPr>
-          <p:cNvPr id="153" name="Shape 42"/>
+          <p:cNvPr id="158" name="Shape 42"/>
           <p:cNvSpPr/>
           <p:nvPr/>
         </p:nvSpPr>
@@ -25216,7 +26871,7 @@
       </p:sp>
       <p:sp>
         <p:nvSpPr>
-          <p:cNvPr id="154" name="Shape 43"/>
+          <p:cNvPr id="159" name="Shape 43"/>
           <p:cNvSpPr/>
           <p:nvPr/>
         </p:nvSpPr>
@@ -25247,14 +26902,14 @@
       </p:sp>
       <p:sp>
         <p:nvSpPr>
-          <p:cNvPr id="155" name="Shape 44"/>
-          <p:cNvSpPr/>
-          <p:nvPr/>
-        </p:nvSpPr>
-        <p:spPr>
-          <a:xfrm>
-            <a:off x="9601199" y="3209544"/>
-            <a:ext cx="402338" cy="402337"/>
+          <p:cNvPr id="160" name="Shape 44"/>
+          <p:cNvSpPr/>
+          <p:nvPr/>
+        </p:nvSpPr>
+        <p:spPr>
+          <a:xfrm>
+            <a:off x="9601200" y="3209544"/>
+            <a:ext cx="402337" cy="402337"/>
           </a:xfrm>
           <a:prstGeom prst="rect">
             <a:avLst/>
@@ -25278,7 +26933,7 @@
       </p:sp>
       <p:sp>
         <p:nvSpPr>
-          <p:cNvPr id="156" name="Shape 45"/>
+          <p:cNvPr id="161" name="Shape 45"/>
           <p:cNvSpPr/>
           <p:nvPr/>
         </p:nvSpPr>
@@ -25309,7 +26964,7 @@
       </p:sp>
       <p:sp>
         <p:nvSpPr>
-          <p:cNvPr id="157" name="Shape 46"/>
+          <p:cNvPr id="162" name="Shape 46"/>
           <p:cNvSpPr/>
           <p:nvPr/>
         </p:nvSpPr>
@@ -25340,7 +26995,7 @@
       </p:sp>
       <p:sp>
         <p:nvSpPr>
-          <p:cNvPr id="158" name="Shape 47"/>
+          <p:cNvPr id="163" name="Shape 47"/>
           <p:cNvSpPr/>
           <p:nvPr/>
         </p:nvSpPr>
@@ -25371,7 +27026,7 @@
       </p:sp>
       <p:sp>
         <p:nvSpPr>
-          <p:cNvPr id="159" name="Shape 48"/>
+          <p:cNvPr id="164" name="Shape 48"/>
           <p:cNvSpPr/>
           <p:nvPr/>
         </p:nvSpPr>
@@ -25402,7 +27057,7 @@
       </p:sp>
       <p:sp>
         <p:nvSpPr>
-          <p:cNvPr id="160" name="Shape 49"/>
+          <p:cNvPr id="165" name="Shape 49"/>
           <p:cNvSpPr/>
           <p:nvPr/>
         </p:nvSpPr>
@@ -25433,7 +27088,7 @@
       </p:sp>
       <p:sp>
         <p:nvSpPr>
-          <p:cNvPr id="161" name="Shape 50"/>
+          <p:cNvPr id="166" name="Shape 50"/>
           <p:cNvSpPr/>
           <p:nvPr/>
         </p:nvSpPr>
@@ -25464,7 +27119,7 @@
       </p:sp>
       <p:sp>
         <p:nvSpPr>
-          <p:cNvPr id="162" name="Shape 51"/>
+          <p:cNvPr id="167" name="Shape 51"/>
           <p:cNvSpPr/>
           <p:nvPr/>
         </p:nvSpPr>
@@ -25495,14 +27150,14 @@
       </p:sp>
       <p:sp>
         <p:nvSpPr>
-          <p:cNvPr id="163" name="Shape 52"/>
-          <p:cNvSpPr/>
-          <p:nvPr/>
-        </p:nvSpPr>
-        <p:spPr>
-          <a:xfrm>
-            <a:off x="9601199" y="3611879"/>
-            <a:ext cx="402338" cy="402337"/>
+          <p:cNvPr id="168" name="Shape 52"/>
+          <p:cNvSpPr/>
+          <p:nvPr/>
+        </p:nvSpPr>
+        <p:spPr>
+          <a:xfrm>
+            <a:off x="9601200" y="3611879"/>
+            <a:ext cx="402337" cy="402337"/>
           </a:xfrm>
           <a:prstGeom prst="rect">
             <a:avLst/>
@@ -25526,7 +27181,7 @@
       </p:sp>
       <p:sp>
         <p:nvSpPr>
-          <p:cNvPr id="164" name="Shape 53"/>
+          <p:cNvPr id="169" name="Shape 53"/>
           <p:cNvSpPr/>
           <p:nvPr/>
         </p:nvSpPr>
@@ -25557,7 +27212,7 @@
       </p:sp>
       <p:sp>
         <p:nvSpPr>
-          <p:cNvPr id="165" name="Shape 54"/>
+          <p:cNvPr id="170" name="Shape 54"/>
           <p:cNvSpPr/>
           <p:nvPr/>
         </p:nvSpPr>
@@ -25588,7 +27243,7 @@
       </p:sp>
       <p:sp>
         <p:nvSpPr>
-          <p:cNvPr id="166" name="Shape 55"/>
+          <p:cNvPr id="171" name="Shape 55"/>
           <p:cNvSpPr/>
           <p:nvPr/>
         </p:nvSpPr>
@@ -25619,7 +27274,7 @@
       </p:sp>
       <p:sp>
         <p:nvSpPr>
-          <p:cNvPr id="167" name="Shape 56"/>
+          <p:cNvPr id="172" name="Shape 56"/>
           <p:cNvSpPr/>
           <p:nvPr/>
         </p:nvSpPr>
@@ -25650,7 +27305,7 @@
       </p:sp>
       <p:sp>
         <p:nvSpPr>
-          <p:cNvPr id="168" name="Shape 57"/>
+          <p:cNvPr id="173" name="Shape 57"/>
           <p:cNvSpPr/>
           <p:nvPr/>
         </p:nvSpPr>
@@ -25681,7 +27336,7 @@
       </p:sp>
       <p:sp>
         <p:nvSpPr>
-          <p:cNvPr id="169" name="Shape 58"/>
+          <p:cNvPr id="174" name="Shape 58"/>
           <p:cNvSpPr/>
           <p:nvPr/>
         </p:nvSpPr>
@@ -25712,7 +27367,7 @@
       </p:sp>
       <p:sp>
         <p:nvSpPr>
-          <p:cNvPr id="170" name="Shape 59"/>
+          <p:cNvPr id="175" name="Shape 59"/>
           <p:cNvSpPr/>
           <p:nvPr/>
         </p:nvSpPr>
@@ -25743,14 +27398,14 @@
       </p:sp>
       <p:sp>
         <p:nvSpPr>
-          <p:cNvPr id="171" name="Shape 60"/>
-          <p:cNvSpPr/>
-          <p:nvPr/>
-        </p:nvSpPr>
-        <p:spPr>
-          <a:xfrm>
-            <a:off x="9601199" y="4014215"/>
-            <a:ext cx="402338" cy="402337"/>
+          <p:cNvPr id="176" name="Shape 60"/>
+          <p:cNvSpPr/>
+          <p:nvPr/>
+        </p:nvSpPr>
+        <p:spPr>
+          <a:xfrm>
+            <a:off x="9601200" y="4014215"/>
+            <a:ext cx="402337" cy="402337"/>
           </a:xfrm>
           <a:prstGeom prst="rect">
             <a:avLst/>
@@ -25774,7 +27429,7 @@
       </p:sp>
       <p:sp>
         <p:nvSpPr>
-          <p:cNvPr id="172" name="Shape 61"/>
+          <p:cNvPr id="177" name="Shape 61"/>
           <p:cNvSpPr/>
           <p:nvPr/>
         </p:nvSpPr>
@@ -25805,7 +27460,7 @@
       </p:sp>
       <p:sp>
         <p:nvSpPr>
-          <p:cNvPr id="173" name="Shape 62"/>
+          <p:cNvPr id="178" name="Shape 62"/>
           <p:cNvSpPr/>
           <p:nvPr/>
         </p:nvSpPr>
@@ -25836,7 +27491,7 @@
       </p:sp>
       <p:sp>
         <p:nvSpPr>
-          <p:cNvPr id="174" name="Shape 63"/>
+          <p:cNvPr id="179" name="Shape 63"/>
           <p:cNvSpPr/>
           <p:nvPr/>
         </p:nvSpPr>
@@ -25867,7 +27522,7 @@
       </p:sp>
       <p:sp>
         <p:nvSpPr>
-          <p:cNvPr id="175" name="Shape 64"/>
+          <p:cNvPr id="180" name="Shape 64"/>
           <p:cNvSpPr/>
           <p:nvPr/>
         </p:nvSpPr>
@@ -25898,7 +27553,7 @@
       </p:sp>
       <p:sp>
         <p:nvSpPr>
-          <p:cNvPr id="176" name="Shape 65"/>
+          <p:cNvPr id="181" name="Shape 65"/>
           <p:cNvSpPr/>
           <p:nvPr/>
         </p:nvSpPr>
@@ -25929,7 +27584,7 @@
       </p:sp>
       <p:sp>
         <p:nvSpPr>
-          <p:cNvPr id="177" name="Shape 66"/>
+          <p:cNvPr id="182" name="Shape 66"/>
           <p:cNvSpPr/>
           <p:nvPr/>
         </p:nvSpPr>
@@ -25960,7 +27615,7 @@
       </p:sp>
       <p:sp>
         <p:nvSpPr>
-          <p:cNvPr id="178" name="Shape 67"/>
+          <p:cNvPr id="183" name="Shape 67"/>
           <p:cNvSpPr/>
           <p:nvPr/>
         </p:nvSpPr>
@@ -25991,14 +27646,14 @@
       </p:sp>
       <p:sp>
         <p:nvSpPr>
-          <p:cNvPr id="179" name="Shape 68"/>
-          <p:cNvSpPr/>
-          <p:nvPr/>
-        </p:nvSpPr>
-        <p:spPr>
-          <a:xfrm>
-            <a:off x="9601199" y="4416552"/>
-            <a:ext cx="402338" cy="402337"/>
+          <p:cNvPr id="184" name="Shape 68"/>
+          <p:cNvSpPr/>
+          <p:nvPr/>
+        </p:nvSpPr>
+        <p:spPr>
+          <a:xfrm>
+            <a:off x="9601200" y="4416552"/>
+            <a:ext cx="402337" cy="402337"/>
           </a:xfrm>
           <a:prstGeom prst="rect">
             <a:avLst/>
@@ -26022,7 +27677,7 @@
       </p:sp>
       <p:sp>
         <p:nvSpPr>
-          <p:cNvPr id="180" name="Shape 69"/>
+          <p:cNvPr id="185" name="Shape 69"/>
           <p:cNvSpPr/>
           <p:nvPr/>
         </p:nvSpPr>
@@ -26053,7 +27708,7 @@
       </p:sp>
       <p:sp>
         <p:nvSpPr>
-          <p:cNvPr id="181" name="Shape 70"/>
+          <p:cNvPr id="186" name="Shape 70"/>
           <p:cNvSpPr/>
           <p:nvPr/>
         </p:nvSpPr>
@@ -26084,14 +27739,14 @@
       </p:sp>
       <p:sp>
         <p:nvSpPr>
-          <p:cNvPr id="182" name="Shape 71"/>
-          <p:cNvSpPr/>
-          <p:nvPr/>
-        </p:nvSpPr>
-        <p:spPr>
-          <a:xfrm>
-            <a:off x="7589519" y="1600199"/>
-            <a:ext cx="3218689" cy="3218690"/>
+          <p:cNvPr id="187" name="Shape 71"/>
+          <p:cNvSpPr/>
+          <p:nvPr/>
+        </p:nvSpPr>
+        <p:spPr>
+          <a:xfrm>
+            <a:off x="7589519" y="1600200"/>
+            <a:ext cx="3218689" cy="3218689"/>
           </a:xfrm>
           <a:prstGeom prst="rect">
             <a:avLst/>
@@ -26112,7 +27767,7 @@
       </p:sp>
       <p:sp>
         <p:nvSpPr>
-          <p:cNvPr id="183" name="Text 72"/>
+          <p:cNvPr id="188" name="Text 72"/>
           <p:cNvSpPr txBox="1"/>
           <p:nvPr/>
         </p:nvSpPr>
@@ -26156,7 +27811,7 @@
       </p:sp>
       <p:sp>
         <p:nvSpPr>
-          <p:cNvPr id="184" name="Text 73"/>
+          <p:cNvPr id="189" name="Text 73"/>
           <p:cNvSpPr txBox="1"/>
           <p:nvPr/>
         </p:nvSpPr>
@@ -26226,7 +27881,7 @@
       </p:grpSpPr>
       <p:sp>
         <p:nvSpPr>
-          <p:cNvPr id="186" name="Text 0"/>
+          <p:cNvPr id="193" name="Text 0"/>
           <p:cNvSpPr txBox="1"/>
           <p:nvPr/>
         </p:nvSpPr>
@@ -26270,7 +27925,7 @@
       </p:sp>
       <p:sp>
         <p:nvSpPr>
-          <p:cNvPr id="187" name="Text 1"/>
+          <p:cNvPr id="194" name="Text 1"/>
           <p:cNvSpPr txBox="1"/>
           <p:nvPr/>
         </p:nvSpPr>
@@ -26318,7 +27973,7 @@
       </p:sp>
       <p:sp>
         <p:nvSpPr>
-          <p:cNvPr id="188" name="Text 2"/>
+          <p:cNvPr id="195" name="Text 2"/>
           <p:cNvSpPr txBox="1"/>
           <p:nvPr/>
         </p:nvSpPr>
@@ -26362,7 +28017,7 @@
       </p:sp>
       <p:sp>
         <p:nvSpPr>
-          <p:cNvPr id="189" name="Text 3"/>
+          <p:cNvPr id="196" name="Text 3"/>
           <p:cNvSpPr txBox="1"/>
           <p:nvPr/>
         </p:nvSpPr>
@@ -26410,7 +28065,7 @@
       </p:sp>
       <p:sp>
         <p:nvSpPr>
-          <p:cNvPr id="190" name="Text 4"/>
+          <p:cNvPr id="197" name="Text 4"/>
           <p:cNvSpPr txBox="1"/>
           <p:nvPr/>
         </p:nvSpPr>
@@ -26454,7 +28109,7 @@
       </p:sp>
       <p:sp>
         <p:nvSpPr>
-          <p:cNvPr id="191" name="Text 5"/>
+          <p:cNvPr id="198" name="Text 5"/>
           <p:cNvSpPr txBox="1"/>
           <p:nvPr/>
         </p:nvSpPr>
@@ -26502,7 +28157,7 @@
       </p:sp>
       <p:sp>
         <p:nvSpPr>
-          <p:cNvPr id="192" name="Text 6"/>
+          <p:cNvPr id="199" name="Text 6"/>
           <p:cNvSpPr txBox="1"/>
           <p:nvPr/>
         </p:nvSpPr>
@@ -26550,7 +28205,7 @@
       </p:sp>
       <p:sp>
         <p:nvSpPr>
-          <p:cNvPr id="193" name="Text 7"/>
+          <p:cNvPr id="200" name="Text 7"/>
           <p:cNvSpPr txBox="1"/>
           <p:nvPr/>
         </p:nvSpPr>
@@ -26594,7 +28249,7 @@
       </p:sp>
       <p:sp>
         <p:nvSpPr>
-          <p:cNvPr id="194" name="Text 8"/>
+          <p:cNvPr id="201" name="Text 8"/>
           <p:cNvSpPr txBox="1"/>
           <p:nvPr/>
         </p:nvSpPr>
@@ -26638,7 +28293,7 @@
       </p:sp>
       <p:sp>
         <p:nvSpPr>
-          <p:cNvPr id="195" name="Text 9"/>
+          <p:cNvPr id="202" name="Text 9"/>
           <p:cNvSpPr txBox="1"/>
           <p:nvPr/>
         </p:nvSpPr>
@@ -26686,7 +28341,7 @@
       </p:sp>
       <p:sp>
         <p:nvSpPr>
-          <p:cNvPr id="196" name="Text 10"/>
+          <p:cNvPr id="203" name="Text 10"/>
           <p:cNvSpPr txBox="1"/>
           <p:nvPr/>
         </p:nvSpPr>
@@ -26730,7 +28385,7 @@
       </p:sp>
       <p:sp>
         <p:nvSpPr>
-          <p:cNvPr id="197" name="Text 11"/>
+          <p:cNvPr id="204" name="Text 11"/>
           <p:cNvSpPr txBox="1"/>
           <p:nvPr/>
         </p:nvSpPr>
@@ -26774,7 +28429,7 @@
       </p:sp>
       <p:sp>
         <p:nvSpPr>
-          <p:cNvPr id="198" name="Text 12"/>
+          <p:cNvPr id="205" name="Text 12"/>
           <p:cNvSpPr txBox="1"/>
           <p:nvPr/>
         </p:nvSpPr>
@@ -26822,7 +28477,7 @@
       </p:sp>
       <p:sp>
         <p:nvSpPr>
-          <p:cNvPr id="199" name="Text 13"/>
+          <p:cNvPr id="206" name="Text 13"/>
           <p:cNvSpPr txBox="1"/>
           <p:nvPr/>
         </p:nvSpPr>
@@ -26866,7 +28521,7 @@
       </p:sp>
       <p:sp>
         <p:nvSpPr>
-          <p:cNvPr id="200" name="Text 14"/>
+          <p:cNvPr id="207" name="Text 14"/>
           <p:cNvSpPr txBox="1"/>
           <p:nvPr/>
         </p:nvSpPr>
@@ -26910,7 +28565,7 @@
       </p:sp>
       <p:sp>
         <p:nvSpPr>
-          <p:cNvPr id="201" name="Text 15"/>
+          <p:cNvPr id="208" name="Text 15"/>
           <p:cNvSpPr txBox="1"/>
           <p:nvPr/>
         </p:nvSpPr>
@@ -26980,7 +28635,7 @@
       </p:grpSpPr>
       <p:sp>
         <p:nvSpPr>
-          <p:cNvPr id="203" name="Text 0"/>
+          <p:cNvPr id="212" name="Text 0"/>
           <p:cNvSpPr txBox="1"/>
           <p:nvPr/>
         </p:nvSpPr>
@@ -27024,7 +28679,7 @@
       </p:sp>
       <p:sp>
         <p:nvSpPr>
-          <p:cNvPr id="204" name="Text 1"/>
+          <p:cNvPr id="213" name="Text 1"/>
           <p:cNvSpPr txBox="1"/>
           <p:nvPr/>
         </p:nvSpPr>
@@ -27072,7 +28727,7 @@
       </p:sp>
       <p:sp>
         <p:nvSpPr>
-          <p:cNvPr id="205" name="Text 2"/>
+          <p:cNvPr id="214" name="Text 2"/>
           <p:cNvSpPr txBox="1"/>
           <p:nvPr/>
         </p:nvSpPr>
@@ -27116,14 +28771,14 @@
       </p:sp>
       <p:sp>
         <p:nvSpPr>
-          <p:cNvPr id="206" name="Shape 3"/>
+          <p:cNvPr id="215" name="Shape 3"/>
           <p:cNvSpPr/>
           <p:nvPr/>
         </p:nvSpPr>
         <p:spPr>
           <a:xfrm>
             <a:off x="914400" y="2377439"/>
-            <a:ext cx="9144001" cy="1"/>
+            <a:ext cx="9144000" cy="1"/>
           </a:xfrm>
           <a:prstGeom prst="line">
             <a:avLst/>
@@ -27144,7 +28799,7 @@
       </p:sp>
       <p:sp>
         <p:nvSpPr>
-          <p:cNvPr id="207" name="Shape 4"/>
+          <p:cNvPr id="216" name="Shape 4"/>
           <p:cNvSpPr/>
           <p:nvPr/>
         </p:nvSpPr>
@@ -27175,7 +28830,7 @@
       </p:sp>
       <p:sp>
         <p:nvSpPr>
-          <p:cNvPr id="208" name="Text 5"/>
+          <p:cNvPr id="217" name="Text 5"/>
           <p:cNvSpPr txBox="1"/>
           <p:nvPr/>
         </p:nvSpPr>
@@ -27223,7 +28878,7 @@
       </p:sp>
       <p:sp>
         <p:nvSpPr>
-          <p:cNvPr id="209" name="Text 6"/>
+          <p:cNvPr id="218" name="Text 6"/>
           <p:cNvSpPr txBox="1"/>
           <p:nvPr/>
         </p:nvSpPr>
@@ -27267,7 +28922,7 @@
       </p:sp>
       <p:sp>
         <p:nvSpPr>
-          <p:cNvPr id="210" name="Shape 7"/>
+          <p:cNvPr id="219" name="Shape 7"/>
           <p:cNvSpPr/>
           <p:nvPr/>
         </p:nvSpPr>
@@ -27298,14 +28953,14 @@
       </p:sp>
       <p:sp>
         <p:nvSpPr>
-          <p:cNvPr id="211" name="Text 8"/>
+          <p:cNvPr id="220" name="Text 8"/>
           <p:cNvSpPr txBox="1"/>
           <p:nvPr/>
         </p:nvSpPr>
         <p:spPr>
           <a:xfrm>
             <a:off x="2606039" y="1691639"/>
-            <a:ext cx="1463041" cy="355601"/>
+            <a:ext cx="1463042" cy="355601"/>
           </a:xfrm>
           <a:prstGeom prst="rect">
             <a:avLst/>
@@ -27346,7 +29001,7 @@
       </p:sp>
       <p:sp>
         <p:nvSpPr>
-          <p:cNvPr id="212" name="Text 9"/>
+          <p:cNvPr id="221" name="Text 9"/>
           <p:cNvSpPr txBox="1"/>
           <p:nvPr/>
         </p:nvSpPr>
@@ -27390,7 +29045,7 @@
       </p:sp>
       <p:sp>
         <p:nvSpPr>
-          <p:cNvPr id="213" name="Shape 10"/>
+          <p:cNvPr id="222" name="Shape 10"/>
           <p:cNvSpPr/>
           <p:nvPr/>
         </p:nvSpPr>
@@ -27421,7 +29076,7 @@
       </p:sp>
       <p:sp>
         <p:nvSpPr>
-          <p:cNvPr id="214" name="Text 11"/>
+          <p:cNvPr id="223" name="Text 11"/>
           <p:cNvSpPr txBox="1"/>
           <p:nvPr/>
         </p:nvSpPr>
@@ -27469,7 +29124,7 @@
       </p:sp>
       <p:sp>
         <p:nvSpPr>
-          <p:cNvPr id="215" name="Text 12"/>
+          <p:cNvPr id="224" name="Text 12"/>
           <p:cNvSpPr txBox="1"/>
           <p:nvPr/>
         </p:nvSpPr>
@@ -27513,7 +29168,7 @@
       </p:sp>
       <p:sp>
         <p:nvSpPr>
-          <p:cNvPr id="216" name="Shape 13"/>
+          <p:cNvPr id="225" name="Shape 13"/>
           <p:cNvSpPr/>
           <p:nvPr/>
         </p:nvSpPr>
@@ -27544,14 +29199,14 @@
       </p:sp>
       <p:sp>
         <p:nvSpPr>
-          <p:cNvPr id="217" name="Text 14"/>
-          <p:cNvSpPr txBox="1"/>
-          <p:nvPr/>
-        </p:nvSpPr>
-        <p:spPr>
-          <a:xfrm>
-            <a:off x="7086599" y="1691639"/>
-            <a:ext cx="1463042" cy="355601"/>
+          <p:cNvPr id="226" name="Text 14"/>
+          <p:cNvSpPr txBox="1"/>
+          <p:nvPr/>
+        </p:nvSpPr>
+        <p:spPr>
+          <a:xfrm>
+            <a:off x="7086600" y="1691639"/>
+            <a:ext cx="1463041" cy="355601"/>
           </a:xfrm>
           <a:prstGeom prst="rect">
             <a:avLst/>
@@ -27592,7 +29247,7 @@
       </p:sp>
       <p:sp>
         <p:nvSpPr>
-          <p:cNvPr id="218" name="Text 15"/>
+          <p:cNvPr id="227" name="Text 15"/>
           <p:cNvSpPr txBox="1"/>
           <p:nvPr/>
         </p:nvSpPr>
@@ -27636,7 +29291,7 @@
       </p:sp>
       <p:sp>
         <p:nvSpPr>
-          <p:cNvPr id="219" name="Shape 16"/>
+          <p:cNvPr id="228" name="Shape 16"/>
           <p:cNvSpPr/>
           <p:nvPr/>
         </p:nvSpPr>
@@ -27667,7 +29322,7 @@
       </p:sp>
       <p:sp>
         <p:nvSpPr>
-          <p:cNvPr id="220" name="Text 17"/>
+          <p:cNvPr id="229" name="Text 17"/>
           <p:cNvSpPr txBox="1"/>
           <p:nvPr/>
         </p:nvSpPr>
@@ -27715,7 +29370,7 @@
       </p:sp>
       <p:sp>
         <p:nvSpPr>
-          <p:cNvPr id="221" name="Text 18"/>
+          <p:cNvPr id="230" name="Text 18"/>
           <p:cNvSpPr txBox="1"/>
           <p:nvPr/>
         </p:nvSpPr>
@@ -27759,14 +29414,14 @@
       </p:sp>
       <p:sp>
         <p:nvSpPr>
-          <p:cNvPr id="222" name="Shape 19"/>
-          <p:cNvSpPr/>
-          <p:nvPr/>
-        </p:nvSpPr>
-        <p:spPr>
-          <a:xfrm>
-            <a:off x="640079" y="4571999"/>
-            <a:ext cx="10911537" cy="1097282"/>
+          <p:cNvPr id="231" name="Shape 19"/>
+          <p:cNvSpPr/>
+          <p:nvPr/>
+        </p:nvSpPr>
+        <p:spPr>
+          <a:xfrm>
+            <a:off x="640079" y="4572000"/>
+            <a:ext cx="10911537" cy="1097281"/>
           </a:xfrm>
           <a:prstGeom prst="rect">
             <a:avLst/>
@@ -27790,7 +29445,7 @@
       </p:sp>
       <p:sp>
         <p:nvSpPr>
-          <p:cNvPr id="223" name="Text 20"/>
+          <p:cNvPr id="232" name="Text 20"/>
           <p:cNvSpPr txBox="1"/>
           <p:nvPr/>
         </p:nvSpPr>
@@ -27873,7 +29528,7 @@
       </p:grpSpPr>
       <p:sp>
         <p:nvSpPr>
-          <p:cNvPr id="225" name="Text 0"/>
+          <p:cNvPr id="236" name="Text 0"/>
           <p:cNvSpPr txBox="1"/>
           <p:nvPr/>
         </p:nvSpPr>
@@ -27917,7 +29572,7 @@
       </p:sp>
       <p:sp>
         <p:nvSpPr>
-          <p:cNvPr id="226" name="Text 1"/>
+          <p:cNvPr id="237" name="Text 1"/>
           <p:cNvSpPr txBox="1"/>
           <p:nvPr/>
         </p:nvSpPr>
@@ -27965,7 +29620,7 @@
       </p:sp>
       <p:sp>
         <p:nvSpPr>
-          <p:cNvPr id="227" name="Text 2"/>
+          <p:cNvPr id="238" name="Text 2"/>
           <p:cNvSpPr txBox="1"/>
           <p:nvPr/>
         </p:nvSpPr>
@@ -28009,7 +29664,7 @@
       </p:sp>
       <p:sp>
         <p:nvSpPr>
-          <p:cNvPr id="228" name="Shape 3"/>
+          <p:cNvPr id="239" name="Shape 3"/>
           <p:cNvSpPr/>
           <p:nvPr/>
         </p:nvSpPr>
@@ -28040,7 +29695,7 @@
       </p:sp>
       <p:sp>
         <p:nvSpPr>
-          <p:cNvPr id="229" name="Text 4"/>
+          <p:cNvPr id="240" name="Text 4"/>
           <p:cNvSpPr txBox="1"/>
           <p:nvPr/>
         </p:nvSpPr>
@@ -28084,7 +29739,7 @@
       </p:sp>
       <p:sp>
         <p:nvSpPr>
-          <p:cNvPr id="230" name="Shape 5"/>
+          <p:cNvPr id="241" name="Shape 5"/>
           <p:cNvSpPr/>
           <p:nvPr/>
         </p:nvSpPr>
@@ -28115,7 +29770,7 @@
       </p:sp>
       <p:sp>
         <p:nvSpPr>
-          <p:cNvPr id="231" name="Text 6"/>
+          <p:cNvPr id="242" name="Text 6"/>
           <p:cNvSpPr txBox="1"/>
           <p:nvPr/>
         </p:nvSpPr>
@@ -28159,7 +29814,7 @@
       </p:sp>
       <p:sp>
         <p:nvSpPr>
-          <p:cNvPr id="232" name="Shape 7"/>
+          <p:cNvPr id="243" name="Shape 7"/>
           <p:cNvSpPr/>
           <p:nvPr/>
         </p:nvSpPr>
@@ -28190,7 +29845,7 @@
       </p:sp>
       <p:sp>
         <p:nvSpPr>
-          <p:cNvPr id="233" name="Text 8"/>
+          <p:cNvPr id="244" name="Text 8"/>
           <p:cNvSpPr txBox="1"/>
           <p:nvPr/>
         </p:nvSpPr>
@@ -28234,7 +29889,7 @@
       </p:sp>
       <p:sp>
         <p:nvSpPr>
-          <p:cNvPr id="234" name="Shape 9"/>
+          <p:cNvPr id="245" name="Shape 9"/>
           <p:cNvSpPr/>
           <p:nvPr/>
         </p:nvSpPr>
@@ -28265,7 +29920,7 @@
       </p:sp>
       <p:sp>
         <p:nvSpPr>
-          <p:cNvPr id="235" name="Text 10"/>
+          <p:cNvPr id="246" name="Text 10"/>
           <p:cNvSpPr txBox="1"/>
           <p:nvPr/>
         </p:nvSpPr>
@@ -28309,7 +29964,7 @@
       </p:sp>
       <p:sp>
         <p:nvSpPr>
-          <p:cNvPr id="236" name="Shape 11"/>
+          <p:cNvPr id="247" name="Shape 11"/>
           <p:cNvSpPr/>
           <p:nvPr/>
         </p:nvSpPr>
@@ -28340,7 +29995,7 @@
       </p:sp>
       <p:sp>
         <p:nvSpPr>
-          <p:cNvPr id="237" name="Text 12"/>
+          <p:cNvPr id="248" name="Text 12"/>
           <p:cNvSpPr txBox="1"/>
           <p:nvPr/>
         </p:nvSpPr>
@@ -28384,7 +30039,7 @@
       </p:sp>
       <p:sp>
         <p:nvSpPr>
-          <p:cNvPr id="238" name="Shape 13"/>
+          <p:cNvPr id="249" name="Shape 13"/>
           <p:cNvSpPr/>
           <p:nvPr/>
         </p:nvSpPr>
@@ -28415,7 +30070,7 @@
       </p:sp>
       <p:sp>
         <p:nvSpPr>
-          <p:cNvPr id="239" name="Text 14"/>
+          <p:cNvPr id="250" name="Text 14"/>
           <p:cNvSpPr txBox="1"/>
           <p:nvPr/>
         </p:nvSpPr>
@@ -28459,7 +30114,7 @@
       </p:sp>
       <p:sp>
         <p:nvSpPr>
-          <p:cNvPr id="240" name="Shape 15"/>
+          <p:cNvPr id="251" name="Shape 15"/>
           <p:cNvSpPr/>
           <p:nvPr/>
         </p:nvSpPr>
@@ -28490,7 +30145,7 @@
       </p:sp>
       <p:sp>
         <p:nvSpPr>
-          <p:cNvPr id="241" name="Text 16"/>
+          <p:cNvPr id="252" name="Text 16"/>
           <p:cNvSpPr txBox="1"/>
           <p:nvPr/>
         </p:nvSpPr>
@@ -28534,7 +30189,7 @@
       </p:sp>
       <p:sp>
         <p:nvSpPr>
-          <p:cNvPr id="242" name="Shape 17"/>
+          <p:cNvPr id="253" name="Shape 17"/>
           <p:cNvSpPr/>
           <p:nvPr/>
         </p:nvSpPr>
@@ -28565,7 +30220,7 @@
       </p:sp>
       <p:sp>
         <p:nvSpPr>
-          <p:cNvPr id="243" name="Text 18"/>
+          <p:cNvPr id="254" name="Text 18"/>
           <p:cNvSpPr txBox="1"/>
           <p:nvPr/>
         </p:nvSpPr>
@@ -28609,7 +30264,7 @@
       </p:sp>
       <p:sp>
         <p:nvSpPr>
-          <p:cNvPr id="244" name="Shape 19"/>
+          <p:cNvPr id="255" name="Shape 19"/>
           <p:cNvSpPr/>
           <p:nvPr/>
         </p:nvSpPr>
@@ -28640,7 +30295,7 @@
       </p:sp>
       <p:sp>
         <p:nvSpPr>
-          <p:cNvPr id="245" name="Text 20"/>
+          <p:cNvPr id="256" name="Text 20"/>
           <p:cNvSpPr txBox="1"/>
           <p:nvPr/>
         </p:nvSpPr>
@@ -28684,7 +30339,7 @@
       </p:sp>
       <p:sp>
         <p:nvSpPr>
-          <p:cNvPr id="246" name="Shape 21"/>
+          <p:cNvPr id="257" name="Shape 21"/>
           <p:cNvSpPr/>
           <p:nvPr/>
         </p:nvSpPr>
@@ -28715,7 +30370,7 @@
       </p:sp>
       <p:sp>
         <p:nvSpPr>
-          <p:cNvPr id="247" name="Text 22"/>
+          <p:cNvPr id="258" name="Text 22"/>
           <p:cNvSpPr txBox="1"/>
           <p:nvPr/>
         </p:nvSpPr>
@@ -28759,7 +30414,7 @@
       </p:sp>
       <p:sp>
         <p:nvSpPr>
-          <p:cNvPr id="248" name="Shape 23"/>
+          <p:cNvPr id="259" name="Shape 23"/>
           <p:cNvSpPr/>
           <p:nvPr/>
         </p:nvSpPr>
@@ -28788,14 +30443,14 @@
       </p:sp>
       <p:sp>
         <p:nvSpPr>
-          <p:cNvPr id="249" name="Text 24"/>
-          <p:cNvSpPr txBox="1"/>
-          <p:nvPr/>
-        </p:nvSpPr>
-        <p:spPr>
-          <a:xfrm>
-            <a:off x="640079" y="2743199"/>
-            <a:ext cx="10911537" cy="186558"/>
+          <p:cNvPr id="260" name="Text 24"/>
+          <p:cNvSpPr txBox="1"/>
+          <p:nvPr/>
+        </p:nvSpPr>
+        <p:spPr>
+          <a:xfrm>
+            <a:off x="640079" y="2743200"/>
+            <a:ext cx="10911537" cy="186557"/>
           </a:xfrm>
           <a:prstGeom prst="rect">
             <a:avLst/>
@@ -28832,7 +30487,7 @@
       </p:sp>
       <p:sp>
         <p:nvSpPr>
-          <p:cNvPr id="250" name="Text 25"/>
+          <p:cNvPr id="261" name="Text 25"/>
           <p:cNvSpPr txBox="1"/>
           <p:nvPr/>
         </p:nvSpPr>
@@ -28876,7 +30531,7 @@
       </p:sp>
       <p:sp>
         <p:nvSpPr>
-          <p:cNvPr id="251" name="Text 26"/>
+          <p:cNvPr id="262" name="Text 26"/>
           <p:cNvSpPr txBox="1"/>
           <p:nvPr/>
         </p:nvSpPr>
@@ -28920,14 +30575,14 @@
       </p:sp>
       <p:sp>
         <p:nvSpPr>
-          <p:cNvPr id="252" name="Text 27"/>
-          <p:cNvSpPr txBox="1"/>
-          <p:nvPr/>
-        </p:nvSpPr>
-        <p:spPr>
-          <a:xfrm>
-            <a:off x="6217919" y="3703320"/>
-            <a:ext cx="5120642" cy="293936"/>
+          <p:cNvPr id="263" name="Text 27"/>
+          <p:cNvSpPr txBox="1"/>
+          <p:nvPr/>
+        </p:nvSpPr>
+        <p:spPr>
+          <a:xfrm>
+            <a:off x="6217920" y="3703320"/>
+            <a:ext cx="5120641" cy="293936"/>
           </a:xfrm>
           <a:prstGeom prst="rect">
             <a:avLst/>
@@ -28964,14 +30619,14 @@
       </p:sp>
       <p:sp>
         <p:nvSpPr>
-          <p:cNvPr id="253" name="Text 28"/>
-          <p:cNvSpPr txBox="1"/>
-          <p:nvPr/>
-        </p:nvSpPr>
-        <p:spPr>
-          <a:xfrm>
-            <a:off x="6217919" y="4206240"/>
-            <a:ext cx="5120642" cy="533748"/>
+          <p:cNvPr id="264" name="Text 28"/>
+          <p:cNvSpPr txBox="1"/>
+          <p:nvPr/>
+        </p:nvSpPr>
+        <p:spPr>
+          <a:xfrm>
+            <a:off x="6217920" y="4206240"/>
+            <a:ext cx="5120641" cy="533748"/>
           </a:xfrm>
           <a:prstGeom prst="rect">
             <a:avLst/>
@@ -29034,7 +30689,7 @@
       </p:grpSpPr>
       <p:sp>
         <p:nvSpPr>
-          <p:cNvPr id="255" name="Text 0"/>
+          <p:cNvPr id="268" name="Text 0"/>
           <p:cNvSpPr txBox="1"/>
           <p:nvPr/>
         </p:nvSpPr>
@@ -29078,7 +30733,7 @@
       </p:sp>
       <p:sp>
         <p:nvSpPr>
-          <p:cNvPr id="256" name="Text 1"/>
+          <p:cNvPr id="269" name="Text 1"/>
           <p:cNvSpPr txBox="1"/>
           <p:nvPr/>
         </p:nvSpPr>
@@ -29126,7 +30781,7 @@
       </p:sp>
       <p:sp>
         <p:nvSpPr>
-          <p:cNvPr id="257" name="Text 2"/>
+          <p:cNvPr id="270" name="Text 2"/>
           <p:cNvSpPr txBox="1"/>
           <p:nvPr/>
         </p:nvSpPr>
@@ -29170,7 +30825,7 @@
       </p:sp>
       <p:sp>
         <p:nvSpPr>
-          <p:cNvPr id="258" name="Text 3"/>
+          <p:cNvPr id="271" name="Text 3"/>
           <p:cNvSpPr txBox="1"/>
           <p:nvPr/>
         </p:nvSpPr>
@@ -29224,14 +30879,14 @@
       </p:sp>
       <p:sp>
         <p:nvSpPr>
-          <p:cNvPr id="259" name="Text 4"/>
-          <p:cNvSpPr txBox="1"/>
-          <p:nvPr/>
-        </p:nvSpPr>
-        <p:spPr>
-          <a:xfrm>
-            <a:off x="640080" y="2743199"/>
-            <a:ext cx="5029201" cy="248743"/>
+          <p:cNvPr id="272" name="Text 4"/>
+          <p:cNvSpPr txBox="1"/>
+          <p:nvPr/>
+        </p:nvSpPr>
+        <p:spPr>
+          <a:xfrm>
+            <a:off x="640080" y="2743200"/>
+            <a:ext cx="5029201" cy="248742"/>
           </a:xfrm>
           <a:prstGeom prst="rect">
             <a:avLst/>
@@ -29268,7 +30923,7 @@
       </p:sp>
       <p:sp>
         <p:nvSpPr>
-          <p:cNvPr id="260" name="Text 5"/>
+          <p:cNvPr id="273" name="Text 5"/>
           <p:cNvSpPr txBox="1"/>
           <p:nvPr/>
         </p:nvSpPr>
@@ -29312,7 +30967,7 @@
       </p:sp>
       <p:sp>
         <p:nvSpPr>
-          <p:cNvPr id="261" name="Text 6"/>
+          <p:cNvPr id="274" name="Text 6"/>
           <p:cNvSpPr txBox="1"/>
           <p:nvPr/>
         </p:nvSpPr>
@@ -29356,14 +31011,14 @@
       </p:sp>
       <p:sp>
         <p:nvSpPr>
-          <p:cNvPr id="262" name="Text 7"/>
-          <p:cNvSpPr txBox="1"/>
-          <p:nvPr/>
-        </p:nvSpPr>
-        <p:spPr>
-          <a:xfrm>
-            <a:off x="640080" y="4343399"/>
-            <a:ext cx="5029201" cy="485752"/>
+          <p:cNvPr id="275" name="Text 7"/>
+          <p:cNvSpPr txBox="1"/>
+          <p:nvPr/>
+        </p:nvSpPr>
+        <p:spPr>
+          <a:xfrm>
+            <a:off x="640080" y="4343400"/>
+            <a:ext cx="5029201" cy="485751"/>
           </a:xfrm>
           <a:prstGeom prst="rect">
             <a:avLst/>
@@ -29400,14 +31055,14 @@
       </p:sp>
       <p:pic>
         <p:nvPicPr>
-          <p:cNvPr id="263" name="Image 0" descr="Image 0"/>
+          <p:cNvPr id="276" name="Image 0" descr="Image 0"/>
           <p:cNvPicPr>
             <a:picLocks noChangeAspect="1"/>
           </p:cNvPicPr>
           <p:nvPr/>
         </p:nvPicPr>
         <p:blipFill>
-          <a:blip r:embed="rId2">
+          <a:blip r:embed="rId3">
             <a:extLst/>
           </a:blip>
           <a:stretch>
@@ -29455,7 +31110,7 @@
       </p:grpSpPr>
       <p:sp>
         <p:nvSpPr>
-          <p:cNvPr id="265" name="Text 0"/>
+          <p:cNvPr id="280" name="Text 0"/>
           <p:cNvSpPr txBox="1"/>
           <p:nvPr/>
         </p:nvSpPr>
@@ -29499,7 +31154,7 @@
       </p:sp>
       <p:sp>
         <p:nvSpPr>
-          <p:cNvPr id="266" name="Text 1"/>
+          <p:cNvPr id="281" name="Text 1"/>
           <p:cNvSpPr txBox="1"/>
           <p:nvPr/>
         </p:nvSpPr>
@@ -29547,7 +31202,7 @@
       </p:sp>
       <p:sp>
         <p:nvSpPr>
-          <p:cNvPr id="267" name="Text 2"/>
+          <p:cNvPr id="282" name="Text 2"/>
           <p:cNvSpPr txBox="1"/>
           <p:nvPr/>
         </p:nvSpPr>
@@ -29591,7 +31246,7 @@
       </p:sp>
       <p:sp>
         <p:nvSpPr>
-          <p:cNvPr id="268" name="Shape 3"/>
+          <p:cNvPr id="283" name="Shape 3"/>
           <p:cNvSpPr/>
           <p:nvPr/>
         </p:nvSpPr>
@@ -29622,7 +31277,7 @@
       </p:sp>
       <p:sp>
         <p:nvSpPr>
-          <p:cNvPr id="269" name="Text 4"/>
+          <p:cNvPr id="284" name="Text 4"/>
           <p:cNvSpPr txBox="1"/>
           <p:nvPr/>
         </p:nvSpPr>
@@ -29666,7 +31321,7 @@
       </p:sp>
       <p:sp>
         <p:nvSpPr>
-          <p:cNvPr id="270" name="Shape 5"/>
+          <p:cNvPr id="285" name="Shape 5"/>
           <p:cNvSpPr/>
           <p:nvPr/>
         </p:nvSpPr>
@@ -29697,7 +31352,7 @@
       </p:sp>
       <p:sp>
         <p:nvSpPr>
-          <p:cNvPr id="271" name="Text 6"/>
+          <p:cNvPr id="286" name="Text 6"/>
           <p:cNvSpPr txBox="1"/>
           <p:nvPr/>
         </p:nvSpPr>
@@ -29741,7 +31396,7 @@
       </p:sp>
       <p:sp>
         <p:nvSpPr>
-          <p:cNvPr id="272" name="Shape 7"/>
+          <p:cNvPr id="287" name="Shape 7"/>
           <p:cNvSpPr/>
           <p:nvPr/>
         </p:nvSpPr>
@@ -29772,7 +31427,7 @@
       </p:sp>
       <p:sp>
         <p:nvSpPr>
-          <p:cNvPr id="273" name="Text 8"/>
+          <p:cNvPr id="288" name="Text 8"/>
           <p:cNvSpPr txBox="1"/>
           <p:nvPr/>
         </p:nvSpPr>
@@ -29816,7 +31471,7 @@
       </p:sp>
       <p:sp>
         <p:nvSpPr>
-          <p:cNvPr id="274" name="Shape 9"/>
+          <p:cNvPr id="289" name="Shape 9"/>
           <p:cNvSpPr/>
           <p:nvPr/>
         </p:nvSpPr>
@@ -29847,7 +31502,7 @@
       </p:sp>
       <p:sp>
         <p:nvSpPr>
-          <p:cNvPr id="275" name="Text 10"/>
+          <p:cNvPr id="290" name="Text 10"/>
           <p:cNvSpPr txBox="1"/>
           <p:nvPr/>
         </p:nvSpPr>
@@ -29891,7 +31546,7 @@
       </p:sp>
       <p:sp>
         <p:nvSpPr>
-          <p:cNvPr id="276" name="Shape 11"/>
+          <p:cNvPr id="291" name="Shape 11"/>
           <p:cNvSpPr/>
           <p:nvPr/>
         </p:nvSpPr>
@@ -29922,7 +31577,7 @@
       </p:sp>
       <p:sp>
         <p:nvSpPr>
-          <p:cNvPr id="277" name="Text 12"/>
+          <p:cNvPr id="292" name="Text 12"/>
           <p:cNvSpPr txBox="1"/>
           <p:nvPr/>
         </p:nvSpPr>
@@ -29966,7 +31621,7 @@
       </p:sp>
       <p:sp>
         <p:nvSpPr>
-          <p:cNvPr id="278" name="Shape 13"/>
+          <p:cNvPr id="293" name="Shape 13"/>
           <p:cNvSpPr/>
           <p:nvPr/>
         </p:nvSpPr>
@@ -29997,7 +31652,7 @@
       </p:sp>
       <p:sp>
         <p:nvSpPr>
-          <p:cNvPr id="279" name="Text 14"/>
+          <p:cNvPr id="294" name="Text 14"/>
           <p:cNvSpPr txBox="1"/>
           <p:nvPr/>
         </p:nvSpPr>
@@ -30041,7 +31696,7 @@
       </p:sp>
       <p:sp>
         <p:nvSpPr>
-          <p:cNvPr id="280" name="Shape 15"/>
+          <p:cNvPr id="295" name="Shape 15"/>
           <p:cNvSpPr/>
           <p:nvPr/>
         </p:nvSpPr>
@@ -30072,7 +31727,7 @@
       </p:sp>
       <p:sp>
         <p:nvSpPr>
-          <p:cNvPr id="281" name="Text 16"/>
+          <p:cNvPr id="296" name="Text 16"/>
           <p:cNvSpPr txBox="1"/>
           <p:nvPr/>
         </p:nvSpPr>
@@ -30116,14 +31771,14 @@
       </p:sp>
       <p:sp>
         <p:nvSpPr>
-          <p:cNvPr id="282" name="Shape 17"/>
-          <p:cNvSpPr/>
-          <p:nvPr/>
-        </p:nvSpPr>
-        <p:spPr>
-          <a:xfrm>
-            <a:off x="1600199" y="3843430"/>
-            <a:ext cx="798534" cy="88491"/>
+          <p:cNvPr id="297" name="Shape 17"/>
+          <p:cNvSpPr/>
+          <p:nvPr/>
+        </p:nvSpPr>
+        <p:spPr>
+          <a:xfrm>
+            <a:off x="1600200" y="3843430"/>
+            <a:ext cx="798533" cy="88491"/>
           </a:xfrm>
           <a:prstGeom prst="rect">
             <a:avLst/>
@@ -30147,7 +31802,7 @@
       </p:sp>
       <p:sp>
         <p:nvSpPr>
-          <p:cNvPr id="283" name="Text 18"/>
+          <p:cNvPr id="298" name="Text 18"/>
           <p:cNvSpPr txBox="1"/>
           <p:nvPr/>
         </p:nvSpPr>
@@ -30191,7 +31846,7 @@
       </p:sp>
       <p:sp>
         <p:nvSpPr>
-          <p:cNvPr id="284" name="Shape 19"/>
+          <p:cNvPr id="299" name="Shape 19"/>
           <p:cNvSpPr/>
           <p:nvPr/>
         </p:nvSpPr>
@@ -30222,7 +31877,7 @@
       </p:sp>
       <p:sp>
         <p:nvSpPr>
-          <p:cNvPr id="285" name="Text 20"/>
+          <p:cNvPr id="300" name="Text 20"/>
           <p:cNvSpPr txBox="1"/>
           <p:nvPr/>
         </p:nvSpPr>
@@ -30266,7 +31921,7 @@
       </p:sp>
       <p:sp>
         <p:nvSpPr>
-          <p:cNvPr id="286" name="Shape 21"/>
+          <p:cNvPr id="301" name="Shape 21"/>
           <p:cNvSpPr/>
           <p:nvPr/>
         </p:nvSpPr>
@@ -30297,7 +31952,7 @@
       </p:sp>
       <p:sp>
         <p:nvSpPr>
-          <p:cNvPr id="287" name="Text 22"/>
+          <p:cNvPr id="302" name="Text 22"/>
           <p:cNvSpPr txBox="1"/>
           <p:nvPr/>
         </p:nvSpPr>
@@ -30341,7 +31996,7 @@
       </p:sp>
       <p:sp>
         <p:nvSpPr>
-          <p:cNvPr id="288" name="Shape 23"/>
+          <p:cNvPr id="303" name="Shape 23"/>
           <p:cNvSpPr/>
           <p:nvPr/>
         </p:nvSpPr>
@@ -30372,7 +32027,7 @@
       </p:sp>
       <p:sp>
         <p:nvSpPr>
-          <p:cNvPr id="289" name="Text 24"/>
+          <p:cNvPr id="304" name="Text 24"/>
           <p:cNvSpPr txBox="1"/>
           <p:nvPr/>
         </p:nvSpPr>
@@ -30416,7 +32071,7 @@
       </p:sp>
       <p:sp>
         <p:nvSpPr>
-          <p:cNvPr id="290" name="Shape 25"/>
+          <p:cNvPr id="305" name="Shape 25"/>
           <p:cNvSpPr/>
           <p:nvPr/>
         </p:nvSpPr>
@@ -30447,7 +32102,7 @@
       </p:sp>
       <p:sp>
         <p:nvSpPr>
-          <p:cNvPr id="291" name="Text 26"/>
+          <p:cNvPr id="306" name="Text 26"/>
           <p:cNvSpPr txBox="1"/>
           <p:nvPr/>
         </p:nvSpPr>
@@ -30491,7 +32146,7 @@
       </p:sp>
       <p:sp>
         <p:nvSpPr>
-          <p:cNvPr id="292" name="Shape 27"/>
+          <p:cNvPr id="307" name="Shape 27"/>
           <p:cNvSpPr/>
           <p:nvPr/>
         </p:nvSpPr>
@@ -30522,7 +32177,7 @@
       </p:sp>
       <p:sp>
         <p:nvSpPr>
-          <p:cNvPr id="293" name="Text 28"/>
+          <p:cNvPr id="308" name="Text 28"/>
           <p:cNvSpPr txBox="1"/>
           <p:nvPr/>
         </p:nvSpPr>
@@ -30566,7 +32221,7 @@
       </p:sp>
       <p:sp>
         <p:nvSpPr>
-          <p:cNvPr id="294" name="Shape 29"/>
+          <p:cNvPr id="309" name="Shape 29"/>
           <p:cNvSpPr/>
           <p:nvPr/>
         </p:nvSpPr>
@@ -30597,7 +32252,7 @@
       </p:sp>
       <p:sp>
         <p:nvSpPr>
-          <p:cNvPr id="295" name="Text 30"/>
+          <p:cNvPr id="310" name="Text 30"/>
           <p:cNvSpPr txBox="1"/>
           <p:nvPr/>
         </p:nvSpPr>
@@ -30641,7 +32296,7 @@
       </p:sp>
       <p:sp>
         <p:nvSpPr>
-          <p:cNvPr id="296" name="Text 31"/>
+          <p:cNvPr id="311" name="Text 31"/>
           <p:cNvSpPr txBox="1"/>
           <p:nvPr/>
         </p:nvSpPr>
@@ -30685,7 +32340,7 @@
       </p:sp>
       <p:sp>
         <p:nvSpPr>
-          <p:cNvPr id="297" name="Text 32"/>
+          <p:cNvPr id="312" name="Text 32"/>
           <p:cNvSpPr txBox="1"/>
           <p:nvPr/>
         </p:nvSpPr>
@@ -30759,7 +32414,7 @@
       </p:grpSpPr>
       <p:sp>
         <p:nvSpPr>
-          <p:cNvPr id="299" name="Text 0"/>
+          <p:cNvPr id="316" name="Text 0"/>
           <p:cNvSpPr txBox="1"/>
           <p:nvPr/>
         </p:nvSpPr>
@@ -30803,7 +32458,7 @@
       </p:sp>
       <p:sp>
         <p:nvSpPr>
-          <p:cNvPr id="300" name="Text 1"/>
+          <p:cNvPr id="317" name="Text 1"/>
           <p:cNvSpPr txBox="1"/>
           <p:nvPr/>
         </p:nvSpPr>
@@ -30851,7 +32506,7 @@
       </p:sp>
       <p:sp>
         <p:nvSpPr>
-          <p:cNvPr id="301" name="Text 2"/>
+          <p:cNvPr id="318" name="Text 2"/>
           <p:cNvSpPr txBox="1"/>
           <p:nvPr/>
         </p:nvSpPr>
@@ -30895,14 +32550,14 @@
       </p:sp>
       <p:sp>
         <p:nvSpPr>
-          <p:cNvPr id="302" name="Shape 3"/>
-          <p:cNvSpPr/>
-          <p:nvPr/>
-        </p:nvSpPr>
-        <p:spPr>
-          <a:xfrm>
-            <a:off x="640079" y="1828799"/>
-            <a:ext cx="1645922" cy="640082"/>
+          <p:cNvPr id="319" name="Shape 3"/>
+          <p:cNvSpPr/>
+          <p:nvPr/>
+        </p:nvSpPr>
+        <p:spPr>
+          <a:xfrm>
+            <a:off x="640079" y="1828800"/>
+            <a:ext cx="1645922" cy="640081"/>
           </a:xfrm>
           <a:prstGeom prst="rect">
             <a:avLst/>
@@ -30926,7 +32581,7 @@
       </p:sp>
       <p:sp>
         <p:nvSpPr>
-          <p:cNvPr id="303" name="Text 4"/>
+          <p:cNvPr id="320" name="Text 4"/>
           <p:cNvSpPr txBox="1"/>
           <p:nvPr/>
         </p:nvSpPr>
@@ -30970,7 +32625,7 @@
       </p:sp>
       <p:sp>
         <p:nvSpPr>
-          <p:cNvPr id="304" name="Shape 5"/>
+          <p:cNvPr id="321" name="Shape 5"/>
           <p:cNvSpPr/>
           <p:nvPr/>
         </p:nvSpPr>
@@ -30999,14 +32654,14 @@
       </p:sp>
       <p:sp>
         <p:nvSpPr>
-          <p:cNvPr id="305" name="Shape 6"/>
-          <p:cNvSpPr/>
-          <p:nvPr/>
-        </p:nvSpPr>
-        <p:spPr>
-          <a:xfrm>
-            <a:off x="3291840" y="1828799"/>
-            <a:ext cx="2743201" cy="640082"/>
+          <p:cNvPr id="322" name="Shape 6"/>
+          <p:cNvSpPr/>
+          <p:nvPr/>
+        </p:nvSpPr>
+        <p:spPr>
+          <a:xfrm>
+            <a:off x="3291840" y="1828800"/>
+            <a:ext cx="2743201" cy="640081"/>
           </a:xfrm>
           <a:prstGeom prst="rect">
             <a:avLst/>
@@ -31030,13 +32685,13 @@
       </p:sp>
       <p:sp>
         <p:nvSpPr>
-          <p:cNvPr id="306" name="Text 7"/>
-          <p:cNvSpPr txBox="1"/>
-          <p:nvPr/>
-        </p:nvSpPr>
-        <p:spPr>
-          <a:xfrm>
-            <a:off x="3291840" y="2021840"/>
+          <p:cNvPr id="323" name="Text 7"/>
+          <p:cNvSpPr txBox="1"/>
+          <p:nvPr/>
+        </p:nvSpPr>
+        <p:spPr>
+          <a:xfrm>
+            <a:off x="3291840" y="2021839"/>
             <a:ext cx="2743201" cy="254001"/>
           </a:xfrm>
           <a:prstGeom prst="rect">
@@ -31078,7 +32733,7 @@
       </p:sp>
       <p:sp>
         <p:nvSpPr>
-          <p:cNvPr id="307" name="Shape 8"/>
+          <p:cNvPr id="324" name="Shape 8"/>
           <p:cNvSpPr/>
           <p:nvPr/>
         </p:nvSpPr>
@@ -31109,7 +32764,7 @@
       </p:sp>
       <p:sp>
         <p:nvSpPr>
-          <p:cNvPr id="308" name="Text 9"/>
+          <p:cNvPr id="325" name="Text 9"/>
           <p:cNvSpPr txBox="1"/>
           <p:nvPr/>
         </p:nvSpPr>
@@ -31153,7 +32808,7 @@
       </p:sp>
       <p:sp>
         <p:nvSpPr>
-          <p:cNvPr id="309" name="Shape 10"/>
+          <p:cNvPr id="326" name="Shape 10"/>
           <p:cNvSpPr/>
           <p:nvPr/>
         </p:nvSpPr>
@@ -31182,7 +32837,7 @@
       </p:sp>
       <p:sp>
         <p:nvSpPr>
-          <p:cNvPr id="310" name="Shape 11"/>
+          <p:cNvPr id="327" name="Shape 11"/>
           <p:cNvSpPr/>
           <p:nvPr/>
         </p:nvSpPr>
@@ -31213,7 +32868,7 @@
       </p:sp>
       <p:sp>
         <p:nvSpPr>
-          <p:cNvPr id="311" name="Text 12"/>
+          <p:cNvPr id="328" name="Text 12"/>
           <p:cNvSpPr txBox="1"/>
           <p:nvPr/>
         </p:nvSpPr>
@@ -31261,7 +32916,7 @@
       </p:sp>
       <p:sp>
         <p:nvSpPr>
-          <p:cNvPr id="312" name="Shape 13"/>
+          <p:cNvPr id="329" name="Shape 13"/>
           <p:cNvSpPr/>
           <p:nvPr/>
         </p:nvSpPr>
@@ -31292,7 +32947,7 @@
       </p:sp>
       <p:sp>
         <p:nvSpPr>
-          <p:cNvPr id="313" name="Text 14"/>
+          <p:cNvPr id="330" name="Text 14"/>
           <p:cNvSpPr txBox="1"/>
           <p:nvPr/>
         </p:nvSpPr>
@@ -31336,7 +32991,7 @@
       </p:sp>
       <p:sp>
         <p:nvSpPr>
-          <p:cNvPr id="314" name="Shape 15"/>
+          <p:cNvPr id="331" name="Shape 15"/>
           <p:cNvSpPr/>
           <p:nvPr/>
         </p:nvSpPr>
@@ -31365,7 +33020,7 @@
       </p:sp>
       <p:sp>
         <p:nvSpPr>
-          <p:cNvPr id="315" name="Shape 16"/>
+          <p:cNvPr id="332" name="Shape 16"/>
           <p:cNvSpPr/>
           <p:nvPr/>
         </p:nvSpPr>
@@ -31396,13 +33051,13 @@
       </p:sp>
       <p:sp>
         <p:nvSpPr>
-          <p:cNvPr id="316" name="Text 17"/>
-          <p:cNvSpPr txBox="1"/>
-          <p:nvPr/>
-        </p:nvSpPr>
-        <p:spPr>
-          <a:xfrm>
-            <a:off x="3291840" y="3759199"/>
+          <p:cNvPr id="333" name="Text 17"/>
+          <p:cNvSpPr txBox="1"/>
+          <p:nvPr/>
+        </p:nvSpPr>
+        <p:spPr>
+          <a:xfrm>
+            <a:off x="3291840" y="3759200"/>
             <a:ext cx="2743201" cy="254001"/>
           </a:xfrm>
           <a:prstGeom prst="rect">
@@ -31444,7 +33099,7 @@
       </p:sp>
       <p:sp>
         <p:nvSpPr>
-          <p:cNvPr id="317" name="Text 18"/>
+          <p:cNvPr id="334" name="Text 18"/>
           <p:cNvSpPr txBox="1"/>
           <p:nvPr/>
         </p:nvSpPr>
@@ -31488,7 +33143,7 @@
       </p:sp>
       <p:sp>
         <p:nvSpPr>
-          <p:cNvPr id="318" name="Text 19"/>
+          <p:cNvPr id="335" name="Text 19"/>
           <p:cNvSpPr txBox="1"/>
           <p:nvPr/>
         </p:nvSpPr>
@@ -31532,14 +33187,14 @@
       </p:sp>
       <p:sp>
         <p:nvSpPr>
-          <p:cNvPr id="319" name="Text 20"/>
-          <p:cNvSpPr txBox="1"/>
-          <p:nvPr/>
-        </p:nvSpPr>
-        <p:spPr>
-          <a:xfrm>
-            <a:off x="6400799" y="1737360"/>
-            <a:ext cx="5120642" cy="238845"/>
+          <p:cNvPr id="336" name="Text 20"/>
+          <p:cNvSpPr txBox="1"/>
+          <p:nvPr/>
+        </p:nvSpPr>
+        <p:spPr>
+          <a:xfrm>
+            <a:off x="6400800" y="1737360"/>
+            <a:ext cx="5120641" cy="238845"/>
           </a:xfrm>
           <a:prstGeom prst="rect">
             <a:avLst/>
@@ -31576,14 +33231,14 @@
       </p:sp>
       <p:sp>
         <p:nvSpPr>
-          <p:cNvPr id="320" name="Text 21"/>
-          <p:cNvSpPr txBox="1"/>
-          <p:nvPr/>
-        </p:nvSpPr>
-        <p:spPr>
-          <a:xfrm>
-            <a:off x="6400799" y="2103120"/>
-            <a:ext cx="5120642" cy="219051"/>
+          <p:cNvPr id="337" name="Text 21"/>
+          <p:cNvSpPr txBox="1"/>
+          <p:nvPr/>
+        </p:nvSpPr>
+        <p:spPr>
+          <a:xfrm>
+            <a:off x="6400800" y="2103120"/>
+            <a:ext cx="5120641" cy="219051"/>
           </a:xfrm>
           <a:prstGeom prst="rect">
             <a:avLst/>
@@ -31620,14 +33275,14 @@
       </p:sp>
       <p:sp>
         <p:nvSpPr>
-          <p:cNvPr id="321" name="Text 22"/>
-          <p:cNvSpPr txBox="1"/>
-          <p:nvPr/>
-        </p:nvSpPr>
-        <p:spPr>
-          <a:xfrm>
-            <a:off x="6400799" y="2834639"/>
-            <a:ext cx="5120642" cy="238846"/>
+          <p:cNvPr id="338" name="Text 22"/>
+          <p:cNvSpPr txBox="1"/>
+          <p:nvPr/>
+        </p:nvSpPr>
+        <p:spPr>
+          <a:xfrm>
+            <a:off x="6400800" y="2834639"/>
+            <a:ext cx="5120641" cy="238846"/>
           </a:xfrm>
           <a:prstGeom prst="rect">
             <a:avLst/>
@@ -31664,14 +33319,14 @@
       </p:sp>
       <p:sp>
         <p:nvSpPr>
-          <p:cNvPr id="322" name="Text 23"/>
-          <p:cNvSpPr txBox="1"/>
-          <p:nvPr/>
-        </p:nvSpPr>
-        <p:spPr>
-          <a:xfrm>
-            <a:off x="6400799" y="3200399"/>
-            <a:ext cx="5120642" cy="219052"/>
+          <p:cNvPr id="339" name="Text 23"/>
+          <p:cNvSpPr txBox="1"/>
+          <p:nvPr/>
+        </p:nvSpPr>
+        <p:spPr>
+          <a:xfrm>
+            <a:off x="6400800" y="3200400"/>
+            <a:ext cx="5120641" cy="219051"/>
           </a:xfrm>
           <a:prstGeom prst="rect">
             <a:avLst/>
@@ -31708,14 +33363,14 @@
       </p:sp>
       <p:sp>
         <p:nvSpPr>
-          <p:cNvPr id="323" name="Text 24"/>
-          <p:cNvSpPr txBox="1"/>
-          <p:nvPr/>
-        </p:nvSpPr>
-        <p:spPr>
-          <a:xfrm>
-            <a:off x="6400799" y="3931920"/>
-            <a:ext cx="5120642" cy="238845"/>
+          <p:cNvPr id="340" name="Text 24"/>
+          <p:cNvSpPr txBox="1"/>
+          <p:nvPr/>
+        </p:nvSpPr>
+        <p:spPr>
+          <a:xfrm>
+            <a:off x="6400800" y="3931920"/>
+            <a:ext cx="5120641" cy="238845"/>
           </a:xfrm>
           <a:prstGeom prst="rect">
             <a:avLst/>
@@ -31752,14 +33407,14 @@
       </p:sp>
       <p:sp>
         <p:nvSpPr>
-          <p:cNvPr id="324" name="Text 25"/>
-          <p:cNvSpPr txBox="1"/>
-          <p:nvPr/>
-        </p:nvSpPr>
-        <p:spPr>
-          <a:xfrm>
-            <a:off x="6400799" y="4297679"/>
-            <a:ext cx="5120642" cy="485752"/>
+          <p:cNvPr id="341" name="Text 25"/>
+          <p:cNvSpPr txBox="1"/>
+          <p:nvPr/>
+        </p:nvSpPr>
+        <p:spPr>
+          <a:xfrm>
+            <a:off x="6400800" y="4297679"/>
+            <a:ext cx="5120641" cy="485752"/>
           </a:xfrm>
           <a:prstGeom prst="rect">
             <a:avLst/>
